--- a/Doorknock Leave-Behind Flyer.pptx
+++ b/Doorknock Leave-Behind Flyer.pptx
@@ -3105,7 +3105,7 @@
         <p:spPr>
           <a:xfrm>
             <a:off x="0" y="0"/>
-            <a:ext cx="7562088" cy="2331720"/>
+            <a:ext cx="7562088" cy="2423160"/>
           </a:xfrm>
           <a:prstGeom prst="rect">
             <a:avLst/>
@@ -3148,7 +3148,7 @@
         <p:spPr>
           <a:xfrm>
             <a:off x="0" y="0"/>
-            <a:ext cx="256032" cy="2331720"/>
+            <a:ext cx="256032" cy="2423160"/>
           </a:xfrm>
           <a:prstGeom prst="rect">
             <a:avLst/>
@@ -3190,8 +3190,8 @@
         </p:nvSpPr>
         <p:spPr>
           <a:xfrm>
-            <a:off x="411480" y="228600"/>
-            <a:ext cx="6217920" cy="658368"/>
+            <a:off x="411480" y="201168"/>
+            <a:ext cx="5303520" cy="658368"/>
           </a:xfrm>
           <a:prstGeom prst="rect">
             <a:avLst/>
@@ -3206,7 +3206,7 @@
           <a:p>
             <a:pPr algn="l"/>
             <a:r>
-              <a:rPr sz="2600" b="1" i="0">
+              <a:rPr sz="2400" b="1" i="0">
                 <a:solidFill>
                   <a:srgbClr val="FFFFFF"/>
                 </a:solidFill>
@@ -3226,8 +3226,8 @@
         </p:nvSpPr>
         <p:spPr>
           <a:xfrm>
-            <a:off x="411480" y="960120"/>
-            <a:ext cx="5943600" cy="365760"/>
+            <a:off x="411480" y="932688"/>
+            <a:ext cx="5303520" cy="365760"/>
           </a:xfrm>
           <a:prstGeom prst="rect">
             <a:avLst/>
@@ -3242,13 +3242,13 @@
           <a:p>
             <a:pPr algn="l"/>
             <a:r>
-              <a:rPr sz="1100" b="0" i="1">
+              <a:rPr sz="1050" b="0" i="1">
                 <a:solidFill>
                   <a:srgbClr val="C9A84C"/>
                 </a:solidFill>
                 <a:latin typeface="Calibri"/>
               </a:rPr>
-              <a:t>Singapore's landed market is performing strongly — and serious buyers are actively looking in your estate.</a:t>
+              <a:t>Thomson Garden Estate has seen 21 transactions in the last 12 months — and serious buyers are actively looking here.</a:t>
             </a:r>
           </a:p>
         </p:txBody>
@@ -3261,8 +3261,8 @@
         </p:nvSpPr>
         <p:spPr>
           <a:xfrm>
-            <a:off x="5897880" y="201168"/>
-            <a:ext cx="1481328" cy="1874519"/>
+            <a:off x="5806440" y="182880"/>
+            <a:ext cx="1572768" cy="2194560"/>
           </a:xfrm>
           <a:prstGeom prst="rect">
             <a:avLst/>
@@ -3306,8 +3306,8 @@
         </p:nvSpPr>
         <p:spPr>
           <a:xfrm>
-            <a:off x="5943600" y="274320"/>
-            <a:ext cx="1389888" cy="320040"/>
+            <a:off x="5852159" y="237744"/>
+            <a:ext cx="1481328" cy="182880"/>
           </a:xfrm>
           <a:prstGeom prst="rect">
             <a:avLst/>
@@ -3322,7 +3322,7 @@
           <a:p>
             <a:pPr algn="ctr"/>
             <a:r>
-              <a:rPr sz="900" b="1" i="0">
+              <a:rPr sz="850" b="1" i="0">
                 <a:solidFill>
                   <a:srgbClr val="C9A84C"/>
                 </a:solidFill>
@@ -3341,8 +3341,8 @@
         </p:nvSpPr>
         <p:spPr>
           <a:xfrm>
-            <a:off x="6053328" y="594360"/>
-            <a:ext cx="1097280" cy="36576"/>
+            <a:off x="5943600" y="438912"/>
+            <a:ext cx="1298448" cy="27432"/>
           </a:xfrm>
           <a:prstGeom prst="rect">
             <a:avLst/>
@@ -3376,16 +3376,40 @@
           </a:p>
         </p:txBody>
       </p:sp>
-      <p:sp>
-        <p:nvSpPr>
-          <p:cNvPr id="9" name="TextBox 8"/>
+      <p:pic>
+        <p:nvPicPr>
+          <p:cNvPr id="9" name="Picture 8" descr="rio_face_square.png"/>
+          <p:cNvPicPr>
+            <a:picLocks noChangeAspect="1"/>
+          </p:cNvPicPr>
+          <p:nvPr/>
+        </p:nvPicPr>
+        <p:blipFill>
+          <a:blip r:embed="rId2"/>
+          <a:stretch>
+            <a:fillRect/>
+          </a:stretch>
+        </p:blipFill>
+        <p:spPr>
+          <a:xfrm>
+            <a:off x="5961888" y="484632"/>
+            <a:ext cx="1261872" cy="1261872"/>
+          </a:xfrm>
+          <a:prstGeom prst="rect">
+            <a:avLst/>
+          </a:prstGeom>
+        </p:spPr>
+      </p:pic>
+      <p:sp>
+        <p:nvSpPr>
+          <p:cNvPr id="10" name="TextBox 9"/>
           <p:cNvSpPr txBox="1"/>
           <p:nvPr/>
         </p:nvSpPr>
         <p:spPr>
           <a:xfrm>
-            <a:off x="5943600" y="676656"/>
-            <a:ext cx="1389888" cy="292608"/>
+            <a:off x="5852159" y="1801368"/>
+            <a:ext cx="1481328" cy="201168"/>
           </a:xfrm>
           <a:prstGeom prst="rect">
             <a:avLst/>
@@ -3406,21 +3430,21 @@
                 </a:solidFill>
                 <a:latin typeface="Calibri"/>
               </a:rPr>
-              <a:t>[Agent Name]</a:t>
-            </a:r>
-          </a:p>
-        </p:txBody>
-      </p:sp>
-      <p:sp>
-        <p:nvSpPr>
-          <p:cNvPr id="10" name="TextBox 9"/>
+              <a:t>Rio Pang</a:t>
+            </a:r>
+          </a:p>
+        </p:txBody>
+      </p:sp>
+      <p:sp>
+        <p:nvSpPr>
+          <p:cNvPr id="11" name="TextBox 10"/>
           <p:cNvSpPr txBox="1"/>
           <p:nvPr/>
         </p:nvSpPr>
         <p:spPr>
           <a:xfrm>
-            <a:off x="5943600" y="960120"/>
-            <a:ext cx="1389888" cy="237744"/>
+            <a:off x="5852159" y="2002536"/>
+            <a:ext cx="1481328" cy="164592"/>
           </a:xfrm>
           <a:prstGeom prst="rect">
             <a:avLst/>
@@ -3435,27 +3459,27 @@
           <a:p>
             <a:pPr algn="ctr"/>
             <a:r>
-              <a:rPr sz="850" b="0" i="0">
+              <a:rPr sz="800" b="0" i="0">
                 <a:solidFill>
                   <a:srgbClr val="B0BED4"/>
                 </a:solidFill>
                 <a:latin typeface="Calibri"/>
               </a:rPr>
-              <a:t>[CEA Reg. No.]</a:t>
-            </a:r>
-          </a:p>
-        </p:txBody>
-      </p:sp>
-      <p:sp>
-        <p:nvSpPr>
-          <p:cNvPr id="11" name="TextBox 10"/>
+              <a:t>CEA No. R0702148</a:t>
+            </a:r>
+          </a:p>
+        </p:txBody>
+      </p:sp>
+      <p:sp>
+        <p:nvSpPr>
+          <p:cNvPr id="12" name="TextBox 11"/>
           <p:cNvSpPr txBox="1"/>
           <p:nvPr/>
         </p:nvSpPr>
         <p:spPr>
           <a:xfrm>
-            <a:off x="5943600" y="1188720"/>
-            <a:ext cx="1389888" cy="237744"/>
+            <a:off x="5852159" y="2167128"/>
+            <a:ext cx="1481328" cy="201168"/>
           </a:xfrm>
           <a:prstGeom prst="rect">
             <a:avLst/>
@@ -3470,96 +3494,26 @@
           <a:p>
             <a:pPr algn="ctr"/>
             <a:r>
-              <a:rPr sz="950" b="1" i="0">
+              <a:rPr sz="1000" b="1" i="0">
                 <a:solidFill>
                   <a:srgbClr val="C9A84C"/>
                 </a:solidFill>
                 <a:latin typeface="Calibri"/>
               </a:rPr>
-              <a:t>[Mobile No.]</a:t>
-            </a:r>
-          </a:p>
-        </p:txBody>
-      </p:sp>
-      <p:sp>
-        <p:nvSpPr>
-          <p:cNvPr id="12" name="TextBox 11"/>
-          <p:cNvSpPr txBox="1"/>
-          <p:nvPr/>
-        </p:nvSpPr>
-        <p:spPr>
-          <a:xfrm>
-            <a:off x="5943600" y="1426464"/>
-            <a:ext cx="1389888" cy="237744"/>
-          </a:xfrm>
-          <a:prstGeom prst="rect">
-            <a:avLst/>
-          </a:prstGeom>
-          <a:noFill/>
-        </p:spPr>
-        <p:txBody>
-          <a:bodyPr wrap="square">
-            <a:spAutoFit/>
-          </a:bodyPr>
-          <a:lstStyle/>
-          <a:p>
-            <a:pPr algn="ctr"/>
-            <a:r>
-              <a:rPr sz="850" b="0" i="0">
-                <a:solidFill>
-                  <a:srgbClr val="B0BED4"/>
-                </a:solidFill>
-                <a:latin typeface="Calibri"/>
-              </a:rPr>
-              <a:t>[Email]</a:t>
-            </a:r>
-          </a:p>
-        </p:txBody>
-      </p:sp>
-      <p:sp>
-        <p:nvSpPr>
-          <p:cNvPr id="13" name="TextBox 12"/>
-          <p:cNvSpPr txBox="1"/>
-          <p:nvPr/>
-        </p:nvSpPr>
-        <p:spPr>
-          <a:xfrm>
-            <a:off x="5943600" y="1664208"/>
-            <a:ext cx="1389888" cy="274320"/>
-          </a:xfrm>
-          <a:prstGeom prst="rect">
-            <a:avLst/>
-          </a:prstGeom>
-          <a:noFill/>
-        </p:spPr>
-        <p:txBody>
-          <a:bodyPr wrap="square">
-            <a:spAutoFit/>
-          </a:bodyPr>
-          <a:lstStyle/>
-          <a:p>
-            <a:pPr algn="ctr"/>
-            <a:r>
-              <a:rPr sz="800" b="0" i="1">
-                <a:solidFill>
-                  <a:srgbClr val="64748B"/>
-                </a:solidFill>
-                <a:latin typeface="Calibri"/>
-              </a:rPr>
-              <a:t>[WhatsApp QR]</a:t>
-            </a:r>
-          </a:p>
-        </p:txBody>
-      </p:sp>
-      <p:sp>
-        <p:nvSpPr>
-          <p:cNvPr id="14" name="Rectangle 13"/>
+              <a:t>9183 1316</a:t>
+            </a:r>
+          </a:p>
+        </p:txBody>
+      </p:sp>
+      <p:sp>
+        <p:nvSpPr>
+          <p:cNvPr id="13" name="Rectangle 12"/>
           <p:cNvSpPr/>
           <p:nvPr/>
         </p:nvSpPr>
         <p:spPr>
           <a:xfrm>
-            <a:off x="457200" y="2450592"/>
+            <a:off x="457200" y="2532888"/>
             <a:ext cx="1552193" cy="1024128"/>
           </a:xfrm>
           <a:prstGeom prst="rect">
@@ -3598,13 +3552,13 @@
       </p:sp>
       <p:sp>
         <p:nvSpPr>
-          <p:cNvPr id="15" name="TextBox 14"/>
+          <p:cNvPr id="14" name="TextBox 13"/>
           <p:cNvSpPr txBox="1"/>
           <p:nvPr/>
         </p:nvSpPr>
         <p:spPr>
           <a:xfrm>
-            <a:off x="512064" y="2514600"/>
+            <a:off x="512064" y="2596896"/>
             <a:ext cx="1442466" cy="438912"/>
           </a:xfrm>
           <a:prstGeom prst="rect">
@@ -3620,7 +3574,7 @@
           <a:p>
             <a:pPr algn="ctr"/>
             <a:r>
-              <a:rPr sz="2200" b="1" i="0">
+              <a:rPr sz="2000" b="1" i="0">
                 <a:solidFill>
                   <a:srgbClr val="1B2A4A"/>
                 </a:solidFill>
@@ -3633,13 +3587,13 @@
       </p:sp>
       <p:sp>
         <p:nvSpPr>
-          <p:cNvPr id="16" name="TextBox 15"/>
+          <p:cNvPr id="15" name="TextBox 14"/>
           <p:cNvSpPr txBox="1"/>
           <p:nvPr/>
         </p:nvSpPr>
         <p:spPr>
           <a:xfrm>
-            <a:off x="512064" y="2944368"/>
+            <a:off x="512064" y="3026664"/>
             <a:ext cx="1442466" cy="457200"/>
           </a:xfrm>
           <a:prstGeom prst="rect">
@@ -3669,13 +3623,13 @@
       </p:sp>
       <p:sp>
         <p:nvSpPr>
-          <p:cNvPr id="17" name="Rectangle 16"/>
+          <p:cNvPr id="16" name="Rectangle 15"/>
           <p:cNvSpPr/>
           <p:nvPr/>
         </p:nvSpPr>
         <p:spPr>
           <a:xfrm>
-            <a:off x="2119122" y="2450592"/>
+            <a:off x="2119122" y="2532888"/>
             <a:ext cx="1552193" cy="1024128"/>
           </a:xfrm>
           <a:prstGeom prst="rect">
@@ -3714,13 +3668,13 @@
       </p:sp>
       <p:sp>
         <p:nvSpPr>
-          <p:cNvPr id="18" name="TextBox 17"/>
+          <p:cNvPr id="17" name="TextBox 16"/>
           <p:cNvSpPr txBox="1"/>
           <p:nvPr/>
         </p:nvSpPr>
         <p:spPr>
           <a:xfrm>
-            <a:off x="2173986" y="2514600"/>
+            <a:off x="2173986" y="2596896"/>
             <a:ext cx="1442466" cy="438912"/>
           </a:xfrm>
           <a:prstGeom prst="rect">
@@ -3736,7 +3690,7 @@
           <a:p>
             <a:pPr algn="ctr"/>
             <a:r>
-              <a:rPr sz="2200" b="1" i="0">
+              <a:rPr sz="2000" b="1" i="0">
                 <a:solidFill>
                   <a:srgbClr val="1B2A4A"/>
                 </a:solidFill>
@@ -3749,13 +3703,13 @@
       </p:sp>
       <p:sp>
         <p:nvSpPr>
-          <p:cNvPr id="19" name="TextBox 18"/>
+          <p:cNvPr id="18" name="TextBox 17"/>
           <p:cNvSpPr txBox="1"/>
           <p:nvPr/>
         </p:nvSpPr>
         <p:spPr>
           <a:xfrm>
-            <a:off x="2173986" y="2944368"/>
+            <a:off x="2173986" y="3026664"/>
             <a:ext cx="1442466" cy="457200"/>
           </a:xfrm>
           <a:prstGeom prst="rect">
@@ -3785,13 +3739,13 @@
       </p:sp>
       <p:sp>
         <p:nvSpPr>
-          <p:cNvPr id="20" name="Rectangle 19"/>
+          <p:cNvPr id="19" name="Rectangle 18"/>
           <p:cNvSpPr/>
           <p:nvPr/>
         </p:nvSpPr>
         <p:spPr>
           <a:xfrm>
-            <a:off x="3781044" y="2450592"/>
+            <a:off x="3781044" y="2532888"/>
             <a:ext cx="1552193" cy="1024128"/>
           </a:xfrm>
           <a:prstGeom prst="rect">
@@ -3830,13 +3784,13 @@
       </p:sp>
       <p:sp>
         <p:nvSpPr>
-          <p:cNvPr id="21" name="TextBox 20"/>
+          <p:cNvPr id="20" name="TextBox 19"/>
           <p:cNvSpPr txBox="1"/>
           <p:nvPr/>
         </p:nvSpPr>
         <p:spPr>
           <a:xfrm>
-            <a:off x="3835907" y="2514600"/>
+            <a:off x="3835907" y="2596896"/>
             <a:ext cx="1442466" cy="438912"/>
           </a:xfrm>
           <a:prstGeom prst="rect">
@@ -3852,26 +3806,26 @@
           <a:p>
             <a:pPr algn="ctr"/>
             <a:r>
-              <a:rPr sz="2200" b="1" i="0">
+              <a:rPr sz="2000" b="1" i="0">
                 <a:solidFill>
                   <a:srgbClr val="1B2A4A"/>
                 </a:solidFill>
                 <a:latin typeface="Calibri"/>
               </a:rPr>
-              <a:t>~75,000</a:t>
-            </a:r>
-          </a:p>
-        </p:txBody>
-      </p:sp>
-      <p:sp>
-        <p:nvSpPr>
-          <p:cNvPr id="22" name="TextBox 21"/>
+              <a:t>21 deals</a:t>
+            </a:r>
+          </a:p>
+        </p:txBody>
+      </p:sp>
+      <p:sp>
+        <p:nvSpPr>
+          <p:cNvPr id="21" name="TextBox 20"/>
           <p:cNvSpPr txBox="1"/>
           <p:nvPr/>
         </p:nvSpPr>
         <p:spPr>
           <a:xfrm>
-            <a:off x="3835907" y="2944368"/>
+            <a:off x="3835907" y="3026664"/>
             <a:ext cx="1442466" cy="457200"/>
           </a:xfrm>
           <a:prstGeom prst="rect">
@@ -3893,21 +3847,21 @@
                 </a:solidFill>
                 <a:latin typeface="Calibri"/>
               </a:rPr>
-              <a:t>landed homes in SG
-(only 5–6% of all housing)</a:t>
-            </a:r>
-          </a:p>
-        </p:txBody>
-      </p:sp>
-      <p:sp>
-        <p:nvSpPr>
-          <p:cNvPr id="23" name="Rectangle 22"/>
+              <a:t>Thomson Garden Estate
+last 12 months</a:t>
+            </a:r>
+          </a:p>
+        </p:txBody>
+      </p:sp>
+      <p:sp>
+        <p:nvSpPr>
+          <p:cNvPr id="22" name="Rectangle 21"/>
           <p:cNvSpPr/>
           <p:nvPr/>
         </p:nvSpPr>
         <p:spPr>
           <a:xfrm>
-            <a:off x="5442966" y="2450592"/>
+            <a:off x="5442966" y="2532888"/>
             <a:ext cx="1552193" cy="1024128"/>
           </a:xfrm>
           <a:prstGeom prst="rect">
@@ -3946,13 +3900,13 @@
       </p:sp>
       <p:sp>
         <p:nvSpPr>
-          <p:cNvPr id="24" name="TextBox 23"/>
+          <p:cNvPr id="23" name="TextBox 22"/>
           <p:cNvSpPr txBox="1"/>
           <p:nvPr/>
         </p:nvSpPr>
         <p:spPr>
           <a:xfrm>
-            <a:off x="5497829" y="2514600"/>
+            <a:off x="5497829" y="2596896"/>
             <a:ext cx="1442466" cy="438912"/>
           </a:xfrm>
           <a:prstGeom prst="rect">
@@ -3968,7 +3922,7 @@
           <a:p>
             <a:pPr algn="ctr"/>
             <a:r>
-              <a:rPr sz="2200" b="1" i="0">
+              <a:rPr sz="2000" b="1" i="0">
                 <a:solidFill>
                   <a:srgbClr val="1B2A4A"/>
                 </a:solidFill>
@@ -3981,13 +3935,13 @@
       </p:sp>
       <p:sp>
         <p:nvSpPr>
-          <p:cNvPr id="25" name="TextBox 24"/>
+          <p:cNvPr id="24" name="TextBox 23"/>
           <p:cNvSpPr txBox="1"/>
           <p:nvPr/>
         </p:nvSpPr>
         <p:spPr>
           <a:xfrm>
-            <a:off x="5497829" y="2944368"/>
+            <a:off x="5497829" y="3026664"/>
             <a:ext cx="1442466" cy="457200"/>
           </a:xfrm>
           <a:prstGeom prst="rect">
@@ -4017,13 +3971,13 @@
       </p:sp>
       <p:sp>
         <p:nvSpPr>
-          <p:cNvPr id="26" name="TextBox 25"/>
+          <p:cNvPr id="25" name="TextBox 24"/>
           <p:cNvSpPr txBox="1"/>
           <p:nvPr/>
         </p:nvSpPr>
         <p:spPr>
           <a:xfrm>
-            <a:off x="457200" y="3639312"/>
+            <a:off x="457200" y="3675887"/>
             <a:ext cx="4389120" cy="256032"/>
           </a:xfrm>
           <a:prstGeom prst="rect">
@@ -4052,13 +4006,13 @@
       </p:sp>
       <p:sp>
         <p:nvSpPr>
-          <p:cNvPr id="27" name="Rectangle 26"/>
+          <p:cNvPr id="26" name="Rectangle 25"/>
           <p:cNvSpPr/>
           <p:nvPr/>
         </p:nvSpPr>
         <p:spPr>
           <a:xfrm>
-            <a:off x="457200" y="3913632"/>
+            <a:off x="457200" y="3950207"/>
             <a:ext cx="4389120" cy="2395728"/>
           </a:xfrm>
           <a:prstGeom prst="rect">
@@ -4097,13 +4051,13 @@
       </p:sp>
       <p:sp>
         <p:nvSpPr>
-          <p:cNvPr id="28" name="Oval 27"/>
+          <p:cNvPr id="27" name="Oval 26"/>
           <p:cNvSpPr/>
           <p:nvPr/>
         </p:nvSpPr>
         <p:spPr>
           <a:xfrm>
-            <a:off x="566928" y="4059935"/>
+            <a:off x="566928" y="4096511"/>
             <a:ext cx="237744" cy="237744"/>
           </a:xfrm>
           <a:prstGeom prst="ellipse">
@@ -4140,13 +4094,13 @@
       </p:sp>
       <p:sp>
         <p:nvSpPr>
-          <p:cNvPr id="29" name="TextBox 28"/>
+          <p:cNvPr id="28" name="TextBox 27"/>
           <p:cNvSpPr txBox="1"/>
           <p:nvPr/>
         </p:nvSpPr>
         <p:spPr>
           <a:xfrm>
-            <a:off x="566928" y="4059935"/>
+            <a:off x="566928" y="4096511"/>
             <a:ext cx="237744" cy="237744"/>
           </a:xfrm>
           <a:prstGeom prst="rect">
@@ -4175,13 +4129,13 @@
       </p:sp>
       <p:sp>
         <p:nvSpPr>
-          <p:cNvPr id="30" name="TextBox 29"/>
+          <p:cNvPr id="29" name="TextBox 28"/>
           <p:cNvSpPr txBox="1"/>
           <p:nvPr/>
         </p:nvSpPr>
         <p:spPr>
           <a:xfrm>
-            <a:off x="896112" y="4041648"/>
+            <a:off x="896112" y="4078224"/>
             <a:ext cx="1280160" cy="201168"/>
           </a:xfrm>
           <a:prstGeom prst="rect">
@@ -4210,13 +4164,13 @@
       </p:sp>
       <p:sp>
         <p:nvSpPr>
-          <p:cNvPr id="31" name="TextBox 30"/>
+          <p:cNvPr id="30" name="TextBox 29"/>
           <p:cNvSpPr txBox="1"/>
           <p:nvPr/>
         </p:nvSpPr>
         <p:spPr>
           <a:xfrm>
-            <a:off x="896112" y="4233672"/>
+            <a:off x="896112" y="4270248"/>
             <a:ext cx="2926080" cy="182880"/>
           </a:xfrm>
           <a:prstGeom prst="rect">
@@ -4238,20 +4192,20 @@
                 </a:solidFill>
                 <a:latin typeface="Calibri"/>
               </a:rPr>
-              <a:t>Strong market recovery after seasonal Q1 dip — Q2/Q3 is peak demand.</a:t>
-            </a:r>
-          </a:p>
-        </p:txBody>
-      </p:sp>
-      <p:sp>
-        <p:nvSpPr>
-          <p:cNvPr id="32" name="Oval 31"/>
+              <a:t>Strong market recovery — Q2/Q3 is peak transaction season.</a:t>
+            </a:r>
+          </a:p>
+        </p:txBody>
+      </p:sp>
+      <p:sp>
+        <p:nvSpPr>
+          <p:cNvPr id="31" name="Oval 30"/>
           <p:cNvSpPr/>
           <p:nvPr/>
         </p:nvSpPr>
         <p:spPr>
           <a:xfrm>
-            <a:off x="566928" y="4498847"/>
+            <a:off x="566928" y="4535424"/>
             <a:ext cx="237744" cy="237744"/>
           </a:xfrm>
           <a:prstGeom prst="ellipse">
@@ -4288,13 +4242,13 @@
       </p:sp>
       <p:sp>
         <p:nvSpPr>
-          <p:cNvPr id="33" name="TextBox 32"/>
+          <p:cNvPr id="32" name="TextBox 31"/>
           <p:cNvSpPr txBox="1"/>
           <p:nvPr/>
         </p:nvSpPr>
         <p:spPr>
           <a:xfrm>
-            <a:off x="566928" y="4498847"/>
+            <a:off x="566928" y="4535424"/>
             <a:ext cx="237744" cy="237744"/>
           </a:xfrm>
           <a:prstGeom prst="rect">
@@ -4323,13 +4277,13 @@
       </p:sp>
       <p:sp>
         <p:nvSpPr>
-          <p:cNvPr id="34" name="TextBox 33"/>
+          <p:cNvPr id="33" name="TextBox 32"/>
           <p:cNvSpPr txBox="1"/>
           <p:nvPr/>
         </p:nvSpPr>
         <p:spPr>
           <a:xfrm>
-            <a:off x="896112" y="4480559"/>
+            <a:off x="896112" y="4517136"/>
             <a:ext cx="1280160" cy="201168"/>
           </a:xfrm>
           <a:prstGeom prst="rect">
@@ -4358,13 +4312,13 @@
       </p:sp>
       <p:sp>
         <p:nvSpPr>
-          <p:cNvPr id="35" name="TextBox 34"/>
+          <p:cNvPr id="34" name="TextBox 33"/>
           <p:cNvSpPr txBox="1"/>
           <p:nvPr/>
         </p:nvSpPr>
         <p:spPr>
           <a:xfrm>
-            <a:off x="896112" y="4672583"/>
+            <a:off x="896112" y="4709160"/>
             <a:ext cx="2926080" cy="182880"/>
           </a:xfrm>
           <a:prstGeom prst="rect">
@@ -4393,13 +4347,13 @@
       </p:sp>
       <p:sp>
         <p:nvSpPr>
-          <p:cNvPr id="36" name="Oval 35"/>
+          <p:cNvPr id="35" name="Oval 34"/>
           <p:cNvSpPr/>
           <p:nvPr/>
         </p:nvSpPr>
         <p:spPr>
           <a:xfrm>
-            <a:off x="566928" y="4937759"/>
+            <a:off x="566928" y="4974336"/>
             <a:ext cx="237744" cy="237744"/>
           </a:xfrm>
           <a:prstGeom prst="ellipse">
@@ -4436,13 +4390,13 @@
       </p:sp>
       <p:sp>
         <p:nvSpPr>
-          <p:cNvPr id="37" name="TextBox 36"/>
+          <p:cNvPr id="36" name="TextBox 35"/>
           <p:cNvSpPr txBox="1"/>
           <p:nvPr/>
         </p:nvSpPr>
         <p:spPr>
           <a:xfrm>
-            <a:off x="566928" y="4937759"/>
+            <a:off x="566928" y="4974336"/>
             <a:ext cx="237744" cy="237744"/>
           </a:xfrm>
           <a:prstGeom prst="rect">
@@ -4471,13 +4425,13 @@
       </p:sp>
       <p:sp>
         <p:nvSpPr>
-          <p:cNvPr id="38" name="TextBox 37"/>
+          <p:cNvPr id="37" name="TextBox 36"/>
           <p:cNvSpPr txBox="1"/>
           <p:nvPr/>
         </p:nvSpPr>
         <p:spPr>
           <a:xfrm>
-            <a:off x="896112" y="4919472"/>
+            <a:off x="896112" y="4956048"/>
             <a:ext cx="1280160" cy="201168"/>
           </a:xfrm>
           <a:prstGeom prst="rect">
@@ -4506,13 +4460,13 @@
       </p:sp>
       <p:sp>
         <p:nvSpPr>
-          <p:cNvPr id="39" name="TextBox 38"/>
+          <p:cNvPr id="38" name="TextBox 37"/>
           <p:cNvSpPr txBox="1"/>
           <p:nvPr/>
         </p:nvSpPr>
         <p:spPr>
           <a:xfrm>
-            <a:off x="896112" y="5111496"/>
+            <a:off x="896112" y="5148072"/>
             <a:ext cx="2926080" cy="182880"/>
           </a:xfrm>
           <a:prstGeom prst="rect">
@@ -4541,13 +4495,13 @@
       </p:sp>
       <p:sp>
         <p:nvSpPr>
-          <p:cNvPr id="40" name="Oval 39"/>
+          <p:cNvPr id="39" name="Oval 38"/>
           <p:cNvSpPr/>
           <p:nvPr/>
         </p:nvSpPr>
         <p:spPr>
           <a:xfrm>
-            <a:off x="566928" y="5376672"/>
+            <a:off x="566928" y="5413247"/>
             <a:ext cx="237744" cy="237744"/>
           </a:xfrm>
           <a:prstGeom prst="ellipse">
@@ -4584,13 +4538,13 @@
       </p:sp>
       <p:sp>
         <p:nvSpPr>
-          <p:cNvPr id="41" name="TextBox 40"/>
+          <p:cNvPr id="40" name="TextBox 39"/>
           <p:cNvSpPr txBox="1"/>
           <p:nvPr/>
         </p:nvSpPr>
         <p:spPr>
           <a:xfrm>
-            <a:off x="566928" y="5376672"/>
+            <a:off x="566928" y="5413247"/>
             <a:ext cx="237744" cy="237744"/>
           </a:xfrm>
           <a:prstGeom prst="rect">
@@ -4619,13 +4573,13 @@
       </p:sp>
       <p:sp>
         <p:nvSpPr>
-          <p:cNvPr id="42" name="TextBox 41"/>
+          <p:cNvPr id="41" name="TextBox 40"/>
           <p:cNvSpPr txBox="1"/>
           <p:nvPr/>
         </p:nvSpPr>
         <p:spPr>
           <a:xfrm>
-            <a:off x="896112" y="5358384"/>
+            <a:off x="896112" y="5394959"/>
             <a:ext cx="1280160" cy="201168"/>
           </a:xfrm>
           <a:prstGeom prst="rect">
@@ -4654,13 +4608,13 @@
       </p:sp>
       <p:sp>
         <p:nvSpPr>
-          <p:cNvPr id="43" name="TextBox 42"/>
+          <p:cNvPr id="42" name="TextBox 41"/>
           <p:cNvSpPr txBox="1"/>
           <p:nvPr/>
         </p:nvSpPr>
         <p:spPr>
           <a:xfrm>
-            <a:off x="896112" y="5550408"/>
+            <a:off x="896112" y="5586983"/>
             <a:ext cx="2926080" cy="182880"/>
           </a:xfrm>
           <a:prstGeom prst="rect">
@@ -4689,13 +4643,13 @@
       </p:sp>
       <p:sp>
         <p:nvSpPr>
-          <p:cNvPr id="44" name="Oval 43"/>
+          <p:cNvPr id="43" name="Oval 42"/>
           <p:cNvSpPr/>
           <p:nvPr/>
         </p:nvSpPr>
         <p:spPr>
           <a:xfrm>
-            <a:off x="566928" y="5815583"/>
+            <a:off x="566928" y="5852159"/>
             <a:ext cx="237744" cy="237744"/>
           </a:xfrm>
           <a:prstGeom prst="ellipse">
@@ -4732,13 +4686,13 @@
       </p:sp>
       <p:sp>
         <p:nvSpPr>
-          <p:cNvPr id="45" name="TextBox 44"/>
+          <p:cNvPr id="44" name="TextBox 43"/>
           <p:cNvSpPr txBox="1"/>
           <p:nvPr/>
         </p:nvSpPr>
         <p:spPr>
           <a:xfrm>
-            <a:off x="566928" y="5815583"/>
+            <a:off x="566928" y="5852159"/>
             <a:ext cx="237744" cy="237744"/>
           </a:xfrm>
           <a:prstGeom prst="rect">
@@ -4767,13 +4721,13 @@
       </p:sp>
       <p:sp>
         <p:nvSpPr>
-          <p:cNvPr id="46" name="TextBox 45"/>
+          <p:cNvPr id="45" name="TextBox 44"/>
           <p:cNvSpPr txBox="1"/>
           <p:nvPr/>
         </p:nvSpPr>
         <p:spPr>
           <a:xfrm>
-            <a:off x="896112" y="5797296"/>
+            <a:off x="896112" y="5833872"/>
             <a:ext cx="1280160" cy="201168"/>
           </a:xfrm>
           <a:prstGeom prst="rect">
@@ -4802,13 +4756,13 @@
       </p:sp>
       <p:sp>
         <p:nvSpPr>
-          <p:cNvPr id="47" name="TextBox 46"/>
+          <p:cNvPr id="46" name="TextBox 45"/>
           <p:cNvSpPr txBox="1"/>
           <p:nvPr/>
         </p:nvSpPr>
         <p:spPr>
           <a:xfrm>
-            <a:off x="896112" y="5989320"/>
+            <a:off x="896112" y="6025896"/>
             <a:ext cx="2926080" cy="182880"/>
           </a:xfrm>
           <a:prstGeom prst="rect">
@@ -4837,13 +4791,13 @@
       </p:sp>
       <p:sp>
         <p:nvSpPr>
-          <p:cNvPr id="48" name="TextBox 47"/>
+          <p:cNvPr id="47" name="TextBox 46"/>
           <p:cNvSpPr txBox="1"/>
           <p:nvPr/>
         </p:nvSpPr>
         <p:spPr>
           <a:xfrm>
-            <a:off x="5029200" y="3639312"/>
+            <a:off x="5029200" y="3675887"/>
             <a:ext cx="2359152" cy="256032"/>
           </a:xfrm>
           <a:prstGeom prst="rect">
@@ -4859,13 +4813,48 @@
           <a:p>
             <a:pPr algn="l"/>
             <a:r>
-              <a:rPr sz="850" b="1" i="0">
+              <a:rPr sz="800" b="1" i="0">
                 <a:solidFill>
                   <a:srgbClr val="C9A84C"/>
                 </a:solidFill>
                 <a:latin typeface="Calibri"/>
               </a:rPr>
-              <a:t>MEDIAN PRICES (1Q 2026)</a:t>
+              <a:t>THOMSON GARDEN ESTATE</a:t>
+            </a:r>
+          </a:p>
+        </p:txBody>
+      </p:sp>
+      <p:sp>
+        <p:nvSpPr>
+          <p:cNvPr id="48" name="TextBox 47"/>
+          <p:cNvSpPr txBox="1"/>
+          <p:nvPr/>
+        </p:nvSpPr>
+        <p:spPr>
+          <a:xfrm>
+            <a:off x="5029200" y="3840479"/>
+            <a:ext cx="2359152" cy="128016"/>
+          </a:xfrm>
+          <a:prstGeom prst="rect">
+            <a:avLst/>
+          </a:prstGeom>
+          <a:noFill/>
+        </p:spPr>
+        <p:txBody>
+          <a:bodyPr wrap="square">
+            <a:spAutoFit/>
+          </a:bodyPr>
+          <a:lstStyle/>
+          <a:p>
+            <a:pPr algn="l"/>
+            <a:r>
+              <a:rPr sz="700" b="0" i="1">
+                <a:solidFill>
+                  <a:srgbClr val="64748B"/>
+                </a:solidFill>
+                <a:latin typeface="Calibri"/>
+              </a:rPr>
+              <a:t>Jun 2025 – Jun 2026 · Freehold D20</a:t>
             </a:r>
           </a:p>
         </p:txBody>
@@ -4878,7 +4867,7 @@
         </p:nvSpPr>
         <p:spPr>
           <a:xfrm>
-            <a:off x="5029200" y="3913632"/>
+            <a:off x="5029200" y="3950207"/>
             <a:ext cx="2359152" cy="2395728"/>
           </a:xfrm>
           <a:prstGeom prst="rect">
@@ -4923,7 +4912,7 @@
         </p:nvSpPr>
         <p:spPr>
           <a:xfrm>
-            <a:off x="5120640" y="4005072"/>
+            <a:off x="5120640" y="4041648"/>
             <a:ext cx="2157984" cy="457200"/>
           </a:xfrm>
           <a:prstGeom prst="rect">
@@ -4968,8 +4957,8 @@
         </p:nvSpPr>
         <p:spPr>
           <a:xfrm>
-            <a:off x="5193792" y="4050791"/>
-            <a:ext cx="1188720" cy="219456"/>
+            <a:off x="5193792" y="4087368"/>
+            <a:ext cx="1097280" cy="219456"/>
           </a:xfrm>
           <a:prstGeom prst="rect">
             <a:avLst/>
@@ -4984,13 +4973,13 @@
           <a:p>
             <a:pPr algn="l"/>
             <a:r>
-              <a:rPr sz="950" b="0" i="0">
+              <a:rPr sz="900" b="0" i="0">
                 <a:solidFill>
                   <a:srgbClr val="1B2A4A"/>
                 </a:solidFill>
                 <a:latin typeface="Calibri"/>
               </a:rPr>
-              <a:t>OCR Terrace</a:t>
+              <a:t>Terrace (typical)</a:t>
             </a:r>
           </a:p>
         </p:txBody>
@@ -5003,8 +4992,8 @@
         </p:nvSpPr>
         <p:spPr>
           <a:xfrm>
-            <a:off x="6263640" y="4050791"/>
-            <a:ext cx="914400" cy="347472"/>
+            <a:off x="5193792" y="4288536"/>
+            <a:ext cx="1828800" cy="164592"/>
           </a:xfrm>
           <a:prstGeom prst="rect">
             <a:avLst/>
@@ -5017,15 +5006,15 @@
           </a:bodyPr>
           <a:lstStyle/>
           <a:p>
-            <a:pPr algn="r"/>
-            <a:r>
-              <a:rPr sz="1400" b="1" i="0">
+            <a:pPr algn="l"/>
+            <a:r>
+              <a:rPr sz="1200" b="1" i="0">
                 <a:solidFill>
                   <a:srgbClr val="C9A84C"/>
                 </a:solidFill>
                 <a:latin typeface="Calibri"/>
               </a:rPr>
-              <a:t>$4.44M</a:t>
+              <a:t>$2.65M–$4.35M</a:t>
             </a:r>
           </a:p>
         </p:txBody>
@@ -5038,7 +5027,7 @@
         </p:nvSpPr>
         <p:spPr>
           <a:xfrm>
-            <a:off x="5120640" y="4553712"/>
+            <a:off x="5120640" y="4590288"/>
             <a:ext cx="2157984" cy="457200"/>
           </a:xfrm>
           <a:prstGeom prst="rect">
@@ -5083,8 +5072,8 @@
         </p:nvSpPr>
         <p:spPr>
           <a:xfrm>
-            <a:off x="5193792" y="4599431"/>
-            <a:ext cx="1188720" cy="219456"/>
+            <a:off x="5193792" y="4636007"/>
+            <a:ext cx="1097280" cy="219456"/>
           </a:xfrm>
           <a:prstGeom prst="rect">
             <a:avLst/>
@@ -5099,13 +5088,13 @@
           <a:p>
             <a:pPr algn="l"/>
             <a:r>
-              <a:rPr sz="950" b="0" i="0">
+              <a:rPr sz="900" b="0" i="0">
                 <a:solidFill>
                   <a:srgbClr val="1B2A4A"/>
                 </a:solidFill>
                 <a:latin typeface="Calibri"/>
               </a:rPr>
-              <a:t>OCR Semi-D</a:t>
+              <a:t>Terrace (large)</a:t>
             </a:r>
           </a:p>
         </p:txBody>
@@ -5118,8 +5107,8 @@
         </p:nvSpPr>
         <p:spPr>
           <a:xfrm>
-            <a:off x="6263640" y="4599431"/>
-            <a:ext cx="914400" cy="347472"/>
+            <a:off x="5193792" y="4837175"/>
+            <a:ext cx="1828800" cy="164592"/>
           </a:xfrm>
           <a:prstGeom prst="rect">
             <a:avLst/>
@@ -5132,15 +5121,15 @@
           </a:bodyPr>
           <a:lstStyle/>
           <a:p>
-            <a:pPr algn="r"/>
-            <a:r>
-              <a:rPr sz="1400" b="1" i="0">
+            <a:pPr algn="l"/>
+            <a:r>
+              <a:rPr sz="1200" b="1" i="0">
                 <a:solidFill>
                   <a:srgbClr val="C9A84C"/>
                 </a:solidFill>
                 <a:latin typeface="Calibri"/>
               </a:rPr>
-              <a:t>$5.75M</a:t>
+              <a:t>$4.35M–$6.25M</a:t>
             </a:r>
           </a:p>
         </p:txBody>
@@ -5153,7 +5142,7 @@
         </p:nvSpPr>
         <p:spPr>
           <a:xfrm>
-            <a:off x="5120640" y="5102352"/>
+            <a:off x="5120640" y="5138928"/>
             <a:ext cx="2157984" cy="457200"/>
           </a:xfrm>
           <a:prstGeom prst="rect">
@@ -5198,8 +5187,8 @@
         </p:nvSpPr>
         <p:spPr>
           <a:xfrm>
-            <a:off x="5193792" y="5148072"/>
-            <a:ext cx="1188720" cy="219456"/>
+            <a:off x="5193792" y="5184648"/>
+            <a:ext cx="1097280" cy="219456"/>
           </a:xfrm>
           <a:prstGeom prst="rect">
             <a:avLst/>
@@ -5214,13 +5203,13 @@
           <a:p>
             <a:pPr algn="l"/>
             <a:r>
-              <a:rPr sz="950" b="0" i="0">
+              <a:rPr sz="900" b="0" i="0">
                 <a:solidFill>
                   <a:srgbClr val="1B2A4A"/>
                 </a:solidFill>
                 <a:latin typeface="Calibri"/>
               </a:rPr>
-              <a:t>RCR Detached</a:t>
+              <a:t>Semi-D</a:t>
             </a:r>
           </a:p>
         </p:txBody>
@@ -5233,8 +5222,8 @@
         </p:nvSpPr>
         <p:spPr>
           <a:xfrm>
-            <a:off x="6263640" y="5148072"/>
-            <a:ext cx="914400" cy="347472"/>
+            <a:off x="5193792" y="5385816"/>
+            <a:ext cx="1828800" cy="164592"/>
           </a:xfrm>
           <a:prstGeom prst="rect">
             <a:avLst/>
@@ -5247,15 +5236,15 @@
           </a:bodyPr>
           <a:lstStyle/>
           <a:p>
-            <a:pPr algn="r"/>
-            <a:r>
-              <a:rPr sz="1400" b="1" i="0">
+            <a:pPr algn="l"/>
+            <a:r>
+              <a:rPr sz="1200" b="1" i="0">
                 <a:solidFill>
                   <a:srgbClr val="C9A84C"/>
                 </a:solidFill>
                 <a:latin typeface="Calibri"/>
               </a:rPr>
-              <a:t>$10.9M</a:t>
+              <a:t>$5.70M–$7.20M</a:t>
             </a:r>
           </a:p>
         </p:txBody>
@@ -5268,7 +5257,7 @@
         </p:nvSpPr>
         <p:spPr>
           <a:xfrm>
-            <a:off x="5120640" y="5650992"/>
+            <a:off x="5120640" y="5687568"/>
             <a:ext cx="2157984" cy="457200"/>
           </a:xfrm>
           <a:prstGeom prst="rect">
@@ -5313,8 +5302,8 @@
         </p:nvSpPr>
         <p:spPr>
           <a:xfrm>
-            <a:off x="5193792" y="5696712"/>
-            <a:ext cx="1188720" cy="219456"/>
+            <a:off x="5193792" y="5733288"/>
+            <a:ext cx="1097280" cy="219456"/>
           </a:xfrm>
           <a:prstGeom prst="rect">
             <a:avLst/>
@@ -5329,13 +5318,13 @@
           <a:p>
             <a:pPr algn="l"/>
             <a:r>
-              <a:rPr sz="950" b="0" i="0">
+              <a:rPr sz="900" b="0" i="0">
                 <a:solidFill>
                   <a:srgbClr val="1B2A4A"/>
                 </a:solidFill>
                 <a:latin typeface="Calibri"/>
               </a:rPr>
-              <a:t>CCR Detached</a:t>
+              <a:t>Avg Land PSF</a:t>
             </a:r>
           </a:p>
         </p:txBody>
@@ -5348,8 +5337,8 @@
         </p:nvSpPr>
         <p:spPr>
           <a:xfrm>
-            <a:off x="6263640" y="5696712"/>
-            <a:ext cx="914400" cy="347472"/>
+            <a:off x="5193792" y="5934456"/>
+            <a:ext cx="1828800" cy="164592"/>
           </a:xfrm>
           <a:prstGeom prst="rect">
             <a:avLst/>
@@ -5362,15 +5351,15 @@
           </a:bodyPr>
           <a:lstStyle/>
           <a:p>
-            <a:pPr algn="r"/>
-            <a:r>
-              <a:rPr sz="1400" b="1" i="0">
+            <a:pPr algn="l"/>
+            <a:r>
+              <a:rPr sz="1200" b="1" i="0">
                 <a:solidFill>
                   <a:srgbClr val="C9A84C"/>
                 </a:solidFill>
                 <a:latin typeface="Calibri"/>
               </a:rPr>
-              <a:t>$16.8M</a:t>
+              <a:t>$3,151 psf</a:t>
             </a:r>
           </a:p>
         </p:txBody>
@@ -5383,7 +5372,7 @@
         </p:nvSpPr>
         <p:spPr>
           <a:xfrm>
-            <a:off x="5029200" y="6144768"/>
+            <a:off x="5029200" y="6419088"/>
             <a:ext cx="2359152" cy="164592"/>
           </a:xfrm>
           <a:prstGeom prst="rect">
@@ -5399,13 +5388,13 @@
           <a:p>
             <a:pPr algn="l"/>
             <a:r>
-              <a:rPr sz="750" b="0" i="1">
+              <a:rPr sz="700" b="0" i="1">
                 <a:solidFill>
                   <a:srgbClr val="64748B"/>
                 </a:solidFill>
                 <a:latin typeface="Calibri"/>
               </a:rPr>
-              <a:t>Source: ERA Research 1Q 2026 Landed Report</a:t>
+              <a:t>Source: URA REALIS (Jun 2025–Jun 2026)</a:t>
             </a:r>
           </a:p>
         </p:txBody>
@@ -5418,7 +5407,7 @@
         </p:nvSpPr>
         <p:spPr>
           <a:xfrm>
-            <a:off x="0" y="6446520"/>
+            <a:off x="0" y="6400800"/>
             <a:ext cx="7562088" cy="1207008"/>
           </a:xfrm>
           <a:prstGeom prst="rect">
@@ -5461,7 +5450,7 @@
         </p:nvSpPr>
         <p:spPr>
           <a:xfrm>
-            <a:off x="0" y="6446520"/>
+            <a:off x="0" y="6400800"/>
             <a:ext cx="256032" cy="1207008"/>
           </a:xfrm>
           <a:prstGeom prst="rect">
@@ -5504,8 +5493,8 @@
         </p:nvSpPr>
         <p:spPr>
           <a:xfrm>
-            <a:off x="411480" y="6492240"/>
-            <a:ext cx="5029200" cy="274320"/>
+            <a:off x="411480" y="6473952"/>
+            <a:ext cx="5029200" cy="256032"/>
           </a:xfrm>
           <a:prstGeom prst="rect">
             <a:avLst/>
@@ -5539,8 +5528,8 @@
         </p:nvSpPr>
         <p:spPr>
           <a:xfrm>
-            <a:off x="411480" y="6766560"/>
-            <a:ext cx="6858000" cy="621792"/>
+            <a:off x="411480" y="6748272"/>
+            <a:ext cx="6858000" cy="694944"/>
           </a:xfrm>
           <a:prstGeom prst="rect">
             <a:avLst/>
@@ -5555,13 +5544,13 @@
           <a:p>
             <a:pPr algn="l"/>
             <a:r>
-              <a:rPr sz="1050" b="0" i="0">
+              <a:rPr sz="1000" b="0" i="0">
                 <a:solidFill>
                   <a:srgbClr val="FFFFFF"/>
                 </a:solidFill>
                 <a:latin typeface="Calibri"/>
               </a:rPr>
-              <a:t>Based on recent comparable transactions in your estate, similar homes have transacted at $[X]M–$[Y]M. After settling your CPF refund and any outstanding mortgage, most sellers in this estate are walking away with $[Z]M or more in cash proceeds.</a:t>
+              <a:t>Based on 21 transactions in Thomson Garden Estate over the last 12 months, freehold terraces have transacted between $2.65M–$6.25M and semi-detached homes at $5.70M–$7.20M. Average land PSF: $3,151. Call me for a complimentary, no-obligation valuation of your specific home.</a:t>
             </a:r>
           </a:p>
         </p:txBody>
@@ -5574,7 +5563,7 @@
         </p:nvSpPr>
         <p:spPr>
           <a:xfrm>
-            <a:off x="457200" y="7818120"/>
+            <a:off x="457200" y="7680960"/>
             <a:ext cx="6858000" cy="256032"/>
           </a:xfrm>
           <a:prstGeom prst="rect">
@@ -5609,7 +5598,7 @@
         </p:nvSpPr>
         <p:spPr>
           <a:xfrm>
-            <a:off x="457200" y="8119872"/>
+            <a:off x="457200" y="7973568"/>
             <a:ext cx="2078736" cy="1417320"/>
           </a:xfrm>
           <a:prstGeom prst="rect">
@@ -5654,7 +5643,7 @@
         </p:nvSpPr>
         <p:spPr>
           <a:xfrm>
-            <a:off x="1313688" y="8183879"/>
+            <a:off x="1313688" y="8037576"/>
             <a:ext cx="365760" cy="365760"/>
           </a:xfrm>
           <a:prstGeom prst="ellipse">
@@ -5697,7 +5686,7 @@
         </p:nvSpPr>
         <p:spPr>
           <a:xfrm>
-            <a:off x="1313688" y="8183879"/>
+            <a:off x="1313688" y="8037576"/>
             <a:ext cx="365760" cy="365760"/>
           </a:xfrm>
           <a:prstGeom prst="rect">
@@ -5732,7 +5721,7 @@
         </p:nvSpPr>
         <p:spPr>
           <a:xfrm>
-            <a:off x="548640" y="8613648"/>
+            <a:off x="548640" y="8467344"/>
             <a:ext cx="1895856" cy="274320"/>
           </a:xfrm>
           <a:prstGeom prst="rect">
@@ -5767,8 +5756,8 @@
         </p:nvSpPr>
         <p:spPr>
           <a:xfrm>
-            <a:off x="548640" y="8887968"/>
-            <a:ext cx="1895856" cy="548640"/>
+            <a:off x="548640" y="8741664"/>
+            <a:ext cx="1895856" cy="594360"/>
           </a:xfrm>
           <a:prstGeom prst="rect">
             <a:avLst/>
@@ -5802,7 +5791,7 @@
         </p:nvSpPr>
         <p:spPr>
           <a:xfrm>
-            <a:off x="2673096" y="8119872"/>
+            <a:off x="2673096" y="7973568"/>
             <a:ext cx="2078736" cy="1417320"/>
           </a:xfrm>
           <a:prstGeom prst="rect">
@@ -5847,7 +5836,7 @@
         </p:nvSpPr>
         <p:spPr>
           <a:xfrm>
-            <a:off x="3529584" y="8183879"/>
+            <a:off x="3529584" y="8037576"/>
             <a:ext cx="365760" cy="365760"/>
           </a:xfrm>
           <a:prstGeom prst="ellipse">
@@ -5890,7 +5879,7 @@
         </p:nvSpPr>
         <p:spPr>
           <a:xfrm>
-            <a:off x="3529584" y="8183879"/>
+            <a:off x="3529584" y="8037576"/>
             <a:ext cx="365760" cy="365760"/>
           </a:xfrm>
           <a:prstGeom prst="rect">
@@ -5925,7 +5914,7 @@
         </p:nvSpPr>
         <p:spPr>
           <a:xfrm>
-            <a:off x="2764536" y="8613648"/>
+            <a:off x="2764536" y="8467344"/>
             <a:ext cx="1895856" cy="274320"/>
           </a:xfrm>
           <a:prstGeom prst="rect">
@@ -5960,8 +5949,8 @@
         </p:nvSpPr>
         <p:spPr>
           <a:xfrm>
-            <a:off x="2764536" y="8887968"/>
-            <a:ext cx="1895856" cy="548640"/>
+            <a:off x="2764536" y="8741664"/>
+            <a:ext cx="1895856" cy="594360"/>
           </a:xfrm>
           <a:prstGeom prst="rect">
             <a:avLst/>
@@ -5995,7 +5984,7 @@
         </p:nvSpPr>
         <p:spPr>
           <a:xfrm>
-            <a:off x="4888992" y="8119872"/>
+            <a:off x="4888992" y="7973568"/>
             <a:ext cx="2078736" cy="1417320"/>
           </a:xfrm>
           <a:prstGeom prst="rect">
@@ -6040,7 +6029,7 @@
         </p:nvSpPr>
         <p:spPr>
           <a:xfrm>
-            <a:off x="5745480" y="8183879"/>
+            <a:off x="5745480" y="8037576"/>
             <a:ext cx="365760" cy="365760"/>
           </a:xfrm>
           <a:prstGeom prst="ellipse">
@@ -6083,7 +6072,7 @@
         </p:nvSpPr>
         <p:spPr>
           <a:xfrm>
-            <a:off x="5745480" y="8183879"/>
+            <a:off x="5745480" y="8037576"/>
             <a:ext cx="365760" cy="365760"/>
           </a:xfrm>
           <a:prstGeom prst="rect">
@@ -6118,7 +6107,7 @@
         </p:nvSpPr>
         <p:spPr>
           <a:xfrm>
-            <a:off x="4980432" y="8613648"/>
+            <a:off x="4980432" y="8467344"/>
             <a:ext cx="1895856" cy="274320"/>
           </a:xfrm>
           <a:prstGeom prst="rect">
@@ -6153,8 +6142,8 @@
         </p:nvSpPr>
         <p:spPr>
           <a:xfrm>
-            <a:off x="4980432" y="8887968"/>
-            <a:ext cx="1895856" cy="548640"/>
+            <a:off x="4980432" y="8741664"/>
+            <a:ext cx="1895856" cy="594360"/>
           </a:xfrm>
           <a:prstGeom prst="rect">
             <a:avLst/>
@@ -6175,7 +6164,7 @@
                 </a:solidFill>
                 <a:latin typeface="Calibri"/>
               </a:rPr>
-              <a:t>Photography within 5 days. Listing live within 7 days. Active buyer outreach starts immediately.</a:t>
+              <a:t>Professional photography within 5 days. Listing live within 7 days. Active buyer outreach starts immediately.</a:t>
             </a:r>
           </a:p>
         </p:txBody>
@@ -6188,8 +6177,8 @@
         </p:nvSpPr>
         <p:spPr>
           <a:xfrm>
-            <a:off x="0" y="9674352"/>
-            <a:ext cx="7562088" cy="1014984"/>
+            <a:off x="0" y="9619488"/>
+            <a:ext cx="7562088" cy="987552"/>
           </a:xfrm>
           <a:prstGeom prst="rect">
             <a:avLst/>
@@ -6231,8 +6220,8 @@
         </p:nvSpPr>
         <p:spPr>
           <a:xfrm>
-            <a:off x="0" y="9674352"/>
-            <a:ext cx="256032" cy="1014984"/>
+            <a:off x="0" y="9619488"/>
+            <a:ext cx="256032" cy="987552"/>
           </a:xfrm>
           <a:prstGeom prst="rect">
             <a:avLst/>
@@ -6274,8 +6263,8 @@
         </p:nvSpPr>
         <p:spPr>
           <a:xfrm>
-            <a:off x="411480" y="9738360"/>
-            <a:ext cx="3200400" cy="274320"/>
+            <a:off x="411480" y="9692640"/>
+            <a:ext cx="3200400" cy="256032"/>
           </a:xfrm>
           <a:prstGeom prst="rect">
             <a:avLst/>
@@ -6296,7 +6285,7 @@
                 </a:solidFill>
                 <a:latin typeface="Calibri"/>
               </a:rPr>
-              <a:t>[Agent Name]</a:t>
+              <a:t>Rio Pang 彭仕轩</a:t>
             </a:r>
           </a:p>
         </p:txBody>
@@ -6309,8 +6298,8 @@
         </p:nvSpPr>
         <p:spPr>
           <a:xfrm>
-            <a:off x="411480" y="10021824"/>
-            <a:ext cx="3200400" cy="237744"/>
+            <a:off x="411480" y="9966960"/>
+            <a:ext cx="3200400" cy="219456"/>
           </a:xfrm>
           <a:prstGeom prst="rect">
             <a:avLst/>
@@ -6331,7 +6320,7 @@
                 </a:solidFill>
                 <a:latin typeface="Calibri"/>
               </a:rPr>
-              <a:t>ERA Singapore  |  CEA Reg. No. [XXXXX]</a:t>
+              <a:t>ERA Singapore  |  CEA Reg. No. R0702148</a:t>
             </a:r>
           </a:p>
         </p:txBody>
@@ -6344,8 +6333,8 @@
         </p:nvSpPr>
         <p:spPr>
           <a:xfrm>
-            <a:off x="3749039" y="9738360"/>
-            <a:ext cx="2103120" cy="237744"/>
+            <a:off x="3657600" y="9692640"/>
+            <a:ext cx="2286000" cy="237744"/>
           </a:xfrm>
           <a:prstGeom prst="rect">
             <a:avLst/>
@@ -6360,13 +6349,13 @@
           <a:p>
             <a:pPr algn="l"/>
             <a:r>
-              <a:rPr sz="1050" b="1" i="0">
+              <a:rPr sz="1300" b="1" i="0">
                 <a:solidFill>
                   <a:srgbClr val="C9A84C"/>
                 </a:solidFill>
                 <a:latin typeface="Calibri"/>
               </a:rPr>
-              <a:t>[Mobile / WhatsApp]</a:t>
+              <a:t>9183 1316</a:t>
             </a:r>
           </a:p>
         </p:txBody>
@@ -6379,8 +6368,8 @@
         </p:nvSpPr>
         <p:spPr>
           <a:xfrm>
-            <a:off x="3749039" y="10003536"/>
-            <a:ext cx="2103120" cy="237744"/>
+            <a:off x="3657600" y="9948672"/>
+            <a:ext cx="2286000" cy="237744"/>
           </a:xfrm>
           <a:prstGeom prst="rect">
             <a:avLst/>
@@ -6395,13 +6384,13 @@
           <a:p>
             <a:pPr algn="l"/>
             <a:r>
-              <a:rPr sz="1000" b="0" i="0">
+              <a:rPr sz="950" b="0" i="0">
                 <a:solidFill>
                   <a:srgbClr val="B0BED4"/>
                 </a:solidFill>
                 <a:latin typeface="Calibri"/>
               </a:rPr>
-              <a:t>[Email Address]</a:t>
+              <a:t>WhatsApp / Call</a:t>
             </a:r>
           </a:p>
         </p:txBody>
@@ -6414,8 +6403,8 @@
         </p:nvSpPr>
         <p:spPr>
           <a:xfrm>
-            <a:off x="411480" y="10405872"/>
-            <a:ext cx="6739127" cy="201168"/>
+            <a:off x="411480" y="10396728"/>
+            <a:ext cx="6739127" cy="182880"/>
           </a:xfrm>
           <a:prstGeom prst="rect">
             <a:avLst/>
@@ -6436,7 +6425,7 @@
                 </a:solidFill>
                 <a:latin typeface="Calibri"/>
               </a:rPr>
-              <a:t>Data sourced from ERA Research, URA REALIS and Knight Frank (2026). This flyer is for informational purposes only and does not constitute a formal valuation.</a:t>
+              <a:t>Data sourced from URA REALIS (Jun 2025–Jun 2026). This flyer is for informational purposes only and does not constitute a formal valuation.</a:t>
             </a:r>
           </a:p>
         </p:txBody>

--- a/Doorknock Leave-Behind Flyer.pptx
+++ b/Doorknock Leave-Behind Flyer.pptx
@@ -4,10 +4,14 @@
   <p:sldMasterIdLst>
     <p:sldMasterId id="2147483648" r:id="rId1"/>
   </p:sldMasterIdLst>
+  <p:notesMasterIdLst>
+    <p:notesMasterId r:id="rId4"/>
+  </p:notesMasterIdLst>
   <p:sldIdLst>
-    <p:sldId id="256" r:id="rId7"/>
+    <p:sldId id="256" r:id="rId2"/>
+    <p:sldId id="257" r:id="rId3"/>
   </p:sldIdLst>
-  <p:sldSz cx="7562088" cy="10689336" type="screen4x3"/>
+  <p:sldSz cx="7562850" cy="10688638"/>
   <p:notesSz cx="6858000" cy="9144000"/>
   <p:defaultTextStyle>
     <a:defPPr>
@@ -104,7 +108,564 @@
       </a:defRPr>
     </a:lvl9pPr>
   </p:defaultTextStyle>
+  <p:extLst>
+    <p:ext uri="{EFAFB233-063F-42B5-8137-9DF3F51BA10A}">
+      <p15:sldGuideLst xmlns:p15="http://schemas.microsoft.com/office/powerpoint/2012/main">
+        <p15:guide id="1" orient="horz" pos="2160">
+          <p15:clr>
+            <a:srgbClr val="A4A3A4"/>
+          </p15:clr>
+        </p15:guide>
+        <p15:guide id="2" pos="2880">
+          <p15:clr>
+            <a:srgbClr val="A4A3A4"/>
+          </p15:clr>
+        </p15:guide>
+      </p15:sldGuideLst>
+    </p:ext>
+  </p:extLst>
 </p:presentation>
+</file>
+
+<file path=ppt/notesMasters/notesMaster1.xml><?xml version="1.0" encoding="utf-8"?>
+<p:notesMaster xmlns:a="http://schemas.openxmlformats.org/drawingml/2006/main" xmlns:r="http://schemas.openxmlformats.org/officeDocument/2006/relationships" xmlns:p="http://schemas.openxmlformats.org/presentationml/2006/main">
+  <p:cSld>
+    <p:bg>
+      <p:bgRef idx="1001">
+        <a:schemeClr val="bg1"/>
+      </p:bgRef>
+    </p:bg>
+    <p:spTree>
+      <p:nvGrpSpPr>
+        <p:cNvPr id="1" name=""/>
+        <p:cNvGrpSpPr/>
+        <p:nvPr/>
+      </p:nvGrpSpPr>
+      <p:grpSpPr>
+        <a:xfrm>
+          <a:off x="0" y="0"/>
+          <a:ext cx="0" cy="0"/>
+          <a:chOff x="0" y="0"/>
+          <a:chExt cx="0" cy="0"/>
+        </a:xfrm>
+      </p:grpSpPr>
+      <p:sp>
+        <p:nvSpPr>
+          <p:cNvPr id="2" name="Header Placeholder 1"/>
+          <p:cNvSpPr>
+            <a:spLocks noGrp="1"/>
+          </p:cNvSpPr>
+          <p:nvPr>
+            <p:ph type="hdr" sz="quarter"/>
+          </p:nvPr>
+        </p:nvSpPr>
+        <p:spPr>
+          <a:xfrm>
+            <a:off x="0" y="0"/>
+            <a:ext cx="2971800" cy="458788"/>
+          </a:xfrm>
+          <a:prstGeom prst="rect">
+            <a:avLst/>
+          </a:prstGeom>
+        </p:spPr>
+        <p:txBody>
+          <a:bodyPr vert="horz" lIns="91440" tIns="45720" rIns="91440" bIns="45720" rtlCol="0"/>
+          <a:lstStyle>
+            <a:lvl1pPr algn="l">
+              <a:defRPr sz="1200"/>
+            </a:lvl1pPr>
+          </a:lstStyle>
+          <a:p>
+            <a:endParaRPr lang="en-US"/>
+          </a:p>
+        </p:txBody>
+      </p:sp>
+      <p:sp>
+        <p:nvSpPr>
+          <p:cNvPr id="3" name="Date Placeholder 2"/>
+          <p:cNvSpPr>
+            <a:spLocks noGrp="1"/>
+          </p:cNvSpPr>
+          <p:nvPr>
+            <p:ph type="dt" idx="1"/>
+          </p:nvPr>
+        </p:nvSpPr>
+        <p:spPr>
+          <a:xfrm>
+            <a:off x="3884613" y="0"/>
+            <a:ext cx="2971800" cy="458788"/>
+          </a:xfrm>
+          <a:prstGeom prst="rect">
+            <a:avLst/>
+          </a:prstGeom>
+        </p:spPr>
+        <p:txBody>
+          <a:bodyPr vert="horz" lIns="91440" tIns="45720" rIns="91440" bIns="45720" rtlCol="0"/>
+          <a:lstStyle>
+            <a:lvl1pPr algn="r">
+              <a:defRPr sz="1200"/>
+            </a:lvl1pPr>
+          </a:lstStyle>
+          <a:p>
+            <a:fld id="{DEE4A353-551F-DA40-88C5-95E609E26DE6}" type="datetimeFigureOut">
+              <a:rPr lang="en-US" smtClean="0"/>
+              <a:t>6/17/26</a:t>
+            </a:fld>
+            <a:endParaRPr lang="en-US"/>
+          </a:p>
+        </p:txBody>
+      </p:sp>
+      <p:sp>
+        <p:nvSpPr>
+          <p:cNvPr id="4" name="Slide Image Placeholder 3"/>
+          <p:cNvSpPr>
+            <a:spLocks noGrp="1" noRot="1" noChangeAspect="1"/>
+          </p:cNvSpPr>
+          <p:nvPr>
+            <p:ph type="sldImg" idx="2"/>
+          </p:nvPr>
+        </p:nvSpPr>
+        <p:spPr>
+          <a:xfrm>
+            <a:off x="2336800" y="1143000"/>
+            <a:ext cx="2184400" cy="3086100"/>
+          </a:xfrm>
+          <a:prstGeom prst="rect">
+            <a:avLst/>
+          </a:prstGeom>
+          <a:noFill/>
+          <a:ln w="12700">
+            <a:solidFill>
+              <a:prstClr val="black"/>
+            </a:solidFill>
+          </a:ln>
+        </p:spPr>
+        <p:txBody>
+          <a:bodyPr vert="horz" lIns="91440" tIns="45720" rIns="91440" bIns="45720" rtlCol="0" anchor="ctr"/>
+          <a:lstStyle/>
+          <a:p>
+            <a:endParaRPr lang="en-US"/>
+          </a:p>
+        </p:txBody>
+      </p:sp>
+      <p:sp>
+        <p:nvSpPr>
+          <p:cNvPr id="5" name="Notes Placeholder 4"/>
+          <p:cNvSpPr>
+            <a:spLocks noGrp="1"/>
+          </p:cNvSpPr>
+          <p:nvPr>
+            <p:ph type="body" sz="quarter" idx="3"/>
+          </p:nvPr>
+        </p:nvSpPr>
+        <p:spPr>
+          <a:xfrm>
+            <a:off x="685800" y="4400550"/>
+            <a:ext cx="5486400" cy="3600450"/>
+          </a:xfrm>
+          <a:prstGeom prst="rect">
+            <a:avLst/>
+          </a:prstGeom>
+        </p:spPr>
+        <p:txBody>
+          <a:bodyPr vert="horz" lIns="91440" tIns="45720" rIns="91440" bIns="45720" rtlCol="0"/>
+          <a:lstStyle/>
+          <a:p>
+            <a:pPr lvl="0"/>
+            <a:r>
+              <a:rPr lang="en-US"/>
+              <a:t>Click to edit Master text styles</a:t>
+            </a:r>
+          </a:p>
+          <a:p>
+            <a:pPr lvl="1"/>
+            <a:r>
+              <a:rPr lang="en-US"/>
+              <a:t>Second level</a:t>
+            </a:r>
+          </a:p>
+          <a:p>
+            <a:pPr lvl="2"/>
+            <a:r>
+              <a:rPr lang="en-US"/>
+              <a:t>Third level</a:t>
+            </a:r>
+          </a:p>
+          <a:p>
+            <a:pPr lvl="3"/>
+            <a:r>
+              <a:rPr lang="en-US"/>
+              <a:t>Fourth level</a:t>
+            </a:r>
+          </a:p>
+          <a:p>
+            <a:pPr lvl="4"/>
+            <a:r>
+              <a:rPr lang="en-US"/>
+              <a:t>Fifth level</a:t>
+            </a:r>
+          </a:p>
+        </p:txBody>
+      </p:sp>
+      <p:sp>
+        <p:nvSpPr>
+          <p:cNvPr id="6" name="Footer Placeholder 5"/>
+          <p:cNvSpPr>
+            <a:spLocks noGrp="1"/>
+          </p:cNvSpPr>
+          <p:nvPr>
+            <p:ph type="ftr" sz="quarter" idx="4"/>
+          </p:nvPr>
+        </p:nvSpPr>
+        <p:spPr>
+          <a:xfrm>
+            <a:off x="0" y="8685213"/>
+            <a:ext cx="2971800" cy="458787"/>
+          </a:xfrm>
+          <a:prstGeom prst="rect">
+            <a:avLst/>
+          </a:prstGeom>
+        </p:spPr>
+        <p:txBody>
+          <a:bodyPr vert="horz" lIns="91440" tIns="45720" rIns="91440" bIns="45720" rtlCol="0" anchor="b"/>
+          <a:lstStyle>
+            <a:lvl1pPr algn="l">
+              <a:defRPr sz="1200"/>
+            </a:lvl1pPr>
+          </a:lstStyle>
+          <a:p>
+            <a:endParaRPr lang="en-US"/>
+          </a:p>
+        </p:txBody>
+      </p:sp>
+      <p:sp>
+        <p:nvSpPr>
+          <p:cNvPr id="7" name="Slide Number Placeholder 6"/>
+          <p:cNvSpPr>
+            <a:spLocks noGrp="1"/>
+          </p:cNvSpPr>
+          <p:nvPr>
+            <p:ph type="sldNum" sz="quarter" idx="5"/>
+          </p:nvPr>
+        </p:nvSpPr>
+        <p:spPr>
+          <a:xfrm>
+            <a:off x="3884613" y="8685213"/>
+            <a:ext cx="2971800" cy="458787"/>
+          </a:xfrm>
+          <a:prstGeom prst="rect">
+            <a:avLst/>
+          </a:prstGeom>
+        </p:spPr>
+        <p:txBody>
+          <a:bodyPr vert="horz" lIns="91440" tIns="45720" rIns="91440" bIns="45720" rtlCol="0" anchor="b"/>
+          <a:lstStyle>
+            <a:lvl1pPr algn="r">
+              <a:defRPr sz="1200"/>
+            </a:lvl1pPr>
+          </a:lstStyle>
+          <a:p>
+            <a:fld id="{AD330A47-8819-B149-9DB7-95F42AA22DD1}" type="slidenum">
+              <a:rPr lang="en-US" smtClean="0"/>
+              <a:t>‹#›</a:t>
+            </a:fld>
+            <a:endParaRPr lang="en-US"/>
+          </a:p>
+        </p:txBody>
+      </p:sp>
+    </p:spTree>
+    <p:extLst>
+      <p:ext uri="{BB962C8B-B14F-4D97-AF65-F5344CB8AC3E}">
+        <p14:creationId xmlns:p14="http://schemas.microsoft.com/office/powerpoint/2010/main" val="1023337794"/>
+      </p:ext>
+    </p:extLst>
+  </p:cSld>
+  <p:clrMap bg1="lt1" tx1="dk1" bg2="lt2" tx2="dk2" accent1="accent1" accent2="accent2" accent3="accent3" accent4="accent4" accent5="accent5" accent6="accent6" hlink="hlink" folHlink="folHlink"/>
+  <p:notesStyle>
+    <a:lvl1pPr marL="0" algn="l" defTabSz="914400" rtl="0" eaLnBrk="1" latinLnBrk="0" hangingPunct="1">
+      <a:defRPr sz="1200" kern="1200">
+        <a:solidFill>
+          <a:schemeClr val="tx1"/>
+        </a:solidFill>
+        <a:latin typeface="+mn-lt"/>
+        <a:ea typeface="+mn-ea"/>
+        <a:cs typeface="+mn-cs"/>
+      </a:defRPr>
+    </a:lvl1pPr>
+    <a:lvl2pPr marL="457200" algn="l" defTabSz="914400" rtl="0" eaLnBrk="1" latinLnBrk="0" hangingPunct="1">
+      <a:defRPr sz="1200" kern="1200">
+        <a:solidFill>
+          <a:schemeClr val="tx1"/>
+        </a:solidFill>
+        <a:latin typeface="+mn-lt"/>
+        <a:ea typeface="+mn-ea"/>
+        <a:cs typeface="+mn-cs"/>
+      </a:defRPr>
+    </a:lvl2pPr>
+    <a:lvl3pPr marL="914400" algn="l" defTabSz="914400" rtl="0" eaLnBrk="1" latinLnBrk="0" hangingPunct="1">
+      <a:defRPr sz="1200" kern="1200">
+        <a:solidFill>
+          <a:schemeClr val="tx1"/>
+        </a:solidFill>
+        <a:latin typeface="+mn-lt"/>
+        <a:ea typeface="+mn-ea"/>
+        <a:cs typeface="+mn-cs"/>
+      </a:defRPr>
+    </a:lvl3pPr>
+    <a:lvl4pPr marL="1371600" algn="l" defTabSz="914400" rtl="0" eaLnBrk="1" latinLnBrk="0" hangingPunct="1">
+      <a:defRPr sz="1200" kern="1200">
+        <a:solidFill>
+          <a:schemeClr val="tx1"/>
+        </a:solidFill>
+        <a:latin typeface="+mn-lt"/>
+        <a:ea typeface="+mn-ea"/>
+        <a:cs typeface="+mn-cs"/>
+      </a:defRPr>
+    </a:lvl4pPr>
+    <a:lvl5pPr marL="1828800" algn="l" defTabSz="914400" rtl="0" eaLnBrk="1" latinLnBrk="0" hangingPunct="1">
+      <a:defRPr sz="1200" kern="1200">
+        <a:solidFill>
+          <a:schemeClr val="tx1"/>
+        </a:solidFill>
+        <a:latin typeface="+mn-lt"/>
+        <a:ea typeface="+mn-ea"/>
+        <a:cs typeface="+mn-cs"/>
+      </a:defRPr>
+    </a:lvl5pPr>
+    <a:lvl6pPr marL="2286000" algn="l" defTabSz="914400" rtl="0" eaLnBrk="1" latinLnBrk="0" hangingPunct="1">
+      <a:defRPr sz="1200" kern="1200">
+        <a:solidFill>
+          <a:schemeClr val="tx1"/>
+        </a:solidFill>
+        <a:latin typeface="+mn-lt"/>
+        <a:ea typeface="+mn-ea"/>
+        <a:cs typeface="+mn-cs"/>
+      </a:defRPr>
+    </a:lvl6pPr>
+    <a:lvl7pPr marL="2743200" algn="l" defTabSz="914400" rtl="0" eaLnBrk="1" latinLnBrk="0" hangingPunct="1">
+      <a:defRPr sz="1200" kern="1200">
+        <a:solidFill>
+          <a:schemeClr val="tx1"/>
+        </a:solidFill>
+        <a:latin typeface="+mn-lt"/>
+        <a:ea typeface="+mn-ea"/>
+        <a:cs typeface="+mn-cs"/>
+      </a:defRPr>
+    </a:lvl7pPr>
+    <a:lvl8pPr marL="3200400" algn="l" defTabSz="914400" rtl="0" eaLnBrk="1" latinLnBrk="0" hangingPunct="1">
+      <a:defRPr sz="1200" kern="1200">
+        <a:solidFill>
+          <a:schemeClr val="tx1"/>
+        </a:solidFill>
+        <a:latin typeface="+mn-lt"/>
+        <a:ea typeface="+mn-ea"/>
+        <a:cs typeface="+mn-cs"/>
+      </a:defRPr>
+    </a:lvl8pPr>
+    <a:lvl9pPr marL="3657600" algn="l" defTabSz="914400" rtl="0" eaLnBrk="1" latinLnBrk="0" hangingPunct="1">
+      <a:defRPr sz="1200" kern="1200">
+        <a:solidFill>
+          <a:schemeClr val="tx1"/>
+        </a:solidFill>
+        <a:latin typeface="+mn-lt"/>
+        <a:ea typeface="+mn-ea"/>
+        <a:cs typeface="+mn-cs"/>
+      </a:defRPr>
+    </a:lvl9pPr>
+  </p:notesStyle>
+</p:notesMaster>
+</file>
+
+<file path=ppt/notesSlides/notesSlide1.xml><?xml version="1.0" encoding="utf-8"?>
+<p:notes xmlns:a="http://schemas.openxmlformats.org/drawingml/2006/main" xmlns:r="http://schemas.openxmlformats.org/officeDocument/2006/relationships" xmlns:p="http://schemas.openxmlformats.org/presentationml/2006/main">
+  <p:cSld>
+    <p:spTree>
+      <p:nvGrpSpPr>
+        <p:cNvPr id="1" name=""/>
+        <p:cNvGrpSpPr/>
+        <p:nvPr/>
+      </p:nvGrpSpPr>
+      <p:grpSpPr>
+        <a:xfrm>
+          <a:off x="0" y="0"/>
+          <a:ext cx="0" cy="0"/>
+          <a:chOff x="0" y="0"/>
+          <a:chExt cx="0" cy="0"/>
+        </a:xfrm>
+      </p:grpSpPr>
+      <p:sp>
+        <p:nvSpPr>
+          <p:cNvPr id="2" name="Slide Image Placeholder 1"/>
+          <p:cNvSpPr>
+            <a:spLocks noGrp="1" noRot="1" noChangeAspect="1"/>
+          </p:cNvSpPr>
+          <p:nvPr>
+            <p:ph type="sldImg"/>
+          </p:nvPr>
+        </p:nvSpPr>
+        <p:spPr/>
+      </p:sp>
+      <p:sp>
+        <p:nvSpPr>
+          <p:cNvPr id="3" name="Notes Placeholder 2"/>
+          <p:cNvSpPr>
+            <a:spLocks noGrp="1"/>
+          </p:cNvSpPr>
+          <p:nvPr>
+            <p:ph type="body" idx="1"/>
+          </p:nvPr>
+        </p:nvSpPr>
+        <p:spPr/>
+        <p:txBody>
+          <a:bodyPr/>
+          <a:lstStyle/>
+          <a:p>
+            <a:endParaRPr lang="en-US" dirty="0"/>
+          </a:p>
+        </p:txBody>
+      </p:sp>
+      <p:sp>
+        <p:nvSpPr>
+          <p:cNvPr id="4" name="Slide Number Placeholder 3"/>
+          <p:cNvSpPr>
+            <a:spLocks noGrp="1"/>
+          </p:cNvSpPr>
+          <p:nvPr>
+            <p:ph type="sldNum" sz="quarter" idx="5"/>
+          </p:nvPr>
+        </p:nvSpPr>
+        <p:spPr/>
+        <p:txBody>
+          <a:bodyPr/>
+          <a:lstStyle/>
+          <a:p>
+            <a:fld id="{AD330A47-8819-B149-9DB7-95F42AA22DD1}" type="slidenum">
+              <a:rPr lang="en-US" smtClean="0"/>
+              <a:t>1</a:t>
+            </a:fld>
+            <a:endParaRPr lang="en-US"/>
+          </a:p>
+        </p:txBody>
+      </p:sp>
+    </p:spTree>
+    <p:extLst>
+      <p:ext uri="{BB962C8B-B14F-4D97-AF65-F5344CB8AC3E}">
+        <p14:creationId xmlns:p14="http://schemas.microsoft.com/office/powerpoint/2010/main" val="3881224341"/>
+      </p:ext>
+    </p:extLst>
+  </p:cSld>
+  <p:clrMapOvr>
+    <a:masterClrMapping/>
+  </p:clrMapOvr>
+</p:notes>
+</file>
+
+<file path=ppt/notesSlides/notesSlide2.xml><?xml version="1.0" encoding="utf-8"?>
+<p:notes xmlns:a="http://schemas.openxmlformats.org/drawingml/2006/main" xmlns:r="http://schemas.openxmlformats.org/officeDocument/2006/relationships" xmlns:p="http://schemas.openxmlformats.org/presentationml/2006/main">
+  <p:cSld>
+    <p:spTree>
+      <p:nvGrpSpPr>
+        <p:cNvPr id="1" name="">
+          <a:extLst>
+            <a:ext uri="{FF2B5EF4-FFF2-40B4-BE49-F238E27FC236}">
+              <a16:creationId xmlns:a16="http://schemas.microsoft.com/office/drawing/2014/main" id="{02488F2A-5758-A010-B390-4F477F24AC70}"/>
+            </a:ext>
+          </a:extLst>
+        </p:cNvPr>
+        <p:cNvGrpSpPr/>
+        <p:nvPr/>
+      </p:nvGrpSpPr>
+      <p:grpSpPr>
+        <a:xfrm>
+          <a:off x="0" y="0"/>
+          <a:ext cx="0" cy="0"/>
+          <a:chOff x="0" y="0"/>
+          <a:chExt cx="0" cy="0"/>
+        </a:xfrm>
+      </p:grpSpPr>
+      <p:sp>
+        <p:nvSpPr>
+          <p:cNvPr id="2" name="Slide Image Placeholder 1">
+            <a:extLst>
+              <a:ext uri="{FF2B5EF4-FFF2-40B4-BE49-F238E27FC236}">
+                <a16:creationId xmlns:a16="http://schemas.microsoft.com/office/drawing/2014/main" id="{3D1E1E70-F5DF-EDF8-361D-FA8AB35B462B}"/>
+              </a:ext>
+            </a:extLst>
+          </p:cNvPr>
+          <p:cNvSpPr>
+            <a:spLocks noGrp="1" noRot="1" noChangeAspect="1"/>
+          </p:cNvSpPr>
+          <p:nvPr>
+            <p:ph type="sldImg"/>
+          </p:nvPr>
+        </p:nvSpPr>
+        <p:spPr/>
+      </p:sp>
+      <p:sp>
+        <p:nvSpPr>
+          <p:cNvPr id="3" name="Notes Placeholder 2">
+            <a:extLst>
+              <a:ext uri="{FF2B5EF4-FFF2-40B4-BE49-F238E27FC236}">
+                <a16:creationId xmlns:a16="http://schemas.microsoft.com/office/drawing/2014/main" id="{07754189-3F92-19A5-A8EF-4EB260F123B9}"/>
+              </a:ext>
+            </a:extLst>
+          </p:cNvPr>
+          <p:cNvSpPr>
+            <a:spLocks noGrp="1"/>
+          </p:cNvSpPr>
+          <p:nvPr>
+            <p:ph type="body" idx="1"/>
+          </p:nvPr>
+        </p:nvSpPr>
+        <p:spPr/>
+        <p:txBody>
+          <a:bodyPr/>
+          <a:lstStyle/>
+          <a:p>
+            <a:endParaRPr lang="en-US" dirty="0"/>
+          </a:p>
+        </p:txBody>
+      </p:sp>
+      <p:sp>
+        <p:nvSpPr>
+          <p:cNvPr id="4" name="Slide Number Placeholder 3">
+            <a:extLst>
+              <a:ext uri="{FF2B5EF4-FFF2-40B4-BE49-F238E27FC236}">
+                <a16:creationId xmlns:a16="http://schemas.microsoft.com/office/drawing/2014/main" id="{F0D03FBC-22A7-3EC6-875C-6AA8E578E6A2}"/>
+              </a:ext>
+            </a:extLst>
+          </p:cNvPr>
+          <p:cNvSpPr>
+            <a:spLocks noGrp="1"/>
+          </p:cNvSpPr>
+          <p:nvPr>
+            <p:ph type="sldNum" sz="quarter" idx="5"/>
+          </p:nvPr>
+        </p:nvSpPr>
+        <p:spPr/>
+        <p:txBody>
+          <a:bodyPr/>
+          <a:lstStyle/>
+          <a:p>
+            <a:fld id="{AD330A47-8819-B149-9DB7-95F42AA22DD1}" type="slidenum">
+              <a:rPr lang="en-US" smtClean="0"/>
+              <a:t>2</a:t>
+            </a:fld>
+            <a:endParaRPr lang="en-US"/>
+          </a:p>
+        </p:txBody>
+      </p:sp>
+    </p:spTree>
+    <p:extLst>
+      <p:ext uri="{BB962C8B-B14F-4D97-AF65-F5344CB8AC3E}">
+        <p14:creationId xmlns:p14="http://schemas.microsoft.com/office/powerpoint/2010/main" val="1966938080"/>
+      </p:ext>
+    </p:extLst>
+  </p:cSld>
+  <p:clrMapOvr>
+    <a:masterClrMapping/>
+  </p:clrMapOvr>
+</p:notes>
 </file>
 
 <file path=ppt/slideLayouts/slideLayout1.xml><?xml version="1.0" encoding="utf-8"?>
@@ -145,10 +706,9 @@
           <a:lstStyle/>
           <a:p>
             <a:r>
-              <a:rPr lang="en-US" smtClean="0"/>
+              <a:rPr lang="en-US"/>
               <a:t>Click to edit Master title style</a:t>
             </a:r>
-            <a:endParaRPr lang="en-US"/>
           </a:p>
         </p:txBody>
       </p:sp>
@@ -264,10 +824,9 @@
           </a:lstStyle>
           <a:p>
             <a:r>
-              <a:rPr lang="en-US" smtClean="0"/>
+              <a:rPr lang="en-US"/>
               <a:t>Click to edit Master subtitle style</a:t>
             </a:r>
-            <a:endParaRPr lang="en-US"/>
           </a:p>
         </p:txBody>
       </p:sp>
@@ -288,7 +847,7 @@
           <a:p>
             <a:fld id="{5BCAD085-E8A6-8845-BD4E-CB4CCA059FC4}" type="datetimeFigureOut">
               <a:rPr lang="en-US" smtClean="0"/>
-              <a:t>1/27/13</a:t>
+              <a:t>6/17/26</a:t>
             </a:fld>
             <a:endParaRPr lang="en-US"/>
           </a:p>
@@ -382,10 +941,9 @@
           <a:lstStyle/>
           <a:p>
             <a:r>
-              <a:rPr lang="en-US" smtClean="0"/>
+              <a:rPr lang="en-US"/>
               <a:t>Click to edit Master title style</a:t>
             </a:r>
-            <a:endParaRPr lang="en-US"/>
           </a:p>
         </p:txBody>
       </p:sp>
@@ -406,38 +964,37 @@
           <a:p>
             <a:pPr lvl="0"/>
             <a:r>
-              <a:rPr lang="en-US" smtClean="0"/>
+              <a:rPr lang="en-US"/>
               <a:t>Click to edit Master text styles</a:t>
             </a:r>
           </a:p>
           <a:p>
             <a:pPr lvl="1"/>
             <a:r>
-              <a:rPr lang="en-US" smtClean="0"/>
+              <a:rPr lang="en-US"/>
               <a:t>Second level</a:t>
             </a:r>
           </a:p>
           <a:p>
             <a:pPr lvl="2"/>
             <a:r>
-              <a:rPr lang="en-US" smtClean="0"/>
+              <a:rPr lang="en-US"/>
               <a:t>Third level</a:t>
             </a:r>
           </a:p>
           <a:p>
             <a:pPr lvl="3"/>
             <a:r>
-              <a:rPr lang="en-US" smtClean="0"/>
+              <a:rPr lang="en-US"/>
               <a:t>Fourth level</a:t>
             </a:r>
           </a:p>
           <a:p>
             <a:pPr lvl="4"/>
             <a:r>
-              <a:rPr lang="en-US" smtClean="0"/>
+              <a:rPr lang="en-US"/>
               <a:t>Fifth level</a:t>
             </a:r>
-            <a:endParaRPr lang="en-US"/>
           </a:p>
         </p:txBody>
       </p:sp>
@@ -458,7 +1015,7 @@
           <a:p>
             <a:fld id="{5BCAD085-E8A6-8845-BD4E-CB4CCA059FC4}" type="datetimeFigureOut">
               <a:rPr lang="en-US" smtClean="0"/>
-              <a:t>1/27/13</a:t>
+              <a:t>6/17/26</a:t>
             </a:fld>
             <a:endParaRPr lang="en-US"/>
           </a:p>
@@ -557,10 +1114,9 @@
           <a:lstStyle/>
           <a:p>
             <a:r>
-              <a:rPr lang="en-US" smtClean="0"/>
+              <a:rPr lang="en-US"/>
               <a:t>Click to edit Master title style</a:t>
             </a:r>
-            <a:endParaRPr lang="en-US"/>
           </a:p>
         </p:txBody>
       </p:sp>
@@ -586,38 +1142,37 @@
           <a:p>
             <a:pPr lvl="0"/>
             <a:r>
-              <a:rPr lang="en-US" smtClean="0"/>
+              <a:rPr lang="en-US"/>
               <a:t>Click to edit Master text styles</a:t>
             </a:r>
           </a:p>
           <a:p>
             <a:pPr lvl="1"/>
             <a:r>
-              <a:rPr lang="en-US" smtClean="0"/>
+              <a:rPr lang="en-US"/>
               <a:t>Second level</a:t>
             </a:r>
           </a:p>
           <a:p>
             <a:pPr lvl="2"/>
             <a:r>
-              <a:rPr lang="en-US" smtClean="0"/>
+              <a:rPr lang="en-US"/>
               <a:t>Third level</a:t>
             </a:r>
           </a:p>
           <a:p>
             <a:pPr lvl="3"/>
             <a:r>
-              <a:rPr lang="en-US" smtClean="0"/>
+              <a:rPr lang="en-US"/>
               <a:t>Fourth level</a:t>
             </a:r>
           </a:p>
           <a:p>
             <a:pPr lvl="4"/>
             <a:r>
-              <a:rPr lang="en-US" smtClean="0"/>
+              <a:rPr lang="en-US"/>
               <a:t>Fifth level</a:t>
             </a:r>
-            <a:endParaRPr lang="en-US"/>
           </a:p>
         </p:txBody>
       </p:sp>
@@ -638,7 +1193,7 @@
           <a:p>
             <a:fld id="{5BCAD085-E8A6-8845-BD4E-CB4CCA059FC4}" type="datetimeFigureOut">
               <a:rPr lang="en-US" smtClean="0"/>
-              <a:t>1/27/13</a:t>
+              <a:t>6/17/26</a:t>
             </a:fld>
             <a:endParaRPr lang="en-US"/>
           </a:p>
@@ -732,10 +1287,9 @@
           <a:lstStyle/>
           <a:p>
             <a:r>
-              <a:rPr lang="en-US" smtClean="0"/>
+              <a:rPr lang="en-US"/>
               <a:t>Click to edit Master title style</a:t>
             </a:r>
-            <a:endParaRPr lang="en-US"/>
           </a:p>
         </p:txBody>
       </p:sp>
@@ -756,38 +1310,37 @@
           <a:p>
             <a:pPr lvl="0"/>
             <a:r>
-              <a:rPr lang="en-US" smtClean="0"/>
+              <a:rPr lang="en-US"/>
               <a:t>Click to edit Master text styles</a:t>
             </a:r>
           </a:p>
           <a:p>
             <a:pPr lvl="1"/>
             <a:r>
-              <a:rPr lang="en-US" smtClean="0"/>
+              <a:rPr lang="en-US"/>
               <a:t>Second level</a:t>
             </a:r>
           </a:p>
           <a:p>
             <a:pPr lvl="2"/>
             <a:r>
-              <a:rPr lang="en-US" smtClean="0"/>
+              <a:rPr lang="en-US"/>
               <a:t>Third level</a:t>
             </a:r>
           </a:p>
           <a:p>
             <a:pPr lvl="3"/>
             <a:r>
-              <a:rPr lang="en-US" smtClean="0"/>
+              <a:rPr lang="en-US"/>
               <a:t>Fourth level</a:t>
             </a:r>
           </a:p>
           <a:p>
             <a:pPr lvl="4"/>
             <a:r>
-              <a:rPr lang="en-US" smtClean="0"/>
+              <a:rPr lang="en-US"/>
               <a:t>Fifth level</a:t>
             </a:r>
-            <a:endParaRPr lang="en-US"/>
           </a:p>
         </p:txBody>
       </p:sp>
@@ -808,7 +1361,7 @@
           <a:p>
             <a:fld id="{5BCAD085-E8A6-8845-BD4E-CB4CCA059FC4}" type="datetimeFigureOut">
               <a:rPr lang="en-US" smtClean="0"/>
-              <a:t>1/27/13</a:t>
+              <a:t>6/17/26</a:t>
             </a:fld>
             <a:endParaRPr lang="en-US"/>
           </a:p>
@@ -911,10 +1464,9 @@
           </a:lstStyle>
           <a:p>
             <a:r>
-              <a:rPr lang="en-US" smtClean="0"/>
+              <a:rPr lang="en-US"/>
               <a:t>Click to edit Master title style</a:t>
             </a:r>
-            <a:endParaRPr lang="en-US"/>
           </a:p>
         </p:txBody>
       </p:sp>
@@ -1031,7 +1583,7 @@
           <a:p>
             <a:pPr lvl="0"/>
             <a:r>
-              <a:rPr lang="en-US" smtClean="0"/>
+              <a:rPr lang="en-US"/>
               <a:t>Click to edit Master text styles</a:t>
             </a:r>
           </a:p>
@@ -1054,7 +1606,7 @@
           <a:p>
             <a:fld id="{5BCAD085-E8A6-8845-BD4E-CB4CCA059FC4}" type="datetimeFigureOut">
               <a:rPr lang="en-US" smtClean="0"/>
-              <a:t>1/27/13</a:t>
+              <a:t>6/17/26</a:t>
             </a:fld>
             <a:endParaRPr lang="en-US"/>
           </a:p>
@@ -1148,10 +1700,9 @@
           <a:lstStyle/>
           <a:p>
             <a:r>
-              <a:rPr lang="en-US" smtClean="0"/>
+              <a:rPr lang="en-US"/>
               <a:t>Click to edit Master title style</a:t>
             </a:r>
-            <a:endParaRPr lang="en-US"/>
           </a:p>
         </p:txBody>
       </p:sp>
@@ -1205,38 +1756,37 @@
           <a:p>
             <a:pPr lvl="0"/>
             <a:r>
-              <a:rPr lang="en-US" smtClean="0"/>
+              <a:rPr lang="en-US"/>
               <a:t>Click to edit Master text styles</a:t>
             </a:r>
           </a:p>
           <a:p>
             <a:pPr lvl="1"/>
             <a:r>
-              <a:rPr lang="en-US" smtClean="0"/>
+              <a:rPr lang="en-US"/>
               <a:t>Second level</a:t>
             </a:r>
           </a:p>
           <a:p>
             <a:pPr lvl="2"/>
             <a:r>
-              <a:rPr lang="en-US" smtClean="0"/>
+              <a:rPr lang="en-US"/>
               <a:t>Third level</a:t>
             </a:r>
           </a:p>
           <a:p>
             <a:pPr lvl="3"/>
             <a:r>
-              <a:rPr lang="en-US" smtClean="0"/>
+              <a:rPr lang="en-US"/>
               <a:t>Fourth level</a:t>
             </a:r>
           </a:p>
           <a:p>
             <a:pPr lvl="4"/>
             <a:r>
-              <a:rPr lang="en-US" smtClean="0"/>
+              <a:rPr lang="en-US"/>
               <a:t>Fifth level</a:t>
             </a:r>
-            <a:endParaRPr lang="en-US"/>
           </a:p>
         </p:txBody>
       </p:sp>
@@ -1290,38 +1840,37 @@
           <a:p>
             <a:pPr lvl="0"/>
             <a:r>
-              <a:rPr lang="en-US" smtClean="0"/>
+              <a:rPr lang="en-US"/>
               <a:t>Click to edit Master text styles</a:t>
             </a:r>
           </a:p>
           <a:p>
             <a:pPr lvl="1"/>
             <a:r>
-              <a:rPr lang="en-US" smtClean="0"/>
+              <a:rPr lang="en-US"/>
               <a:t>Second level</a:t>
             </a:r>
           </a:p>
           <a:p>
             <a:pPr lvl="2"/>
             <a:r>
-              <a:rPr lang="en-US" smtClean="0"/>
+              <a:rPr lang="en-US"/>
               <a:t>Third level</a:t>
             </a:r>
           </a:p>
           <a:p>
             <a:pPr lvl="3"/>
             <a:r>
-              <a:rPr lang="en-US" smtClean="0"/>
+              <a:rPr lang="en-US"/>
               <a:t>Fourth level</a:t>
             </a:r>
           </a:p>
           <a:p>
             <a:pPr lvl="4"/>
             <a:r>
-              <a:rPr lang="en-US" smtClean="0"/>
+              <a:rPr lang="en-US"/>
               <a:t>Fifth level</a:t>
             </a:r>
-            <a:endParaRPr lang="en-US"/>
           </a:p>
         </p:txBody>
       </p:sp>
@@ -1342,7 +1891,7 @@
           <a:p>
             <a:fld id="{5BCAD085-E8A6-8845-BD4E-CB4CCA059FC4}" type="datetimeFigureOut">
               <a:rPr lang="en-US" smtClean="0"/>
-              <a:t>1/27/13</a:t>
+              <a:t>6/17/26</a:t>
             </a:fld>
             <a:endParaRPr lang="en-US"/>
           </a:p>
@@ -1440,10 +1989,9 @@
           </a:lstStyle>
           <a:p>
             <a:r>
-              <a:rPr lang="en-US" smtClean="0"/>
+              <a:rPr lang="en-US"/>
               <a:t>Click to edit Master title style</a:t>
             </a:r>
-            <a:endParaRPr lang="en-US"/>
           </a:p>
         </p:txBody>
       </p:sp>
@@ -1506,7 +2054,7 @@
           <a:p>
             <a:pPr lvl="0"/>
             <a:r>
-              <a:rPr lang="en-US" smtClean="0"/>
+              <a:rPr lang="en-US"/>
               <a:t>Click to edit Master text styles</a:t>
             </a:r>
           </a:p>
@@ -1562,38 +2110,37 @@
           <a:p>
             <a:pPr lvl="0"/>
             <a:r>
-              <a:rPr lang="en-US" smtClean="0"/>
+              <a:rPr lang="en-US"/>
               <a:t>Click to edit Master text styles</a:t>
             </a:r>
           </a:p>
           <a:p>
             <a:pPr lvl="1"/>
             <a:r>
-              <a:rPr lang="en-US" smtClean="0"/>
+              <a:rPr lang="en-US"/>
               <a:t>Second level</a:t>
             </a:r>
           </a:p>
           <a:p>
             <a:pPr lvl="2"/>
             <a:r>
-              <a:rPr lang="en-US" smtClean="0"/>
+              <a:rPr lang="en-US"/>
               <a:t>Third level</a:t>
             </a:r>
           </a:p>
           <a:p>
             <a:pPr lvl="3"/>
             <a:r>
-              <a:rPr lang="en-US" smtClean="0"/>
+              <a:rPr lang="en-US"/>
               <a:t>Fourth level</a:t>
             </a:r>
           </a:p>
           <a:p>
             <a:pPr lvl="4"/>
             <a:r>
-              <a:rPr lang="en-US" smtClean="0"/>
+              <a:rPr lang="en-US"/>
               <a:t>Fifth level</a:t>
             </a:r>
-            <a:endParaRPr lang="en-US"/>
           </a:p>
         </p:txBody>
       </p:sp>
@@ -1656,7 +2203,7 @@
           <a:p>
             <a:pPr lvl="0"/>
             <a:r>
-              <a:rPr lang="en-US" smtClean="0"/>
+              <a:rPr lang="en-US"/>
               <a:t>Click to edit Master text styles</a:t>
             </a:r>
           </a:p>
@@ -1712,38 +2259,37 @@
           <a:p>
             <a:pPr lvl="0"/>
             <a:r>
-              <a:rPr lang="en-US" smtClean="0"/>
+              <a:rPr lang="en-US"/>
               <a:t>Click to edit Master text styles</a:t>
             </a:r>
           </a:p>
           <a:p>
             <a:pPr lvl="1"/>
             <a:r>
-              <a:rPr lang="en-US" smtClean="0"/>
+              <a:rPr lang="en-US"/>
               <a:t>Second level</a:t>
             </a:r>
           </a:p>
           <a:p>
             <a:pPr lvl="2"/>
             <a:r>
-              <a:rPr lang="en-US" smtClean="0"/>
+              <a:rPr lang="en-US"/>
               <a:t>Third level</a:t>
             </a:r>
           </a:p>
           <a:p>
             <a:pPr lvl="3"/>
             <a:r>
-              <a:rPr lang="en-US" smtClean="0"/>
+              <a:rPr lang="en-US"/>
               <a:t>Fourth level</a:t>
             </a:r>
           </a:p>
           <a:p>
             <a:pPr lvl="4"/>
             <a:r>
-              <a:rPr lang="en-US" smtClean="0"/>
+              <a:rPr lang="en-US"/>
               <a:t>Fifth level</a:t>
             </a:r>
-            <a:endParaRPr lang="en-US"/>
           </a:p>
         </p:txBody>
       </p:sp>
@@ -1764,7 +2310,7 @@
           <a:p>
             <a:fld id="{5BCAD085-E8A6-8845-BD4E-CB4CCA059FC4}" type="datetimeFigureOut">
               <a:rPr lang="en-US" smtClean="0"/>
-              <a:t>1/27/13</a:t>
+              <a:t>6/17/26</a:t>
             </a:fld>
             <a:endParaRPr lang="en-US"/>
           </a:p>
@@ -1858,10 +2404,9 @@
           <a:lstStyle/>
           <a:p>
             <a:r>
-              <a:rPr lang="en-US" smtClean="0"/>
+              <a:rPr lang="en-US"/>
               <a:t>Click to edit Master title style</a:t>
             </a:r>
-            <a:endParaRPr lang="en-US"/>
           </a:p>
         </p:txBody>
       </p:sp>
@@ -1882,7 +2427,7 @@
           <a:p>
             <a:fld id="{5BCAD085-E8A6-8845-BD4E-CB4CCA059FC4}" type="datetimeFigureOut">
               <a:rPr lang="en-US" smtClean="0"/>
-              <a:t>1/27/13</a:t>
+              <a:t>6/17/26</a:t>
             </a:fld>
             <a:endParaRPr lang="en-US"/>
           </a:p>
@@ -1977,7 +2522,7 @@
           <a:p>
             <a:fld id="{5BCAD085-E8A6-8845-BD4E-CB4CCA059FC4}" type="datetimeFigureOut">
               <a:rPr lang="en-US" smtClean="0"/>
-              <a:t>1/27/13</a:t>
+              <a:t>6/17/26</a:t>
             </a:fld>
             <a:endParaRPr lang="en-US"/>
           </a:p>
@@ -2080,10 +2625,9 @@
           </a:lstStyle>
           <a:p>
             <a:r>
-              <a:rPr lang="en-US" smtClean="0"/>
+              <a:rPr lang="en-US"/>
               <a:t>Click to edit Master title style</a:t>
             </a:r>
-            <a:endParaRPr lang="en-US"/>
           </a:p>
         </p:txBody>
       </p:sp>
@@ -2137,38 +2681,37 @@
           <a:p>
             <a:pPr lvl="0"/>
             <a:r>
-              <a:rPr lang="en-US" smtClean="0"/>
+              <a:rPr lang="en-US"/>
               <a:t>Click to edit Master text styles</a:t>
             </a:r>
           </a:p>
           <a:p>
             <a:pPr lvl="1"/>
             <a:r>
-              <a:rPr lang="en-US" smtClean="0"/>
+              <a:rPr lang="en-US"/>
               <a:t>Second level</a:t>
             </a:r>
           </a:p>
           <a:p>
             <a:pPr lvl="2"/>
             <a:r>
-              <a:rPr lang="en-US" smtClean="0"/>
+              <a:rPr lang="en-US"/>
               <a:t>Third level</a:t>
             </a:r>
           </a:p>
           <a:p>
             <a:pPr lvl="3"/>
             <a:r>
-              <a:rPr lang="en-US" smtClean="0"/>
+              <a:rPr lang="en-US"/>
               <a:t>Fourth level</a:t>
             </a:r>
           </a:p>
           <a:p>
             <a:pPr lvl="4"/>
             <a:r>
-              <a:rPr lang="en-US" smtClean="0"/>
+              <a:rPr lang="en-US"/>
               <a:t>Fifth level</a:t>
             </a:r>
-            <a:endParaRPr lang="en-US"/>
           </a:p>
         </p:txBody>
       </p:sp>
@@ -2231,7 +2774,7 @@
           <a:p>
             <a:pPr lvl="0"/>
             <a:r>
-              <a:rPr lang="en-US" smtClean="0"/>
+              <a:rPr lang="en-US"/>
               <a:t>Click to edit Master text styles</a:t>
             </a:r>
           </a:p>
@@ -2254,7 +2797,7 @@
           <a:p>
             <a:fld id="{5BCAD085-E8A6-8845-BD4E-CB4CCA059FC4}" type="datetimeFigureOut">
               <a:rPr lang="en-US" smtClean="0"/>
-              <a:t>1/27/13</a:t>
+              <a:t>6/17/26</a:t>
             </a:fld>
             <a:endParaRPr lang="en-US"/>
           </a:p>
@@ -2357,10 +2900,9 @@
           </a:lstStyle>
           <a:p>
             <a:r>
-              <a:rPr lang="en-US" smtClean="0"/>
+              <a:rPr lang="en-US"/>
               <a:t>Click to edit Master title style</a:t>
             </a:r>
-            <a:endParaRPr lang="en-US"/>
           </a:p>
         </p:txBody>
       </p:sp>
@@ -2484,7 +3026,7 @@
           <a:p>
             <a:pPr lvl="0"/>
             <a:r>
-              <a:rPr lang="en-US" smtClean="0"/>
+              <a:rPr lang="en-US"/>
               <a:t>Click to edit Master text styles</a:t>
             </a:r>
           </a:p>
@@ -2507,7 +3049,7 @@
           <a:p>
             <a:fld id="{5BCAD085-E8A6-8845-BD4E-CB4CCA059FC4}" type="datetimeFigureOut">
               <a:rPr lang="en-US" smtClean="0"/>
-              <a:t>1/27/13</a:t>
+              <a:t>6/17/26</a:t>
             </a:fld>
             <a:endParaRPr lang="en-US"/>
           </a:p>
@@ -2616,10 +3158,9 @@
           <a:lstStyle/>
           <a:p>
             <a:r>
-              <a:rPr lang="en-US" smtClean="0"/>
+              <a:rPr lang="en-US"/>
               <a:t>Click to edit Master title style</a:t>
             </a:r>
-            <a:endParaRPr lang="en-US"/>
           </a:p>
         </p:txBody>
       </p:sp>
@@ -2650,38 +3191,37 @@
           <a:p>
             <a:pPr lvl="0"/>
             <a:r>
-              <a:rPr lang="en-US" smtClean="0"/>
+              <a:rPr lang="en-US"/>
               <a:t>Click to edit Master text styles</a:t>
             </a:r>
           </a:p>
           <a:p>
             <a:pPr lvl="1"/>
             <a:r>
-              <a:rPr lang="en-US" smtClean="0"/>
+              <a:rPr lang="en-US"/>
               <a:t>Second level</a:t>
             </a:r>
           </a:p>
           <a:p>
             <a:pPr lvl="2"/>
             <a:r>
-              <a:rPr lang="en-US" smtClean="0"/>
+              <a:rPr lang="en-US"/>
               <a:t>Third level</a:t>
             </a:r>
           </a:p>
           <a:p>
             <a:pPr lvl="3"/>
             <a:r>
-              <a:rPr lang="en-US" smtClean="0"/>
+              <a:rPr lang="en-US"/>
               <a:t>Fourth level</a:t>
             </a:r>
           </a:p>
           <a:p>
             <a:pPr lvl="4"/>
             <a:r>
-              <a:rPr lang="en-US" smtClean="0"/>
+              <a:rPr lang="en-US"/>
               <a:t>Fifth level</a:t>
             </a:r>
-            <a:endParaRPr lang="en-US"/>
           </a:p>
         </p:txBody>
       </p:sp>
@@ -2720,7 +3260,7 @@
           <a:p>
             <a:fld id="{5BCAD085-E8A6-8845-BD4E-CB4CCA059FC4}" type="datetimeFigureOut">
               <a:rPr lang="en-US" smtClean="0"/>
-              <a:t>1/27/13</a:t>
+              <a:t>6/17/26</a:t>
             </a:fld>
             <a:endParaRPr lang="en-US"/>
           </a:p>
@@ -3079,7 +3619,7 @@
 </file>
 
 <file path=ppt/slides/slide1.xml><?xml version="1.0" encoding="utf-8"?>
-<p:sld xmlns:a="http://schemas.openxmlformats.org/drawingml/2006/main" xmlns:p="http://schemas.openxmlformats.org/presentationml/2006/main" xmlns:r="http://schemas.openxmlformats.org/officeDocument/2006/relationships">
+<p:sld xmlns:a="http://schemas.openxmlformats.org/drawingml/2006/main" xmlns:r="http://schemas.openxmlformats.org/officeDocument/2006/relationships" xmlns:p="http://schemas.openxmlformats.org/presentationml/2006/main">
   <p:cSld>
     <p:bg>
       <p:bgPr>
@@ -3095,7 +3635,14 @@
         <p:cNvGrpSpPr/>
         <p:nvPr/>
       </p:nvGrpSpPr>
-      <p:grpSpPr/>
+      <p:grpSpPr>
+        <a:xfrm>
+          <a:off x="0" y="0"/>
+          <a:ext cx="0" cy="0"/>
+          <a:chOff x="0" y="0"/>
+          <a:chExt cx="0" cy="0"/>
+        </a:xfrm>
+      </p:grpSpPr>
       <p:sp>
         <p:nvSpPr>
           <p:cNvPr id="2" name="Rectangle 1"/>
@@ -3104,8 +3651,8 @@
         </p:nvSpPr>
         <p:spPr>
           <a:xfrm>
-            <a:off x="0" y="0"/>
-            <a:ext cx="7562088" cy="2423160"/>
+            <a:off x="21020" y="-15923"/>
+            <a:ext cx="7562088" cy="1813935"/>
           </a:xfrm>
           <a:prstGeom prst="rect">
             <a:avLst/>
@@ -3136,6 +3683,7 @@
           <a:lstStyle/>
           <a:p>
             <a:pPr algn="ctr"/>
+            <a:endParaRPr dirty="0"/>
           </a:p>
         </p:txBody>
       </p:sp>
@@ -3147,8 +3695,8 @@
         </p:nvSpPr>
         <p:spPr>
           <a:xfrm>
-            <a:off x="0" y="0"/>
-            <a:ext cx="256032" cy="2423160"/>
+            <a:off x="-10510" y="-21020"/>
+            <a:ext cx="256032" cy="1813935"/>
           </a:xfrm>
           <a:prstGeom prst="rect">
             <a:avLst/>
@@ -3179,6 +3727,7 @@
           <a:lstStyle/>
           <a:p>
             <a:pPr algn="ctr"/>
+            <a:endParaRPr/>
           </a:p>
         </p:txBody>
       </p:sp>
@@ -3206,7 +3755,7 @@
           <a:p>
             <a:pPr algn="l"/>
             <a:r>
-              <a:rPr sz="2400" b="1" i="0">
+              <a:rPr sz="2400" b="1" i="0" dirty="0">
                 <a:solidFill>
                   <a:srgbClr val="FFFFFF"/>
                 </a:solidFill>
@@ -3226,8 +3775,8 @@
         </p:nvSpPr>
         <p:spPr>
           <a:xfrm>
-            <a:off x="411480" y="932688"/>
-            <a:ext cx="5303520" cy="365760"/>
+            <a:off x="411479" y="978988"/>
+            <a:ext cx="5401035" cy="415498"/>
           </a:xfrm>
           <a:prstGeom prst="rect">
             <a:avLst/>
@@ -3242,265 +3791,49 @@
           <a:p>
             <a:pPr algn="l"/>
             <a:r>
-              <a:rPr sz="1050" b="0" i="1">
+              <a:rPr sz="1050" b="0" i="1" dirty="0">
                 <a:solidFill>
                   <a:srgbClr val="C9A84C"/>
                 </a:solidFill>
                 <a:latin typeface="Calibri"/>
               </a:rPr>
-              <a:t>Thomson Garden Estate has seen 21 transactions in the last 12 months — and serious buyers are actively looking here.</a:t>
-            </a:r>
-          </a:p>
-        </p:txBody>
-      </p:sp>
-      <p:sp>
-        <p:nvSpPr>
-          <p:cNvPr id="6" name="Rectangle 5"/>
-          <p:cNvSpPr/>
-          <p:nvPr/>
-        </p:nvSpPr>
-        <p:spPr>
-          <a:xfrm>
-            <a:off x="5806440" y="182880"/>
-            <a:ext cx="1572768" cy="2194560"/>
-          </a:xfrm>
-          <a:prstGeom prst="rect">
-            <a:avLst/>
-          </a:prstGeom>
-          <a:solidFill>
-            <a:srgbClr val="162338"/>
-          </a:solidFill>
-          <a:ln w="9525">
-            <a:solidFill>
-              <a:srgbClr val="2E4166"/>
-            </a:solidFill>
-          </a:ln>
-        </p:spPr>
-        <p:style>
-          <a:lnRef idx="1">
-            <a:schemeClr val="accent1"/>
-          </a:lnRef>
-          <a:fillRef idx="3">
-            <a:schemeClr val="accent1"/>
-          </a:fillRef>
-          <a:effectRef idx="2">
-            <a:schemeClr val="accent1"/>
-          </a:effectRef>
-          <a:fontRef idx="minor">
-            <a:schemeClr val="lt1"/>
-          </a:fontRef>
-        </p:style>
-        <p:txBody>
-          <a:bodyPr rtlCol="0" anchor="ctr"/>
-          <a:lstStyle/>
-          <a:p>
-            <a:pPr algn="ctr"/>
-          </a:p>
-        </p:txBody>
-      </p:sp>
-      <p:sp>
-        <p:nvSpPr>
-          <p:cNvPr id="7" name="TextBox 6"/>
-          <p:cNvSpPr txBox="1"/>
-          <p:nvPr/>
-        </p:nvSpPr>
-        <p:spPr>
-          <a:xfrm>
-            <a:off x="5852159" y="237744"/>
-            <a:ext cx="1481328" cy="182880"/>
-          </a:xfrm>
-          <a:prstGeom prst="rect">
-            <a:avLst/>
-          </a:prstGeom>
-          <a:noFill/>
-        </p:spPr>
-        <p:txBody>
-          <a:bodyPr wrap="square">
-            <a:spAutoFit/>
-          </a:bodyPr>
-          <a:lstStyle/>
-          <a:p>
-            <a:pPr algn="ctr"/>
-            <a:r>
-              <a:rPr sz="850" b="1" i="0">
+              <a:t>Thomson Garden Estate has seen 21 transactions in the last 12 </a:t>
+            </a:r>
+            <a:r>
+              <a:rPr lang="en-US" sz="1050" b="0" i="1" dirty="0">
                 <a:solidFill>
                   <a:srgbClr val="C9A84C"/>
                 </a:solidFill>
                 <a:latin typeface="Calibri"/>
               </a:rPr>
-              <a:t>ERA SINGAPORE</a:t>
-            </a:r>
-          </a:p>
-        </p:txBody>
-      </p:sp>
-      <p:sp>
-        <p:nvSpPr>
-          <p:cNvPr id="8" name="Rectangle 7"/>
-          <p:cNvSpPr/>
-          <p:nvPr/>
-        </p:nvSpPr>
-        <p:spPr>
-          <a:xfrm>
-            <a:off x="5943600" y="438912"/>
-            <a:ext cx="1298448" cy="27432"/>
-          </a:xfrm>
-          <a:prstGeom prst="rect">
-            <a:avLst/>
-          </a:prstGeom>
-          <a:solidFill>
-            <a:srgbClr val="C9A84C"/>
-          </a:solidFill>
-          <a:ln>
-            <a:noFill/>
-          </a:ln>
-        </p:spPr>
-        <p:style>
-          <a:lnRef idx="1">
-            <a:schemeClr val="accent1"/>
-          </a:lnRef>
-          <a:fillRef idx="3">
-            <a:schemeClr val="accent1"/>
-          </a:fillRef>
-          <a:effectRef idx="2">
-            <a:schemeClr val="accent1"/>
-          </a:effectRef>
-          <a:fontRef idx="minor">
-            <a:schemeClr val="lt1"/>
-          </a:fontRef>
-        </p:style>
-        <p:txBody>
-          <a:bodyPr rtlCol="0" anchor="ctr"/>
-          <a:lstStyle/>
-          <a:p>
-            <a:pPr algn="ctr"/>
-          </a:p>
-        </p:txBody>
-      </p:sp>
-      <p:pic>
-        <p:nvPicPr>
-          <p:cNvPr id="9" name="Picture 8" descr="rio_face_square.png"/>
-          <p:cNvPicPr>
-            <a:picLocks noChangeAspect="1"/>
-          </p:cNvPicPr>
-          <p:nvPr/>
-        </p:nvPicPr>
-        <p:blipFill>
-          <a:blip r:embed="rId2"/>
-          <a:stretch>
-            <a:fillRect/>
-          </a:stretch>
-        </p:blipFill>
-        <p:spPr>
-          <a:xfrm>
-            <a:off x="5961888" y="484632"/>
-            <a:ext cx="1261872" cy="1261872"/>
-          </a:xfrm>
-          <a:prstGeom prst="rect">
-            <a:avLst/>
-          </a:prstGeom>
-        </p:spPr>
-      </p:pic>
-      <p:sp>
-        <p:nvSpPr>
-          <p:cNvPr id="10" name="TextBox 9"/>
-          <p:cNvSpPr txBox="1"/>
-          <p:nvPr/>
-        </p:nvSpPr>
-        <p:spPr>
-          <a:xfrm>
-            <a:off x="5852159" y="1801368"/>
-            <a:ext cx="1481328" cy="201168"/>
-          </a:xfrm>
-          <a:prstGeom prst="rect">
-            <a:avLst/>
-          </a:prstGeom>
-          <a:noFill/>
-        </p:spPr>
-        <p:txBody>
-          <a:bodyPr wrap="square">
-            <a:spAutoFit/>
-          </a:bodyPr>
-          <a:lstStyle/>
-          <a:p>
-            <a:pPr algn="ctr"/>
-            <a:r>
-              <a:rPr sz="1100" b="1" i="0">
-                <a:solidFill>
-                  <a:srgbClr val="FFFFFF"/>
-                </a:solidFill>
-                <a:latin typeface="Calibri"/>
-              </a:rPr>
-              <a:t>Rio Pang</a:t>
-            </a:r>
-          </a:p>
-        </p:txBody>
-      </p:sp>
-      <p:sp>
-        <p:nvSpPr>
-          <p:cNvPr id="11" name="TextBox 10"/>
-          <p:cNvSpPr txBox="1"/>
-          <p:nvPr/>
-        </p:nvSpPr>
-        <p:spPr>
-          <a:xfrm>
-            <a:off x="5852159" y="2002536"/>
-            <a:ext cx="1481328" cy="164592"/>
-          </a:xfrm>
-          <a:prstGeom prst="rect">
-            <a:avLst/>
-          </a:prstGeom>
-          <a:noFill/>
-        </p:spPr>
-        <p:txBody>
-          <a:bodyPr wrap="square">
-            <a:spAutoFit/>
-          </a:bodyPr>
-          <a:lstStyle/>
-          <a:p>
-            <a:pPr algn="ctr"/>
-            <a:r>
-              <a:rPr sz="800" b="0" i="0">
-                <a:solidFill>
-                  <a:srgbClr val="B0BED4"/>
-                </a:solidFill>
-                <a:latin typeface="Calibri"/>
-              </a:rPr>
-              <a:t>CEA No. R0702148</a:t>
-            </a:r>
-          </a:p>
-        </p:txBody>
-      </p:sp>
-      <p:sp>
-        <p:nvSpPr>
-          <p:cNvPr id="12" name="TextBox 11"/>
-          <p:cNvSpPr txBox="1"/>
-          <p:nvPr/>
-        </p:nvSpPr>
-        <p:spPr>
-          <a:xfrm>
-            <a:off x="5852159" y="2167128"/>
-            <a:ext cx="1481328" cy="201168"/>
-          </a:xfrm>
-          <a:prstGeom prst="rect">
-            <a:avLst/>
-          </a:prstGeom>
-          <a:noFill/>
-        </p:spPr>
-        <p:txBody>
-          <a:bodyPr wrap="square">
-            <a:spAutoFit/>
-          </a:bodyPr>
-          <a:lstStyle/>
-          <a:p>
-            <a:pPr algn="ctr"/>
-            <a:r>
-              <a:rPr sz="1000" b="1" i="0">
+              <a:t>months,</a:t>
+            </a:r>
+            <a:r>
+              <a:rPr sz="1050" b="0" i="1" dirty="0">
                 <a:solidFill>
                   <a:srgbClr val="C9A84C"/>
                 </a:solidFill>
                 <a:latin typeface="Calibri"/>
               </a:rPr>
-              <a:t>9183 1316</a:t>
+              <a:t>  and </a:t>
+            </a:r>
+            <a:r>
+              <a:rPr lang="en-US" sz="1050" b="0" i="1" dirty="0">
+                <a:solidFill>
+                  <a:srgbClr val="C9A84C"/>
+                </a:solidFill>
+                <a:latin typeface="Calibri"/>
+              </a:rPr>
+              <a:t>we have </a:t>
+            </a:r>
+            <a:r>
+              <a:rPr sz="1050" b="0" i="1" dirty="0">
+                <a:solidFill>
+                  <a:srgbClr val="C9A84C"/>
+                </a:solidFill>
+                <a:latin typeface="Calibri"/>
+              </a:rPr>
+              <a:t>serious buyers are actively looking here.</a:t>
             </a:r>
           </a:p>
         </p:txBody>
@@ -3513,7 +3846,7 @@
         </p:nvSpPr>
         <p:spPr>
           <a:xfrm>
-            <a:off x="457200" y="2532888"/>
+            <a:off x="518985" y="2067494"/>
             <a:ext cx="1552193" cy="1024128"/>
           </a:xfrm>
           <a:prstGeom prst="rect">
@@ -3547,6 +3880,7 @@
           <a:lstStyle/>
           <a:p>
             <a:pPr algn="ctr"/>
+            <a:endParaRPr/>
           </a:p>
         </p:txBody>
       </p:sp>
@@ -3558,7 +3892,7 @@
         </p:nvSpPr>
         <p:spPr>
           <a:xfrm>
-            <a:off x="512064" y="2596896"/>
+            <a:off x="573849" y="2143776"/>
             <a:ext cx="1442466" cy="438912"/>
           </a:xfrm>
           <a:prstGeom prst="rect">
@@ -3574,7 +3908,7 @@
           <a:p>
             <a:pPr algn="ctr"/>
             <a:r>
-              <a:rPr sz="2000" b="1" i="0">
+              <a:rPr sz="2000" b="1" i="0" dirty="0">
                 <a:solidFill>
                   <a:srgbClr val="1B2A4A"/>
                 </a:solidFill>
@@ -3593,7 +3927,7 @@
         </p:nvSpPr>
         <p:spPr>
           <a:xfrm>
-            <a:off x="512064" y="3026664"/>
+            <a:off x="573849" y="2598092"/>
             <a:ext cx="1442466" cy="457200"/>
           </a:xfrm>
           <a:prstGeom prst="rect">
@@ -3629,7 +3963,7 @@
         </p:nvSpPr>
         <p:spPr>
           <a:xfrm>
-            <a:off x="2119122" y="2532888"/>
+            <a:off x="2180907" y="2067494"/>
             <a:ext cx="1552193" cy="1024128"/>
           </a:xfrm>
           <a:prstGeom prst="rect">
@@ -3663,6 +3997,7 @@
           <a:lstStyle/>
           <a:p>
             <a:pPr algn="ctr"/>
+            <a:endParaRPr/>
           </a:p>
         </p:txBody>
       </p:sp>
@@ -3674,7 +4009,7 @@
         </p:nvSpPr>
         <p:spPr>
           <a:xfrm>
-            <a:off x="2173986" y="2596896"/>
+            <a:off x="2235771" y="2149913"/>
             <a:ext cx="1442466" cy="438912"/>
           </a:xfrm>
           <a:prstGeom prst="rect">
@@ -3709,7 +4044,7 @@
         </p:nvSpPr>
         <p:spPr>
           <a:xfrm>
-            <a:off x="2173986" y="3026664"/>
+            <a:off x="2235771" y="2598092"/>
             <a:ext cx="1442466" cy="457200"/>
           </a:xfrm>
           <a:prstGeom prst="rect">
@@ -3745,7 +4080,7 @@
         </p:nvSpPr>
         <p:spPr>
           <a:xfrm>
-            <a:off x="3781044" y="2532888"/>
+            <a:off x="3842829" y="2067494"/>
             <a:ext cx="1552193" cy="1024128"/>
           </a:xfrm>
           <a:prstGeom prst="rect">
@@ -3779,6 +4114,7 @@
           <a:lstStyle/>
           <a:p>
             <a:pPr algn="ctr"/>
+            <a:endParaRPr/>
           </a:p>
         </p:txBody>
       </p:sp>
@@ -3790,8 +4126,8 @@
         </p:nvSpPr>
         <p:spPr>
           <a:xfrm>
-            <a:off x="3835907" y="2596896"/>
-            <a:ext cx="1442466" cy="438912"/>
+            <a:off x="3787963" y="2026039"/>
+            <a:ext cx="1604773" cy="400110"/>
           </a:xfrm>
           <a:prstGeom prst="rect">
             <a:avLst/>
@@ -3806,14 +4142,29 @@
           <a:p>
             <a:pPr algn="ctr"/>
             <a:r>
-              <a:rPr sz="2000" b="1" i="0">
+              <a:rPr sz="2000" b="1" i="0" dirty="0">
                 <a:solidFill>
                   <a:srgbClr val="1B2A4A"/>
                 </a:solidFill>
                 <a:latin typeface="Calibri"/>
               </a:rPr>
-              <a:t>21 deals</a:t>
-            </a:r>
+              <a:t>2</a:t>
+            </a:r>
+            <a:r>
+              <a:rPr lang="en-US" sz="2000" b="1" i="0" dirty="0">
+                <a:solidFill>
+                  <a:srgbClr val="1B2A4A"/>
+                </a:solidFill>
+                <a:latin typeface="Calibri"/>
+              </a:rPr>
+              <a:t>1</a:t>
+            </a:r>
+            <a:endParaRPr sz="2000" b="1" i="0" dirty="0">
+              <a:solidFill>
+                <a:srgbClr val="1B2A4A"/>
+              </a:solidFill>
+              <a:latin typeface="Calibri"/>
+            </a:endParaRPr>
           </a:p>
         </p:txBody>
       </p:sp>
@@ -3825,7 +4176,7 @@
         </p:nvSpPr>
         <p:spPr>
           <a:xfrm>
-            <a:off x="3835907" y="3026664"/>
+            <a:off x="3897692" y="2598092"/>
             <a:ext cx="1442466" cy="457200"/>
           </a:xfrm>
           <a:prstGeom prst="rect">
@@ -3861,7 +4212,7 @@
         </p:nvSpPr>
         <p:spPr>
           <a:xfrm>
-            <a:off x="5442966" y="2532888"/>
+            <a:off x="5504751" y="2067494"/>
             <a:ext cx="1552193" cy="1024128"/>
           </a:xfrm>
           <a:prstGeom prst="rect">
@@ -3895,6 +4246,7 @@
           <a:lstStyle/>
           <a:p>
             <a:pPr algn="ctr"/>
+            <a:endParaRPr/>
           </a:p>
         </p:txBody>
       </p:sp>
@@ -3906,7 +4258,7 @@
         </p:nvSpPr>
         <p:spPr>
           <a:xfrm>
-            <a:off x="5497829" y="2596896"/>
+            <a:off x="5559614" y="2149913"/>
             <a:ext cx="1442466" cy="438912"/>
           </a:xfrm>
           <a:prstGeom prst="rect">
@@ -3922,7 +4274,7 @@
           <a:p>
             <a:pPr algn="ctr"/>
             <a:r>
-              <a:rPr sz="2000" b="1" i="0">
+              <a:rPr sz="2000" b="1" i="0" dirty="0">
                 <a:solidFill>
                   <a:srgbClr val="1B2A4A"/>
                 </a:solidFill>
@@ -3941,7 +4293,7 @@
         </p:nvSpPr>
         <p:spPr>
           <a:xfrm>
-            <a:off x="5497829" y="3026664"/>
+            <a:off x="5559614" y="2598092"/>
             <a:ext cx="1442466" cy="457200"/>
           </a:xfrm>
           <a:prstGeom prst="rect">
@@ -3977,7 +4329,7 @@
         </p:nvSpPr>
         <p:spPr>
           <a:xfrm>
-            <a:off x="457200" y="3675887"/>
+            <a:off x="457200" y="3313205"/>
             <a:ext cx="4389120" cy="256032"/>
           </a:xfrm>
           <a:prstGeom prst="rect">
@@ -3993,7 +4345,7 @@
           <a:p>
             <a:pPr algn="l"/>
             <a:r>
-              <a:rPr sz="850" b="1" i="0">
+              <a:rPr sz="850" b="1" i="0" dirty="0">
                 <a:solidFill>
                   <a:srgbClr val="C9A84C"/>
                 </a:solidFill>
@@ -4012,7 +4364,7 @@
         </p:nvSpPr>
         <p:spPr>
           <a:xfrm>
-            <a:off x="457200" y="3950207"/>
+            <a:off x="457200" y="3602155"/>
             <a:ext cx="4389120" cy="2395728"/>
           </a:xfrm>
           <a:prstGeom prst="rect">
@@ -4046,6 +4398,7 @@
           <a:lstStyle/>
           <a:p>
             <a:pPr algn="ctr"/>
+            <a:endParaRPr/>
           </a:p>
         </p:txBody>
       </p:sp>
@@ -4057,7 +4410,7 @@
         </p:nvSpPr>
         <p:spPr>
           <a:xfrm>
-            <a:off x="566928" y="4096511"/>
+            <a:off x="566928" y="3772134"/>
             <a:ext cx="237744" cy="237744"/>
           </a:xfrm>
           <a:prstGeom prst="ellipse">
@@ -4089,6 +4442,7 @@
           <a:lstStyle/>
           <a:p>
             <a:pPr algn="ctr"/>
+            <a:endParaRPr/>
           </a:p>
         </p:txBody>
       </p:sp>
@@ -4100,7 +4454,7 @@
         </p:nvSpPr>
         <p:spPr>
           <a:xfrm>
-            <a:off x="566928" y="4096511"/>
+            <a:off x="566928" y="3772134"/>
             <a:ext cx="237744" cy="237744"/>
           </a:xfrm>
           <a:prstGeom prst="rect">
@@ -4135,7 +4489,7 @@
         </p:nvSpPr>
         <p:spPr>
           <a:xfrm>
-            <a:off x="896112" y="4078224"/>
+            <a:off x="896112" y="3715291"/>
             <a:ext cx="1280160" cy="201168"/>
           </a:xfrm>
           <a:prstGeom prst="rect">
@@ -4151,7 +4505,7 @@
           <a:p>
             <a:pPr algn="l"/>
             <a:r>
-              <a:rPr sz="950" b="1" i="0">
+              <a:rPr sz="950" b="1" i="0" dirty="0">
                 <a:solidFill>
                   <a:srgbClr val="1B2A4A"/>
                 </a:solidFill>
@@ -4170,7 +4524,7 @@
         </p:nvSpPr>
         <p:spPr>
           <a:xfrm>
-            <a:off x="896112" y="4270248"/>
+            <a:off x="896112" y="3841214"/>
             <a:ext cx="2926080" cy="182880"/>
           </a:xfrm>
           <a:prstGeom prst="rect">
@@ -4186,7 +4540,7 @@
           <a:p>
             <a:pPr algn="l"/>
             <a:r>
-              <a:rPr sz="850" b="0" i="0">
+              <a:rPr sz="850" b="0" i="0" dirty="0">
                 <a:solidFill>
                   <a:srgbClr val="64748B"/>
                 </a:solidFill>
@@ -4205,7 +4559,7 @@
         </p:nvSpPr>
         <p:spPr>
           <a:xfrm>
-            <a:off x="566928" y="4535424"/>
+            <a:off x="566928" y="4275845"/>
             <a:ext cx="237744" cy="237744"/>
           </a:xfrm>
           <a:prstGeom prst="ellipse">
@@ -4237,6 +4591,7 @@
           <a:lstStyle/>
           <a:p>
             <a:pPr algn="ctr"/>
+            <a:endParaRPr/>
           </a:p>
         </p:txBody>
       </p:sp>
@@ -4248,7 +4603,7 @@
         </p:nvSpPr>
         <p:spPr>
           <a:xfrm>
-            <a:off x="566928" y="4535424"/>
+            <a:off x="566928" y="4275845"/>
             <a:ext cx="237744" cy="237744"/>
           </a:xfrm>
           <a:prstGeom prst="rect">
@@ -4283,8 +4638,8 @@
         </p:nvSpPr>
         <p:spPr>
           <a:xfrm>
-            <a:off x="896112" y="4517136"/>
-            <a:ext cx="1280160" cy="201168"/>
+            <a:off x="896112" y="4215188"/>
+            <a:ext cx="1868424" cy="238527"/>
           </a:xfrm>
           <a:prstGeom prst="rect">
             <a:avLst/>
@@ -4299,7 +4654,7 @@
           <a:p>
             <a:pPr algn="l"/>
             <a:r>
-              <a:rPr sz="950" b="1" i="0">
+              <a:rPr sz="950" b="1" i="0" dirty="0">
                 <a:solidFill>
                   <a:srgbClr val="1B2A4A"/>
                 </a:solidFill>
@@ -4318,7 +4673,7 @@
         </p:nvSpPr>
         <p:spPr>
           <a:xfrm>
-            <a:off x="896112" y="4709160"/>
+            <a:off x="896112" y="4341116"/>
             <a:ext cx="2926080" cy="182880"/>
           </a:xfrm>
           <a:prstGeom prst="rect">
@@ -4334,7 +4689,7 @@
           <a:p>
             <a:pPr algn="l"/>
             <a:r>
-              <a:rPr sz="850" b="0" i="0">
+              <a:rPr sz="850" b="0" i="0" dirty="0">
                 <a:solidFill>
                   <a:srgbClr val="64748B"/>
                 </a:solidFill>
@@ -4353,7 +4708,7 @@
         </p:nvSpPr>
         <p:spPr>
           <a:xfrm>
-            <a:off x="566928" y="4974336"/>
+            <a:off x="566928" y="4838474"/>
             <a:ext cx="237744" cy="237744"/>
           </a:xfrm>
           <a:prstGeom prst="ellipse">
@@ -4385,6 +4740,7 @@
           <a:lstStyle/>
           <a:p>
             <a:pPr algn="ctr"/>
+            <a:endParaRPr/>
           </a:p>
         </p:txBody>
       </p:sp>
@@ -4396,7 +4752,7 @@
         </p:nvSpPr>
         <p:spPr>
           <a:xfrm>
-            <a:off x="566928" y="4974336"/>
+            <a:off x="566928" y="4838474"/>
             <a:ext cx="237744" cy="237744"/>
           </a:xfrm>
           <a:prstGeom prst="rect">
@@ -4431,8 +4787,8 @@
         </p:nvSpPr>
         <p:spPr>
           <a:xfrm>
-            <a:off x="896112" y="4956048"/>
-            <a:ext cx="1280160" cy="201168"/>
+            <a:off x="896112" y="4788629"/>
+            <a:ext cx="2155560" cy="238527"/>
           </a:xfrm>
           <a:prstGeom prst="rect">
             <a:avLst/>
@@ -4447,7 +4803,7 @@
           <a:p>
             <a:pPr algn="l"/>
             <a:r>
-              <a:rPr sz="950" b="1" i="0">
+              <a:rPr sz="950" b="1" i="0" dirty="0">
                 <a:solidFill>
                   <a:srgbClr val="1B2A4A"/>
                 </a:solidFill>
@@ -4466,7 +4822,7 @@
         </p:nvSpPr>
         <p:spPr>
           <a:xfrm>
-            <a:off x="896112" y="5148072"/>
+            <a:off x="896112" y="4919496"/>
             <a:ext cx="2926080" cy="182880"/>
           </a:xfrm>
           <a:prstGeom prst="rect">
@@ -4482,7 +4838,7 @@
           <a:p>
             <a:pPr algn="l"/>
             <a:r>
-              <a:rPr sz="850" b="0" i="0">
+              <a:rPr sz="850" b="0" i="0" dirty="0">
                 <a:solidFill>
                   <a:srgbClr val="64748B"/>
                 </a:solidFill>
@@ -4501,7 +4857,7 @@
         </p:nvSpPr>
         <p:spPr>
           <a:xfrm>
-            <a:off x="566928" y="5413247"/>
+            <a:off x="566928" y="5406793"/>
             <a:ext cx="237744" cy="237744"/>
           </a:xfrm>
           <a:prstGeom prst="ellipse">
@@ -4533,6 +4889,7 @@
           <a:lstStyle/>
           <a:p>
             <a:pPr algn="ctr"/>
+            <a:endParaRPr/>
           </a:p>
         </p:txBody>
       </p:sp>
@@ -4544,7 +4901,7 @@
         </p:nvSpPr>
         <p:spPr>
           <a:xfrm>
-            <a:off x="566928" y="5413247"/>
+            <a:off x="566928" y="5406793"/>
             <a:ext cx="237744" cy="237744"/>
           </a:xfrm>
           <a:prstGeom prst="rect">
@@ -4579,7 +4936,7 @@
         </p:nvSpPr>
         <p:spPr>
           <a:xfrm>
-            <a:off x="896112" y="5394959"/>
+            <a:off x="896112" y="5353904"/>
             <a:ext cx="1280160" cy="201168"/>
           </a:xfrm>
           <a:prstGeom prst="rect">
@@ -4595,7 +4952,7 @@
           <a:p>
             <a:pPr algn="l"/>
             <a:r>
-              <a:rPr sz="950" b="1" i="0">
+              <a:rPr sz="950" b="1" i="0" dirty="0">
                 <a:solidFill>
                   <a:srgbClr val="1B2A4A"/>
                 </a:solidFill>
@@ -4614,7 +4971,7 @@
         </p:nvSpPr>
         <p:spPr>
           <a:xfrm>
-            <a:off x="896112" y="5586983"/>
+            <a:off x="896112" y="5486467"/>
             <a:ext cx="2926080" cy="182880"/>
           </a:xfrm>
           <a:prstGeom prst="rect">
@@ -4630,7 +4987,7 @@
           <a:p>
             <a:pPr algn="l"/>
             <a:r>
-              <a:rPr sz="850" b="0" i="0">
+              <a:rPr sz="850" b="0" i="0" dirty="0">
                 <a:solidFill>
                   <a:srgbClr val="64748B"/>
                 </a:solidFill>
@@ -4643,57 +5000,14 @@
       </p:sp>
       <p:sp>
         <p:nvSpPr>
-          <p:cNvPr id="43" name="Oval 42"/>
-          <p:cNvSpPr/>
-          <p:nvPr/>
-        </p:nvSpPr>
-        <p:spPr>
-          <a:xfrm>
-            <a:off x="566928" y="5852159"/>
-            <a:ext cx="237744" cy="237744"/>
-          </a:xfrm>
-          <a:prstGeom prst="ellipse">
-            <a:avLst/>
-          </a:prstGeom>
-          <a:solidFill>
-            <a:srgbClr val="1B2A4A"/>
-          </a:solidFill>
-          <a:ln>
-            <a:noFill/>
-          </a:ln>
-        </p:spPr>
-        <p:style>
-          <a:lnRef idx="1">
-            <a:schemeClr val="accent1"/>
-          </a:lnRef>
-          <a:fillRef idx="3">
-            <a:schemeClr val="accent1"/>
-          </a:fillRef>
-          <a:effectRef idx="2">
-            <a:schemeClr val="accent1"/>
-          </a:effectRef>
-          <a:fontRef idx="minor">
-            <a:schemeClr val="lt1"/>
-          </a:fontRef>
-        </p:style>
-        <p:txBody>
-          <a:bodyPr rtlCol="0" anchor="ctr"/>
-          <a:lstStyle/>
-          <a:p>
-            <a:pPr algn="ctr"/>
-          </a:p>
-        </p:txBody>
-      </p:sp>
-      <p:sp>
-        <p:nvSpPr>
-          <p:cNvPr id="44" name="TextBox 43"/>
+          <p:cNvPr id="47" name="TextBox 46"/>
           <p:cNvSpPr txBox="1"/>
           <p:nvPr/>
         </p:nvSpPr>
         <p:spPr>
           <a:xfrm>
-            <a:off x="566928" y="5852159"/>
-            <a:ext cx="237744" cy="237744"/>
+            <a:off x="5029200" y="3327835"/>
+            <a:ext cx="2359152" cy="256032"/>
           </a:xfrm>
           <a:prstGeom prst="rect">
             <a:avLst/>
@@ -4706,7 +5020,7 @@
           </a:bodyPr>
           <a:lstStyle/>
           <a:p>
-            <a:pPr algn="ctr"/>
+            <a:pPr algn="l"/>
             <a:r>
               <a:rPr sz="800" b="1" i="0">
                 <a:solidFill>
@@ -4714,21 +5028,21 @@
                 </a:solidFill>
                 <a:latin typeface="Calibri"/>
               </a:rPr>
-              <a:t>5</a:t>
-            </a:r>
-          </a:p>
-        </p:txBody>
-      </p:sp>
-      <p:sp>
-        <p:nvSpPr>
-          <p:cNvPr id="45" name="TextBox 44"/>
+              <a:t>THOMSON GARDEN ESTATE</a:t>
+            </a:r>
+          </a:p>
+        </p:txBody>
+      </p:sp>
+      <p:sp>
+        <p:nvSpPr>
+          <p:cNvPr id="48" name="TextBox 47"/>
           <p:cNvSpPr txBox="1"/>
           <p:nvPr/>
         </p:nvSpPr>
         <p:spPr>
           <a:xfrm>
-            <a:off x="896112" y="5833872"/>
-            <a:ext cx="1280160" cy="201168"/>
+            <a:off x="5029200" y="3442135"/>
+            <a:ext cx="2359152" cy="307777"/>
           </a:xfrm>
           <a:prstGeom prst="rect">
             <a:avLst/>
@@ -4743,119 +5057,29 @@
           <a:p>
             <a:pPr algn="l"/>
             <a:r>
-              <a:rPr sz="950" b="1" i="0">
-                <a:solidFill>
-                  <a:srgbClr val="1B2A4A"/>
-                </a:solidFill>
-                <a:latin typeface="Calibri"/>
-              </a:rPr>
-              <a:t>60% ABSD for foreigners</a:t>
-            </a:r>
-          </a:p>
-        </p:txBody>
-      </p:sp>
-      <p:sp>
-        <p:nvSpPr>
-          <p:cNvPr id="46" name="TextBox 45"/>
-          <p:cNvSpPr txBox="1"/>
-          <p:nvPr/>
-        </p:nvSpPr>
-        <p:spPr>
-          <a:xfrm>
-            <a:off x="896112" y="6025896"/>
-            <a:ext cx="2926080" cy="182880"/>
-          </a:xfrm>
-          <a:prstGeom prst="rect">
-            <a:avLst/>
-          </a:prstGeom>
-          <a:noFill/>
-        </p:spPr>
-        <p:txBody>
-          <a:bodyPr wrap="square">
-            <a:spAutoFit/>
-          </a:bodyPr>
-          <a:lstStyle/>
+              <a:rPr sz="700" b="0" i="1" dirty="0">
+                <a:solidFill>
+                  <a:srgbClr val="64748B"/>
+                </a:solidFill>
+                <a:latin typeface="Calibri"/>
+              </a:rPr>
+              <a:t>Jun 2025 – Jun 2026 · Freehold D20</a:t>
+            </a:r>
+            <a:endParaRPr lang="en-US" sz="700" b="0" i="1" dirty="0">
+              <a:solidFill>
+                <a:srgbClr val="64748B"/>
+              </a:solidFill>
+              <a:latin typeface="Calibri"/>
+            </a:endParaRPr>
+          </a:p>
           <a:p>
             <a:pPr algn="l"/>
-            <a:r>
-              <a:rPr sz="850" b="0" i="0">
-                <a:solidFill>
-                  <a:srgbClr val="64748B"/>
-                </a:solidFill>
-                <a:latin typeface="Calibri"/>
-              </a:rPr>
-              <a:t>Landed stays exclusive to locals/PRs — buyers compete in a motivated pool.</a:t>
-            </a:r>
-          </a:p>
-        </p:txBody>
-      </p:sp>
-      <p:sp>
-        <p:nvSpPr>
-          <p:cNvPr id="47" name="TextBox 46"/>
-          <p:cNvSpPr txBox="1"/>
-          <p:nvPr/>
-        </p:nvSpPr>
-        <p:spPr>
-          <a:xfrm>
-            <a:off x="5029200" y="3675887"/>
-            <a:ext cx="2359152" cy="256032"/>
-          </a:xfrm>
-          <a:prstGeom prst="rect">
-            <a:avLst/>
-          </a:prstGeom>
-          <a:noFill/>
-        </p:spPr>
-        <p:txBody>
-          <a:bodyPr wrap="square">
-            <a:spAutoFit/>
-          </a:bodyPr>
-          <a:lstStyle/>
-          <a:p>
-            <a:pPr algn="l"/>
-            <a:r>
-              <a:rPr sz="800" b="1" i="0">
-                <a:solidFill>
-                  <a:srgbClr val="C9A84C"/>
-                </a:solidFill>
-                <a:latin typeface="Calibri"/>
-              </a:rPr>
-              <a:t>THOMSON GARDEN ESTATE</a:t>
-            </a:r>
-          </a:p>
-        </p:txBody>
-      </p:sp>
-      <p:sp>
-        <p:nvSpPr>
-          <p:cNvPr id="48" name="TextBox 47"/>
-          <p:cNvSpPr txBox="1"/>
-          <p:nvPr/>
-        </p:nvSpPr>
-        <p:spPr>
-          <a:xfrm>
-            <a:off x="5029200" y="3840479"/>
-            <a:ext cx="2359152" cy="128016"/>
-          </a:xfrm>
-          <a:prstGeom prst="rect">
-            <a:avLst/>
-          </a:prstGeom>
-          <a:noFill/>
-        </p:spPr>
-        <p:txBody>
-          <a:bodyPr wrap="square">
-            <a:spAutoFit/>
-          </a:bodyPr>
-          <a:lstStyle/>
-          <a:p>
-            <a:pPr algn="l"/>
-            <a:r>
-              <a:rPr sz="700" b="0" i="1">
-                <a:solidFill>
-                  <a:srgbClr val="64748B"/>
-                </a:solidFill>
-                <a:latin typeface="Calibri"/>
-              </a:rPr>
-              <a:t>Jun 2025 – Jun 2026 · Freehold D20</a:t>
-            </a:r>
+            <a:endParaRPr sz="700" b="0" i="1" dirty="0">
+              <a:solidFill>
+                <a:srgbClr val="64748B"/>
+              </a:solidFill>
+              <a:latin typeface="Calibri"/>
+            </a:endParaRPr>
           </a:p>
         </p:txBody>
       </p:sp>
@@ -4867,7 +5091,7 @@
         </p:nvSpPr>
         <p:spPr>
           <a:xfrm>
-            <a:off x="5029200" y="3950207"/>
+            <a:off x="5029200" y="3602155"/>
             <a:ext cx="2359152" cy="2395728"/>
           </a:xfrm>
           <a:prstGeom prst="rect">
@@ -4901,6 +5125,7 @@
           <a:lstStyle/>
           <a:p>
             <a:pPr algn="ctr"/>
+            <a:endParaRPr/>
           </a:p>
         </p:txBody>
       </p:sp>
@@ -4912,7 +5137,7 @@
         </p:nvSpPr>
         <p:spPr>
           <a:xfrm>
-            <a:off x="5120640" y="4041648"/>
+            <a:off x="5120640" y="3693596"/>
             <a:ext cx="2157984" cy="457200"/>
           </a:xfrm>
           <a:prstGeom prst="rect">
@@ -4946,6 +5171,7 @@
           <a:lstStyle/>
           <a:p>
             <a:pPr algn="ctr"/>
+            <a:endParaRPr/>
           </a:p>
         </p:txBody>
       </p:sp>
@@ -4957,8 +5183,8 @@
         </p:nvSpPr>
         <p:spPr>
           <a:xfrm>
-            <a:off x="5193792" y="4087368"/>
-            <a:ext cx="1097280" cy="219456"/>
+            <a:off x="5193791" y="3739316"/>
+            <a:ext cx="1746503" cy="230832"/>
           </a:xfrm>
           <a:prstGeom prst="rect">
             <a:avLst/>
@@ -4973,13 +5199,31 @@
           <a:p>
             <a:pPr algn="l"/>
             <a:r>
-              <a:rPr sz="900" b="0" i="0">
+              <a:rPr sz="900" b="0" i="0" dirty="0">
                 <a:solidFill>
                   <a:srgbClr val="1B2A4A"/>
                 </a:solidFill>
                 <a:latin typeface="Calibri"/>
               </a:rPr>
-              <a:t>Terrace (typical)</a:t>
+              <a:t>Terrace (</a:t>
+            </a:r>
+            <a:r>
+              <a:rPr lang="en-US" sz="900" b="0" i="0" dirty="0">
+                <a:solidFill>
+                  <a:srgbClr val="1B2A4A"/>
+                </a:solidFill>
+                <a:latin typeface="Calibri"/>
+              </a:rPr>
+              <a:t>small &amp; </a:t>
+            </a:r>
+            <a:r>
+              <a:rPr sz="900" b="0" i="0" dirty="0">
+                <a:solidFill>
+                  <a:srgbClr val="1B2A4A"/>
+                </a:solidFill>
+                <a:latin typeface="Calibri"/>
+              </a:rPr>
+              <a:t>typical)</a:t>
             </a:r>
           </a:p>
         </p:txBody>
@@ -4992,7 +5236,7 @@
         </p:nvSpPr>
         <p:spPr>
           <a:xfrm>
-            <a:off x="5193792" y="4288536"/>
+            <a:off x="5193792" y="3867598"/>
             <a:ext cx="1828800" cy="164592"/>
           </a:xfrm>
           <a:prstGeom prst="rect">
@@ -5008,7 +5252,7 @@
           <a:p>
             <a:pPr algn="l"/>
             <a:r>
-              <a:rPr sz="1200" b="1" i="0">
+              <a:rPr sz="1200" b="1" i="0" dirty="0">
                 <a:solidFill>
                   <a:srgbClr val="C9A84C"/>
                 </a:solidFill>
@@ -5027,7 +5271,7 @@
         </p:nvSpPr>
         <p:spPr>
           <a:xfrm>
-            <a:off x="5120640" y="4590288"/>
+            <a:off x="5120640" y="4242236"/>
             <a:ext cx="2157984" cy="457200"/>
           </a:xfrm>
           <a:prstGeom prst="rect">
@@ -5061,6 +5305,7 @@
           <a:lstStyle/>
           <a:p>
             <a:pPr algn="ctr"/>
+            <a:endParaRPr/>
           </a:p>
         </p:txBody>
       </p:sp>
@@ -5072,7 +5317,7 @@
         </p:nvSpPr>
         <p:spPr>
           <a:xfrm>
-            <a:off x="5193792" y="4636007"/>
+            <a:off x="5193792" y="4287955"/>
             <a:ext cx="1097280" cy="219456"/>
           </a:xfrm>
           <a:prstGeom prst="rect">
@@ -5107,7 +5352,7 @@
         </p:nvSpPr>
         <p:spPr>
           <a:xfrm>
-            <a:off x="5193792" y="4837175"/>
+            <a:off x="5193792" y="4416237"/>
             <a:ext cx="1828800" cy="164592"/>
           </a:xfrm>
           <a:prstGeom prst="rect">
@@ -5123,7 +5368,7 @@
           <a:p>
             <a:pPr algn="l"/>
             <a:r>
-              <a:rPr sz="1200" b="1" i="0">
+              <a:rPr sz="1200" b="1" i="0" dirty="0">
                 <a:solidFill>
                   <a:srgbClr val="C9A84C"/>
                 </a:solidFill>
@@ -5142,7 +5387,7 @@
         </p:nvSpPr>
         <p:spPr>
           <a:xfrm>
-            <a:off x="5120640" y="5138928"/>
+            <a:off x="5120640" y="4790876"/>
             <a:ext cx="2157984" cy="457200"/>
           </a:xfrm>
           <a:prstGeom prst="rect">
@@ -5176,6 +5421,7 @@
           <a:lstStyle/>
           <a:p>
             <a:pPr algn="ctr"/>
+            <a:endParaRPr/>
           </a:p>
         </p:txBody>
       </p:sp>
@@ -5187,7 +5433,7 @@
         </p:nvSpPr>
         <p:spPr>
           <a:xfrm>
-            <a:off x="5193792" y="5184648"/>
+            <a:off x="5193792" y="4836596"/>
             <a:ext cx="1097280" cy="219456"/>
           </a:xfrm>
           <a:prstGeom prst="rect">
@@ -5222,7 +5468,7 @@
         </p:nvSpPr>
         <p:spPr>
           <a:xfrm>
-            <a:off x="5193792" y="5385816"/>
+            <a:off x="5193792" y="4958252"/>
             <a:ext cx="1828800" cy="164592"/>
           </a:xfrm>
           <a:prstGeom prst="rect">
@@ -5238,7 +5484,7 @@
           <a:p>
             <a:pPr algn="l"/>
             <a:r>
-              <a:rPr sz="1200" b="1" i="0">
+              <a:rPr sz="1200" b="1" i="0" dirty="0">
                 <a:solidFill>
                   <a:srgbClr val="C9A84C"/>
                 </a:solidFill>
@@ -5257,7 +5503,7 @@
         </p:nvSpPr>
         <p:spPr>
           <a:xfrm>
-            <a:off x="5120640" y="5687568"/>
+            <a:off x="5120640" y="5339516"/>
             <a:ext cx="2157984" cy="457200"/>
           </a:xfrm>
           <a:prstGeom prst="rect">
@@ -5291,6 +5537,7 @@
           <a:lstStyle/>
           <a:p>
             <a:pPr algn="ctr"/>
+            <a:endParaRPr/>
           </a:p>
         </p:txBody>
       </p:sp>
@@ -5302,7 +5549,7 @@
         </p:nvSpPr>
         <p:spPr>
           <a:xfrm>
-            <a:off x="5193792" y="5733288"/>
+            <a:off x="5193792" y="5385236"/>
             <a:ext cx="1097280" cy="219456"/>
           </a:xfrm>
           <a:prstGeom prst="rect">
@@ -5337,7 +5584,7 @@
         </p:nvSpPr>
         <p:spPr>
           <a:xfrm>
-            <a:off x="5193792" y="5934456"/>
+            <a:off x="5193792" y="5513518"/>
             <a:ext cx="1828800" cy="164592"/>
           </a:xfrm>
           <a:prstGeom prst="rect">
@@ -5353,14 +5600,29 @@
           <a:p>
             <a:pPr algn="l"/>
             <a:r>
-              <a:rPr sz="1200" b="1" i="0">
+              <a:rPr sz="1200" b="1" i="0" dirty="0">
                 <a:solidFill>
                   <a:srgbClr val="C9A84C"/>
                 </a:solidFill>
                 <a:latin typeface="Calibri"/>
               </a:rPr>
-              <a:t>$3,151 psf</a:t>
-            </a:r>
+              <a:t>$3,151 </a:t>
+            </a:r>
+            <a:r>
+              <a:rPr sz="1200" b="1" i="0" dirty="0" err="1">
+                <a:solidFill>
+                  <a:srgbClr val="C9A84C"/>
+                </a:solidFill>
+                <a:latin typeface="Calibri"/>
+              </a:rPr>
+              <a:t>psf</a:t>
+            </a:r>
+            <a:endParaRPr sz="1200" b="1" i="0" dirty="0">
+              <a:solidFill>
+                <a:srgbClr val="C9A84C"/>
+              </a:solidFill>
+              <a:latin typeface="Calibri"/>
+            </a:endParaRPr>
           </a:p>
         </p:txBody>
       </p:sp>
@@ -5372,7 +5634,7 @@
         </p:nvSpPr>
         <p:spPr>
           <a:xfrm>
-            <a:off x="5029200" y="6419088"/>
+            <a:off x="5029200" y="6254496"/>
             <a:ext cx="2359152" cy="164592"/>
           </a:xfrm>
           <a:prstGeom prst="rect">
@@ -5407,8 +5669,8 @@
         </p:nvSpPr>
         <p:spPr>
           <a:xfrm>
-            <a:off x="0" y="6400800"/>
-            <a:ext cx="7562088" cy="1207008"/>
+            <a:off x="21020" y="6236208"/>
+            <a:ext cx="7562088" cy="1042416"/>
           </a:xfrm>
           <a:prstGeom prst="rect">
             <a:avLst/>
@@ -5439,6 +5701,7 @@
           <a:lstStyle/>
           <a:p>
             <a:pPr algn="ctr"/>
+            <a:endParaRPr/>
           </a:p>
         </p:txBody>
       </p:sp>
@@ -5450,8 +5713,8 @@
         </p:nvSpPr>
         <p:spPr>
           <a:xfrm>
-            <a:off x="0" y="6400800"/>
-            <a:ext cx="256032" cy="1207008"/>
+            <a:off x="-10510" y="6236208"/>
+            <a:ext cx="256032" cy="1042416"/>
           </a:xfrm>
           <a:prstGeom prst="rect">
             <a:avLst/>
@@ -5482,6 +5745,7 @@
           <a:lstStyle/>
           <a:p>
             <a:pPr algn="ctr"/>
+            <a:endParaRPr/>
           </a:p>
         </p:txBody>
       </p:sp>
@@ -5493,7 +5757,7 @@
         </p:nvSpPr>
         <p:spPr>
           <a:xfrm>
-            <a:off x="411480" y="6473952"/>
+            <a:off x="411480" y="6309360"/>
             <a:ext cx="5029200" cy="256032"/>
           </a:xfrm>
           <a:prstGeom prst="rect">
@@ -5509,7 +5773,7 @@
           <a:p>
             <a:pPr algn="l"/>
             <a:r>
-              <a:rPr sz="900" b="1" i="0">
+              <a:rPr sz="900" b="1" i="0" dirty="0">
                 <a:solidFill>
                   <a:srgbClr val="C9A84C"/>
                 </a:solidFill>
@@ -5528,7 +5792,7 @@
         </p:nvSpPr>
         <p:spPr>
           <a:xfrm>
-            <a:off x="411480" y="6748272"/>
+            <a:off x="411480" y="6583680"/>
             <a:ext cx="6858000" cy="694944"/>
           </a:xfrm>
           <a:prstGeom prst="rect">
@@ -5563,8 +5827,8 @@
         </p:nvSpPr>
         <p:spPr>
           <a:xfrm>
-            <a:off x="457200" y="7680960"/>
-            <a:ext cx="6858000" cy="256032"/>
+            <a:off x="946481" y="7398688"/>
+            <a:ext cx="2460266" cy="223138"/>
           </a:xfrm>
           <a:prstGeom prst="rect">
             <a:avLst/>
@@ -5579,7 +5843,7 @@
           <a:p>
             <a:pPr algn="l"/>
             <a:r>
-              <a:rPr sz="850" b="1" i="0">
+              <a:rPr sz="850" b="1" i="0" dirty="0">
                 <a:solidFill>
                   <a:srgbClr val="C9A84C"/>
                 </a:solidFill>
@@ -5598,8 +5862,8 @@
         </p:nvSpPr>
         <p:spPr>
           <a:xfrm>
-            <a:off x="457200" y="7973568"/>
-            <a:ext cx="2078736" cy="1417320"/>
+            <a:off x="910472" y="7691296"/>
+            <a:ext cx="1755592" cy="1417320"/>
           </a:xfrm>
           <a:prstGeom prst="rect">
             <a:avLst/>
@@ -5632,6 +5896,7 @@
           <a:lstStyle/>
           <a:p>
             <a:pPr algn="ctr"/>
+            <a:endParaRPr/>
           </a:p>
         </p:txBody>
       </p:sp>
@@ -5643,7 +5908,7 @@
         </p:nvSpPr>
         <p:spPr>
           <a:xfrm>
-            <a:off x="1313688" y="8037576"/>
+            <a:off x="1609237" y="7755304"/>
             <a:ext cx="365760" cy="365760"/>
           </a:xfrm>
           <a:prstGeom prst="ellipse">
@@ -5675,6 +5940,7 @@
           <a:lstStyle/>
           <a:p>
             <a:pPr algn="ctr"/>
+            <a:endParaRPr dirty="0"/>
           </a:p>
         </p:txBody>
       </p:sp>
@@ -5686,7 +5952,7 @@
         </p:nvSpPr>
         <p:spPr>
           <a:xfrm>
-            <a:off x="1313688" y="8037576"/>
+            <a:off x="1609237" y="7755304"/>
             <a:ext cx="365760" cy="365760"/>
           </a:xfrm>
           <a:prstGeom prst="rect">
@@ -5702,7 +5968,7 @@
           <a:p>
             <a:pPr algn="ctr"/>
             <a:r>
-              <a:rPr sz="1200" b="1" i="0">
+              <a:rPr sz="1200" b="1" i="0" dirty="0">
                 <a:solidFill>
                   <a:srgbClr val="C9A84C"/>
                 </a:solidFill>
@@ -5721,8 +5987,8 @@
         </p:nvSpPr>
         <p:spPr>
           <a:xfrm>
-            <a:off x="548640" y="8467344"/>
-            <a:ext cx="1895856" cy="274320"/>
+            <a:off x="909205" y="8185072"/>
+            <a:ext cx="1755592" cy="238527"/>
           </a:xfrm>
           <a:prstGeom prst="rect">
             <a:avLst/>
@@ -5756,8 +6022,8 @@
         </p:nvSpPr>
         <p:spPr>
           <a:xfrm>
-            <a:off x="548640" y="8741664"/>
-            <a:ext cx="1895856" cy="594360"/>
+            <a:off x="909205" y="8459392"/>
+            <a:ext cx="1755593" cy="484748"/>
           </a:xfrm>
           <a:prstGeom prst="rect">
             <a:avLst/>
@@ -5772,13 +6038,40 @@
           <a:p>
             <a:pPr algn="ctr"/>
             <a:r>
-              <a:rPr sz="850" b="0" i="0">
+              <a:rPr lang="en-US" sz="850" dirty="0">
                 <a:solidFill>
                   <a:srgbClr val="64748B"/>
                 </a:solidFill>
                 <a:latin typeface="Calibri"/>
               </a:rPr>
-              <a:t>I visit, assess condition, pull the latest comps and give you an honest, no-obligation valuation.</a:t>
+              <a:t>We</a:t>
+            </a:r>
+            <a:r>
+              <a:rPr sz="850" b="0" i="0" dirty="0">
+                <a:solidFill>
+                  <a:srgbClr val="64748B"/>
+                </a:solidFill>
+                <a:latin typeface="Calibri"/>
+              </a:rPr>
+              <a:t> visit, assess condition, pull the latest comps and give you an </a:t>
+            </a:r>
+            <a:r>
+              <a:rPr lang="en-US" sz="850" dirty="0">
+                <a:solidFill>
+                  <a:srgbClr val="64748B"/>
+                </a:solidFill>
+                <a:latin typeface="Calibri"/>
+              </a:rPr>
+              <a:t>indicative </a:t>
+            </a:r>
+            <a:r>
+              <a:rPr sz="850" b="0" i="0" dirty="0">
+                <a:solidFill>
+                  <a:srgbClr val="64748B"/>
+                </a:solidFill>
+                <a:latin typeface="Calibri"/>
+              </a:rPr>
+              <a:t>valuation.</a:t>
             </a:r>
           </a:p>
         </p:txBody>
@@ -5791,8 +6084,8 @@
         </p:nvSpPr>
         <p:spPr>
           <a:xfrm>
-            <a:off x="2673096" y="7973568"/>
-            <a:ext cx="2078736" cy="1417320"/>
+            <a:off x="2893399" y="7691296"/>
+            <a:ext cx="1755592" cy="1417320"/>
           </a:xfrm>
           <a:prstGeom prst="rect">
             <a:avLst/>
@@ -5825,6 +6118,7 @@
           <a:lstStyle/>
           <a:p>
             <a:pPr algn="ctr"/>
+            <a:endParaRPr/>
           </a:p>
         </p:txBody>
       </p:sp>
@@ -5836,7 +6130,7 @@
         </p:nvSpPr>
         <p:spPr>
           <a:xfrm>
-            <a:off x="3529584" y="8037576"/>
+            <a:off x="3572062" y="7760785"/>
             <a:ext cx="365760" cy="365760"/>
           </a:xfrm>
           <a:prstGeom prst="ellipse">
@@ -5868,6 +6162,7 @@
           <a:lstStyle/>
           <a:p>
             <a:pPr algn="ctr"/>
+            <a:endParaRPr/>
           </a:p>
         </p:txBody>
       </p:sp>
@@ -5879,7 +6174,7 @@
         </p:nvSpPr>
         <p:spPr>
           <a:xfrm>
-            <a:off x="3529584" y="8037576"/>
+            <a:off x="3572062" y="7760785"/>
             <a:ext cx="365760" cy="365760"/>
           </a:xfrm>
           <a:prstGeom prst="rect">
@@ -5895,7 +6190,7 @@
           <a:p>
             <a:pPr algn="ctr"/>
             <a:r>
-              <a:rPr sz="1200" b="1" i="0">
+              <a:rPr sz="1200" b="1" i="0" dirty="0">
                 <a:solidFill>
                   <a:srgbClr val="C9A84C"/>
                 </a:solidFill>
@@ -5914,8 +6209,8 @@
         </p:nvSpPr>
         <p:spPr>
           <a:xfrm>
-            <a:off x="2764536" y="8467344"/>
-            <a:ext cx="1895856" cy="274320"/>
+            <a:off x="2893398" y="8185072"/>
+            <a:ext cx="1755593" cy="238527"/>
           </a:xfrm>
           <a:prstGeom prst="rect">
             <a:avLst/>
@@ -5930,7 +6225,7 @@
           <a:p>
             <a:pPr algn="ctr"/>
             <a:r>
-              <a:rPr sz="950" b="1" i="0">
+              <a:rPr sz="950" b="1" i="0" dirty="0">
                 <a:solidFill>
                   <a:srgbClr val="1B2A4A"/>
                 </a:solidFill>
@@ -5949,8 +6244,8 @@
         </p:nvSpPr>
         <p:spPr>
           <a:xfrm>
-            <a:off x="2764536" y="8741664"/>
-            <a:ext cx="1895856" cy="594360"/>
+            <a:off x="2893399" y="8459392"/>
+            <a:ext cx="1755592" cy="615553"/>
           </a:xfrm>
           <a:prstGeom prst="rect">
             <a:avLst/>
@@ -5965,13 +6260,76 @@
           <a:p>
             <a:pPr algn="ctr"/>
             <a:r>
-              <a:rPr sz="850" b="0" i="0">
+              <a:rPr lang="en-US" sz="850" b="0" i="0" dirty="0">
                 <a:solidFill>
                   <a:srgbClr val="64748B"/>
                 </a:solidFill>
                 <a:latin typeface="Calibri"/>
               </a:rPr>
-              <a:t>We agree on the right price and approach. I'll show you exactly who the buyers are and how I'll reach them.</a:t>
+              <a:t>Discuss </a:t>
+            </a:r>
+            <a:r>
+              <a:rPr sz="850" b="0" i="0" dirty="0">
+                <a:solidFill>
+                  <a:srgbClr val="64748B"/>
+                </a:solidFill>
+                <a:latin typeface="Calibri"/>
+              </a:rPr>
+              <a:t>on the right </a:t>
+            </a:r>
+            <a:r>
+              <a:rPr lang="en-US" sz="850" b="0" i="0" dirty="0">
+                <a:solidFill>
+                  <a:srgbClr val="64748B"/>
+                </a:solidFill>
+                <a:latin typeface="Calibri"/>
+              </a:rPr>
+              <a:t>strategy </a:t>
+            </a:r>
+            <a:r>
+              <a:rPr sz="850" b="0" i="0" dirty="0">
+                <a:solidFill>
+                  <a:srgbClr val="64748B"/>
+                </a:solidFill>
+                <a:latin typeface="Calibri"/>
+              </a:rPr>
+              <a:t>and approach. </a:t>
+            </a:r>
+            <a:r>
+              <a:rPr lang="en-US" sz="850" dirty="0">
+                <a:solidFill>
+                  <a:srgbClr val="64748B"/>
+                </a:solidFill>
+                <a:latin typeface="Calibri"/>
+              </a:rPr>
+              <a:t>We</a:t>
+            </a:r>
+            <a:r>
+              <a:rPr sz="850" b="0" i="0" dirty="0">
+                <a:solidFill>
+                  <a:srgbClr val="64748B"/>
+                </a:solidFill>
+                <a:latin typeface="Calibri"/>
+              </a:rPr>
+              <a:t>'ll show you exactly who the buyers are and how </a:t>
+            </a:r>
+            <a:r>
+              <a:rPr lang="en-US" sz="850" b="0" i="0" dirty="0">
+                <a:solidFill>
+                  <a:srgbClr val="64748B"/>
+                </a:solidFill>
+                <a:latin typeface="Calibri"/>
+              </a:rPr>
+              <a:t>We</a:t>
+            </a:r>
+            <a:r>
+              <a:rPr sz="850" b="0" i="0" dirty="0">
+                <a:solidFill>
+                  <a:srgbClr val="64748B"/>
+                </a:solidFill>
+                <a:latin typeface="Calibri"/>
+              </a:rPr>
+              <a:t>'ll reach them.</a:t>
             </a:r>
           </a:p>
         </p:txBody>
@@ -5984,8 +6342,8 @@
         </p:nvSpPr>
         <p:spPr>
           <a:xfrm>
-            <a:off x="4888992" y="7973568"/>
-            <a:ext cx="2078736" cy="1417320"/>
+            <a:off x="4876326" y="7691296"/>
+            <a:ext cx="1755592" cy="1417320"/>
           </a:xfrm>
           <a:prstGeom prst="rect">
             <a:avLst/>
@@ -6018,6 +6376,7 @@
           <a:lstStyle/>
           <a:p>
             <a:pPr algn="ctr"/>
+            <a:endParaRPr/>
           </a:p>
         </p:txBody>
       </p:sp>
@@ -6029,7 +6388,7 @@
         </p:nvSpPr>
         <p:spPr>
           <a:xfrm>
-            <a:off x="5745480" y="8037576"/>
+            <a:off x="5589107" y="7760785"/>
             <a:ext cx="365760" cy="365760"/>
           </a:xfrm>
           <a:prstGeom prst="ellipse">
@@ -6061,6 +6420,7 @@
           <a:lstStyle/>
           <a:p>
             <a:pPr algn="ctr"/>
+            <a:endParaRPr/>
           </a:p>
         </p:txBody>
       </p:sp>
@@ -6072,7 +6432,7 @@
         </p:nvSpPr>
         <p:spPr>
           <a:xfrm>
-            <a:off x="5745480" y="8037576"/>
+            <a:off x="5589107" y="7760785"/>
             <a:ext cx="365760" cy="365760"/>
           </a:xfrm>
           <a:prstGeom prst="rect">
@@ -6107,8 +6467,8 @@
         </p:nvSpPr>
         <p:spPr>
           <a:xfrm>
-            <a:off x="4980432" y="8467344"/>
-            <a:ext cx="1895856" cy="274320"/>
+            <a:off x="4876327" y="8185072"/>
+            <a:ext cx="1755592" cy="238527"/>
           </a:xfrm>
           <a:prstGeom prst="rect">
             <a:avLst/>
@@ -6123,13 +6483,22 @@
           <a:p>
             <a:pPr algn="ctr"/>
             <a:r>
-              <a:rPr sz="950" b="1" i="0">
+              <a:rPr lang="en-US" sz="950" b="1" dirty="0">
                 <a:solidFill>
                   <a:srgbClr val="1B2A4A"/>
                 </a:solidFill>
                 <a:latin typeface="Calibri"/>
               </a:rPr>
-              <a:t>Sign listing &amp; launch</a:t>
+              <a:t>L</a:t>
+            </a:r>
+            <a:r>
+              <a:rPr sz="950" b="1" i="0" dirty="0">
+                <a:solidFill>
+                  <a:srgbClr val="1B2A4A"/>
+                </a:solidFill>
+                <a:latin typeface="Calibri"/>
+              </a:rPr>
+              <a:t>isting &amp; launch</a:t>
             </a:r>
           </a:p>
         </p:txBody>
@@ -6142,8 +6511,8 @@
         </p:nvSpPr>
         <p:spPr>
           <a:xfrm>
-            <a:off x="4980432" y="8741664"/>
-            <a:ext cx="1895856" cy="594360"/>
+            <a:off x="4876325" y="8459392"/>
+            <a:ext cx="1755592" cy="615553"/>
           </a:xfrm>
           <a:prstGeom prst="rect">
             <a:avLst/>
@@ -6158,7 +6527,7 @@
           <a:p>
             <a:pPr algn="ctr"/>
             <a:r>
-              <a:rPr sz="850" b="0" i="0">
+              <a:rPr sz="850" b="0" i="0" dirty="0">
                 <a:solidFill>
                   <a:srgbClr val="64748B"/>
                 </a:solidFill>
@@ -6177,7 +6546,7 @@
         </p:nvSpPr>
         <p:spPr>
           <a:xfrm>
-            <a:off x="0" y="9619488"/>
+            <a:off x="9430" y="9423948"/>
             <a:ext cx="7562088" cy="987552"/>
           </a:xfrm>
           <a:prstGeom prst="rect">
@@ -6209,6 +6578,7 @@
           <a:lstStyle/>
           <a:p>
             <a:pPr algn="ctr"/>
+            <a:endParaRPr/>
           </a:p>
         </p:txBody>
       </p:sp>
@@ -6220,7 +6590,7 @@
         </p:nvSpPr>
         <p:spPr>
           <a:xfrm>
-            <a:off x="0" y="9619488"/>
+            <a:off x="-7144" y="9442236"/>
             <a:ext cx="256032" cy="987552"/>
           </a:xfrm>
           <a:prstGeom prst="rect">
@@ -6252,6 +6622,7 @@
           <a:lstStyle/>
           <a:p>
             <a:pPr algn="ctr"/>
+            <a:endParaRPr/>
           </a:p>
         </p:txBody>
       </p:sp>
@@ -6263,8 +6634,8 @@
         </p:nvSpPr>
         <p:spPr>
           <a:xfrm>
-            <a:off x="411480" y="9692640"/>
-            <a:ext cx="3200400" cy="256032"/>
+            <a:off x="1218997" y="9515629"/>
+            <a:ext cx="1165527" cy="338554"/>
           </a:xfrm>
           <a:prstGeom prst="rect">
             <a:avLst/>
@@ -6279,13 +6650,13 @@
           <a:p>
             <a:pPr algn="l"/>
             <a:r>
-              <a:rPr sz="1300" b="1" i="0">
+              <a:rPr sz="1600" b="1" i="0" dirty="0">
                 <a:solidFill>
                   <a:srgbClr val="FFFFFF"/>
                 </a:solidFill>
                 <a:latin typeface="Calibri"/>
               </a:rPr>
-              <a:t>Rio Pang 彭仕轩</a:t>
+              <a:t>Rio Pang</a:t>
             </a:r>
           </a:p>
         </p:txBody>
@@ -6298,8 +6669,8 @@
         </p:nvSpPr>
         <p:spPr>
           <a:xfrm>
-            <a:off x="411480" y="9966960"/>
-            <a:ext cx="3200400" cy="219456"/>
+            <a:off x="1218997" y="9870688"/>
+            <a:ext cx="1165527" cy="276999"/>
           </a:xfrm>
           <a:prstGeom prst="rect">
             <a:avLst/>
@@ -6313,15 +6684,38 @@
           <a:lstStyle/>
           <a:p>
             <a:pPr algn="l"/>
-            <a:r>
-              <a:rPr sz="900" b="0" i="0">
+            <a:br>
+              <a:rPr lang="en-US" sz="600" b="0" i="0" dirty="0">
                 <a:solidFill>
                   <a:srgbClr val="B0BED4"/>
                 </a:solidFill>
                 <a:latin typeface="Calibri"/>
               </a:rPr>
-              <a:t>ERA Singapore  |  CEA Reg. No. R0702148</a:t>
-            </a:r>
+            </a:br>
+            <a:r>
+              <a:rPr sz="600" b="0" i="0" dirty="0">
+                <a:solidFill>
+                  <a:srgbClr val="B0BED4"/>
+                </a:solidFill>
+                <a:latin typeface="Calibri"/>
+              </a:rPr>
+              <a:t>R070214</a:t>
+            </a:r>
+            <a:r>
+              <a:rPr lang="en-US" sz="600" b="0" i="0" dirty="0">
+                <a:solidFill>
+                  <a:srgbClr val="B0BED4"/>
+                </a:solidFill>
+                <a:latin typeface="Calibri"/>
+              </a:rPr>
+              <a:t>B</a:t>
+            </a:r>
+            <a:endParaRPr sz="600" b="0" i="0" dirty="0">
+              <a:solidFill>
+                <a:srgbClr val="B0BED4"/>
+              </a:solidFill>
+              <a:latin typeface="Calibri"/>
+            </a:endParaRPr>
           </a:p>
         </p:txBody>
       </p:sp>
@@ -6333,8 +6727,8 @@
         </p:nvSpPr>
         <p:spPr>
           <a:xfrm>
-            <a:off x="3657600" y="9692640"/>
-            <a:ext cx="2286000" cy="237744"/>
+            <a:off x="1218997" y="9724425"/>
+            <a:ext cx="1165527" cy="338554"/>
           </a:xfrm>
           <a:prstGeom prst="rect">
             <a:avLst/>
@@ -6349,7 +6743,7 @@
           <a:p>
             <a:pPr algn="l"/>
             <a:r>
-              <a:rPr sz="1300" b="1" i="0">
+              <a:rPr sz="1600" b="1" i="0" dirty="0">
                 <a:solidFill>
                   <a:srgbClr val="C9A84C"/>
                 </a:solidFill>
@@ -6362,14 +6756,14 @@
       </p:sp>
       <p:sp>
         <p:nvSpPr>
-          <p:cNvPr id="88" name="TextBox 87"/>
+          <p:cNvPr id="89" name="TextBox 88"/>
           <p:cNvSpPr txBox="1"/>
           <p:nvPr/>
         </p:nvSpPr>
         <p:spPr>
           <a:xfrm>
-            <a:off x="3657600" y="9948672"/>
-            <a:ext cx="2286000" cy="237744"/>
+            <a:off x="429768" y="10545022"/>
+            <a:ext cx="6739127" cy="192360"/>
           </a:xfrm>
           <a:prstGeom prst="rect">
             <a:avLst/>
@@ -6382,29 +6776,66 @@
           </a:bodyPr>
           <a:lstStyle/>
           <a:p>
-            <a:pPr algn="l"/>
-            <a:r>
-              <a:rPr sz="950" b="0" i="0">
-                <a:solidFill>
-                  <a:srgbClr val="B0BED4"/>
-                </a:solidFill>
-                <a:latin typeface="Calibri"/>
-              </a:rPr>
-              <a:t>WhatsApp / Call</a:t>
-            </a:r>
-          </a:p>
-        </p:txBody>
-      </p:sp>
-      <p:sp>
-        <p:nvSpPr>
-          <p:cNvPr id="89" name="TextBox 88"/>
+            <a:pPr algn="ctr"/>
+            <a:r>
+              <a:rPr sz="650" b="0" i="1" dirty="0">
+                <a:solidFill>
+                  <a:srgbClr val="64748B"/>
+                </a:solidFill>
+                <a:latin typeface="Calibri"/>
+              </a:rPr>
+              <a:t>Data sourced from URA REALIS (Jun 2025–Jun 2026). This flyer is for informational purposes only and does not constitute a formal valuation.</a:t>
+            </a:r>
+          </a:p>
+        </p:txBody>
+      </p:sp>
+      <p:pic>
+        <p:nvPicPr>
+          <p:cNvPr id="97" name="Picture 96">
+            <a:extLst>
+              <a:ext uri="{FF2B5EF4-FFF2-40B4-BE49-F238E27FC236}">
+                <a16:creationId xmlns:a16="http://schemas.microsoft.com/office/drawing/2014/main" id="{E37EB9D4-3063-33C7-BE32-E6AFFDA22142}"/>
+              </a:ext>
+            </a:extLst>
+          </p:cNvPr>
+          <p:cNvPicPr>
+            <a:picLocks noChangeAspect="1"/>
+          </p:cNvPicPr>
+          <p:nvPr/>
+        </p:nvPicPr>
+        <p:blipFill>
+          <a:blip r:embed="rId3"/>
+          <a:srcRect l="19580" r="16604"/>
+          <a:stretch>
+            <a:fillRect/>
+          </a:stretch>
+        </p:blipFill>
+        <p:spPr>
+          <a:xfrm>
+            <a:off x="-100665" y="7630706"/>
+            <a:ext cx="1306670" cy="3071357"/>
+          </a:xfrm>
+          <a:prstGeom prst="rect">
+            <a:avLst/>
+          </a:prstGeom>
+        </p:spPr>
+      </p:pic>
+      <p:sp>
+        <p:nvSpPr>
+          <p:cNvPr id="98" name="TextBox 97">
+            <a:extLst>
+              <a:ext uri="{FF2B5EF4-FFF2-40B4-BE49-F238E27FC236}">
+                <a16:creationId xmlns:a16="http://schemas.microsoft.com/office/drawing/2014/main" id="{FF8B22FF-8123-85F5-B445-759DAC8BDA7B}"/>
+              </a:ext>
+            </a:extLst>
+          </p:cNvPr>
           <p:cNvSpPr txBox="1"/>
           <p:nvPr/>
         </p:nvSpPr>
         <p:spPr>
           <a:xfrm>
-            <a:off x="411480" y="10396728"/>
-            <a:ext cx="6739127" cy="182880"/>
+            <a:off x="3815395" y="2246191"/>
+            <a:ext cx="1604773" cy="400110"/>
           </a:xfrm>
           <a:prstGeom prst="rect">
             <a:avLst/>
@@ -6417,20 +6848,4366 @@
           </a:bodyPr>
           <a:lstStyle/>
           <a:p>
+            <a:pPr algn="ctr"/>
+            <a:r>
+              <a:rPr lang="en-US" sz="2000" b="1" i="0" dirty="0">
+                <a:solidFill>
+                  <a:srgbClr val="1B2A4A"/>
+                </a:solidFill>
+                <a:latin typeface="Calibri"/>
+              </a:rPr>
+              <a:t>Transactions</a:t>
+            </a:r>
+            <a:endParaRPr sz="2000" b="1" i="0" dirty="0">
+              <a:solidFill>
+                <a:srgbClr val="1B2A4A"/>
+              </a:solidFill>
+              <a:latin typeface="Calibri"/>
+            </a:endParaRPr>
+          </a:p>
+        </p:txBody>
+      </p:sp>
+      <p:pic>
+        <p:nvPicPr>
+          <p:cNvPr id="100" name="Picture 99">
+            <a:extLst>
+              <a:ext uri="{FF2B5EF4-FFF2-40B4-BE49-F238E27FC236}">
+                <a16:creationId xmlns:a16="http://schemas.microsoft.com/office/drawing/2014/main" id="{82F8EE19-B110-5391-350F-CF1F5C015CBD}"/>
+              </a:ext>
+            </a:extLst>
+          </p:cNvPr>
+          <p:cNvPicPr>
+            <a:picLocks noChangeAspect="1"/>
+          </p:cNvPicPr>
+          <p:nvPr/>
+        </p:nvPicPr>
+        <p:blipFill>
+          <a:blip r:embed="rId4"/>
+          <a:srcRect l="16444" r="59677"/>
+          <a:stretch>
+            <a:fillRect/>
+          </a:stretch>
+        </p:blipFill>
+        <p:spPr>
+          <a:xfrm>
+            <a:off x="6398246" y="7607808"/>
+            <a:ext cx="1311510" cy="3089416"/>
+          </a:xfrm>
+          <a:prstGeom prst="rect">
+            <a:avLst/>
+          </a:prstGeom>
+        </p:spPr>
+      </p:pic>
+      <p:sp>
+        <p:nvSpPr>
+          <p:cNvPr id="106" name="TextBox 105">
+            <a:extLst>
+              <a:ext uri="{FF2B5EF4-FFF2-40B4-BE49-F238E27FC236}">
+                <a16:creationId xmlns:a16="http://schemas.microsoft.com/office/drawing/2014/main" id="{5A271584-8034-164E-1DB4-5E2F26513D07}"/>
+              </a:ext>
+            </a:extLst>
+          </p:cNvPr>
+          <p:cNvSpPr txBox="1"/>
+          <p:nvPr/>
+        </p:nvSpPr>
+        <p:spPr>
+          <a:xfrm>
+            <a:off x="5241917" y="9515318"/>
+            <a:ext cx="1165527" cy="338554"/>
+          </a:xfrm>
+          <a:prstGeom prst="rect">
+            <a:avLst/>
+          </a:prstGeom>
+          <a:noFill/>
+        </p:spPr>
+        <p:txBody>
+          <a:bodyPr wrap="square">
+            <a:spAutoFit/>
+          </a:bodyPr>
+          <a:lstStyle/>
+          <a:p>
+            <a:pPr algn="r"/>
+            <a:r>
+              <a:rPr lang="en-US" sz="1600" b="1" dirty="0">
+                <a:solidFill>
+                  <a:srgbClr val="FFFFFF"/>
+                </a:solidFill>
+                <a:latin typeface="Calibri"/>
+              </a:rPr>
+              <a:t>Tricia Low</a:t>
+            </a:r>
+            <a:endParaRPr sz="1600" b="1" i="0" dirty="0">
+              <a:solidFill>
+                <a:srgbClr val="FFFFFF"/>
+              </a:solidFill>
+              <a:latin typeface="Calibri"/>
+            </a:endParaRPr>
+          </a:p>
+        </p:txBody>
+      </p:sp>
+      <p:sp>
+        <p:nvSpPr>
+          <p:cNvPr id="107" name="TextBox 106">
+            <a:extLst>
+              <a:ext uri="{FF2B5EF4-FFF2-40B4-BE49-F238E27FC236}">
+                <a16:creationId xmlns:a16="http://schemas.microsoft.com/office/drawing/2014/main" id="{159BCDF0-E7E4-A824-D29B-D687C5C14D8B}"/>
+              </a:ext>
+            </a:extLst>
+          </p:cNvPr>
+          <p:cNvSpPr txBox="1"/>
+          <p:nvPr/>
+        </p:nvSpPr>
+        <p:spPr>
+          <a:xfrm>
+            <a:off x="5241917" y="9870377"/>
+            <a:ext cx="1165527" cy="276999"/>
+          </a:xfrm>
+          <a:prstGeom prst="rect">
+            <a:avLst/>
+          </a:prstGeom>
+          <a:noFill/>
+        </p:spPr>
+        <p:txBody>
+          <a:bodyPr wrap="square">
+            <a:spAutoFit/>
+          </a:bodyPr>
+          <a:lstStyle/>
+          <a:p>
+            <a:pPr algn="r"/>
+            <a:br>
+              <a:rPr lang="en-US" sz="600" b="0" i="0" dirty="0">
+                <a:solidFill>
+                  <a:srgbClr val="B0BED4"/>
+                </a:solidFill>
+                <a:latin typeface="Calibri"/>
+              </a:rPr>
+            </a:br>
+            <a:r>
+              <a:rPr lang="en-US" sz="600" b="0" i="0" dirty="0">
+                <a:solidFill>
+                  <a:srgbClr val="B0BED4"/>
+                </a:solidFill>
+                <a:latin typeface="Calibri"/>
+              </a:rPr>
+              <a:t>R068957J</a:t>
+            </a:r>
+            <a:endParaRPr sz="600" b="0" i="0" dirty="0">
+              <a:solidFill>
+                <a:srgbClr val="B0BED4"/>
+              </a:solidFill>
+              <a:latin typeface="Calibri"/>
+            </a:endParaRPr>
+          </a:p>
+        </p:txBody>
+      </p:sp>
+      <p:sp>
+        <p:nvSpPr>
+          <p:cNvPr id="108" name="TextBox 107">
+            <a:extLst>
+              <a:ext uri="{FF2B5EF4-FFF2-40B4-BE49-F238E27FC236}">
+                <a16:creationId xmlns:a16="http://schemas.microsoft.com/office/drawing/2014/main" id="{8A2B2599-6011-325E-8F69-29F4A069A0DD}"/>
+              </a:ext>
+            </a:extLst>
+          </p:cNvPr>
+          <p:cNvSpPr txBox="1"/>
+          <p:nvPr/>
+        </p:nvSpPr>
+        <p:spPr>
+          <a:xfrm>
+            <a:off x="5241917" y="9724114"/>
+            <a:ext cx="1165527" cy="338554"/>
+          </a:xfrm>
+          <a:prstGeom prst="rect">
+            <a:avLst/>
+          </a:prstGeom>
+          <a:noFill/>
+        </p:spPr>
+        <p:txBody>
+          <a:bodyPr wrap="square">
+            <a:spAutoFit/>
+          </a:bodyPr>
+          <a:lstStyle/>
+          <a:p>
+            <a:pPr algn="r"/>
+            <a:r>
+              <a:rPr lang="en-US" sz="1600" b="1" i="0" dirty="0">
+                <a:solidFill>
+                  <a:srgbClr val="C9A84C"/>
+                </a:solidFill>
+                <a:latin typeface="Calibri"/>
+              </a:rPr>
+              <a:t>9833 8871</a:t>
+            </a:r>
+            <a:endParaRPr sz="1600" b="1" i="0" dirty="0">
+              <a:solidFill>
+                <a:srgbClr val="C9A84C"/>
+              </a:solidFill>
+              <a:latin typeface="Calibri"/>
+            </a:endParaRPr>
+          </a:p>
+        </p:txBody>
+      </p:sp>
+      <p:sp>
+        <p:nvSpPr>
+          <p:cNvPr id="115" name="TextBox 114">
+            <a:extLst>
+              <a:ext uri="{FF2B5EF4-FFF2-40B4-BE49-F238E27FC236}">
+                <a16:creationId xmlns:a16="http://schemas.microsoft.com/office/drawing/2014/main" id="{717C82F8-E140-0F5E-A39C-7213878DDDDE}"/>
+              </a:ext>
+            </a:extLst>
+          </p:cNvPr>
+          <p:cNvSpPr txBox="1"/>
+          <p:nvPr/>
+        </p:nvSpPr>
+        <p:spPr>
+          <a:xfrm>
+            <a:off x="2963221" y="9554753"/>
+            <a:ext cx="1583441" cy="715581"/>
+          </a:xfrm>
+          <a:prstGeom prst="rect">
+            <a:avLst/>
+          </a:prstGeom>
+          <a:noFill/>
+        </p:spPr>
+        <p:txBody>
+          <a:bodyPr wrap="square">
+            <a:spAutoFit/>
+          </a:bodyPr>
+          <a:lstStyle/>
+          <a:p>
+            <a:pPr algn="ctr"/>
+            <a:r>
+              <a:rPr lang="en-US" sz="1000" b="1" i="0" dirty="0">
+                <a:solidFill>
+                  <a:srgbClr val="C9A84C"/>
+                </a:solidFill>
+                <a:latin typeface="Calibri"/>
+              </a:rPr>
+              <a:t>CONTACT US FOR A </a:t>
+            </a:r>
+          </a:p>
+          <a:p>
+            <a:pPr algn="ctr"/>
+            <a:r>
+              <a:rPr lang="en-US" sz="1050" b="1" i="0" u="sng" dirty="0">
+                <a:solidFill>
+                  <a:srgbClr val="C00000"/>
+                </a:solidFill>
+                <a:latin typeface="Calibri"/>
+              </a:rPr>
+              <a:t>FREE</a:t>
+            </a:r>
+            <a:r>
+              <a:rPr lang="en-US" sz="1000" b="1" i="0" dirty="0">
+                <a:solidFill>
+                  <a:srgbClr val="C9A84C"/>
+                </a:solidFill>
+                <a:latin typeface="Calibri"/>
+              </a:rPr>
+              <a:t> INDICATIVE VALUATION AND CONSULTATION TODAY!</a:t>
+            </a:r>
+            <a:endParaRPr sz="1000" b="1" i="0" dirty="0">
+              <a:solidFill>
+                <a:srgbClr val="C9A84C"/>
+              </a:solidFill>
+              <a:latin typeface="Calibri"/>
+            </a:endParaRPr>
+          </a:p>
+        </p:txBody>
+      </p:sp>
+      <p:pic>
+        <p:nvPicPr>
+          <p:cNvPr id="116" name="Picture 115">
+            <a:extLst>
+              <a:ext uri="{FF2B5EF4-FFF2-40B4-BE49-F238E27FC236}">
+                <a16:creationId xmlns:a16="http://schemas.microsoft.com/office/drawing/2014/main" id="{29AB6464-DA9D-9F70-9F21-34FAA8452621}"/>
+              </a:ext>
+            </a:extLst>
+          </p:cNvPr>
+          <p:cNvPicPr>
+            <a:picLocks noChangeAspect="1"/>
+          </p:cNvPicPr>
+          <p:nvPr/>
+        </p:nvPicPr>
+        <p:blipFill>
+          <a:blip r:embed="rId5"/>
+          <a:stretch>
+            <a:fillRect/>
+          </a:stretch>
+        </p:blipFill>
+        <p:spPr>
+          <a:xfrm>
+            <a:off x="2231864" y="9662982"/>
+            <a:ext cx="449708" cy="450613"/>
+          </a:xfrm>
+          <a:prstGeom prst="rect">
+            <a:avLst/>
+          </a:prstGeom>
+        </p:spPr>
+      </p:pic>
+      <p:pic>
+        <p:nvPicPr>
+          <p:cNvPr id="117" name="Picture 116">
+            <a:extLst>
+              <a:ext uri="{FF2B5EF4-FFF2-40B4-BE49-F238E27FC236}">
+                <a16:creationId xmlns:a16="http://schemas.microsoft.com/office/drawing/2014/main" id="{C096E41E-6A92-87B3-4627-92A7E1CE833B}"/>
+              </a:ext>
+            </a:extLst>
+          </p:cNvPr>
+          <p:cNvPicPr>
+            <a:picLocks noChangeAspect="1"/>
+          </p:cNvPicPr>
+          <p:nvPr/>
+        </p:nvPicPr>
+        <p:blipFill>
+          <a:blip r:embed="rId6"/>
+          <a:stretch>
+            <a:fillRect/>
+          </a:stretch>
+        </p:blipFill>
+        <p:spPr>
+          <a:xfrm rot="16200000" flipV="1">
+            <a:off x="4921166" y="9646126"/>
+            <a:ext cx="448221" cy="449123"/>
+          </a:xfrm>
+          <a:prstGeom prst="rect">
+            <a:avLst/>
+          </a:prstGeom>
+        </p:spPr>
+      </p:pic>
+    </p:spTree>
+  </p:cSld>
+  <p:clrMapOvr>
+    <a:masterClrMapping/>
+  </p:clrMapOvr>
+</p:sld>
+</file>
+
+<file path=ppt/slides/slide2.xml><?xml version="1.0" encoding="utf-8"?>
+<p:sld xmlns:a="http://schemas.openxmlformats.org/drawingml/2006/main" xmlns:r="http://schemas.openxmlformats.org/officeDocument/2006/relationships" xmlns:p="http://schemas.openxmlformats.org/presentationml/2006/main">
+  <p:cSld>
+    <p:bg>
+      <p:bgPr>
+        <a:solidFill>
+          <a:srgbClr val="FFFFFF"/>
+        </a:solidFill>
+        <a:effectLst/>
+      </p:bgPr>
+    </p:bg>
+    <p:spTree>
+      <p:nvGrpSpPr>
+        <p:cNvPr id="1" name="">
+          <a:extLst>
+            <a:ext uri="{FF2B5EF4-FFF2-40B4-BE49-F238E27FC236}">
+              <a16:creationId xmlns:a16="http://schemas.microsoft.com/office/drawing/2014/main" id="{1FAB938A-6974-A970-9406-EF19668220C4}"/>
+            </a:ext>
+          </a:extLst>
+        </p:cNvPr>
+        <p:cNvGrpSpPr/>
+        <p:nvPr/>
+      </p:nvGrpSpPr>
+      <p:grpSpPr>
+        <a:xfrm>
+          <a:off x="0" y="0"/>
+          <a:ext cx="0" cy="0"/>
+          <a:chOff x="0" y="0"/>
+          <a:chExt cx="0" cy="0"/>
+        </a:xfrm>
+      </p:grpSpPr>
+      <p:sp>
+        <p:nvSpPr>
+          <p:cNvPr id="2" name="Rectangle 1">
+            <a:extLst>
+              <a:ext uri="{FF2B5EF4-FFF2-40B4-BE49-F238E27FC236}">
+                <a16:creationId xmlns:a16="http://schemas.microsoft.com/office/drawing/2014/main" id="{69C799B0-3AE5-5E04-0D0B-F0790A546CEE}"/>
+              </a:ext>
+            </a:extLst>
+          </p:cNvPr>
+          <p:cNvSpPr/>
+          <p:nvPr/>
+        </p:nvSpPr>
+        <p:spPr>
+          <a:xfrm>
+            <a:off x="21020" y="-15923"/>
+            <a:ext cx="7562088" cy="1813935"/>
+          </a:xfrm>
+          <a:prstGeom prst="rect">
+            <a:avLst/>
+          </a:prstGeom>
+          <a:solidFill>
+            <a:srgbClr val="1B2A4A"/>
+          </a:solidFill>
+          <a:ln>
+            <a:noFill/>
+          </a:ln>
+        </p:spPr>
+        <p:style>
+          <a:lnRef idx="1">
+            <a:schemeClr val="accent1"/>
+          </a:lnRef>
+          <a:fillRef idx="3">
+            <a:schemeClr val="accent1"/>
+          </a:fillRef>
+          <a:effectRef idx="2">
+            <a:schemeClr val="accent1"/>
+          </a:effectRef>
+          <a:fontRef idx="minor">
+            <a:schemeClr val="lt1"/>
+          </a:fontRef>
+        </p:style>
+        <p:txBody>
+          <a:bodyPr rtlCol="0" anchor="ctr"/>
+          <a:lstStyle/>
+          <a:p>
+            <a:pPr algn="ctr"/>
+            <a:endParaRPr dirty="0"/>
+          </a:p>
+        </p:txBody>
+      </p:sp>
+      <p:sp>
+        <p:nvSpPr>
+          <p:cNvPr id="3" name="Rectangle 2">
+            <a:extLst>
+              <a:ext uri="{FF2B5EF4-FFF2-40B4-BE49-F238E27FC236}">
+                <a16:creationId xmlns:a16="http://schemas.microsoft.com/office/drawing/2014/main" id="{98EFFDC7-4890-B0BE-E93A-46A6A076692B}"/>
+              </a:ext>
+            </a:extLst>
+          </p:cNvPr>
+          <p:cNvSpPr/>
+          <p:nvPr/>
+        </p:nvSpPr>
+        <p:spPr>
+          <a:xfrm>
+            <a:off x="-10510" y="-21020"/>
+            <a:ext cx="256032" cy="1813935"/>
+          </a:xfrm>
+          <a:prstGeom prst="rect">
+            <a:avLst/>
+          </a:prstGeom>
+          <a:solidFill>
+            <a:srgbClr val="C9A84C"/>
+          </a:solidFill>
+          <a:ln>
+            <a:noFill/>
+          </a:ln>
+        </p:spPr>
+        <p:style>
+          <a:lnRef idx="1">
+            <a:schemeClr val="accent1"/>
+          </a:lnRef>
+          <a:fillRef idx="3">
+            <a:schemeClr val="accent1"/>
+          </a:fillRef>
+          <a:effectRef idx="2">
+            <a:schemeClr val="accent1"/>
+          </a:effectRef>
+          <a:fontRef idx="minor">
+            <a:schemeClr val="lt1"/>
+          </a:fontRef>
+        </p:style>
+        <p:txBody>
+          <a:bodyPr rtlCol="0" anchor="ctr"/>
+          <a:lstStyle/>
+          <a:p>
+            <a:pPr algn="ctr"/>
+            <a:endParaRPr/>
+          </a:p>
+        </p:txBody>
+      </p:sp>
+      <p:sp>
+        <p:nvSpPr>
+          <p:cNvPr id="4" name="TextBox 3">
+            <a:extLst>
+              <a:ext uri="{FF2B5EF4-FFF2-40B4-BE49-F238E27FC236}">
+                <a16:creationId xmlns:a16="http://schemas.microsoft.com/office/drawing/2014/main" id="{C0EB1421-B0D0-4A31-A148-1EE77D551E1F}"/>
+              </a:ext>
+            </a:extLst>
+          </p:cNvPr>
+          <p:cNvSpPr txBox="1"/>
+          <p:nvPr/>
+        </p:nvSpPr>
+        <p:spPr>
+          <a:xfrm>
+            <a:off x="411480" y="201168"/>
+            <a:ext cx="5303520" cy="658368"/>
+          </a:xfrm>
+          <a:prstGeom prst="rect">
+            <a:avLst/>
+          </a:prstGeom>
+          <a:noFill/>
+        </p:spPr>
+        <p:txBody>
+          <a:bodyPr wrap="square">
+            <a:spAutoFit/>
+          </a:bodyPr>
+          <a:lstStyle/>
+          <a:p>
             <a:pPr algn="l"/>
             <a:r>
-              <a:rPr sz="650" b="0" i="1">
+              <a:rPr sz="2400" b="1" i="0" dirty="0">
+                <a:solidFill>
+                  <a:srgbClr val="FFFFFF"/>
+                </a:solidFill>
+                <a:latin typeface="Calibri"/>
+              </a:rPr>
+              <a:t>Is now the right time
+to sell your landed home?</a:t>
+            </a:r>
+          </a:p>
+        </p:txBody>
+      </p:sp>
+      <p:sp>
+        <p:nvSpPr>
+          <p:cNvPr id="5" name="TextBox 4">
+            <a:extLst>
+              <a:ext uri="{FF2B5EF4-FFF2-40B4-BE49-F238E27FC236}">
+                <a16:creationId xmlns:a16="http://schemas.microsoft.com/office/drawing/2014/main" id="{40E0603E-94E0-3E09-72E2-369BFCC7C5B2}"/>
+              </a:ext>
+            </a:extLst>
+          </p:cNvPr>
+          <p:cNvSpPr txBox="1"/>
+          <p:nvPr/>
+        </p:nvSpPr>
+        <p:spPr>
+          <a:xfrm>
+            <a:off x="411479" y="978988"/>
+            <a:ext cx="5401035" cy="415498"/>
+          </a:xfrm>
+          <a:prstGeom prst="rect">
+            <a:avLst/>
+          </a:prstGeom>
+          <a:noFill/>
+        </p:spPr>
+        <p:txBody>
+          <a:bodyPr wrap="square">
+            <a:spAutoFit/>
+          </a:bodyPr>
+          <a:lstStyle/>
+          <a:p>
+            <a:pPr algn="l"/>
+            <a:r>
+              <a:rPr sz="1050" b="0" i="1" dirty="0">
+                <a:solidFill>
+                  <a:srgbClr val="C9A84C"/>
+                </a:solidFill>
+                <a:latin typeface="Calibri"/>
+              </a:rPr>
+              <a:t>Thomson Garden Estate has seen 21 transactions in the last 12 </a:t>
+            </a:r>
+            <a:r>
+              <a:rPr lang="en-US" sz="1050" b="0" i="1" dirty="0">
+                <a:solidFill>
+                  <a:srgbClr val="C9A84C"/>
+                </a:solidFill>
+                <a:latin typeface="Calibri"/>
+              </a:rPr>
+              <a:t>months,</a:t>
+            </a:r>
+            <a:r>
+              <a:rPr sz="1050" b="0" i="1" dirty="0">
+                <a:solidFill>
+                  <a:srgbClr val="C9A84C"/>
+                </a:solidFill>
+                <a:latin typeface="Calibri"/>
+              </a:rPr>
+              <a:t>  and </a:t>
+            </a:r>
+            <a:r>
+              <a:rPr lang="en-US" sz="1050" b="0" i="1" dirty="0">
+                <a:solidFill>
+                  <a:srgbClr val="C9A84C"/>
+                </a:solidFill>
+                <a:latin typeface="Calibri"/>
+              </a:rPr>
+              <a:t>we have </a:t>
+            </a:r>
+            <a:r>
+              <a:rPr sz="1050" b="0" i="1" dirty="0">
+                <a:solidFill>
+                  <a:srgbClr val="C9A84C"/>
+                </a:solidFill>
+                <a:latin typeface="Calibri"/>
+              </a:rPr>
+              <a:t>serious buyers are actively looking here.</a:t>
+            </a:r>
+          </a:p>
+        </p:txBody>
+      </p:sp>
+      <p:sp>
+        <p:nvSpPr>
+          <p:cNvPr id="13" name="Rectangle 12">
+            <a:extLst>
+              <a:ext uri="{FF2B5EF4-FFF2-40B4-BE49-F238E27FC236}">
+                <a16:creationId xmlns:a16="http://schemas.microsoft.com/office/drawing/2014/main" id="{4C5D9873-B39C-CD22-9F31-83D982CBF382}"/>
+              </a:ext>
+            </a:extLst>
+          </p:cNvPr>
+          <p:cNvSpPr/>
+          <p:nvPr/>
+        </p:nvSpPr>
+        <p:spPr>
+          <a:xfrm>
+            <a:off x="518985" y="2067494"/>
+            <a:ext cx="1552193" cy="1024128"/>
+          </a:xfrm>
+          <a:prstGeom prst="rect">
+            <a:avLst/>
+          </a:prstGeom>
+          <a:solidFill>
+            <a:srgbClr val="FDF6E3"/>
+          </a:solidFill>
+          <a:ln w="12700">
+            <a:solidFill>
+              <a:srgbClr val="C9A84C"/>
+            </a:solidFill>
+          </a:ln>
+        </p:spPr>
+        <p:style>
+          <a:lnRef idx="1">
+            <a:schemeClr val="accent1"/>
+          </a:lnRef>
+          <a:fillRef idx="3">
+            <a:schemeClr val="accent1"/>
+          </a:fillRef>
+          <a:effectRef idx="2">
+            <a:schemeClr val="accent1"/>
+          </a:effectRef>
+          <a:fontRef idx="minor">
+            <a:schemeClr val="lt1"/>
+          </a:fontRef>
+        </p:style>
+        <p:txBody>
+          <a:bodyPr rtlCol="0" anchor="ctr"/>
+          <a:lstStyle/>
+          <a:p>
+            <a:pPr algn="ctr"/>
+            <a:endParaRPr/>
+          </a:p>
+        </p:txBody>
+      </p:sp>
+      <p:sp>
+        <p:nvSpPr>
+          <p:cNvPr id="14" name="TextBox 13">
+            <a:extLst>
+              <a:ext uri="{FF2B5EF4-FFF2-40B4-BE49-F238E27FC236}">
+                <a16:creationId xmlns:a16="http://schemas.microsoft.com/office/drawing/2014/main" id="{62F125B7-D151-DD18-5C76-D5AD00DAAF19}"/>
+              </a:ext>
+            </a:extLst>
+          </p:cNvPr>
+          <p:cNvSpPr txBox="1"/>
+          <p:nvPr/>
+        </p:nvSpPr>
+        <p:spPr>
+          <a:xfrm>
+            <a:off x="573849" y="2143776"/>
+            <a:ext cx="1442466" cy="438912"/>
+          </a:xfrm>
+          <a:prstGeom prst="rect">
+            <a:avLst/>
+          </a:prstGeom>
+          <a:noFill/>
+        </p:spPr>
+        <p:txBody>
+          <a:bodyPr wrap="square">
+            <a:spAutoFit/>
+          </a:bodyPr>
+          <a:lstStyle/>
+          <a:p>
+            <a:pPr algn="ctr"/>
+            <a:r>
+              <a:rPr sz="2000" b="1" i="0" dirty="0">
+                <a:solidFill>
+                  <a:srgbClr val="1B2A4A"/>
+                </a:solidFill>
+                <a:latin typeface="Calibri"/>
+              </a:rPr>
+              <a:t>+6.7%</a:t>
+            </a:r>
+          </a:p>
+        </p:txBody>
+      </p:sp>
+      <p:sp>
+        <p:nvSpPr>
+          <p:cNvPr id="15" name="TextBox 14">
+            <a:extLst>
+              <a:ext uri="{FF2B5EF4-FFF2-40B4-BE49-F238E27FC236}">
+                <a16:creationId xmlns:a16="http://schemas.microsoft.com/office/drawing/2014/main" id="{E2775C51-3353-2347-AB2E-CE71AD59868D}"/>
+              </a:ext>
+            </a:extLst>
+          </p:cNvPr>
+          <p:cNvSpPr txBox="1"/>
+          <p:nvPr/>
+        </p:nvSpPr>
+        <p:spPr>
+          <a:xfrm>
+            <a:off x="573849" y="2598092"/>
+            <a:ext cx="1442466" cy="457200"/>
+          </a:xfrm>
+          <a:prstGeom prst="rect">
+            <a:avLst/>
+          </a:prstGeom>
+          <a:noFill/>
+        </p:spPr>
+        <p:txBody>
+          <a:bodyPr wrap="square">
+            <a:spAutoFit/>
+          </a:bodyPr>
+          <a:lstStyle/>
+          <a:p>
+            <a:pPr algn="ctr"/>
+            <a:r>
+              <a:rPr sz="850" b="0" i="0">
                 <a:solidFill>
                   <a:srgbClr val="64748B"/>
                 </a:solidFill>
                 <a:latin typeface="Calibri"/>
               </a:rPr>
+              <a:t>landed price growth
+year-on-year (2025)</a:t>
+            </a:r>
+          </a:p>
+        </p:txBody>
+      </p:sp>
+      <p:sp>
+        <p:nvSpPr>
+          <p:cNvPr id="16" name="Rectangle 15">
+            <a:extLst>
+              <a:ext uri="{FF2B5EF4-FFF2-40B4-BE49-F238E27FC236}">
+                <a16:creationId xmlns:a16="http://schemas.microsoft.com/office/drawing/2014/main" id="{39B47EC5-689A-4347-DC2D-545335D70594}"/>
+              </a:ext>
+            </a:extLst>
+          </p:cNvPr>
+          <p:cNvSpPr/>
+          <p:nvPr/>
+        </p:nvSpPr>
+        <p:spPr>
+          <a:xfrm>
+            <a:off x="2180907" y="2067494"/>
+            <a:ext cx="1552193" cy="1024128"/>
+          </a:xfrm>
+          <a:prstGeom prst="rect">
+            <a:avLst/>
+          </a:prstGeom>
+          <a:solidFill>
+            <a:srgbClr val="FDF6E3"/>
+          </a:solidFill>
+          <a:ln w="12700">
+            <a:solidFill>
+              <a:srgbClr val="C9A84C"/>
+            </a:solidFill>
+          </a:ln>
+        </p:spPr>
+        <p:style>
+          <a:lnRef idx="1">
+            <a:schemeClr val="accent1"/>
+          </a:lnRef>
+          <a:fillRef idx="3">
+            <a:schemeClr val="accent1"/>
+          </a:fillRef>
+          <a:effectRef idx="2">
+            <a:schemeClr val="accent1"/>
+          </a:effectRef>
+          <a:fontRef idx="minor">
+            <a:schemeClr val="lt1"/>
+          </a:fontRef>
+        </p:style>
+        <p:txBody>
+          <a:bodyPr rtlCol="0" anchor="ctr"/>
+          <a:lstStyle/>
+          <a:p>
+            <a:pPr algn="ctr"/>
+            <a:endParaRPr/>
+          </a:p>
+        </p:txBody>
+      </p:sp>
+      <p:sp>
+        <p:nvSpPr>
+          <p:cNvPr id="17" name="TextBox 16">
+            <a:extLst>
+              <a:ext uri="{FF2B5EF4-FFF2-40B4-BE49-F238E27FC236}">
+                <a16:creationId xmlns:a16="http://schemas.microsoft.com/office/drawing/2014/main" id="{62E5059C-B861-CF6C-5F90-C5F403929A7E}"/>
+              </a:ext>
+            </a:extLst>
+          </p:cNvPr>
+          <p:cNvSpPr txBox="1"/>
+          <p:nvPr/>
+        </p:nvSpPr>
+        <p:spPr>
+          <a:xfrm>
+            <a:off x="2235771" y="2149913"/>
+            <a:ext cx="1442466" cy="438912"/>
+          </a:xfrm>
+          <a:prstGeom prst="rect">
+            <a:avLst/>
+          </a:prstGeom>
+          <a:noFill/>
+        </p:spPr>
+        <p:txBody>
+          <a:bodyPr wrap="square">
+            <a:spAutoFit/>
+          </a:bodyPr>
+          <a:lstStyle/>
+          <a:p>
+            <a:pPr algn="ctr"/>
+            <a:r>
+              <a:rPr sz="2000" b="1" i="0">
+                <a:solidFill>
+                  <a:srgbClr val="1B2A4A"/>
+                </a:solidFill>
+                <a:latin typeface="Calibri"/>
+              </a:rPr>
+              <a:t>+73%</a:t>
+            </a:r>
+          </a:p>
+        </p:txBody>
+      </p:sp>
+      <p:sp>
+        <p:nvSpPr>
+          <p:cNvPr id="18" name="TextBox 17">
+            <a:extLst>
+              <a:ext uri="{FF2B5EF4-FFF2-40B4-BE49-F238E27FC236}">
+                <a16:creationId xmlns:a16="http://schemas.microsoft.com/office/drawing/2014/main" id="{F3996E0A-2138-336A-9D2F-9FE49835D230}"/>
+              </a:ext>
+            </a:extLst>
+          </p:cNvPr>
+          <p:cNvSpPr txBox="1"/>
+          <p:nvPr/>
+        </p:nvSpPr>
+        <p:spPr>
+          <a:xfrm>
+            <a:off x="2235771" y="2598092"/>
+            <a:ext cx="1442466" cy="457200"/>
+          </a:xfrm>
+          <a:prstGeom prst="rect">
+            <a:avLst/>
+          </a:prstGeom>
+          <a:noFill/>
+        </p:spPr>
+        <p:txBody>
+          <a:bodyPr wrap="square">
+            <a:spAutoFit/>
+          </a:bodyPr>
+          <a:lstStyle/>
+          <a:p>
+            <a:pPr algn="ctr"/>
+            <a:r>
+              <a:rPr sz="850" b="0" i="0">
+                <a:solidFill>
+                  <a:srgbClr val="64748B"/>
+                </a:solidFill>
+                <a:latin typeface="Calibri"/>
+              </a:rPr>
+              <a:t>URA landed price index
+Q1 2019 → Q1 2026</a:t>
+            </a:r>
+          </a:p>
+        </p:txBody>
+      </p:sp>
+      <p:sp>
+        <p:nvSpPr>
+          <p:cNvPr id="19" name="Rectangle 18">
+            <a:extLst>
+              <a:ext uri="{FF2B5EF4-FFF2-40B4-BE49-F238E27FC236}">
+                <a16:creationId xmlns:a16="http://schemas.microsoft.com/office/drawing/2014/main" id="{72ABC103-46E1-9039-2294-A800F5A14F54}"/>
+              </a:ext>
+            </a:extLst>
+          </p:cNvPr>
+          <p:cNvSpPr/>
+          <p:nvPr/>
+        </p:nvSpPr>
+        <p:spPr>
+          <a:xfrm>
+            <a:off x="3842829" y="2067494"/>
+            <a:ext cx="1552193" cy="1024128"/>
+          </a:xfrm>
+          <a:prstGeom prst="rect">
+            <a:avLst/>
+          </a:prstGeom>
+          <a:solidFill>
+            <a:srgbClr val="FDF6E3"/>
+          </a:solidFill>
+          <a:ln w="12700">
+            <a:solidFill>
+              <a:srgbClr val="C9A84C"/>
+            </a:solidFill>
+          </a:ln>
+        </p:spPr>
+        <p:style>
+          <a:lnRef idx="1">
+            <a:schemeClr val="accent1"/>
+          </a:lnRef>
+          <a:fillRef idx="3">
+            <a:schemeClr val="accent1"/>
+          </a:fillRef>
+          <a:effectRef idx="2">
+            <a:schemeClr val="accent1"/>
+          </a:effectRef>
+          <a:fontRef idx="minor">
+            <a:schemeClr val="lt1"/>
+          </a:fontRef>
+        </p:style>
+        <p:txBody>
+          <a:bodyPr rtlCol="0" anchor="ctr"/>
+          <a:lstStyle/>
+          <a:p>
+            <a:pPr algn="ctr"/>
+            <a:endParaRPr/>
+          </a:p>
+        </p:txBody>
+      </p:sp>
+      <p:sp>
+        <p:nvSpPr>
+          <p:cNvPr id="20" name="TextBox 19">
+            <a:extLst>
+              <a:ext uri="{FF2B5EF4-FFF2-40B4-BE49-F238E27FC236}">
+                <a16:creationId xmlns:a16="http://schemas.microsoft.com/office/drawing/2014/main" id="{37798BC6-04BF-9C76-5C71-2DD029D39427}"/>
+              </a:ext>
+            </a:extLst>
+          </p:cNvPr>
+          <p:cNvSpPr txBox="1"/>
+          <p:nvPr/>
+        </p:nvSpPr>
+        <p:spPr>
+          <a:xfrm>
+            <a:off x="3787963" y="2026039"/>
+            <a:ext cx="1604773" cy="400110"/>
+          </a:xfrm>
+          <a:prstGeom prst="rect">
+            <a:avLst/>
+          </a:prstGeom>
+          <a:noFill/>
+        </p:spPr>
+        <p:txBody>
+          <a:bodyPr wrap="square">
+            <a:spAutoFit/>
+          </a:bodyPr>
+          <a:lstStyle/>
+          <a:p>
+            <a:pPr algn="ctr"/>
+            <a:r>
+              <a:rPr sz="2000" b="1" i="0" dirty="0">
+                <a:solidFill>
+                  <a:srgbClr val="1B2A4A"/>
+                </a:solidFill>
+                <a:latin typeface="Calibri"/>
+              </a:rPr>
+              <a:t>2</a:t>
+            </a:r>
+            <a:r>
+              <a:rPr lang="en-US" sz="2000" b="1" i="0" dirty="0">
+                <a:solidFill>
+                  <a:srgbClr val="1B2A4A"/>
+                </a:solidFill>
+                <a:latin typeface="Calibri"/>
+              </a:rPr>
+              <a:t>1</a:t>
+            </a:r>
+            <a:endParaRPr sz="2000" b="1" i="0" dirty="0">
+              <a:solidFill>
+                <a:srgbClr val="1B2A4A"/>
+              </a:solidFill>
+              <a:latin typeface="Calibri"/>
+            </a:endParaRPr>
+          </a:p>
+        </p:txBody>
+      </p:sp>
+      <p:sp>
+        <p:nvSpPr>
+          <p:cNvPr id="21" name="TextBox 20">
+            <a:extLst>
+              <a:ext uri="{FF2B5EF4-FFF2-40B4-BE49-F238E27FC236}">
+                <a16:creationId xmlns:a16="http://schemas.microsoft.com/office/drawing/2014/main" id="{95071643-9398-4290-E04A-41298952FA7D}"/>
+              </a:ext>
+            </a:extLst>
+          </p:cNvPr>
+          <p:cNvSpPr txBox="1"/>
+          <p:nvPr/>
+        </p:nvSpPr>
+        <p:spPr>
+          <a:xfrm>
+            <a:off x="3897692" y="2598092"/>
+            <a:ext cx="1442466" cy="457200"/>
+          </a:xfrm>
+          <a:prstGeom prst="rect">
+            <a:avLst/>
+          </a:prstGeom>
+          <a:noFill/>
+        </p:spPr>
+        <p:txBody>
+          <a:bodyPr wrap="square">
+            <a:spAutoFit/>
+          </a:bodyPr>
+          <a:lstStyle/>
+          <a:p>
+            <a:pPr algn="ctr"/>
+            <a:r>
+              <a:rPr sz="850" b="0" i="0">
+                <a:solidFill>
+                  <a:srgbClr val="64748B"/>
+                </a:solidFill>
+                <a:latin typeface="Calibri"/>
+              </a:rPr>
+              <a:t>Thomson Garden Estate
+last 12 months</a:t>
+            </a:r>
+          </a:p>
+        </p:txBody>
+      </p:sp>
+      <p:sp>
+        <p:nvSpPr>
+          <p:cNvPr id="22" name="Rectangle 21">
+            <a:extLst>
+              <a:ext uri="{FF2B5EF4-FFF2-40B4-BE49-F238E27FC236}">
+                <a16:creationId xmlns:a16="http://schemas.microsoft.com/office/drawing/2014/main" id="{FBBF57DA-3278-1905-6E9B-F3E20150E58E}"/>
+              </a:ext>
+            </a:extLst>
+          </p:cNvPr>
+          <p:cNvSpPr/>
+          <p:nvPr/>
+        </p:nvSpPr>
+        <p:spPr>
+          <a:xfrm>
+            <a:off x="5504751" y="2067494"/>
+            <a:ext cx="1552193" cy="1024128"/>
+          </a:xfrm>
+          <a:prstGeom prst="rect">
+            <a:avLst/>
+          </a:prstGeom>
+          <a:solidFill>
+            <a:srgbClr val="FDF6E3"/>
+          </a:solidFill>
+          <a:ln w="12700">
+            <a:solidFill>
+              <a:srgbClr val="C9A84C"/>
+            </a:solidFill>
+          </a:ln>
+        </p:spPr>
+        <p:style>
+          <a:lnRef idx="1">
+            <a:schemeClr val="accent1"/>
+          </a:lnRef>
+          <a:fillRef idx="3">
+            <a:schemeClr val="accent1"/>
+          </a:fillRef>
+          <a:effectRef idx="2">
+            <a:schemeClr val="accent1"/>
+          </a:effectRef>
+          <a:fontRef idx="minor">
+            <a:schemeClr val="lt1"/>
+          </a:fontRef>
+        </p:style>
+        <p:txBody>
+          <a:bodyPr rtlCol="0" anchor="ctr"/>
+          <a:lstStyle/>
+          <a:p>
+            <a:pPr algn="ctr"/>
+            <a:endParaRPr/>
+          </a:p>
+        </p:txBody>
+      </p:sp>
+      <p:sp>
+        <p:nvSpPr>
+          <p:cNvPr id="23" name="TextBox 22">
+            <a:extLst>
+              <a:ext uri="{FF2B5EF4-FFF2-40B4-BE49-F238E27FC236}">
+                <a16:creationId xmlns:a16="http://schemas.microsoft.com/office/drawing/2014/main" id="{4355CD5D-3738-14E0-2BBC-1D5E9EBB98D0}"/>
+              </a:ext>
+            </a:extLst>
+          </p:cNvPr>
+          <p:cNvSpPr txBox="1"/>
+          <p:nvPr/>
+        </p:nvSpPr>
+        <p:spPr>
+          <a:xfrm>
+            <a:off x="5559614" y="2149913"/>
+            <a:ext cx="1442466" cy="438912"/>
+          </a:xfrm>
+          <a:prstGeom prst="rect">
+            <a:avLst/>
+          </a:prstGeom>
+          <a:noFill/>
+        </p:spPr>
+        <p:txBody>
+          <a:bodyPr wrap="square">
+            <a:spAutoFit/>
+          </a:bodyPr>
+          <a:lstStyle/>
+          <a:p>
+            <a:pPr algn="ctr"/>
+            <a:r>
+              <a:rPr sz="2000" b="1" i="0" dirty="0">
+                <a:solidFill>
+                  <a:srgbClr val="1B2A4A"/>
+                </a:solidFill>
+                <a:latin typeface="Calibri"/>
+              </a:rPr>
+              <a:t>+46%</a:t>
+            </a:r>
+          </a:p>
+        </p:txBody>
+      </p:sp>
+      <p:sp>
+        <p:nvSpPr>
+          <p:cNvPr id="24" name="TextBox 23">
+            <a:extLst>
+              <a:ext uri="{FF2B5EF4-FFF2-40B4-BE49-F238E27FC236}">
+                <a16:creationId xmlns:a16="http://schemas.microsoft.com/office/drawing/2014/main" id="{003E90CE-ED7D-A0EC-73C5-27A8F5AABF10}"/>
+              </a:ext>
+            </a:extLst>
+          </p:cNvPr>
+          <p:cNvSpPr txBox="1"/>
+          <p:nvPr/>
+        </p:nvSpPr>
+        <p:spPr>
+          <a:xfrm>
+            <a:off x="5559614" y="2598092"/>
+            <a:ext cx="1442466" cy="457200"/>
+          </a:xfrm>
+          <a:prstGeom prst="rect">
+            <a:avLst/>
+          </a:prstGeom>
+          <a:noFill/>
+        </p:spPr>
+        <p:txBody>
+          <a:bodyPr wrap="square">
+            <a:spAutoFit/>
+          </a:bodyPr>
+          <a:lstStyle/>
+          <a:p>
+            <a:pPr algn="ctr"/>
+            <a:r>
+              <a:rPr sz="850" b="0" i="0">
+                <a:solidFill>
+                  <a:srgbClr val="64748B"/>
+                </a:solidFill>
+                <a:latin typeface="Calibri"/>
+              </a:rPr>
+              <a:t>ultra-wealthy buyer count
+forecast by 2031</a:t>
+            </a:r>
+          </a:p>
+        </p:txBody>
+      </p:sp>
+      <p:sp>
+        <p:nvSpPr>
+          <p:cNvPr id="25" name="TextBox 24">
+            <a:extLst>
+              <a:ext uri="{FF2B5EF4-FFF2-40B4-BE49-F238E27FC236}">
+                <a16:creationId xmlns:a16="http://schemas.microsoft.com/office/drawing/2014/main" id="{F02A710B-6EF4-B807-B04E-94EF6363AC47}"/>
+              </a:ext>
+            </a:extLst>
+          </p:cNvPr>
+          <p:cNvSpPr txBox="1"/>
+          <p:nvPr/>
+        </p:nvSpPr>
+        <p:spPr>
+          <a:xfrm>
+            <a:off x="457200" y="3313205"/>
+            <a:ext cx="4389120" cy="256032"/>
+          </a:xfrm>
+          <a:prstGeom prst="rect">
+            <a:avLst/>
+          </a:prstGeom>
+          <a:noFill/>
+        </p:spPr>
+        <p:txBody>
+          <a:bodyPr wrap="square">
+            <a:spAutoFit/>
+          </a:bodyPr>
+          <a:lstStyle/>
+          <a:p>
+            <a:pPr algn="l"/>
+            <a:r>
+              <a:rPr sz="850" b="1" i="0" dirty="0">
+                <a:solidFill>
+                  <a:srgbClr val="C9A84C"/>
+                </a:solidFill>
+                <a:latin typeface="Calibri"/>
+              </a:rPr>
+              <a:t>WHY SELLERS ARE MOVING NOW</a:t>
+            </a:r>
+          </a:p>
+        </p:txBody>
+      </p:sp>
+      <p:sp>
+        <p:nvSpPr>
+          <p:cNvPr id="26" name="Rectangle 25">
+            <a:extLst>
+              <a:ext uri="{FF2B5EF4-FFF2-40B4-BE49-F238E27FC236}">
+                <a16:creationId xmlns:a16="http://schemas.microsoft.com/office/drawing/2014/main" id="{95F5C60F-71D0-F538-DF9F-4AF7B74FBC04}"/>
+              </a:ext>
+            </a:extLst>
+          </p:cNvPr>
+          <p:cNvSpPr/>
+          <p:nvPr/>
+        </p:nvSpPr>
+        <p:spPr>
+          <a:xfrm>
+            <a:off x="457200" y="3602155"/>
+            <a:ext cx="4389120" cy="2395728"/>
+          </a:xfrm>
+          <a:prstGeom prst="rect">
+            <a:avLst/>
+          </a:prstGeom>
+          <a:solidFill>
+            <a:srgbClr val="F4F6FA"/>
+          </a:solidFill>
+          <a:ln w="6350">
+            <a:solidFill>
+              <a:srgbClr val="D9E2EF"/>
+            </a:solidFill>
+          </a:ln>
+        </p:spPr>
+        <p:style>
+          <a:lnRef idx="1">
+            <a:schemeClr val="accent1"/>
+          </a:lnRef>
+          <a:fillRef idx="3">
+            <a:schemeClr val="accent1"/>
+          </a:fillRef>
+          <a:effectRef idx="2">
+            <a:schemeClr val="accent1"/>
+          </a:effectRef>
+          <a:fontRef idx="minor">
+            <a:schemeClr val="lt1"/>
+          </a:fontRef>
+        </p:style>
+        <p:txBody>
+          <a:bodyPr rtlCol="0" anchor="ctr"/>
+          <a:lstStyle/>
+          <a:p>
+            <a:pPr algn="ctr"/>
+            <a:endParaRPr/>
+          </a:p>
+        </p:txBody>
+      </p:sp>
+      <p:sp>
+        <p:nvSpPr>
+          <p:cNvPr id="27" name="Oval 26">
+            <a:extLst>
+              <a:ext uri="{FF2B5EF4-FFF2-40B4-BE49-F238E27FC236}">
+                <a16:creationId xmlns:a16="http://schemas.microsoft.com/office/drawing/2014/main" id="{2383E093-A32B-8E2A-30CB-D6E68C4C33F2}"/>
+              </a:ext>
+            </a:extLst>
+          </p:cNvPr>
+          <p:cNvSpPr/>
+          <p:nvPr/>
+        </p:nvSpPr>
+        <p:spPr>
+          <a:xfrm>
+            <a:off x="566928" y="3772134"/>
+            <a:ext cx="237744" cy="237744"/>
+          </a:xfrm>
+          <a:prstGeom prst="ellipse">
+            <a:avLst/>
+          </a:prstGeom>
+          <a:solidFill>
+            <a:srgbClr val="1B2A4A"/>
+          </a:solidFill>
+          <a:ln>
+            <a:noFill/>
+          </a:ln>
+        </p:spPr>
+        <p:style>
+          <a:lnRef idx="1">
+            <a:schemeClr val="accent1"/>
+          </a:lnRef>
+          <a:fillRef idx="3">
+            <a:schemeClr val="accent1"/>
+          </a:fillRef>
+          <a:effectRef idx="2">
+            <a:schemeClr val="accent1"/>
+          </a:effectRef>
+          <a:fontRef idx="minor">
+            <a:schemeClr val="lt1"/>
+          </a:fontRef>
+        </p:style>
+        <p:txBody>
+          <a:bodyPr rtlCol="0" anchor="ctr"/>
+          <a:lstStyle/>
+          <a:p>
+            <a:pPr algn="ctr"/>
+            <a:endParaRPr/>
+          </a:p>
+        </p:txBody>
+      </p:sp>
+      <p:sp>
+        <p:nvSpPr>
+          <p:cNvPr id="28" name="TextBox 27">
+            <a:extLst>
+              <a:ext uri="{FF2B5EF4-FFF2-40B4-BE49-F238E27FC236}">
+                <a16:creationId xmlns:a16="http://schemas.microsoft.com/office/drawing/2014/main" id="{F5F0FB14-A80E-D5E9-85E7-078F96EAC163}"/>
+              </a:ext>
+            </a:extLst>
+          </p:cNvPr>
+          <p:cNvSpPr txBox="1"/>
+          <p:nvPr/>
+        </p:nvSpPr>
+        <p:spPr>
+          <a:xfrm>
+            <a:off x="566928" y="3772134"/>
+            <a:ext cx="237744" cy="237744"/>
+          </a:xfrm>
+          <a:prstGeom prst="rect">
+            <a:avLst/>
+          </a:prstGeom>
+          <a:noFill/>
+        </p:spPr>
+        <p:txBody>
+          <a:bodyPr wrap="square">
+            <a:spAutoFit/>
+          </a:bodyPr>
+          <a:lstStyle/>
+          <a:p>
+            <a:pPr algn="ctr"/>
+            <a:r>
+              <a:rPr sz="800" b="1" i="0">
+                <a:solidFill>
+                  <a:srgbClr val="C9A84C"/>
+                </a:solidFill>
+                <a:latin typeface="Calibri"/>
+              </a:rPr>
+              <a:t>1</a:t>
+            </a:r>
+          </a:p>
+        </p:txBody>
+      </p:sp>
+      <p:sp>
+        <p:nvSpPr>
+          <p:cNvPr id="29" name="TextBox 28">
+            <a:extLst>
+              <a:ext uri="{FF2B5EF4-FFF2-40B4-BE49-F238E27FC236}">
+                <a16:creationId xmlns:a16="http://schemas.microsoft.com/office/drawing/2014/main" id="{82BAC320-1925-425C-F458-63606F411294}"/>
+              </a:ext>
+            </a:extLst>
+          </p:cNvPr>
+          <p:cNvSpPr txBox="1"/>
+          <p:nvPr/>
+        </p:nvSpPr>
+        <p:spPr>
+          <a:xfrm>
+            <a:off x="896112" y="3715291"/>
+            <a:ext cx="1280160" cy="201168"/>
+          </a:xfrm>
+          <a:prstGeom prst="rect">
+            <a:avLst/>
+          </a:prstGeom>
+          <a:noFill/>
+        </p:spPr>
+        <p:txBody>
+          <a:bodyPr wrap="square">
+            <a:spAutoFit/>
+          </a:bodyPr>
+          <a:lstStyle/>
+          <a:p>
+            <a:pPr algn="l"/>
+            <a:r>
+              <a:rPr sz="950" b="1" i="0" dirty="0">
+                <a:solidFill>
+                  <a:srgbClr val="1B2A4A"/>
+                </a:solidFill>
+                <a:latin typeface="Calibri"/>
+              </a:rPr>
+              <a:t>Prices up 6.7% YoY</a:t>
+            </a:r>
+          </a:p>
+        </p:txBody>
+      </p:sp>
+      <p:sp>
+        <p:nvSpPr>
+          <p:cNvPr id="30" name="TextBox 29">
+            <a:extLst>
+              <a:ext uri="{FF2B5EF4-FFF2-40B4-BE49-F238E27FC236}">
+                <a16:creationId xmlns:a16="http://schemas.microsoft.com/office/drawing/2014/main" id="{5B38C430-2D64-535B-1649-D0A1B429115E}"/>
+              </a:ext>
+            </a:extLst>
+          </p:cNvPr>
+          <p:cNvSpPr txBox="1"/>
+          <p:nvPr/>
+        </p:nvSpPr>
+        <p:spPr>
+          <a:xfrm>
+            <a:off x="896112" y="3841214"/>
+            <a:ext cx="2926080" cy="182880"/>
+          </a:xfrm>
+          <a:prstGeom prst="rect">
+            <a:avLst/>
+          </a:prstGeom>
+          <a:noFill/>
+        </p:spPr>
+        <p:txBody>
+          <a:bodyPr wrap="square">
+            <a:spAutoFit/>
+          </a:bodyPr>
+          <a:lstStyle/>
+          <a:p>
+            <a:pPr algn="l"/>
+            <a:r>
+              <a:rPr sz="850" b="0" i="0" dirty="0">
+                <a:solidFill>
+                  <a:srgbClr val="64748B"/>
+                </a:solidFill>
+                <a:latin typeface="Calibri"/>
+              </a:rPr>
+              <a:t>Strong market recovery — Q2/Q3 is peak transaction season.</a:t>
+            </a:r>
+          </a:p>
+        </p:txBody>
+      </p:sp>
+      <p:sp>
+        <p:nvSpPr>
+          <p:cNvPr id="31" name="Oval 30">
+            <a:extLst>
+              <a:ext uri="{FF2B5EF4-FFF2-40B4-BE49-F238E27FC236}">
+                <a16:creationId xmlns:a16="http://schemas.microsoft.com/office/drawing/2014/main" id="{1CB7BF31-3D19-A432-86EE-3261916876F0}"/>
+              </a:ext>
+            </a:extLst>
+          </p:cNvPr>
+          <p:cNvSpPr/>
+          <p:nvPr/>
+        </p:nvSpPr>
+        <p:spPr>
+          <a:xfrm>
+            <a:off x="566928" y="4275845"/>
+            <a:ext cx="237744" cy="237744"/>
+          </a:xfrm>
+          <a:prstGeom prst="ellipse">
+            <a:avLst/>
+          </a:prstGeom>
+          <a:solidFill>
+            <a:srgbClr val="1B2A4A"/>
+          </a:solidFill>
+          <a:ln>
+            <a:noFill/>
+          </a:ln>
+        </p:spPr>
+        <p:style>
+          <a:lnRef idx="1">
+            <a:schemeClr val="accent1"/>
+          </a:lnRef>
+          <a:fillRef idx="3">
+            <a:schemeClr val="accent1"/>
+          </a:fillRef>
+          <a:effectRef idx="2">
+            <a:schemeClr val="accent1"/>
+          </a:effectRef>
+          <a:fontRef idx="minor">
+            <a:schemeClr val="lt1"/>
+          </a:fontRef>
+        </p:style>
+        <p:txBody>
+          <a:bodyPr rtlCol="0" anchor="ctr"/>
+          <a:lstStyle/>
+          <a:p>
+            <a:pPr algn="ctr"/>
+            <a:endParaRPr/>
+          </a:p>
+        </p:txBody>
+      </p:sp>
+      <p:sp>
+        <p:nvSpPr>
+          <p:cNvPr id="32" name="TextBox 31">
+            <a:extLst>
+              <a:ext uri="{FF2B5EF4-FFF2-40B4-BE49-F238E27FC236}">
+                <a16:creationId xmlns:a16="http://schemas.microsoft.com/office/drawing/2014/main" id="{A60F21CF-71AF-599C-548C-054C80EA24EB}"/>
+              </a:ext>
+            </a:extLst>
+          </p:cNvPr>
+          <p:cNvSpPr txBox="1"/>
+          <p:nvPr/>
+        </p:nvSpPr>
+        <p:spPr>
+          <a:xfrm>
+            <a:off x="566928" y="4275845"/>
+            <a:ext cx="237744" cy="237744"/>
+          </a:xfrm>
+          <a:prstGeom prst="rect">
+            <a:avLst/>
+          </a:prstGeom>
+          <a:noFill/>
+        </p:spPr>
+        <p:txBody>
+          <a:bodyPr wrap="square">
+            <a:spAutoFit/>
+          </a:bodyPr>
+          <a:lstStyle/>
+          <a:p>
+            <a:pPr algn="ctr"/>
+            <a:r>
+              <a:rPr sz="800" b="1" i="0">
+                <a:solidFill>
+                  <a:srgbClr val="C9A84C"/>
+                </a:solidFill>
+                <a:latin typeface="Calibri"/>
+              </a:rPr>
+              <a:t>2</a:t>
+            </a:r>
+          </a:p>
+        </p:txBody>
+      </p:sp>
+      <p:sp>
+        <p:nvSpPr>
+          <p:cNvPr id="33" name="TextBox 32">
+            <a:extLst>
+              <a:ext uri="{FF2B5EF4-FFF2-40B4-BE49-F238E27FC236}">
+                <a16:creationId xmlns:a16="http://schemas.microsoft.com/office/drawing/2014/main" id="{5707030F-E3FC-1D66-7858-D8C9C9FD9E1B}"/>
+              </a:ext>
+            </a:extLst>
+          </p:cNvPr>
+          <p:cNvSpPr txBox="1"/>
+          <p:nvPr/>
+        </p:nvSpPr>
+        <p:spPr>
+          <a:xfrm>
+            <a:off x="896112" y="4215188"/>
+            <a:ext cx="1868424" cy="238527"/>
+          </a:xfrm>
+          <a:prstGeom prst="rect">
+            <a:avLst/>
+          </a:prstGeom>
+          <a:noFill/>
+        </p:spPr>
+        <p:txBody>
+          <a:bodyPr wrap="square">
+            <a:spAutoFit/>
+          </a:bodyPr>
+          <a:lstStyle/>
+          <a:p>
+            <a:pPr algn="l"/>
+            <a:r>
+              <a:rPr sz="950" b="1" i="0" dirty="0">
+                <a:solidFill>
+                  <a:srgbClr val="1B2A4A"/>
+                </a:solidFill>
+                <a:latin typeface="Calibri"/>
+              </a:rPr>
+              <a:t>Declining interest rates</a:t>
+            </a:r>
+          </a:p>
+        </p:txBody>
+      </p:sp>
+      <p:sp>
+        <p:nvSpPr>
+          <p:cNvPr id="34" name="TextBox 33">
+            <a:extLst>
+              <a:ext uri="{FF2B5EF4-FFF2-40B4-BE49-F238E27FC236}">
+                <a16:creationId xmlns:a16="http://schemas.microsoft.com/office/drawing/2014/main" id="{A8507DDB-43E1-E33E-B8F4-28D3EC5C6023}"/>
+              </a:ext>
+            </a:extLst>
+          </p:cNvPr>
+          <p:cNvSpPr txBox="1"/>
+          <p:nvPr/>
+        </p:nvSpPr>
+        <p:spPr>
+          <a:xfrm>
+            <a:off x="896112" y="4341116"/>
+            <a:ext cx="2926080" cy="182880"/>
+          </a:xfrm>
+          <a:prstGeom prst="rect">
+            <a:avLst/>
+          </a:prstGeom>
+          <a:noFill/>
+        </p:spPr>
+        <p:txBody>
+          <a:bodyPr wrap="square">
+            <a:spAutoFit/>
+          </a:bodyPr>
+          <a:lstStyle/>
+          <a:p>
+            <a:pPr algn="l"/>
+            <a:r>
+              <a:rPr sz="850" b="0" i="0" dirty="0">
+                <a:solidFill>
+                  <a:srgbClr val="64748B"/>
+                </a:solidFill>
+                <a:latin typeface="Calibri"/>
+              </a:rPr>
+              <a:t>SORA falling → buyer affordability improving → larger qualified buyer pool.</a:t>
+            </a:r>
+          </a:p>
+        </p:txBody>
+      </p:sp>
+      <p:sp>
+        <p:nvSpPr>
+          <p:cNvPr id="35" name="Oval 34">
+            <a:extLst>
+              <a:ext uri="{FF2B5EF4-FFF2-40B4-BE49-F238E27FC236}">
+                <a16:creationId xmlns:a16="http://schemas.microsoft.com/office/drawing/2014/main" id="{A65FA9F8-7DDE-F62D-E190-FC8CE57ADCF7}"/>
+              </a:ext>
+            </a:extLst>
+          </p:cNvPr>
+          <p:cNvSpPr/>
+          <p:nvPr/>
+        </p:nvSpPr>
+        <p:spPr>
+          <a:xfrm>
+            <a:off x="566928" y="4838474"/>
+            <a:ext cx="237744" cy="237744"/>
+          </a:xfrm>
+          <a:prstGeom prst="ellipse">
+            <a:avLst/>
+          </a:prstGeom>
+          <a:solidFill>
+            <a:srgbClr val="1B2A4A"/>
+          </a:solidFill>
+          <a:ln>
+            <a:noFill/>
+          </a:ln>
+        </p:spPr>
+        <p:style>
+          <a:lnRef idx="1">
+            <a:schemeClr val="accent1"/>
+          </a:lnRef>
+          <a:fillRef idx="3">
+            <a:schemeClr val="accent1"/>
+          </a:fillRef>
+          <a:effectRef idx="2">
+            <a:schemeClr val="accent1"/>
+          </a:effectRef>
+          <a:fontRef idx="minor">
+            <a:schemeClr val="lt1"/>
+          </a:fontRef>
+        </p:style>
+        <p:txBody>
+          <a:bodyPr rtlCol="0" anchor="ctr"/>
+          <a:lstStyle/>
+          <a:p>
+            <a:pPr algn="ctr"/>
+            <a:endParaRPr/>
+          </a:p>
+        </p:txBody>
+      </p:sp>
+      <p:sp>
+        <p:nvSpPr>
+          <p:cNvPr id="36" name="TextBox 35">
+            <a:extLst>
+              <a:ext uri="{FF2B5EF4-FFF2-40B4-BE49-F238E27FC236}">
+                <a16:creationId xmlns:a16="http://schemas.microsoft.com/office/drawing/2014/main" id="{7E79AA1D-5820-966B-1A5F-28E9F1570BE4}"/>
+              </a:ext>
+            </a:extLst>
+          </p:cNvPr>
+          <p:cNvSpPr txBox="1"/>
+          <p:nvPr/>
+        </p:nvSpPr>
+        <p:spPr>
+          <a:xfrm>
+            <a:off x="566928" y="4838474"/>
+            <a:ext cx="237744" cy="237744"/>
+          </a:xfrm>
+          <a:prstGeom prst="rect">
+            <a:avLst/>
+          </a:prstGeom>
+          <a:noFill/>
+        </p:spPr>
+        <p:txBody>
+          <a:bodyPr wrap="square">
+            <a:spAutoFit/>
+          </a:bodyPr>
+          <a:lstStyle/>
+          <a:p>
+            <a:pPr algn="ctr"/>
+            <a:r>
+              <a:rPr sz="800" b="1" i="0">
+                <a:solidFill>
+                  <a:srgbClr val="C9A84C"/>
+                </a:solidFill>
+                <a:latin typeface="Calibri"/>
+              </a:rPr>
+              <a:t>3</a:t>
+            </a:r>
+          </a:p>
+        </p:txBody>
+      </p:sp>
+      <p:sp>
+        <p:nvSpPr>
+          <p:cNvPr id="37" name="TextBox 36">
+            <a:extLst>
+              <a:ext uri="{FF2B5EF4-FFF2-40B4-BE49-F238E27FC236}">
+                <a16:creationId xmlns:a16="http://schemas.microsoft.com/office/drawing/2014/main" id="{605A8718-4814-BA6B-F5FA-C74865CC8AB7}"/>
+              </a:ext>
+            </a:extLst>
+          </p:cNvPr>
+          <p:cNvSpPr txBox="1"/>
+          <p:nvPr/>
+        </p:nvSpPr>
+        <p:spPr>
+          <a:xfrm>
+            <a:off x="896112" y="4788629"/>
+            <a:ext cx="2155560" cy="238527"/>
+          </a:xfrm>
+          <a:prstGeom prst="rect">
+            <a:avLst/>
+          </a:prstGeom>
+          <a:noFill/>
+        </p:spPr>
+        <p:txBody>
+          <a:bodyPr wrap="square">
+            <a:spAutoFit/>
+          </a:bodyPr>
+          <a:lstStyle/>
+          <a:p>
+            <a:pPr algn="l"/>
+            <a:r>
+              <a:rPr sz="950" b="1" i="0" dirty="0">
+                <a:solidFill>
+                  <a:srgbClr val="1B2A4A"/>
+                </a:solidFill>
+                <a:latin typeface="Calibri"/>
+              </a:rPr>
+              <a:t>Wealthiest buyer base ever</a:t>
+            </a:r>
+          </a:p>
+        </p:txBody>
+      </p:sp>
+      <p:sp>
+        <p:nvSpPr>
+          <p:cNvPr id="38" name="TextBox 37">
+            <a:extLst>
+              <a:ext uri="{FF2B5EF4-FFF2-40B4-BE49-F238E27FC236}">
+                <a16:creationId xmlns:a16="http://schemas.microsoft.com/office/drawing/2014/main" id="{BDEF0F8B-80B5-2DF1-51BC-6961F5713B99}"/>
+              </a:ext>
+            </a:extLst>
+          </p:cNvPr>
+          <p:cNvSpPr txBox="1"/>
+          <p:nvPr/>
+        </p:nvSpPr>
+        <p:spPr>
+          <a:xfrm>
+            <a:off x="896112" y="4919496"/>
+            <a:ext cx="2926080" cy="182880"/>
+          </a:xfrm>
+          <a:prstGeom prst="rect">
+            <a:avLst/>
+          </a:prstGeom>
+          <a:noFill/>
+        </p:spPr>
+        <p:txBody>
+          <a:bodyPr wrap="square">
+            <a:spAutoFit/>
+          </a:bodyPr>
+          <a:lstStyle/>
+          <a:p>
+            <a:pPr algn="l"/>
+            <a:r>
+              <a:rPr sz="850" b="0" i="0" dirty="0">
+                <a:solidFill>
+                  <a:srgbClr val="64748B"/>
+                </a:solidFill>
+                <a:latin typeface="Calibri"/>
+              </a:rPr>
+              <a:t>Singapore UHNWI count up 55% in 5 years. Forecast: +46% more by 2031.</a:t>
+            </a:r>
+          </a:p>
+        </p:txBody>
+      </p:sp>
+      <p:sp>
+        <p:nvSpPr>
+          <p:cNvPr id="39" name="Oval 38">
+            <a:extLst>
+              <a:ext uri="{FF2B5EF4-FFF2-40B4-BE49-F238E27FC236}">
+                <a16:creationId xmlns:a16="http://schemas.microsoft.com/office/drawing/2014/main" id="{6FA917ED-B083-56BF-1D88-9EC99AFD1FDF}"/>
+              </a:ext>
+            </a:extLst>
+          </p:cNvPr>
+          <p:cNvSpPr/>
+          <p:nvPr/>
+        </p:nvSpPr>
+        <p:spPr>
+          <a:xfrm>
+            <a:off x="566928" y="5406793"/>
+            <a:ext cx="237744" cy="237744"/>
+          </a:xfrm>
+          <a:prstGeom prst="ellipse">
+            <a:avLst/>
+          </a:prstGeom>
+          <a:solidFill>
+            <a:srgbClr val="1B2A4A"/>
+          </a:solidFill>
+          <a:ln>
+            <a:noFill/>
+          </a:ln>
+        </p:spPr>
+        <p:style>
+          <a:lnRef idx="1">
+            <a:schemeClr val="accent1"/>
+          </a:lnRef>
+          <a:fillRef idx="3">
+            <a:schemeClr val="accent1"/>
+          </a:fillRef>
+          <a:effectRef idx="2">
+            <a:schemeClr val="accent1"/>
+          </a:effectRef>
+          <a:fontRef idx="minor">
+            <a:schemeClr val="lt1"/>
+          </a:fontRef>
+        </p:style>
+        <p:txBody>
+          <a:bodyPr rtlCol="0" anchor="ctr"/>
+          <a:lstStyle/>
+          <a:p>
+            <a:pPr algn="ctr"/>
+            <a:endParaRPr/>
+          </a:p>
+        </p:txBody>
+      </p:sp>
+      <p:sp>
+        <p:nvSpPr>
+          <p:cNvPr id="40" name="TextBox 39">
+            <a:extLst>
+              <a:ext uri="{FF2B5EF4-FFF2-40B4-BE49-F238E27FC236}">
+                <a16:creationId xmlns:a16="http://schemas.microsoft.com/office/drawing/2014/main" id="{3E025E7B-5391-B163-84BF-3C939E4345E8}"/>
+              </a:ext>
+            </a:extLst>
+          </p:cNvPr>
+          <p:cNvSpPr txBox="1"/>
+          <p:nvPr/>
+        </p:nvSpPr>
+        <p:spPr>
+          <a:xfrm>
+            <a:off x="566928" y="5406793"/>
+            <a:ext cx="237744" cy="237744"/>
+          </a:xfrm>
+          <a:prstGeom prst="rect">
+            <a:avLst/>
+          </a:prstGeom>
+          <a:noFill/>
+        </p:spPr>
+        <p:txBody>
+          <a:bodyPr wrap="square">
+            <a:spAutoFit/>
+          </a:bodyPr>
+          <a:lstStyle/>
+          <a:p>
+            <a:pPr algn="ctr"/>
+            <a:r>
+              <a:rPr sz="800" b="1" i="0">
+                <a:solidFill>
+                  <a:srgbClr val="C9A84C"/>
+                </a:solidFill>
+                <a:latin typeface="Calibri"/>
+              </a:rPr>
+              <a:t>4</a:t>
+            </a:r>
+          </a:p>
+        </p:txBody>
+      </p:sp>
+      <p:sp>
+        <p:nvSpPr>
+          <p:cNvPr id="41" name="TextBox 40">
+            <a:extLst>
+              <a:ext uri="{FF2B5EF4-FFF2-40B4-BE49-F238E27FC236}">
+                <a16:creationId xmlns:a16="http://schemas.microsoft.com/office/drawing/2014/main" id="{37DDD36E-EAAC-EC4D-6271-0F3A452F6073}"/>
+              </a:ext>
+            </a:extLst>
+          </p:cNvPr>
+          <p:cNvSpPr txBox="1"/>
+          <p:nvPr/>
+        </p:nvSpPr>
+        <p:spPr>
+          <a:xfrm>
+            <a:off x="896112" y="5353904"/>
+            <a:ext cx="1280160" cy="201168"/>
+          </a:xfrm>
+          <a:prstGeom prst="rect">
+            <a:avLst/>
+          </a:prstGeom>
+          <a:noFill/>
+        </p:spPr>
+        <p:txBody>
+          <a:bodyPr wrap="square">
+            <a:spAutoFit/>
+          </a:bodyPr>
+          <a:lstStyle/>
+          <a:p>
+            <a:pPr algn="l"/>
+            <a:r>
+              <a:rPr sz="950" b="1" i="0" dirty="0">
+                <a:solidFill>
+                  <a:srgbClr val="1B2A4A"/>
+                </a:solidFill>
+                <a:latin typeface="Calibri"/>
+              </a:rPr>
+              <a:t>Supply stays scarce</a:t>
+            </a:r>
+          </a:p>
+        </p:txBody>
+      </p:sp>
+      <p:sp>
+        <p:nvSpPr>
+          <p:cNvPr id="42" name="TextBox 41">
+            <a:extLst>
+              <a:ext uri="{FF2B5EF4-FFF2-40B4-BE49-F238E27FC236}">
+                <a16:creationId xmlns:a16="http://schemas.microsoft.com/office/drawing/2014/main" id="{917AF8F9-1D47-18D3-762C-11E21040F16D}"/>
+              </a:ext>
+            </a:extLst>
+          </p:cNvPr>
+          <p:cNvSpPr txBox="1"/>
+          <p:nvPr/>
+        </p:nvSpPr>
+        <p:spPr>
+          <a:xfrm>
+            <a:off x="896112" y="5486467"/>
+            <a:ext cx="2926080" cy="182880"/>
+          </a:xfrm>
+          <a:prstGeom prst="rect">
+            <a:avLst/>
+          </a:prstGeom>
+          <a:noFill/>
+        </p:spPr>
+        <p:txBody>
+          <a:bodyPr wrap="square">
+            <a:spAutoFit/>
+          </a:bodyPr>
+          <a:lstStyle/>
+          <a:p>
+            <a:pPr algn="l"/>
+            <a:r>
+              <a:rPr sz="850" b="0" i="0" dirty="0">
+                <a:solidFill>
+                  <a:srgbClr val="64748B"/>
+                </a:solidFill>
+                <a:latin typeface="Calibri"/>
+              </a:rPr>
+              <a:t>Landed stock grew only 12% in 25 years vs 228% for non-landed condos.</a:t>
+            </a:r>
+          </a:p>
+        </p:txBody>
+      </p:sp>
+      <p:sp>
+        <p:nvSpPr>
+          <p:cNvPr id="47" name="TextBox 46">
+            <a:extLst>
+              <a:ext uri="{FF2B5EF4-FFF2-40B4-BE49-F238E27FC236}">
+                <a16:creationId xmlns:a16="http://schemas.microsoft.com/office/drawing/2014/main" id="{5E1E47FA-6B61-47C8-F22B-7426B42EDB1F}"/>
+              </a:ext>
+            </a:extLst>
+          </p:cNvPr>
+          <p:cNvSpPr txBox="1"/>
+          <p:nvPr/>
+        </p:nvSpPr>
+        <p:spPr>
+          <a:xfrm>
+            <a:off x="5029200" y="3327835"/>
+            <a:ext cx="2359152" cy="256032"/>
+          </a:xfrm>
+          <a:prstGeom prst="rect">
+            <a:avLst/>
+          </a:prstGeom>
+          <a:noFill/>
+        </p:spPr>
+        <p:txBody>
+          <a:bodyPr wrap="square">
+            <a:spAutoFit/>
+          </a:bodyPr>
+          <a:lstStyle/>
+          <a:p>
+            <a:pPr algn="l"/>
+            <a:r>
+              <a:rPr sz="800" b="1" i="0">
+                <a:solidFill>
+                  <a:srgbClr val="C9A84C"/>
+                </a:solidFill>
+                <a:latin typeface="Calibri"/>
+              </a:rPr>
+              <a:t>THOMSON GARDEN ESTATE</a:t>
+            </a:r>
+          </a:p>
+        </p:txBody>
+      </p:sp>
+      <p:sp>
+        <p:nvSpPr>
+          <p:cNvPr id="48" name="TextBox 47">
+            <a:extLst>
+              <a:ext uri="{FF2B5EF4-FFF2-40B4-BE49-F238E27FC236}">
+                <a16:creationId xmlns:a16="http://schemas.microsoft.com/office/drawing/2014/main" id="{5E022AAD-6D94-E5AE-1972-AA810DA1C64B}"/>
+              </a:ext>
+            </a:extLst>
+          </p:cNvPr>
+          <p:cNvSpPr txBox="1"/>
+          <p:nvPr/>
+        </p:nvSpPr>
+        <p:spPr>
+          <a:xfrm>
+            <a:off x="5029200" y="3442135"/>
+            <a:ext cx="2359152" cy="307777"/>
+          </a:xfrm>
+          <a:prstGeom prst="rect">
+            <a:avLst/>
+          </a:prstGeom>
+          <a:noFill/>
+        </p:spPr>
+        <p:txBody>
+          <a:bodyPr wrap="square">
+            <a:spAutoFit/>
+          </a:bodyPr>
+          <a:lstStyle/>
+          <a:p>
+            <a:pPr algn="l"/>
+            <a:r>
+              <a:rPr sz="700" b="0" i="1" dirty="0">
+                <a:solidFill>
+                  <a:srgbClr val="64748B"/>
+                </a:solidFill>
+                <a:latin typeface="Calibri"/>
+              </a:rPr>
+              <a:t>Jun 2025 – Jun 2026 · Freehold D20</a:t>
+            </a:r>
+            <a:endParaRPr lang="en-US" sz="700" b="0" i="1" dirty="0">
+              <a:solidFill>
+                <a:srgbClr val="64748B"/>
+              </a:solidFill>
+              <a:latin typeface="Calibri"/>
+            </a:endParaRPr>
+          </a:p>
+          <a:p>
+            <a:pPr algn="l"/>
+            <a:endParaRPr sz="700" b="0" i="1" dirty="0">
+              <a:solidFill>
+                <a:srgbClr val="64748B"/>
+              </a:solidFill>
+              <a:latin typeface="Calibri"/>
+            </a:endParaRPr>
+          </a:p>
+        </p:txBody>
+      </p:sp>
+      <p:sp>
+        <p:nvSpPr>
+          <p:cNvPr id="49" name="Rectangle 48">
+            <a:extLst>
+              <a:ext uri="{FF2B5EF4-FFF2-40B4-BE49-F238E27FC236}">
+                <a16:creationId xmlns:a16="http://schemas.microsoft.com/office/drawing/2014/main" id="{4D125AE5-3D5C-D538-1C75-17F3C5A01F12}"/>
+              </a:ext>
+            </a:extLst>
+          </p:cNvPr>
+          <p:cNvSpPr/>
+          <p:nvPr/>
+        </p:nvSpPr>
+        <p:spPr>
+          <a:xfrm>
+            <a:off x="5029200" y="3602155"/>
+            <a:ext cx="2359152" cy="2395728"/>
+          </a:xfrm>
+          <a:prstGeom prst="rect">
+            <a:avLst/>
+          </a:prstGeom>
+          <a:solidFill>
+            <a:srgbClr val="F4F6FA"/>
+          </a:solidFill>
+          <a:ln w="6350">
+            <a:solidFill>
+              <a:srgbClr val="D9E2EF"/>
+            </a:solidFill>
+          </a:ln>
+        </p:spPr>
+        <p:style>
+          <a:lnRef idx="1">
+            <a:schemeClr val="accent1"/>
+          </a:lnRef>
+          <a:fillRef idx="3">
+            <a:schemeClr val="accent1"/>
+          </a:fillRef>
+          <a:effectRef idx="2">
+            <a:schemeClr val="accent1"/>
+          </a:effectRef>
+          <a:fontRef idx="minor">
+            <a:schemeClr val="lt1"/>
+          </a:fontRef>
+        </p:style>
+        <p:txBody>
+          <a:bodyPr rtlCol="0" anchor="ctr"/>
+          <a:lstStyle/>
+          <a:p>
+            <a:pPr algn="ctr"/>
+            <a:endParaRPr/>
+          </a:p>
+        </p:txBody>
+      </p:sp>
+      <p:sp>
+        <p:nvSpPr>
+          <p:cNvPr id="50" name="Rectangle 49">
+            <a:extLst>
+              <a:ext uri="{FF2B5EF4-FFF2-40B4-BE49-F238E27FC236}">
+                <a16:creationId xmlns:a16="http://schemas.microsoft.com/office/drawing/2014/main" id="{96C1900C-7FE5-5D74-5174-C63FF4341483}"/>
+              </a:ext>
+            </a:extLst>
+          </p:cNvPr>
+          <p:cNvSpPr/>
+          <p:nvPr/>
+        </p:nvSpPr>
+        <p:spPr>
+          <a:xfrm>
+            <a:off x="5120640" y="3693596"/>
+            <a:ext cx="2157984" cy="457200"/>
+          </a:xfrm>
+          <a:prstGeom prst="rect">
+            <a:avLst/>
+          </a:prstGeom>
+          <a:solidFill>
+            <a:srgbClr val="FFFFFF"/>
+          </a:solidFill>
+          <a:ln w="6350">
+            <a:solidFill>
+              <a:srgbClr val="D9E2EF"/>
+            </a:solidFill>
+          </a:ln>
+        </p:spPr>
+        <p:style>
+          <a:lnRef idx="1">
+            <a:schemeClr val="accent1"/>
+          </a:lnRef>
+          <a:fillRef idx="3">
+            <a:schemeClr val="accent1"/>
+          </a:fillRef>
+          <a:effectRef idx="2">
+            <a:schemeClr val="accent1"/>
+          </a:effectRef>
+          <a:fontRef idx="minor">
+            <a:schemeClr val="lt1"/>
+          </a:fontRef>
+        </p:style>
+        <p:txBody>
+          <a:bodyPr rtlCol="0" anchor="ctr"/>
+          <a:lstStyle/>
+          <a:p>
+            <a:pPr algn="ctr"/>
+            <a:endParaRPr/>
+          </a:p>
+        </p:txBody>
+      </p:sp>
+      <p:sp>
+        <p:nvSpPr>
+          <p:cNvPr id="51" name="TextBox 50">
+            <a:extLst>
+              <a:ext uri="{FF2B5EF4-FFF2-40B4-BE49-F238E27FC236}">
+                <a16:creationId xmlns:a16="http://schemas.microsoft.com/office/drawing/2014/main" id="{BEF9D49F-847B-ECCC-13EA-506003A74FE4}"/>
+              </a:ext>
+            </a:extLst>
+          </p:cNvPr>
+          <p:cNvSpPr txBox="1"/>
+          <p:nvPr/>
+        </p:nvSpPr>
+        <p:spPr>
+          <a:xfrm>
+            <a:off x="5193791" y="3739316"/>
+            <a:ext cx="1746503" cy="230832"/>
+          </a:xfrm>
+          <a:prstGeom prst="rect">
+            <a:avLst/>
+          </a:prstGeom>
+          <a:noFill/>
+        </p:spPr>
+        <p:txBody>
+          <a:bodyPr wrap="square">
+            <a:spAutoFit/>
+          </a:bodyPr>
+          <a:lstStyle/>
+          <a:p>
+            <a:pPr algn="l"/>
+            <a:r>
+              <a:rPr sz="900" b="0" i="0" dirty="0">
+                <a:solidFill>
+                  <a:srgbClr val="1B2A4A"/>
+                </a:solidFill>
+                <a:latin typeface="Calibri"/>
+              </a:rPr>
+              <a:t>Terrace (</a:t>
+            </a:r>
+            <a:r>
+              <a:rPr lang="en-US" sz="900" b="0" i="0" dirty="0">
+                <a:solidFill>
+                  <a:srgbClr val="1B2A4A"/>
+                </a:solidFill>
+                <a:latin typeface="Calibri"/>
+              </a:rPr>
+              <a:t>small &amp; </a:t>
+            </a:r>
+            <a:r>
+              <a:rPr sz="900" b="0" i="0" dirty="0">
+                <a:solidFill>
+                  <a:srgbClr val="1B2A4A"/>
+                </a:solidFill>
+                <a:latin typeface="Calibri"/>
+              </a:rPr>
+              <a:t>typical)</a:t>
+            </a:r>
+          </a:p>
+        </p:txBody>
+      </p:sp>
+      <p:sp>
+        <p:nvSpPr>
+          <p:cNvPr id="52" name="TextBox 51">
+            <a:extLst>
+              <a:ext uri="{FF2B5EF4-FFF2-40B4-BE49-F238E27FC236}">
+                <a16:creationId xmlns:a16="http://schemas.microsoft.com/office/drawing/2014/main" id="{008F812C-BE32-D0BF-5BD5-BFBE5090DAA3}"/>
+              </a:ext>
+            </a:extLst>
+          </p:cNvPr>
+          <p:cNvSpPr txBox="1"/>
+          <p:nvPr/>
+        </p:nvSpPr>
+        <p:spPr>
+          <a:xfrm>
+            <a:off x="5193792" y="3867598"/>
+            <a:ext cx="1828800" cy="164592"/>
+          </a:xfrm>
+          <a:prstGeom prst="rect">
+            <a:avLst/>
+          </a:prstGeom>
+          <a:noFill/>
+        </p:spPr>
+        <p:txBody>
+          <a:bodyPr wrap="square">
+            <a:spAutoFit/>
+          </a:bodyPr>
+          <a:lstStyle/>
+          <a:p>
+            <a:pPr algn="l"/>
+            <a:r>
+              <a:rPr sz="1200" b="1" i="0" dirty="0">
+                <a:solidFill>
+                  <a:srgbClr val="C9A84C"/>
+                </a:solidFill>
+                <a:latin typeface="Calibri"/>
+              </a:rPr>
+              <a:t>$2.65M–$4.35M</a:t>
+            </a:r>
+          </a:p>
+        </p:txBody>
+      </p:sp>
+      <p:sp>
+        <p:nvSpPr>
+          <p:cNvPr id="53" name="Rectangle 52">
+            <a:extLst>
+              <a:ext uri="{FF2B5EF4-FFF2-40B4-BE49-F238E27FC236}">
+                <a16:creationId xmlns:a16="http://schemas.microsoft.com/office/drawing/2014/main" id="{72A753F1-CFC3-E35F-97AA-273A1BF1C5EC}"/>
+              </a:ext>
+            </a:extLst>
+          </p:cNvPr>
+          <p:cNvSpPr/>
+          <p:nvPr/>
+        </p:nvSpPr>
+        <p:spPr>
+          <a:xfrm>
+            <a:off x="5120640" y="4242236"/>
+            <a:ext cx="2157984" cy="457200"/>
+          </a:xfrm>
+          <a:prstGeom prst="rect">
+            <a:avLst/>
+          </a:prstGeom>
+          <a:solidFill>
+            <a:srgbClr val="FFFFFF"/>
+          </a:solidFill>
+          <a:ln w="6350">
+            <a:solidFill>
+              <a:srgbClr val="D9E2EF"/>
+            </a:solidFill>
+          </a:ln>
+        </p:spPr>
+        <p:style>
+          <a:lnRef idx="1">
+            <a:schemeClr val="accent1"/>
+          </a:lnRef>
+          <a:fillRef idx="3">
+            <a:schemeClr val="accent1"/>
+          </a:fillRef>
+          <a:effectRef idx="2">
+            <a:schemeClr val="accent1"/>
+          </a:effectRef>
+          <a:fontRef idx="minor">
+            <a:schemeClr val="lt1"/>
+          </a:fontRef>
+        </p:style>
+        <p:txBody>
+          <a:bodyPr rtlCol="0" anchor="ctr"/>
+          <a:lstStyle/>
+          <a:p>
+            <a:pPr algn="ctr"/>
+            <a:endParaRPr/>
+          </a:p>
+        </p:txBody>
+      </p:sp>
+      <p:sp>
+        <p:nvSpPr>
+          <p:cNvPr id="54" name="TextBox 53">
+            <a:extLst>
+              <a:ext uri="{FF2B5EF4-FFF2-40B4-BE49-F238E27FC236}">
+                <a16:creationId xmlns:a16="http://schemas.microsoft.com/office/drawing/2014/main" id="{BC581C2E-A9A5-867D-5B76-2FCDE28D3FF7}"/>
+              </a:ext>
+            </a:extLst>
+          </p:cNvPr>
+          <p:cNvSpPr txBox="1"/>
+          <p:nvPr/>
+        </p:nvSpPr>
+        <p:spPr>
+          <a:xfrm>
+            <a:off x="5193792" y="4287955"/>
+            <a:ext cx="1097280" cy="219456"/>
+          </a:xfrm>
+          <a:prstGeom prst="rect">
+            <a:avLst/>
+          </a:prstGeom>
+          <a:noFill/>
+        </p:spPr>
+        <p:txBody>
+          <a:bodyPr wrap="square">
+            <a:spAutoFit/>
+          </a:bodyPr>
+          <a:lstStyle/>
+          <a:p>
+            <a:pPr algn="l"/>
+            <a:r>
+              <a:rPr sz="900" b="0" i="0">
+                <a:solidFill>
+                  <a:srgbClr val="1B2A4A"/>
+                </a:solidFill>
+                <a:latin typeface="Calibri"/>
+              </a:rPr>
+              <a:t>Terrace (large)</a:t>
+            </a:r>
+          </a:p>
+        </p:txBody>
+      </p:sp>
+      <p:sp>
+        <p:nvSpPr>
+          <p:cNvPr id="55" name="TextBox 54">
+            <a:extLst>
+              <a:ext uri="{FF2B5EF4-FFF2-40B4-BE49-F238E27FC236}">
+                <a16:creationId xmlns:a16="http://schemas.microsoft.com/office/drawing/2014/main" id="{AF7938CA-63FE-B093-BBA7-300E5578FC93}"/>
+              </a:ext>
+            </a:extLst>
+          </p:cNvPr>
+          <p:cNvSpPr txBox="1"/>
+          <p:nvPr/>
+        </p:nvSpPr>
+        <p:spPr>
+          <a:xfrm>
+            <a:off x="5193792" y="4416237"/>
+            <a:ext cx="1828800" cy="164592"/>
+          </a:xfrm>
+          <a:prstGeom prst="rect">
+            <a:avLst/>
+          </a:prstGeom>
+          <a:noFill/>
+        </p:spPr>
+        <p:txBody>
+          <a:bodyPr wrap="square">
+            <a:spAutoFit/>
+          </a:bodyPr>
+          <a:lstStyle/>
+          <a:p>
+            <a:pPr algn="l"/>
+            <a:r>
+              <a:rPr sz="1200" b="1" i="0" dirty="0">
+                <a:solidFill>
+                  <a:srgbClr val="C9A84C"/>
+                </a:solidFill>
+                <a:latin typeface="Calibri"/>
+              </a:rPr>
+              <a:t>$4.35M–$6.25M</a:t>
+            </a:r>
+          </a:p>
+        </p:txBody>
+      </p:sp>
+      <p:sp>
+        <p:nvSpPr>
+          <p:cNvPr id="56" name="Rectangle 55">
+            <a:extLst>
+              <a:ext uri="{FF2B5EF4-FFF2-40B4-BE49-F238E27FC236}">
+                <a16:creationId xmlns:a16="http://schemas.microsoft.com/office/drawing/2014/main" id="{EE26E482-D34A-36D7-C02F-857FDE5A79BE}"/>
+              </a:ext>
+            </a:extLst>
+          </p:cNvPr>
+          <p:cNvSpPr/>
+          <p:nvPr/>
+        </p:nvSpPr>
+        <p:spPr>
+          <a:xfrm>
+            <a:off x="5120640" y="4790876"/>
+            <a:ext cx="2157984" cy="457200"/>
+          </a:xfrm>
+          <a:prstGeom prst="rect">
+            <a:avLst/>
+          </a:prstGeom>
+          <a:solidFill>
+            <a:srgbClr val="FFFFFF"/>
+          </a:solidFill>
+          <a:ln w="6350">
+            <a:solidFill>
+              <a:srgbClr val="D9E2EF"/>
+            </a:solidFill>
+          </a:ln>
+        </p:spPr>
+        <p:style>
+          <a:lnRef idx="1">
+            <a:schemeClr val="accent1"/>
+          </a:lnRef>
+          <a:fillRef idx="3">
+            <a:schemeClr val="accent1"/>
+          </a:fillRef>
+          <a:effectRef idx="2">
+            <a:schemeClr val="accent1"/>
+          </a:effectRef>
+          <a:fontRef idx="minor">
+            <a:schemeClr val="lt1"/>
+          </a:fontRef>
+        </p:style>
+        <p:txBody>
+          <a:bodyPr rtlCol="0" anchor="ctr"/>
+          <a:lstStyle/>
+          <a:p>
+            <a:pPr algn="ctr"/>
+            <a:endParaRPr/>
+          </a:p>
+        </p:txBody>
+      </p:sp>
+      <p:sp>
+        <p:nvSpPr>
+          <p:cNvPr id="57" name="TextBox 56">
+            <a:extLst>
+              <a:ext uri="{FF2B5EF4-FFF2-40B4-BE49-F238E27FC236}">
+                <a16:creationId xmlns:a16="http://schemas.microsoft.com/office/drawing/2014/main" id="{1ECB8882-7D28-F3F2-F48B-5A571063E25E}"/>
+              </a:ext>
+            </a:extLst>
+          </p:cNvPr>
+          <p:cNvSpPr txBox="1"/>
+          <p:nvPr/>
+        </p:nvSpPr>
+        <p:spPr>
+          <a:xfrm>
+            <a:off x="5193792" y="4836596"/>
+            <a:ext cx="1097280" cy="219456"/>
+          </a:xfrm>
+          <a:prstGeom prst="rect">
+            <a:avLst/>
+          </a:prstGeom>
+          <a:noFill/>
+        </p:spPr>
+        <p:txBody>
+          <a:bodyPr wrap="square">
+            <a:spAutoFit/>
+          </a:bodyPr>
+          <a:lstStyle/>
+          <a:p>
+            <a:pPr algn="l"/>
+            <a:r>
+              <a:rPr sz="900" b="0" i="0">
+                <a:solidFill>
+                  <a:srgbClr val="1B2A4A"/>
+                </a:solidFill>
+                <a:latin typeface="Calibri"/>
+              </a:rPr>
+              <a:t>Semi-D</a:t>
+            </a:r>
+          </a:p>
+        </p:txBody>
+      </p:sp>
+      <p:sp>
+        <p:nvSpPr>
+          <p:cNvPr id="58" name="TextBox 57">
+            <a:extLst>
+              <a:ext uri="{FF2B5EF4-FFF2-40B4-BE49-F238E27FC236}">
+                <a16:creationId xmlns:a16="http://schemas.microsoft.com/office/drawing/2014/main" id="{B305AE41-16DB-5D11-3552-F82A71360D46}"/>
+              </a:ext>
+            </a:extLst>
+          </p:cNvPr>
+          <p:cNvSpPr txBox="1"/>
+          <p:nvPr/>
+        </p:nvSpPr>
+        <p:spPr>
+          <a:xfrm>
+            <a:off x="5193792" y="4958252"/>
+            <a:ext cx="1828800" cy="164592"/>
+          </a:xfrm>
+          <a:prstGeom prst="rect">
+            <a:avLst/>
+          </a:prstGeom>
+          <a:noFill/>
+        </p:spPr>
+        <p:txBody>
+          <a:bodyPr wrap="square">
+            <a:spAutoFit/>
+          </a:bodyPr>
+          <a:lstStyle/>
+          <a:p>
+            <a:pPr algn="l"/>
+            <a:r>
+              <a:rPr sz="1200" b="1" i="0" dirty="0">
+                <a:solidFill>
+                  <a:srgbClr val="C9A84C"/>
+                </a:solidFill>
+                <a:latin typeface="Calibri"/>
+              </a:rPr>
+              <a:t>$5.70M–$7.20M</a:t>
+            </a:r>
+          </a:p>
+        </p:txBody>
+      </p:sp>
+      <p:sp>
+        <p:nvSpPr>
+          <p:cNvPr id="59" name="Rectangle 58">
+            <a:extLst>
+              <a:ext uri="{FF2B5EF4-FFF2-40B4-BE49-F238E27FC236}">
+                <a16:creationId xmlns:a16="http://schemas.microsoft.com/office/drawing/2014/main" id="{F6E49AD4-FAEE-0F54-691C-14E5C8DA1009}"/>
+              </a:ext>
+            </a:extLst>
+          </p:cNvPr>
+          <p:cNvSpPr/>
+          <p:nvPr/>
+        </p:nvSpPr>
+        <p:spPr>
+          <a:xfrm>
+            <a:off x="5120640" y="5339516"/>
+            <a:ext cx="2157984" cy="457200"/>
+          </a:xfrm>
+          <a:prstGeom prst="rect">
+            <a:avLst/>
+          </a:prstGeom>
+          <a:solidFill>
+            <a:srgbClr val="FFFFFF"/>
+          </a:solidFill>
+          <a:ln w="6350">
+            <a:solidFill>
+              <a:srgbClr val="D9E2EF"/>
+            </a:solidFill>
+          </a:ln>
+        </p:spPr>
+        <p:style>
+          <a:lnRef idx="1">
+            <a:schemeClr val="accent1"/>
+          </a:lnRef>
+          <a:fillRef idx="3">
+            <a:schemeClr val="accent1"/>
+          </a:fillRef>
+          <a:effectRef idx="2">
+            <a:schemeClr val="accent1"/>
+          </a:effectRef>
+          <a:fontRef idx="minor">
+            <a:schemeClr val="lt1"/>
+          </a:fontRef>
+        </p:style>
+        <p:txBody>
+          <a:bodyPr rtlCol="0" anchor="ctr"/>
+          <a:lstStyle/>
+          <a:p>
+            <a:pPr algn="ctr"/>
+            <a:endParaRPr/>
+          </a:p>
+        </p:txBody>
+      </p:sp>
+      <p:sp>
+        <p:nvSpPr>
+          <p:cNvPr id="60" name="TextBox 59">
+            <a:extLst>
+              <a:ext uri="{FF2B5EF4-FFF2-40B4-BE49-F238E27FC236}">
+                <a16:creationId xmlns:a16="http://schemas.microsoft.com/office/drawing/2014/main" id="{C914C115-524B-8B58-1886-49BAE5AD6F05}"/>
+              </a:ext>
+            </a:extLst>
+          </p:cNvPr>
+          <p:cNvSpPr txBox="1"/>
+          <p:nvPr/>
+        </p:nvSpPr>
+        <p:spPr>
+          <a:xfrm>
+            <a:off x="5193792" y="5385236"/>
+            <a:ext cx="1097280" cy="219456"/>
+          </a:xfrm>
+          <a:prstGeom prst="rect">
+            <a:avLst/>
+          </a:prstGeom>
+          <a:noFill/>
+        </p:spPr>
+        <p:txBody>
+          <a:bodyPr wrap="square">
+            <a:spAutoFit/>
+          </a:bodyPr>
+          <a:lstStyle/>
+          <a:p>
+            <a:pPr algn="l"/>
+            <a:r>
+              <a:rPr sz="900" b="0" i="0">
+                <a:solidFill>
+                  <a:srgbClr val="1B2A4A"/>
+                </a:solidFill>
+                <a:latin typeface="Calibri"/>
+              </a:rPr>
+              <a:t>Avg Land PSF</a:t>
+            </a:r>
+          </a:p>
+        </p:txBody>
+      </p:sp>
+      <p:sp>
+        <p:nvSpPr>
+          <p:cNvPr id="61" name="TextBox 60">
+            <a:extLst>
+              <a:ext uri="{FF2B5EF4-FFF2-40B4-BE49-F238E27FC236}">
+                <a16:creationId xmlns:a16="http://schemas.microsoft.com/office/drawing/2014/main" id="{16B7DF03-EA81-B4AD-169A-65157A5F2F50}"/>
+              </a:ext>
+            </a:extLst>
+          </p:cNvPr>
+          <p:cNvSpPr txBox="1"/>
+          <p:nvPr/>
+        </p:nvSpPr>
+        <p:spPr>
+          <a:xfrm>
+            <a:off x="5193792" y="5513518"/>
+            <a:ext cx="1828800" cy="164592"/>
+          </a:xfrm>
+          <a:prstGeom prst="rect">
+            <a:avLst/>
+          </a:prstGeom>
+          <a:noFill/>
+        </p:spPr>
+        <p:txBody>
+          <a:bodyPr wrap="square">
+            <a:spAutoFit/>
+          </a:bodyPr>
+          <a:lstStyle/>
+          <a:p>
+            <a:pPr algn="l"/>
+            <a:r>
+              <a:rPr sz="1200" b="1" i="0" dirty="0">
+                <a:solidFill>
+                  <a:srgbClr val="C9A84C"/>
+                </a:solidFill>
+                <a:latin typeface="Calibri"/>
+              </a:rPr>
+              <a:t>$3,151 </a:t>
+            </a:r>
+            <a:r>
+              <a:rPr sz="1200" b="1" i="0" dirty="0" err="1">
+                <a:solidFill>
+                  <a:srgbClr val="C9A84C"/>
+                </a:solidFill>
+                <a:latin typeface="Calibri"/>
+              </a:rPr>
+              <a:t>psf</a:t>
+            </a:r>
+            <a:endParaRPr sz="1200" b="1" i="0" dirty="0">
+              <a:solidFill>
+                <a:srgbClr val="C9A84C"/>
+              </a:solidFill>
+              <a:latin typeface="Calibri"/>
+            </a:endParaRPr>
+          </a:p>
+        </p:txBody>
+      </p:sp>
+      <p:sp>
+        <p:nvSpPr>
+          <p:cNvPr id="62" name="TextBox 61">
+            <a:extLst>
+              <a:ext uri="{FF2B5EF4-FFF2-40B4-BE49-F238E27FC236}">
+                <a16:creationId xmlns:a16="http://schemas.microsoft.com/office/drawing/2014/main" id="{5E8ECA3D-479D-2343-2B61-7C991CF8783A}"/>
+              </a:ext>
+            </a:extLst>
+          </p:cNvPr>
+          <p:cNvSpPr txBox="1"/>
+          <p:nvPr/>
+        </p:nvSpPr>
+        <p:spPr>
+          <a:xfrm>
+            <a:off x="5029200" y="6254496"/>
+            <a:ext cx="2359152" cy="164592"/>
+          </a:xfrm>
+          <a:prstGeom prst="rect">
+            <a:avLst/>
+          </a:prstGeom>
+          <a:noFill/>
+        </p:spPr>
+        <p:txBody>
+          <a:bodyPr wrap="square">
+            <a:spAutoFit/>
+          </a:bodyPr>
+          <a:lstStyle/>
+          <a:p>
+            <a:pPr algn="l"/>
+            <a:r>
+              <a:rPr sz="700" b="0" i="1">
+                <a:solidFill>
+                  <a:srgbClr val="64748B"/>
+                </a:solidFill>
+                <a:latin typeface="Calibri"/>
+              </a:rPr>
+              <a:t>Source: URA REALIS (Jun 2025–Jun 2026)</a:t>
+            </a:r>
+          </a:p>
+        </p:txBody>
+      </p:sp>
+      <p:sp>
+        <p:nvSpPr>
+          <p:cNvPr id="63" name="Rectangle 62">
+            <a:extLst>
+              <a:ext uri="{FF2B5EF4-FFF2-40B4-BE49-F238E27FC236}">
+                <a16:creationId xmlns:a16="http://schemas.microsoft.com/office/drawing/2014/main" id="{E31F1E9B-191A-0541-5129-FEFE7C4BA42E}"/>
+              </a:ext>
+            </a:extLst>
+          </p:cNvPr>
+          <p:cNvSpPr/>
+          <p:nvPr/>
+        </p:nvSpPr>
+        <p:spPr>
+          <a:xfrm>
+            <a:off x="21020" y="6236208"/>
+            <a:ext cx="7562088" cy="1042416"/>
+          </a:xfrm>
+          <a:prstGeom prst="rect">
+            <a:avLst/>
+          </a:prstGeom>
+          <a:solidFill>
+            <a:srgbClr val="1B2A4A"/>
+          </a:solidFill>
+          <a:ln>
+            <a:noFill/>
+          </a:ln>
+        </p:spPr>
+        <p:style>
+          <a:lnRef idx="1">
+            <a:schemeClr val="accent1"/>
+          </a:lnRef>
+          <a:fillRef idx="3">
+            <a:schemeClr val="accent1"/>
+          </a:fillRef>
+          <a:effectRef idx="2">
+            <a:schemeClr val="accent1"/>
+          </a:effectRef>
+          <a:fontRef idx="minor">
+            <a:schemeClr val="lt1"/>
+          </a:fontRef>
+        </p:style>
+        <p:txBody>
+          <a:bodyPr rtlCol="0" anchor="ctr"/>
+          <a:lstStyle/>
+          <a:p>
+            <a:pPr algn="ctr"/>
+            <a:endParaRPr/>
+          </a:p>
+        </p:txBody>
+      </p:sp>
+      <p:sp>
+        <p:nvSpPr>
+          <p:cNvPr id="64" name="Rectangle 63">
+            <a:extLst>
+              <a:ext uri="{FF2B5EF4-FFF2-40B4-BE49-F238E27FC236}">
+                <a16:creationId xmlns:a16="http://schemas.microsoft.com/office/drawing/2014/main" id="{9C59D7D0-3A5B-CA36-BAE4-309021F98BF9}"/>
+              </a:ext>
+            </a:extLst>
+          </p:cNvPr>
+          <p:cNvSpPr/>
+          <p:nvPr/>
+        </p:nvSpPr>
+        <p:spPr>
+          <a:xfrm>
+            <a:off x="-10510" y="6236208"/>
+            <a:ext cx="256032" cy="1042416"/>
+          </a:xfrm>
+          <a:prstGeom prst="rect">
+            <a:avLst/>
+          </a:prstGeom>
+          <a:solidFill>
+            <a:srgbClr val="C9A84C"/>
+          </a:solidFill>
+          <a:ln>
+            <a:noFill/>
+          </a:ln>
+        </p:spPr>
+        <p:style>
+          <a:lnRef idx="1">
+            <a:schemeClr val="accent1"/>
+          </a:lnRef>
+          <a:fillRef idx="3">
+            <a:schemeClr val="accent1"/>
+          </a:fillRef>
+          <a:effectRef idx="2">
+            <a:schemeClr val="accent1"/>
+          </a:effectRef>
+          <a:fontRef idx="minor">
+            <a:schemeClr val="lt1"/>
+          </a:fontRef>
+        </p:style>
+        <p:txBody>
+          <a:bodyPr rtlCol="0" anchor="ctr"/>
+          <a:lstStyle/>
+          <a:p>
+            <a:pPr algn="ctr"/>
+            <a:endParaRPr/>
+          </a:p>
+        </p:txBody>
+      </p:sp>
+      <p:sp>
+        <p:nvSpPr>
+          <p:cNvPr id="65" name="TextBox 64">
+            <a:extLst>
+              <a:ext uri="{FF2B5EF4-FFF2-40B4-BE49-F238E27FC236}">
+                <a16:creationId xmlns:a16="http://schemas.microsoft.com/office/drawing/2014/main" id="{D62AD8F6-8338-9742-7854-65622CB36049}"/>
+              </a:ext>
+            </a:extLst>
+          </p:cNvPr>
+          <p:cNvSpPr txBox="1"/>
+          <p:nvPr/>
+        </p:nvSpPr>
+        <p:spPr>
+          <a:xfrm>
+            <a:off x="411480" y="6309360"/>
+            <a:ext cx="5029200" cy="256032"/>
+          </a:xfrm>
+          <a:prstGeom prst="rect">
+            <a:avLst/>
+          </a:prstGeom>
+          <a:noFill/>
+        </p:spPr>
+        <p:txBody>
+          <a:bodyPr wrap="square">
+            <a:spAutoFit/>
+          </a:bodyPr>
+          <a:lstStyle/>
+          <a:p>
+            <a:pPr algn="l"/>
+            <a:r>
+              <a:rPr sz="900" b="1" i="0" dirty="0">
+                <a:solidFill>
+                  <a:srgbClr val="C9A84C"/>
+                </a:solidFill>
+                <a:latin typeface="Calibri"/>
+              </a:rPr>
+              <a:t>WHAT YOUR HOME COULD BE WORTH</a:t>
+            </a:r>
+          </a:p>
+        </p:txBody>
+      </p:sp>
+      <p:sp>
+        <p:nvSpPr>
+          <p:cNvPr id="66" name="TextBox 65">
+            <a:extLst>
+              <a:ext uri="{FF2B5EF4-FFF2-40B4-BE49-F238E27FC236}">
+                <a16:creationId xmlns:a16="http://schemas.microsoft.com/office/drawing/2014/main" id="{FE843702-A56B-3783-FD7B-59C077AB7FF2}"/>
+              </a:ext>
+            </a:extLst>
+          </p:cNvPr>
+          <p:cNvSpPr txBox="1"/>
+          <p:nvPr/>
+        </p:nvSpPr>
+        <p:spPr>
+          <a:xfrm>
+            <a:off x="411480" y="6583680"/>
+            <a:ext cx="6858000" cy="694944"/>
+          </a:xfrm>
+          <a:prstGeom prst="rect">
+            <a:avLst/>
+          </a:prstGeom>
+          <a:noFill/>
+        </p:spPr>
+        <p:txBody>
+          <a:bodyPr wrap="square">
+            <a:spAutoFit/>
+          </a:bodyPr>
+          <a:lstStyle/>
+          <a:p>
+            <a:pPr algn="l"/>
+            <a:r>
+              <a:rPr sz="1000" b="0" i="0">
+                <a:solidFill>
+                  <a:srgbClr val="FFFFFF"/>
+                </a:solidFill>
+                <a:latin typeface="Calibri"/>
+              </a:rPr>
+              <a:t>Based on 21 transactions in Thomson Garden Estate over the last 12 months, freehold terraces have transacted between $2.65M–$6.25M and semi-detached homes at $5.70M–$7.20M. Average land PSF: $3,151. Call me for a complimentary, no-obligation valuation of your specific home.</a:t>
+            </a:r>
+          </a:p>
+        </p:txBody>
+      </p:sp>
+      <p:sp>
+        <p:nvSpPr>
+          <p:cNvPr id="67" name="TextBox 66">
+            <a:extLst>
+              <a:ext uri="{FF2B5EF4-FFF2-40B4-BE49-F238E27FC236}">
+                <a16:creationId xmlns:a16="http://schemas.microsoft.com/office/drawing/2014/main" id="{BA2AE029-764C-9EBE-E889-49D3E4962693}"/>
+              </a:ext>
+            </a:extLst>
+          </p:cNvPr>
+          <p:cNvSpPr txBox="1"/>
+          <p:nvPr/>
+        </p:nvSpPr>
+        <p:spPr>
+          <a:xfrm>
+            <a:off x="946481" y="7398688"/>
+            <a:ext cx="2460266" cy="223138"/>
+          </a:xfrm>
+          <a:prstGeom prst="rect">
+            <a:avLst/>
+          </a:prstGeom>
+          <a:noFill/>
+        </p:spPr>
+        <p:txBody>
+          <a:bodyPr wrap="square">
+            <a:spAutoFit/>
+          </a:bodyPr>
+          <a:lstStyle/>
+          <a:p>
+            <a:pPr algn="l"/>
+            <a:r>
+              <a:rPr sz="850" b="1" i="0" dirty="0">
+                <a:solidFill>
+                  <a:srgbClr val="C9A84C"/>
+                </a:solidFill>
+                <a:latin typeface="Calibri"/>
+              </a:rPr>
+              <a:t>HOW IT WORKS — THREE SIMPLE STEPS</a:t>
+            </a:r>
+          </a:p>
+        </p:txBody>
+      </p:sp>
+      <p:sp>
+        <p:nvSpPr>
+          <p:cNvPr id="68" name="Rectangle 67">
+            <a:extLst>
+              <a:ext uri="{FF2B5EF4-FFF2-40B4-BE49-F238E27FC236}">
+                <a16:creationId xmlns:a16="http://schemas.microsoft.com/office/drawing/2014/main" id="{B66F884D-2734-B9C2-3F93-6C525DA9168B}"/>
+              </a:ext>
+            </a:extLst>
+          </p:cNvPr>
+          <p:cNvSpPr/>
+          <p:nvPr/>
+        </p:nvSpPr>
+        <p:spPr>
+          <a:xfrm>
+            <a:off x="910472" y="7691296"/>
+            <a:ext cx="1755592" cy="1417320"/>
+          </a:xfrm>
+          <a:prstGeom prst="rect">
+            <a:avLst/>
+          </a:prstGeom>
+          <a:solidFill>
+            <a:srgbClr val="FDF6E3"/>
+          </a:solidFill>
+          <a:ln w="9525">
+            <a:solidFill>
+              <a:srgbClr val="C9A84C"/>
+            </a:solidFill>
+          </a:ln>
+        </p:spPr>
+        <p:style>
+          <a:lnRef idx="1">
+            <a:schemeClr val="accent1"/>
+          </a:lnRef>
+          <a:fillRef idx="3">
+            <a:schemeClr val="accent1"/>
+          </a:fillRef>
+          <a:effectRef idx="2">
+            <a:schemeClr val="accent1"/>
+          </a:effectRef>
+          <a:fontRef idx="minor">
+            <a:schemeClr val="lt1"/>
+          </a:fontRef>
+        </p:style>
+        <p:txBody>
+          <a:bodyPr rtlCol="0" anchor="ctr"/>
+          <a:lstStyle/>
+          <a:p>
+            <a:pPr algn="ctr"/>
+            <a:endParaRPr/>
+          </a:p>
+        </p:txBody>
+      </p:sp>
+      <p:sp>
+        <p:nvSpPr>
+          <p:cNvPr id="69" name="Oval 68">
+            <a:extLst>
+              <a:ext uri="{FF2B5EF4-FFF2-40B4-BE49-F238E27FC236}">
+                <a16:creationId xmlns:a16="http://schemas.microsoft.com/office/drawing/2014/main" id="{4CCAFFC5-D82E-E128-7BB8-2F8F9D90E160}"/>
+              </a:ext>
+            </a:extLst>
+          </p:cNvPr>
+          <p:cNvSpPr/>
+          <p:nvPr/>
+        </p:nvSpPr>
+        <p:spPr>
+          <a:xfrm>
+            <a:off x="1609237" y="7755304"/>
+            <a:ext cx="365760" cy="365760"/>
+          </a:xfrm>
+          <a:prstGeom prst="ellipse">
+            <a:avLst/>
+          </a:prstGeom>
+          <a:solidFill>
+            <a:srgbClr val="1B2A4A"/>
+          </a:solidFill>
+          <a:ln>
+            <a:noFill/>
+          </a:ln>
+        </p:spPr>
+        <p:style>
+          <a:lnRef idx="1">
+            <a:schemeClr val="accent1"/>
+          </a:lnRef>
+          <a:fillRef idx="3">
+            <a:schemeClr val="accent1"/>
+          </a:fillRef>
+          <a:effectRef idx="2">
+            <a:schemeClr val="accent1"/>
+          </a:effectRef>
+          <a:fontRef idx="minor">
+            <a:schemeClr val="lt1"/>
+          </a:fontRef>
+        </p:style>
+        <p:txBody>
+          <a:bodyPr rtlCol="0" anchor="ctr"/>
+          <a:lstStyle/>
+          <a:p>
+            <a:pPr algn="ctr"/>
+            <a:endParaRPr dirty="0"/>
+          </a:p>
+        </p:txBody>
+      </p:sp>
+      <p:sp>
+        <p:nvSpPr>
+          <p:cNvPr id="70" name="TextBox 69">
+            <a:extLst>
+              <a:ext uri="{FF2B5EF4-FFF2-40B4-BE49-F238E27FC236}">
+                <a16:creationId xmlns:a16="http://schemas.microsoft.com/office/drawing/2014/main" id="{9F395684-A21B-F804-4708-D8C4B214188B}"/>
+              </a:ext>
+            </a:extLst>
+          </p:cNvPr>
+          <p:cNvSpPr txBox="1"/>
+          <p:nvPr/>
+        </p:nvSpPr>
+        <p:spPr>
+          <a:xfrm>
+            <a:off x="1609237" y="7755304"/>
+            <a:ext cx="365760" cy="365760"/>
+          </a:xfrm>
+          <a:prstGeom prst="rect">
+            <a:avLst/>
+          </a:prstGeom>
+          <a:noFill/>
+        </p:spPr>
+        <p:txBody>
+          <a:bodyPr wrap="square">
+            <a:spAutoFit/>
+          </a:bodyPr>
+          <a:lstStyle/>
+          <a:p>
+            <a:pPr algn="ctr"/>
+            <a:r>
+              <a:rPr sz="1200" b="1" i="0" dirty="0">
+                <a:solidFill>
+                  <a:srgbClr val="C9A84C"/>
+                </a:solidFill>
+                <a:latin typeface="Calibri"/>
+              </a:rPr>
+              <a:t>1</a:t>
+            </a:r>
+          </a:p>
+        </p:txBody>
+      </p:sp>
+      <p:sp>
+        <p:nvSpPr>
+          <p:cNvPr id="71" name="TextBox 70">
+            <a:extLst>
+              <a:ext uri="{FF2B5EF4-FFF2-40B4-BE49-F238E27FC236}">
+                <a16:creationId xmlns:a16="http://schemas.microsoft.com/office/drawing/2014/main" id="{BA335D8D-3384-2637-C9CD-ABE5DDD2A653}"/>
+              </a:ext>
+            </a:extLst>
+          </p:cNvPr>
+          <p:cNvSpPr txBox="1"/>
+          <p:nvPr/>
+        </p:nvSpPr>
+        <p:spPr>
+          <a:xfrm>
+            <a:off x="909205" y="8185072"/>
+            <a:ext cx="1755592" cy="238527"/>
+          </a:xfrm>
+          <a:prstGeom prst="rect">
+            <a:avLst/>
+          </a:prstGeom>
+          <a:noFill/>
+        </p:spPr>
+        <p:txBody>
+          <a:bodyPr wrap="square">
+            <a:spAutoFit/>
+          </a:bodyPr>
+          <a:lstStyle/>
+          <a:p>
+            <a:pPr algn="ctr"/>
+            <a:r>
+              <a:rPr sz="950" b="1" i="0">
+                <a:solidFill>
+                  <a:srgbClr val="1B2A4A"/>
+                </a:solidFill>
+                <a:latin typeface="Calibri"/>
+              </a:rPr>
+              <a:t>Free property assessment</a:t>
+            </a:r>
+          </a:p>
+        </p:txBody>
+      </p:sp>
+      <p:sp>
+        <p:nvSpPr>
+          <p:cNvPr id="72" name="TextBox 71">
+            <a:extLst>
+              <a:ext uri="{FF2B5EF4-FFF2-40B4-BE49-F238E27FC236}">
+                <a16:creationId xmlns:a16="http://schemas.microsoft.com/office/drawing/2014/main" id="{DB2EFCE5-139D-CCD4-BF1C-5A36801E9761}"/>
+              </a:ext>
+            </a:extLst>
+          </p:cNvPr>
+          <p:cNvSpPr txBox="1"/>
+          <p:nvPr/>
+        </p:nvSpPr>
+        <p:spPr>
+          <a:xfrm>
+            <a:off x="909205" y="8459392"/>
+            <a:ext cx="1755593" cy="484748"/>
+          </a:xfrm>
+          <a:prstGeom prst="rect">
+            <a:avLst/>
+          </a:prstGeom>
+          <a:noFill/>
+        </p:spPr>
+        <p:txBody>
+          <a:bodyPr wrap="square">
+            <a:spAutoFit/>
+          </a:bodyPr>
+          <a:lstStyle/>
+          <a:p>
+            <a:pPr algn="ctr"/>
+            <a:r>
+              <a:rPr lang="en-US" sz="850" dirty="0">
+                <a:solidFill>
+                  <a:srgbClr val="64748B"/>
+                </a:solidFill>
+                <a:latin typeface="Calibri"/>
+              </a:rPr>
+              <a:t>We</a:t>
+            </a:r>
+            <a:r>
+              <a:rPr sz="850" b="0" i="0" dirty="0">
+                <a:solidFill>
+                  <a:srgbClr val="64748B"/>
+                </a:solidFill>
+                <a:latin typeface="Calibri"/>
+              </a:rPr>
+              <a:t> visit, assess condition, pull the latest comps and give you an </a:t>
+            </a:r>
+            <a:r>
+              <a:rPr lang="en-US" sz="850" dirty="0">
+                <a:solidFill>
+                  <a:srgbClr val="64748B"/>
+                </a:solidFill>
+                <a:latin typeface="Calibri"/>
+              </a:rPr>
+              <a:t>indicative </a:t>
+            </a:r>
+            <a:r>
+              <a:rPr sz="850" b="0" i="0" dirty="0">
+                <a:solidFill>
+                  <a:srgbClr val="64748B"/>
+                </a:solidFill>
+                <a:latin typeface="Calibri"/>
+              </a:rPr>
+              <a:t>valuation.</a:t>
+            </a:r>
+          </a:p>
+        </p:txBody>
+      </p:sp>
+      <p:sp>
+        <p:nvSpPr>
+          <p:cNvPr id="73" name="Rectangle 72">
+            <a:extLst>
+              <a:ext uri="{FF2B5EF4-FFF2-40B4-BE49-F238E27FC236}">
+                <a16:creationId xmlns:a16="http://schemas.microsoft.com/office/drawing/2014/main" id="{AF2C8818-ADE9-9D8A-E2FA-9F6880A8D9FC}"/>
+              </a:ext>
+            </a:extLst>
+          </p:cNvPr>
+          <p:cNvSpPr/>
+          <p:nvPr/>
+        </p:nvSpPr>
+        <p:spPr>
+          <a:xfrm>
+            <a:off x="2893399" y="7691296"/>
+            <a:ext cx="1755592" cy="1417320"/>
+          </a:xfrm>
+          <a:prstGeom prst="rect">
+            <a:avLst/>
+          </a:prstGeom>
+          <a:solidFill>
+            <a:srgbClr val="FDF6E3"/>
+          </a:solidFill>
+          <a:ln w="9525">
+            <a:solidFill>
+              <a:srgbClr val="C9A84C"/>
+            </a:solidFill>
+          </a:ln>
+        </p:spPr>
+        <p:style>
+          <a:lnRef idx="1">
+            <a:schemeClr val="accent1"/>
+          </a:lnRef>
+          <a:fillRef idx="3">
+            <a:schemeClr val="accent1"/>
+          </a:fillRef>
+          <a:effectRef idx="2">
+            <a:schemeClr val="accent1"/>
+          </a:effectRef>
+          <a:fontRef idx="minor">
+            <a:schemeClr val="lt1"/>
+          </a:fontRef>
+        </p:style>
+        <p:txBody>
+          <a:bodyPr rtlCol="0" anchor="ctr"/>
+          <a:lstStyle/>
+          <a:p>
+            <a:pPr algn="ctr"/>
+            <a:endParaRPr/>
+          </a:p>
+        </p:txBody>
+      </p:sp>
+      <p:sp>
+        <p:nvSpPr>
+          <p:cNvPr id="74" name="Oval 73">
+            <a:extLst>
+              <a:ext uri="{FF2B5EF4-FFF2-40B4-BE49-F238E27FC236}">
+                <a16:creationId xmlns:a16="http://schemas.microsoft.com/office/drawing/2014/main" id="{95C07879-4DB7-3CE8-D33D-38EA3982A30F}"/>
+              </a:ext>
+            </a:extLst>
+          </p:cNvPr>
+          <p:cNvSpPr/>
+          <p:nvPr/>
+        </p:nvSpPr>
+        <p:spPr>
+          <a:xfrm>
+            <a:off x="3572062" y="7760785"/>
+            <a:ext cx="365760" cy="365760"/>
+          </a:xfrm>
+          <a:prstGeom prst="ellipse">
+            <a:avLst/>
+          </a:prstGeom>
+          <a:solidFill>
+            <a:srgbClr val="1B2A4A"/>
+          </a:solidFill>
+          <a:ln>
+            <a:noFill/>
+          </a:ln>
+        </p:spPr>
+        <p:style>
+          <a:lnRef idx="1">
+            <a:schemeClr val="accent1"/>
+          </a:lnRef>
+          <a:fillRef idx="3">
+            <a:schemeClr val="accent1"/>
+          </a:fillRef>
+          <a:effectRef idx="2">
+            <a:schemeClr val="accent1"/>
+          </a:effectRef>
+          <a:fontRef idx="minor">
+            <a:schemeClr val="lt1"/>
+          </a:fontRef>
+        </p:style>
+        <p:txBody>
+          <a:bodyPr rtlCol="0" anchor="ctr"/>
+          <a:lstStyle/>
+          <a:p>
+            <a:pPr algn="ctr"/>
+            <a:endParaRPr/>
+          </a:p>
+        </p:txBody>
+      </p:sp>
+      <p:sp>
+        <p:nvSpPr>
+          <p:cNvPr id="75" name="TextBox 74">
+            <a:extLst>
+              <a:ext uri="{FF2B5EF4-FFF2-40B4-BE49-F238E27FC236}">
+                <a16:creationId xmlns:a16="http://schemas.microsoft.com/office/drawing/2014/main" id="{F0E42EC4-8A0B-9EFB-2CDD-3553F7C870D9}"/>
+              </a:ext>
+            </a:extLst>
+          </p:cNvPr>
+          <p:cNvSpPr txBox="1"/>
+          <p:nvPr/>
+        </p:nvSpPr>
+        <p:spPr>
+          <a:xfrm>
+            <a:off x="3572062" y="7760785"/>
+            <a:ext cx="365760" cy="365760"/>
+          </a:xfrm>
+          <a:prstGeom prst="rect">
+            <a:avLst/>
+          </a:prstGeom>
+          <a:noFill/>
+        </p:spPr>
+        <p:txBody>
+          <a:bodyPr wrap="square">
+            <a:spAutoFit/>
+          </a:bodyPr>
+          <a:lstStyle/>
+          <a:p>
+            <a:pPr algn="ctr"/>
+            <a:r>
+              <a:rPr sz="1200" b="1" i="0" dirty="0">
+                <a:solidFill>
+                  <a:srgbClr val="C9A84C"/>
+                </a:solidFill>
+                <a:latin typeface="Calibri"/>
+              </a:rPr>
+              <a:t>2</a:t>
+            </a:r>
+          </a:p>
+        </p:txBody>
+      </p:sp>
+      <p:sp>
+        <p:nvSpPr>
+          <p:cNvPr id="76" name="TextBox 75">
+            <a:extLst>
+              <a:ext uri="{FF2B5EF4-FFF2-40B4-BE49-F238E27FC236}">
+                <a16:creationId xmlns:a16="http://schemas.microsoft.com/office/drawing/2014/main" id="{9A0DEC23-2BDC-F4E7-1F6E-98EE643EDAD7}"/>
+              </a:ext>
+            </a:extLst>
+          </p:cNvPr>
+          <p:cNvSpPr txBox="1"/>
+          <p:nvPr/>
+        </p:nvSpPr>
+        <p:spPr>
+          <a:xfrm>
+            <a:off x="2893398" y="8185072"/>
+            <a:ext cx="1755593" cy="238527"/>
+          </a:xfrm>
+          <a:prstGeom prst="rect">
+            <a:avLst/>
+          </a:prstGeom>
+          <a:noFill/>
+        </p:spPr>
+        <p:txBody>
+          <a:bodyPr wrap="square">
+            <a:spAutoFit/>
+          </a:bodyPr>
+          <a:lstStyle/>
+          <a:p>
+            <a:pPr algn="ctr"/>
+            <a:r>
+              <a:rPr sz="950" b="1" i="0" dirty="0">
+                <a:solidFill>
+                  <a:srgbClr val="1B2A4A"/>
+                </a:solidFill>
+                <a:latin typeface="Calibri"/>
+              </a:rPr>
+              <a:t>Marketing strategy meeting</a:t>
+            </a:r>
+          </a:p>
+        </p:txBody>
+      </p:sp>
+      <p:sp>
+        <p:nvSpPr>
+          <p:cNvPr id="77" name="TextBox 76">
+            <a:extLst>
+              <a:ext uri="{FF2B5EF4-FFF2-40B4-BE49-F238E27FC236}">
+                <a16:creationId xmlns:a16="http://schemas.microsoft.com/office/drawing/2014/main" id="{23FB0CF6-E2FC-0CFF-6710-C580F1DA9E9E}"/>
+              </a:ext>
+            </a:extLst>
+          </p:cNvPr>
+          <p:cNvSpPr txBox="1"/>
+          <p:nvPr/>
+        </p:nvSpPr>
+        <p:spPr>
+          <a:xfrm>
+            <a:off x="2893399" y="8459392"/>
+            <a:ext cx="1755592" cy="615553"/>
+          </a:xfrm>
+          <a:prstGeom prst="rect">
+            <a:avLst/>
+          </a:prstGeom>
+          <a:noFill/>
+        </p:spPr>
+        <p:txBody>
+          <a:bodyPr wrap="square">
+            <a:spAutoFit/>
+          </a:bodyPr>
+          <a:lstStyle/>
+          <a:p>
+            <a:pPr algn="ctr"/>
+            <a:r>
+              <a:rPr lang="en-US" sz="850" b="0" i="0" dirty="0">
+                <a:solidFill>
+                  <a:srgbClr val="64748B"/>
+                </a:solidFill>
+                <a:latin typeface="Calibri"/>
+              </a:rPr>
+              <a:t>Discuss </a:t>
+            </a:r>
+            <a:r>
+              <a:rPr sz="850" b="0" i="0" dirty="0">
+                <a:solidFill>
+                  <a:srgbClr val="64748B"/>
+                </a:solidFill>
+                <a:latin typeface="Calibri"/>
+              </a:rPr>
+              <a:t>on the right </a:t>
+            </a:r>
+            <a:r>
+              <a:rPr lang="en-US" sz="850" b="0" i="0" dirty="0">
+                <a:solidFill>
+                  <a:srgbClr val="64748B"/>
+                </a:solidFill>
+                <a:latin typeface="Calibri"/>
+              </a:rPr>
+              <a:t>strategy </a:t>
+            </a:r>
+            <a:r>
+              <a:rPr sz="850" b="0" i="0" dirty="0">
+                <a:solidFill>
+                  <a:srgbClr val="64748B"/>
+                </a:solidFill>
+                <a:latin typeface="Calibri"/>
+              </a:rPr>
+              <a:t>and approach. </a:t>
+            </a:r>
+            <a:r>
+              <a:rPr lang="en-US" sz="850" dirty="0">
+                <a:solidFill>
+                  <a:srgbClr val="64748B"/>
+                </a:solidFill>
+                <a:latin typeface="Calibri"/>
+              </a:rPr>
+              <a:t>We</a:t>
+            </a:r>
+            <a:r>
+              <a:rPr sz="850" b="0" i="0" dirty="0">
+                <a:solidFill>
+                  <a:srgbClr val="64748B"/>
+                </a:solidFill>
+                <a:latin typeface="Calibri"/>
+              </a:rPr>
+              <a:t>'ll show you exactly who the buyers are and how </a:t>
+            </a:r>
+            <a:r>
+              <a:rPr lang="en-US" sz="850" b="0" i="0" dirty="0">
+                <a:solidFill>
+                  <a:srgbClr val="64748B"/>
+                </a:solidFill>
+                <a:latin typeface="Calibri"/>
+              </a:rPr>
+              <a:t>We</a:t>
+            </a:r>
+            <a:r>
+              <a:rPr sz="850" b="0" i="0" dirty="0">
+                <a:solidFill>
+                  <a:srgbClr val="64748B"/>
+                </a:solidFill>
+                <a:latin typeface="Calibri"/>
+              </a:rPr>
+              <a:t>'ll reach them.</a:t>
+            </a:r>
+          </a:p>
+        </p:txBody>
+      </p:sp>
+      <p:sp>
+        <p:nvSpPr>
+          <p:cNvPr id="78" name="Rectangle 77">
+            <a:extLst>
+              <a:ext uri="{FF2B5EF4-FFF2-40B4-BE49-F238E27FC236}">
+                <a16:creationId xmlns:a16="http://schemas.microsoft.com/office/drawing/2014/main" id="{D2E2BDCC-8A34-D173-777F-CF1E97046561}"/>
+              </a:ext>
+            </a:extLst>
+          </p:cNvPr>
+          <p:cNvSpPr/>
+          <p:nvPr/>
+        </p:nvSpPr>
+        <p:spPr>
+          <a:xfrm>
+            <a:off x="4876326" y="7691296"/>
+            <a:ext cx="1755592" cy="1417320"/>
+          </a:xfrm>
+          <a:prstGeom prst="rect">
+            <a:avLst/>
+          </a:prstGeom>
+          <a:solidFill>
+            <a:srgbClr val="FDF6E3"/>
+          </a:solidFill>
+          <a:ln w="9525">
+            <a:solidFill>
+              <a:srgbClr val="C9A84C"/>
+            </a:solidFill>
+          </a:ln>
+        </p:spPr>
+        <p:style>
+          <a:lnRef idx="1">
+            <a:schemeClr val="accent1"/>
+          </a:lnRef>
+          <a:fillRef idx="3">
+            <a:schemeClr val="accent1"/>
+          </a:fillRef>
+          <a:effectRef idx="2">
+            <a:schemeClr val="accent1"/>
+          </a:effectRef>
+          <a:fontRef idx="minor">
+            <a:schemeClr val="lt1"/>
+          </a:fontRef>
+        </p:style>
+        <p:txBody>
+          <a:bodyPr rtlCol="0" anchor="ctr"/>
+          <a:lstStyle/>
+          <a:p>
+            <a:pPr algn="ctr"/>
+            <a:endParaRPr/>
+          </a:p>
+        </p:txBody>
+      </p:sp>
+      <p:sp>
+        <p:nvSpPr>
+          <p:cNvPr id="79" name="Oval 78">
+            <a:extLst>
+              <a:ext uri="{FF2B5EF4-FFF2-40B4-BE49-F238E27FC236}">
+                <a16:creationId xmlns:a16="http://schemas.microsoft.com/office/drawing/2014/main" id="{3F60CC15-1DD4-F71B-75F6-0FCF895A26B3}"/>
+              </a:ext>
+            </a:extLst>
+          </p:cNvPr>
+          <p:cNvSpPr/>
+          <p:nvPr/>
+        </p:nvSpPr>
+        <p:spPr>
+          <a:xfrm>
+            <a:off x="5589107" y="7760785"/>
+            <a:ext cx="365760" cy="365760"/>
+          </a:xfrm>
+          <a:prstGeom prst="ellipse">
+            <a:avLst/>
+          </a:prstGeom>
+          <a:solidFill>
+            <a:srgbClr val="1B2A4A"/>
+          </a:solidFill>
+          <a:ln>
+            <a:noFill/>
+          </a:ln>
+        </p:spPr>
+        <p:style>
+          <a:lnRef idx="1">
+            <a:schemeClr val="accent1"/>
+          </a:lnRef>
+          <a:fillRef idx="3">
+            <a:schemeClr val="accent1"/>
+          </a:fillRef>
+          <a:effectRef idx="2">
+            <a:schemeClr val="accent1"/>
+          </a:effectRef>
+          <a:fontRef idx="minor">
+            <a:schemeClr val="lt1"/>
+          </a:fontRef>
+        </p:style>
+        <p:txBody>
+          <a:bodyPr rtlCol="0" anchor="ctr"/>
+          <a:lstStyle/>
+          <a:p>
+            <a:pPr algn="ctr"/>
+            <a:endParaRPr/>
+          </a:p>
+        </p:txBody>
+      </p:sp>
+      <p:sp>
+        <p:nvSpPr>
+          <p:cNvPr id="80" name="TextBox 79">
+            <a:extLst>
+              <a:ext uri="{FF2B5EF4-FFF2-40B4-BE49-F238E27FC236}">
+                <a16:creationId xmlns:a16="http://schemas.microsoft.com/office/drawing/2014/main" id="{E84712BD-BFBC-F4C7-B0FE-39B5AE5C3DF3}"/>
+              </a:ext>
+            </a:extLst>
+          </p:cNvPr>
+          <p:cNvSpPr txBox="1"/>
+          <p:nvPr/>
+        </p:nvSpPr>
+        <p:spPr>
+          <a:xfrm>
+            <a:off x="5589107" y="7760785"/>
+            <a:ext cx="365760" cy="365760"/>
+          </a:xfrm>
+          <a:prstGeom prst="rect">
+            <a:avLst/>
+          </a:prstGeom>
+          <a:noFill/>
+        </p:spPr>
+        <p:txBody>
+          <a:bodyPr wrap="square">
+            <a:spAutoFit/>
+          </a:bodyPr>
+          <a:lstStyle/>
+          <a:p>
+            <a:pPr algn="ctr"/>
+            <a:r>
+              <a:rPr sz="1200" b="1" i="0">
+                <a:solidFill>
+                  <a:srgbClr val="C9A84C"/>
+                </a:solidFill>
+                <a:latin typeface="Calibri"/>
+              </a:rPr>
+              <a:t>3</a:t>
+            </a:r>
+          </a:p>
+        </p:txBody>
+      </p:sp>
+      <p:sp>
+        <p:nvSpPr>
+          <p:cNvPr id="81" name="TextBox 80">
+            <a:extLst>
+              <a:ext uri="{FF2B5EF4-FFF2-40B4-BE49-F238E27FC236}">
+                <a16:creationId xmlns:a16="http://schemas.microsoft.com/office/drawing/2014/main" id="{AA48EECD-B8F3-081F-B53C-7F4292E0E3D1}"/>
+              </a:ext>
+            </a:extLst>
+          </p:cNvPr>
+          <p:cNvSpPr txBox="1"/>
+          <p:nvPr/>
+        </p:nvSpPr>
+        <p:spPr>
+          <a:xfrm>
+            <a:off x="4876327" y="8185072"/>
+            <a:ext cx="1755592" cy="238527"/>
+          </a:xfrm>
+          <a:prstGeom prst="rect">
+            <a:avLst/>
+          </a:prstGeom>
+          <a:noFill/>
+        </p:spPr>
+        <p:txBody>
+          <a:bodyPr wrap="square">
+            <a:spAutoFit/>
+          </a:bodyPr>
+          <a:lstStyle/>
+          <a:p>
+            <a:pPr algn="ctr"/>
+            <a:r>
+              <a:rPr lang="en-US" sz="950" b="1" dirty="0">
+                <a:solidFill>
+                  <a:srgbClr val="1B2A4A"/>
+                </a:solidFill>
+                <a:latin typeface="Calibri"/>
+              </a:rPr>
+              <a:t>L</a:t>
+            </a:r>
+            <a:r>
+              <a:rPr sz="950" b="1" i="0" dirty="0">
+                <a:solidFill>
+                  <a:srgbClr val="1B2A4A"/>
+                </a:solidFill>
+                <a:latin typeface="Calibri"/>
+              </a:rPr>
+              <a:t>isting &amp; launch</a:t>
+            </a:r>
+          </a:p>
+        </p:txBody>
+      </p:sp>
+      <p:sp>
+        <p:nvSpPr>
+          <p:cNvPr id="82" name="TextBox 81">
+            <a:extLst>
+              <a:ext uri="{FF2B5EF4-FFF2-40B4-BE49-F238E27FC236}">
+                <a16:creationId xmlns:a16="http://schemas.microsoft.com/office/drawing/2014/main" id="{5E43D6A8-B9B0-198A-F1A7-99751DE60F8C}"/>
+              </a:ext>
+            </a:extLst>
+          </p:cNvPr>
+          <p:cNvSpPr txBox="1"/>
+          <p:nvPr/>
+        </p:nvSpPr>
+        <p:spPr>
+          <a:xfrm>
+            <a:off x="4876325" y="8459392"/>
+            <a:ext cx="1755592" cy="615553"/>
+          </a:xfrm>
+          <a:prstGeom prst="rect">
+            <a:avLst/>
+          </a:prstGeom>
+          <a:noFill/>
+        </p:spPr>
+        <p:txBody>
+          <a:bodyPr wrap="square">
+            <a:spAutoFit/>
+          </a:bodyPr>
+          <a:lstStyle/>
+          <a:p>
+            <a:pPr algn="ctr"/>
+            <a:r>
+              <a:rPr sz="850" b="0" i="0" dirty="0">
+                <a:solidFill>
+                  <a:srgbClr val="64748B"/>
+                </a:solidFill>
+                <a:latin typeface="Calibri"/>
+              </a:rPr>
+              <a:t>Professional photography within 5 days. Listing live within 7 days. Active buyer outreach starts immediately.</a:t>
+            </a:r>
+          </a:p>
+        </p:txBody>
+      </p:sp>
+      <p:sp>
+        <p:nvSpPr>
+          <p:cNvPr id="83" name="Rectangle 82">
+            <a:extLst>
+              <a:ext uri="{FF2B5EF4-FFF2-40B4-BE49-F238E27FC236}">
+                <a16:creationId xmlns:a16="http://schemas.microsoft.com/office/drawing/2014/main" id="{55988E15-2D18-6FF5-0DEB-5968391339E3}"/>
+              </a:ext>
+            </a:extLst>
+          </p:cNvPr>
+          <p:cNvSpPr/>
+          <p:nvPr/>
+        </p:nvSpPr>
+        <p:spPr>
+          <a:xfrm>
+            <a:off x="9430" y="9423948"/>
+            <a:ext cx="7562088" cy="987552"/>
+          </a:xfrm>
+          <a:prstGeom prst="rect">
+            <a:avLst/>
+          </a:prstGeom>
+          <a:solidFill>
+            <a:srgbClr val="162338"/>
+          </a:solidFill>
+          <a:ln>
+            <a:noFill/>
+          </a:ln>
+        </p:spPr>
+        <p:style>
+          <a:lnRef idx="1">
+            <a:schemeClr val="accent1"/>
+          </a:lnRef>
+          <a:fillRef idx="3">
+            <a:schemeClr val="accent1"/>
+          </a:fillRef>
+          <a:effectRef idx="2">
+            <a:schemeClr val="accent1"/>
+          </a:effectRef>
+          <a:fontRef idx="minor">
+            <a:schemeClr val="lt1"/>
+          </a:fontRef>
+        </p:style>
+        <p:txBody>
+          <a:bodyPr rtlCol="0" anchor="ctr"/>
+          <a:lstStyle/>
+          <a:p>
+            <a:pPr algn="ctr"/>
+            <a:endParaRPr/>
+          </a:p>
+        </p:txBody>
+      </p:sp>
+      <p:sp>
+        <p:nvSpPr>
+          <p:cNvPr id="84" name="Rectangle 83">
+            <a:extLst>
+              <a:ext uri="{FF2B5EF4-FFF2-40B4-BE49-F238E27FC236}">
+                <a16:creationId xmlns:a16="http://schemas.microsoft.com/office/drawing/2014/main" id="{AC374066-1B1E-BDEC-FD88-40B3EE153485}"/>
+              </a:ext>
+            </a:extLst>
+          </p:cNvPr>
+          <p:cNvSpPr/>
+          <p:nvPr/>
+        </p:nvSpPr>
+        <p:spPr>
+          <a:xfrm>
+            <a:off x="-7144" y="9442236"/>
+            <a:ext cx="256032" cy="987552"/>
+          </a:xfrm>
+          <a:prstGeom prst="rect">
+            <a:avLst/>
+          </a:prstGeom>
+          <a:solidFill>
+            <a:srgbClr val="C9A84C"/>
+          </a:solidFill>
+          <a:ln>
+            <a:noFill/>
+          </a:ln>
+        </p:spPr>
+        <p:style>
+          <a:lnRef idx="1">
+            <a:schemeClr val="accent1"/>
+          </a:lnRef>
+          <a:fillRef idx="3">
+            <a:schemeClr val="accent1"/>
+          </a:fillRef>
+          <a:effectRef idx="2">
+            <a:schemeClr val="accent1"/>
+          </a:effectRef>
+          <a:fontRef idx="minor">
+            <a:schemeClr val="lt1"/>
+          </a:fontRef>
+        </p:style>
+        <p:txBody>
+          <a:bodyPr rtlCol="0" anchor="ctr"/>
+          <a:lstStyle/>
+          <a:p>
+            <a:pPr algn="ctr"/>
+            <a:endParaRPr/>
+          </a:p>
+        </p:txBody>
+      </p:sp>
+      <p:sp>
+        <p:nvSpPr>
+          <p:cNvPr id="85" name="TextBox 84">
+            <a:extLst>
+              <a:ext uri="{FF2B5EF4-FFF2-40B4-BE49-F238E27FC236}">
+                <a16:creationId xmlns:a16="http://schemas.microsoft.com/office/drawing/2014/main" id="{55230645-4783-7592-AA4C-386CB08A0845}"/>
+              </a:ext>
+            </a:extLst>
+          </p:cNvPr>
+          <p:cNvSpPr txBox="1"/>
+          <p:nvPr/>
+        </p:nvSpPr>
+        <p:spPr>
+          <a:xfrm>
+            <a:off x="1218997" y="9515629"/>
+            <a:ext cx="1165527" cy="338554"/>
+          </a:xfrm>
+          <a:prstGeom prst="rect">
+            <a:avLst/>
+          </a:prstGeom>
+          <a:noFill/>
+        </p:spPr>
+        <p:txBody>
+          <a:bodyPr wrap="square">
+            <a:spAutoFit/>
+          </a:bodyPr>
+          <a:lstStyle/>
+          <a:p>
+            <a:pPr algn="l"/>
+            <a:r>
+              <a:rPr sz="1600" b="1" i="0" dirty="0">
+                <a:solidFill>
+                  <a:srgbClr val="FFFFFF"/>
+                </a:solidFill>
+                <a:latin typeface="Calibri"/>
+              </a:rPr>
+              <a:t>Rio Pang</a:t>
+            </a:r>
+          </a:p>
+        </p:txBody>
+      </p:sp>
+      <p:sp>
+        <p:nvSpPr>
+          <p:cNvPr id="86" name="TextBox 85">
+            <a:extLst>
+              <a:ext uri="{FF2B5EF4-FFF2-40B4-BE49-F238E27FC236}">
+                <a16:creationId xmlns:a16="http://schemas.microsoft.com/office/drawing/2014/main" id="{76C44229-2BC3-D76E-52D7-9C637CD195F0}"/>
+              </a:ext>
+            </a:extLst>
+          </p:cNvPr>
+          <p:cNvSpPr txBox="1"/>
+          <p:nvPr/>
+        </p:nvSpPr>
+        <p:spPr>
+          <a:xfrm>
+            <a:off x="1218997" y="9870688"/>
+            <a:ext cx="1165527" cy="276999"/>
+          </a:xfrm>
+          <a:prstGeom prst="rect">
+            <a:avLst/>
+          </a:prstGeom>
+          <a:noFill/>
+        </p:spPr>
+        <p:txBody>
+          <a:bodyPr wrap="square">
+            <a:spAutoFit/>
+          </a:bodyPr>
+          <a:lstStyle/>
+          <a:p>
+            <a:pPr algn="l"/>
+            <a:br>
+              <a:rPr lang="en-US" sz="600" b="0" i="0" dirty="0">
+                <a:solidFill>
+                  <a:srgbClr val="B0BED4"/>
+                </a:solidFill>
+                <a:latin typeface="Calibri"/>
+              </a:rPr>
+            </a:br>
+            <a:r>
+              <a:rPr sz="600" b="0" i="0" dirty="0">
+                <a:solidFill>
+                  <a:srgbClr val="B0BED4"/>
+                </a:solidFill>
+                <a:latin typeface="Calibri"/>
+              </a:rPr>
+              <a:t>R070214</a:t>
+            </a:r>
+            <a:r>
+              <a:rPr lang="en-US" sz="600" b="0" i="0" dirty="0">
+                <a:solidFill>
+                  <a:srgbClr val="B0BED4"/>
+                </a:solidFill>
+                <a:latin typeface="Calibri"/>
+              </a:rPr>
+              <a:t>B</a:t>
+            </a:r>
+            <a:endParaRPr sz="600" b="0" i="0" dirty="0">
+              <a:solidFill>
+                <a:srgbClr val="B0BED4"/>
+              </a:solidFill>
+              <a:latin typeface="Calibri"/>
+            </a:endParaRPr>
+          </a:p>
+        </p:txBody>
+      </p:sp>
+      <p:sp>
+        <p:nvSpPr>
+          <p:cNvPr id="87" name="TextBox 86">
+            <a:extLst>
+              <a:ext uri="{FF2B5EF4-FFF2-40B4-BE49-F238E27FC236}">
+                <a16:creationId xmlns:a16="http://schemas.microsoft.com/office/drawing/2014/main" id="{4B2802D4-71D2-0FC5-776D-6B9B34CD1307}"/>
+              </a:ext>
+            </a:extLst>
+          </p:cNvPr>
+          <p:cNvSpPr txBox="1"/>
+          <p:nvPr/>
+        </p:nvSpPr>
+        <p:spPr>
+          <a:xfrm>
+            <a:off x="1218997" y="9724425"/>
+            <a:ext cx="1165527" cy="338554"/>
+          </a:xfrm>
+          <a:prstGeom prst="rect">
+            <a:avLst/>
+          </a:prstGeom>
+          <a:noFill/>
+        </p:spPr>
+        <p:txBody>
+          <a:bodyPr wrap="square">
+            <a:spAutoFit/>
+          </a:bodyPr>
+          <a:lstStyle/>
+          <a:p>
+            <a:pPr algn="l"/>
+            <a:r>
+              <a:rPr sz="1600" b="1" i="0" dirty="0">
+                <a:solidFill>
+                  <a:srgbClr val="C9A84C"/>
+                </a:solidFill>
+                <a:latin typeface="Calibri"/>
+              </a:rPr>
+              <a:t>9183 1316</a:t>
+            </a:r>
+          </a:p>
+        </p:txBody>
+      </p:sp>
+      <p:sp>
+        <p:nvSpPr>
+          <p:cNvPr id="89" name="TextBox 88">
+            <a:extLst>
+              <a:ext uri="{FF2B5EF4-FFF2-40B4-BE49-F238E27FC236}">
+                <a16:creationId xmlns:a16="http://schemas.microsoft.com/office/drawing/2014/main" id="{1D360FDF-AC52-0C81-C3BD-8AE3309255E2}"/>
+              </a:ext>
+            </a:extLst>
+          </p:cNvPr>
+          <p:cNvSpPr txBox="1"/>
+          <p:nvPr/>
+        </p:nvSpPr>
+        <p:spPr>
+          <a:xfrm>
+            <a:off x="429768" y="10545022"/>
+            <a:ext cx="6739127" cy="192360"/>
+          </a:xfrm>
+          <a:prstGeom prst="rect">
+            <a:avLst/>
+          </a:prstGeom>
+          <a:noFill/>
+        </p:spPr>
+        <p:txBody>
+          <a:bodyPr wrap="square">
+            <a:spAutoFit/>
+          </a:bodyPr>
+          <a:lstStyle/>
+          <a:p>
+            <a:pPr algn="ctr"/>
+            <a:r>
+              <a:rPr sz="650" b="0" i="1" dirty="0">
+                <a:solidFill>
+                  <a:srgbClr val="64748B"/>
+                </a:solidFill>
+                <a:latin typeface="Calibri"/>
+              </a:rPr>
               <a:t>Data sourced from URA REALIS (Jun 2025–Jun 2026). This flyer is for informational purposes only and does not constitute a formal valuation.</a:t>
             </a:r>
           </a:p>
         </p:txBody>
       </p:sp>
+      <p:pic>
+        <p:nvPicPr>
+          <p:cNvPr id="97" name="Picture 96">
+            <a:extLst>
+              <a:ext uri="{FF2B5EF4-FFF2-40B4-BE49-F238E27FC236}">
+                <a16:creationId xmlns:a16="http://schemas.microsoft.com/office/drawing/2014/main" id="{6C12BEDB-07B4-C02E-56F7-318E30F1FFF7}"/>
+              </a:ext>
+            </a:extLst>
+          </p:cNvPr>
+          <p:cNvPicPr>
+            <a:picLocks noChangeAspect="1"/>
+          </p:cNvPicPr>
+          <p:nvPr/>
+        </p:nvPicPr>
+        <p:blipFill>
+          <a:blip r:embed="rId3"/>
+          <a:srcRect l="19580" r="16604"/>
+          <a:stretch>
+            <a:fillRect/>
+          </a:stretch>
+        </p:blipFill>
+        <p:spPr>
+          <a:xfrm>
+            <a:off x="-100665" y="7630706"/>
+            <a:ext cx="1306670" cy="3071357"/>
+          </a:xfrm>
+          <a:prstGeom prst="rect">
+            <a:avLst/>
+          </a:prstGeom>
+        </p:spPr>
+      </p:pic>
+      <p:sp>
+        <p:nvSpPr>
+          <p:cNvPr id="98" name="TextBox 97">
+            <a:extLst>
+              <a:ext uri="{FF2B5EF4-FFF2-40B4-BE49-F238E27FC236}">
+                <a16:creationId xmlns:a16="http://schemas.microsoft.com/office/drawing/2014/main" id="{DF656F0F-6086-19FB-3BB0-75AA430BF309}"/>
+              </a:ext>
+            </a:extLst>
+          </p:cNvPr>
+          <p:cNvSpPr txBox="1"/>
+          <p:nvPr/>
+        </p:nvSpPr>
+        <p:spPr>
+          <a:xfrm>
+            <a:off x="3815395" y="2246191"/>
+            <a:ext cx="1604773" cy="400110"/>
+          </a:xfrm>
+          <a:prstGeom prst="rect">
+            <a:avLst/>
+          </a:prstGeom>
+          <a:noFill/>
+        </p:spPr>
+        <p:txBody>
+          <a:bodyPr wrap="square">
+            <a:spAutoFit/>
+          </a:bodyPr>
+          <a:lstStyle/>
+          <a:p>
+            <a:pPr algn="ctr"/>
+            <a:r>
+              <a:rPr lang="en-US" sz="2000" b="1" i="0" dirty="0">
+                <a:solidFill>
+                  <a:srgbClr val="1B2A4A"/>
+                </a:solidFill>
+                <a:latin typeface="Calibri"/>
+              </a:rPr>
+              <a:t>Transactions</a:t>
+            </a:r>
+            <a:endParaRPr sz="2000" b="1" i="0" dirty="0">
+              <a:solidFill>
+                <a:srgbClr val="1B2A4A"/>
+              </a:solidFill>
+              <a:latin typeface="Calibri"/>
+            </a:endParaRPr>
+          </a:p>
+        </p:txBody>
+      </p:sp>
+      <p:pic>
+        <p:nvPicPr>
+          <p:cNvPr id="100" name="Picture 99">
+            <a:extLst>
+              <a:ext uri="{FF2B5EF4-FFF2-40B4-BE49-F238E27FC236}">
+                <a16:creationId xmlns:a16="http://schemas.microsoft.com/office/drawing/2014/main" id="{2CD69925-67D4-E92B-40B5-2D8260CDC9BB}"/>
+              </a:ext>
+            </a:extLst>
+          </p:cNvPr>
+          <p:cNvPicPr>
+            <a:picLocks noChangeAspect="1"/>
+          </p:cNvPicPr>
+          <p:nvPr/>
+        </p:nvPicPr>
+        <p:blipFill>
+          <a:blip r:embed="rId4"/>
+          <a:srcRect l="16444" r="59677"/>
+          <a:stretch>
+            <a:fillRect/>
+          </a:stretch>
+        </p:blipFill>
+        <p:spPr>
+          <a:xfrm>
+            <a:off x="6398246" y="7607808"/>
+            <a:ext cx="1311510" cy="3089416"/>
+          </a:xfrm>
+          <a:prstGeom prst="rect">
+            <a:avLst/>
+          </a:prstGeom>
+        </p:spPr>
+      </p:pic>
+      <p:sp>
+        <p:nvSpPr>
+          <p:cNvPr id="106" name="TextBox 105">
+            <a:extLst>
+              <a:ext uri="{FF2B5EF4-FFF2-40B4-BE49-F238E27FC236}">
+                <a16:creationId xmlns:a16="http://schemas.microsoft.com/office/drawing/2014/main" id="{E5D88D5E-32F6-54F0-EF01-B13F2E3520E7}"/>
+              </a:ext>
+            </a:extLst>
+          </p:cNvPr>
+          <p:cNvSpPr txBox="1"/>
+          <p:nvPr/>
+        </p:nvSpPr>
+        <p:spPr>
+          <a:xfrm>
+            <a:off x="5241917" y="9515318"/>
+            <a:ext cx="1165527" cy="338554"/>
+          </a:xfrm>
+          <a:prstGeom prst="rect">
+            <a:avLst/>
+          </a:prstGeom>
+          <a:noFill/>
+        </p:spPr>
+        <p:txBody>
+          <a:bodyPr wrap="square">
+            <a:spAutoFit/>
+          </a:bodyPr>
+          <a:lstStyle/>
+          <a:p>
+            <a:pPr algn="r"/>
+            <a:r>
+              <a:rPr lang="en-US" sz="1600" b="1" dirty="0">
+                <a:solidFill>
+                  <a:srgbClr val="FFFFFF"/>
+                </a:solidFill>
+                <a:latin typeface="Calibri"/>
+              </a:rPr>
+              <a:t>Tricia Low</a:t>
+            </a:r>
+            <a:endParaRPr sz="1600" b="1" i="0" dirty="0">
+              <a:solidFill>
+                <a:srgbClr val="FFFFFF"/>
+              </a:solidFill>
+              <a:latin typeface="Calibri"/>
+            </a:endParaRPr>
+          </a:p>
+        </p:txBody>
+      </p:sp>
+      <p:sp>
+        <p:nvSpPr>
+          <p:cNvPr id="107" name="TextBox 106">
+            <a:extLst>
+              <a:ext uri="{FF2B5EF4-FFF2-40B4-BE49-F238E27FC236}">
+                <a16:creationId xmlns:a16="http://schemas.microsoft.com/office/drawing/2014/main" id="{663EF04C-C377-2709-D693-64D052C9E971}"/>
+              </a:ext>
+            </a:extLst>
+          </p:cNvPr>
+          <p:cNvSpPr txBox="1"/>
+          <p:nvPr/>
+        </p:nvSpPr>
+        <p:spPr>
+          <a:xfrm>
+            <a:off x="5241917" y="9870377"/>
+            <a:ext cx="1165527" cy="276999"/>
+          </a:xfrm>
+          <a:prstGeom prst="rect">
+            <a:avLst/>
+          </a:prstGeom>
+          <a:noFill/>
+        </p:spPr>
+        <p:txBody>
+          <a:bodyPr wrap="square">
+            <a:spAutoFit/>
+          </a:bodyPr>
+          <a:lstStyle/>
+          <a:p>
+            <a:pPr algn="r"/>
+            <a:br>
+              <a:rPr lang="en-US" sz="600" b="0" i="0" dirty="0">
+                <a:solidFill>
+                  <a:srgbClr val="B0BED4"/>
+                </a:solidFill>
+                <a:latin typeface="Calibri"/>
+              </a:rPr>
+            </a:br>
+            <a:r>
+              <a:rPr lang="en-US" sz="600" b="0" i="0" dirty="0">
+                <a:solidFill>
+                  <a:srgbClr val="B0BED4"/>
+                </a:solidFill>
+                <a:latin typeface="Calibri"/>
+              </a:rPr>
+              <a:t>R068957J</a:t>
+            </a:r>
+            <a:endParaRPr sz="600" b="0" i="0" dirty="0">
+              <a:solidFill>
+                <a:srgbClr val="B0BED4"/>
+              </a:solidFill>
+              <a:latin typeface="Calibri"/>
+            </a:endParaRPr>
+          </a:p>
+        </p:txBody>
+      </p:sp>
+      <p:sp>
+        <p:nvSpPr>
+          <p:cNvPr id="108" name="TextBox 107">
+            <a:extLst>
+              <a:ext uri="{FF2B5EF4-FFF2-40B4-BE49-F238E27FC236}">
+                <a16:creationId xmlns:a16="http://schemas.microsoft.com/office/drawing/2014/main" id="{6F499EBC-5950-111E-E3CC-6C96088CB4D1}"/>
+              </a:ext>
+            </a:extLst>
+          </p:cNvPr>
+          <p:cNvSpPr txBox="1"/>
+          <p:nvPr/>
+        </p:nvSpPr>
+        <p:spPr>
+          <a:xfrm>
+            <a:off x="5241917" y="9724114"/>
+            <a:ext cx="1165527" cy="338554"/>
+          </a:xfrm>
+          <a:prstGeom prst="rect">
+            <a:avLst/>
+          </a:prstGeom>
+          <a:noFill/>
+        </p:spPr>
+        <p:txBody>
+          <a:bodyPr wrap="square">
+            <a:spAutoFit/>
+          </a:bodyPr>
+          <a:lstStyle/>
+          <a:p>
+            <a:pPr algn="r"/>
+            <a:r>
+              <a:rPr lang="en-US" sz="1600" b="1" i="0" dirty="0">
+                <a:solidFill>
+                  <a:srgbClr val="C9A84C"/>
+                </a:solidFill>
+                <a:latin typeface="Calibri"/>
+              </a:rPr>
+              <a:t>9833 8871</a:t>
+            </a:r>
+            <a:endParaRPr sz="1600" b="1" i="0" dirty="0">
+              <a:solidFill>
+                <a:srgbClr val="C9A84C"/>
+              </a:solidFill>
+              <a:latin typeface="Calibri"/>
+            </a:endParaRPr>
+          </a:p>
+        </p:txBody>
+      </p:sp>
+      <p:sp>
+        <p:nvSpPr>
+          <p:cNvPr id="115" name="TextBox 114">
+            <a:extLst>
+              <a:ext uri="{FF2B5EF4-FFF2-40B4-BE49-F238E27FC236}">
+                <a16:creationId xmlns:a16="http://schemas.microsoft.com/office/drawing/2014/main" id="{091475DB-ABD7-1BF9-84DE-83EB196426BE}"/>
+              </a:ext>
+            </a:extLst>
+          </p:cNvPr>
+          <p:cNvSpPr txBox="1"/>
+          <p:nvPr/>
+        </p:nvSpPr>
+        <p:spPr>
+          <a:xfrm>
+            <a:off x="2963221" y="9554753"/>
+            <a:ext cx="1583441" cy="715581"/>
+          </a:xfrm>
+          <a:prstGeom prst="rect">
+            <a:avLst/>
+          </a:prstGeom>
+          <a:noFill/>
+        </p:spPr>
+        <p:txBody>
+          <a:bodyPr wrap="square">
+            <a:spAutoFit/>
+          </a:bodyPr>
+          <a:lstStyle/>
+          <a:p>
+            <a:pPr algn="ctr"/>
+            <a:r>
+              <a:rPr lang="en-US" sz="1000" b="1" i="0" dirty="0">
+                <a:solidFill>
+                  <a:srgbClr val="C9A84C"/>
+                </a:solidFill>
+                <a:latin typeface="Calibri"/>
+              </a:rPr>
+              <a:t>CONTACT US FOR A </a:t>
+            </a:r>
+          </a:p>
+          <a:p>
+            <a:pPr algn="ctr"/>
+            <a:r>
+              <a:rPr lang="en-US" sz="1050" b="1" i="0" u="sng" dirty="0">
+                <a:solidFill>
+                  <a:srgbClr val="C00000"/>
+                </a:solidFill>
+                <a:latin typeface="Calibri"/>
+              </a:rPr>
+              <a:t>FREE</a:t>
+            </a:r>
+            <a:r>
+              <a:rPr lang="en-US" sz="1000" b="1" i="0" dirty="0">
+                <a:solidFill>
+                  <a:srgbClr val="C9A84C"/>
+                </a:solidFill>
+                <a:latin typeface="Calibri"/>
+              </a:rPr>
+              <a:t> INDICATIVE VALUATION AND CONSULTATION TODAY!</a:t>
+            </a:r>
+            <a:endParaRPr sz="1000" b="1" i="0" dirty="0">
+              <a:solidFill>
+                <a:srgbClr val="C9A84C"/>
+              </a:solidFill>
+              <a:latin typeface="Calibri"/>
+            </a:endParaRPr>
+          </a:p>
+        </p:txBody>
+      </p:sp>
+      <p:pic>
+        <p:nvPicPr>
+          <p:cNvPr id="116" name="Picture 115">
+            <a:extLst>
+              <a:ext uri="{FF2B5EF4-FFF2-40B4-BE49-F238E27FC236}">
+                <a16:creationId xmlns:a16="http://schemas.microsoft.com/office/drawing/2014/main" id="{F2740892-B28A-F97C-1E22-10AAC9619F82}"/>
+              </a:ext>
+            </a:extLst>
+          </p:cNvPr>
+          <p:cNvPicPr>
+            <a:picLocks noChangeAspect="1"/>
+          </p:cNvPicPr>
+          <p:nvPr/>
+        </p:nvPicPr>
+        <p:blipFill>
+          <a:blip r:embed="rId5"/>
+          <a:stretch>
+            <a:fillRect/>
+          </a:stretch>
+        </p:blipFill>
+        <p:spPr>
+          <a:xfrm>
+            <a:off x="2231864" y="9662982"/>
+            <a:ext cx="449708" cy="450613"/>
+          </a:xfrm>
+          <a:prstGeom prst="rect">
+            <a:avLst/>
+          </a:prstGeom>
+        </p:spPr>
+      </p:pic>
+      <p:pic>
+        <p:nvPicPr>
+          <p:cNvPr id="117" name="Picture 116">
+            <a:extLst>
+              <a:ext uri="{FF2B5EF4-FFF2-40B4-BE49-F238E27FC236}">
+                <a16:creationId xmlns:a16="http://schemas.microsoft.com/office/drawing/2014/main" id="{7AA3D7E5-E036-A445-DF80-03CCC82567DC}"/>
+              </a:ext>
+            </a:extLst>
+          </p:cNvPr>
+          <p:cNvPicPr>
+            <a:picLocks noChangeAspect="1"/>
+          </p:cNvPicPr>
+          <p:nvPr/>
+        </p:nvPicPr>
+        <p:blipFill>
+          <a:blip r:embed="rId6"/>
+          <a:stretch>
+            <a:fillRect/>
+          </a:stretch>
+        </p:blipFill>
+        <p:spPr>
+          <a:xfrm rot="16200000" flipV="1">
+            <a:off x="4921166" y="9646126"/>
+            <a:ext cx="448221" cy="449123"/>
+          </a:xfrm>
+          <a:prstGeom prst="rect">
+            <a:avLst/>
+          </a:prstGeom>
+        </p:spPr>
+      </p:pic>
     </p:spTree>
+    <p:extLst>
+      <p:ext uri="{BB962C8B-B14F-4D97-AF65-F5344CB8AC3E}">
+        <p14:creationId xmlns:p14="http://schemas.microsoft.com/office/powerpoint/2010/main" val="4255115807"/>
+      </p:ext>
+    </p:extLst>
   </p:cSld>
   <p:clrMapOvr>
     <a:masterClrMapping/>
@@ -6756,4 +11533,319 @@
   </a:objectDefaults>
   <a:extraClrSchemeLst/>
 </a:theme>
+</file>
+
+<file path=ppt/theme/theme2.xml><?xml version="1.0" encoding="utf-8"?>
+<a:theme xmlns:a="http://schemas.openxmlformats.org/drawingml/2006/main" name="Office Theme">
+  <a:themeElements>
+    <a:clrScheme name="Office">
+      <a:dk1>
+        <a:sysClr val="windowText" lastClr="000000"/>
+      </a:dk1>
+      <a:lt1>
+        <a:sysClr val="window" lastClr="FFFFFF"/>
+      </a:lt1>
+      <a:dk2>
+        <a:srgbClr val="0E2841"/>
+      </a:dk2>
+      <a:lt2>
+        <a:srgbClr val="E8E8E8"/>
+      </a:lt2>
+      <a:accent1>
+        <a:srgbClr val="156082"/>
+      </a:accent1>
+      <a:accent2>
+        <a:srgbClr val="E97132"/>
+      </a:accent2>
+      <a:accent3>
+        <a:srgbClr val="196B24"/>
+      </a:accent3>
+      <a:accent4>
+        <a:srgbClr val="0F9ED5"/>
+      </a:accent4>
+      <a:accent5>
+        <a:srgbClr val="A02B93"/>
+      </a:accent5>
+      <a:accent6>
+        <a:srgbClr val="4EA72E"/>
+      </a:accent6>
+      <a:hlink>
+        <a:srgbClr val="467886"/>
+      </a:hlink>
+      <a:folHlink>
+        <a:srgbClr val="96607D"/>
+      </a:folHlink>
+    </a:clrScheme>
+    <a:fontScheme name="Office">
+      <a:majorFont>
+        <a:latin typeface="Aptos Display" panose="02110004020202020204"/>
+        <a:ea typeface=""/>
+        <a:cs typeface=""/>
+        <a:font script="Jpan" typeface="游ゴシック Light"/>
+        <a:font script="Hang" typeface="맑은 고딕"/>
+        <a:font script="Hans" typeface="等线 Light"/>
+        <a:font script="Hant" typeface="新細明體"/>
+        <a:font script="Arab" typeface="Times New Roman"/>
+        <a:font script="Hebr" typeface="Times New Roman"/>
+        <a:font script="Thai" typeface="Angsana New"/>
+        <a:font script="Ethi" typeface="Nyala"/>
+        <a:font script="Beng" typeface="Vrinda"/>
+        <a:font script="Gujr" typeface="Shruti"/>
+        <a:font script="Khmr" typeface="MoolBoran"/>
+        <a:font script="Knda" typeface="Tunga"/>
+        <a:font script="Guru" typeface="Raavi"/>
+        <a:font script="Cans" typeface="Euphemia"/>
+        <a:font script="Cher" typeface="Plantagenet Cherokee"/>
+        <a:font script="Yiii" typeface="Microsoft Yi Baiti"/>
+        <a:font script="Tibt" typeface="Microsoft Himalaya"/>
+        <a:font script="Thaa" typeface="MV Boli"/>
+        <a:font script="Deva" typeface="Mangal"/>
+        <a:font script="Telu" typeface="Gautami"/>
+        <a:font script="Taml" typeface="Latha"/>
+        <a:font script="Syrc" typeface="Estrangelo Edessa"/>
+        <a:font script="Orya" typeface="Kalinga"/>
+        <a:font script="Mlym" typeface="Kartika"/>
+        <a:font script="Laoo" typeface="DokChampa"/>
+        <a:font script="Sinh" typeface="Iskoola Pota"/>
+        <a:font script="Mong" typeface="Mongolian Baiti"/>
+        <a:font script="Viet" typeface="Times New Roman"/>
+        <a:font script="Uigh" typeface="Microsoft Uighur"/>
+        <a:font script="Geor" typeface="Sylfaen"/>
+        <a:font script="Armn" typeface="Arial"/>
+        <a:font script="Bugi" typeface="Leelawadee UI"/>
+        <a:font script="Bopo" typeface="Microsoft JhengHei"/>
+        <a:font script="Java" typeface="Javanese Text"/>
+        <a:font script="Lisu" typeface="Segoe UI"/>
+        <a:font script="Mymr" typeface="Myanmar Text"/>
+        <a:font script="Nkoo" typeface="Ebrima"/>
+        <a:font script="Olck" typeface="Nirmala UI"/>
+        <a:font script="Osma" typeface="Ebrima"/>
+        <a:font script="Phag" typeface="Phagspa"/>
+        <a:font script="Syrn" typeface="Estrangelo Edessa"/>
+        <a:font script="Syrj" typeface="Estrangelo Edessa"/>
+        <a:font script="Syre" typeface="Estrangelo Edessa"/>
+        <a:font script="Sora" typeface="Nirmala UI"/>
+        <a:font script="Tale" typeface="Microsoft Tai Le"/>
+        <a:font script="Talu" typeface="Microsoft New Tai Lue"/>
+        <a:font script="Tfng" typeface="Ebrima"/>
+      </a:majorFont>
+      <a:minorFont>
+        <a:latin typeface="Aptos" panose="02110004020202020204"/>
+        <a:ea typeface=""/>
+        <a:cs typeface=""/>
+        <a:font script="Jpan" typeface="游ゴシック"/>
+        <a:font script="Hang" typeface="맑은 고딕"/>
+        <a:font script="Hans" typeface="等线"/>
+        <a:font script="Hant" typeface="新細明體"/>
+        <a:font script="Arab" typeface="Arial"/>
+        <a:font script="Hebr" typeface="Arial"/>
+        <a:font script="Thai" typeface="Cordia New"/>
+        <a:font script="Ethi" typeface="Nyala"/>
+        <a:font script="Beng" typeface="Vrinda"/>
+        <a:font script="Gujr" typeface="Shruti"/>
+        <a:font script="Khmr" typeface="DaunPenh"/>
+        <a:font script="Knda" typeface="Tunga"/>
+        <a:font script="Guru" typeface="Raavi"/>
+        <a:font script="Cans" typeface="Euphemia"/>
+        <a:font script="Cher" typeface="Plantagenet Cherokee"/>
+        <a:font script="Yiii" typeface="Microsoft Yi Baiti"/>
+        <a:font script="Tibt" typeface="Microsoft Himalaya"/>
+        <a:font script="Thaa" typeface="MV Boli"/>
+        <a:font script="Deva" typeface="Mangal"/>
+        <a:font script="Telu" typeface="Gautami"/>
+        <a:font script="Taml" typeface="Latha"/>
+        <a:font script="Syrc" typeface="Estrangelo Edessa"/>
+        <a:font script="Orya" typeface="Kalinga"/>
+        <a:font script="Mlym" typeface="Kartika"/>
+        <a:font script="Laoo" typeface="DokChampa"/>
+        <a:font script="Sinh" typeface="Iskoola Pota"/>
+        <a:font script="Mong" typeface="Mongolian Baiti"/>
+        <a:font script="Viet" typeface="Arial"/>
+        <a:font script="Uigh" typeface="Microsoft Uighur"/>
+        <a:font script="Geor" typeface="Sylfaen"/>
+        <a:font script="Armn" typeface="Arial"/>
+        <a:font script="Bugi" typeface="Leelawadee UI"/>
+        <a:font script="Bopo" typeface="Microsoft JhengHei"/>
+        <a:font script="Java" typeface="Javanese Text"/>
+        <a:font script="Lisu" typeface="Segoe UI"/>
+        <a:font script="Mymr" typeface="Myanmar Text"/>
+        <a:font script="Nkoo" typeface="Ebrima"/>
+        <a:font script="Olck" typeface="Nirmala UI"/>
+        <a:font script="Osma" typeface="Ebrima"/>
+        <a:font script="Phag" typeface="Phagspa"/>
+        <a:font script="Syrn" typeface="Estrangelo Edessa"/>
+        <a:font script="Syrj" typeface="Estrangelo Edessa"/>
+        <a:font script="Syre" typeface="Estrangelo Edessa"/>
+        <a:font script="Sora" typeface="Nirmala UI"/>
+        <a:font script="Tale" typeface="Microsoft Tai Le"/>
+        <a:font script="Talu" typeface="Microsoft New Tai Lue"/>
+        <a:font script="Tfng" typeface="Ebrima"/>
+      </a:minorFont>
+    </a:fontScheme>
+    <a:fmtScheme name="Office">
+      <a:fillStyleLst>
+        <a:solidFill>
+          <a:schemeClr val="phClr"/>
+        </a:solidFill>
+        <a:gradFill rotWithShape="1">
+          <a:gsLst>
+            <a:gs pos="0">
+              <a:schemeClr val="phClr">
+                <a:lumMod val="110000"/>
+                <a:satMod val="105000"/>
+                <a:tint val="67000"/>
+              </a:schemeClr>
+            </a:gs>
+            <a:gs pos="50000">
+              <a:schemeClr val="phClr">
+                <a:lumMod val="105000"/>
+                <a:satMod val="103000"/>
+                <a:tint val="73000"/>
+              </a:schemeClr>
+            </a:gs>
+            <a:gs pos="100000">
+              <a:schemeClr val="phClr">
+                <a:lumMod val="105000"/>
+                <a:satMod val="109000"/>
+                <a:tint val="81000"/>
+              </a:schemeClr>
+            </a:gs>
+          </a:gsLst>
+          <a:lin ang="5400000" scaled="0"/>
+        </a:gradFill>
+        <a:gradFill rotWithShape="1">
+          <a:gsLst>
+            <a:gs pos="0">
+              <a:schemeClr val="phClr">
+                <a:satMod val="103000"/>
+                <a:lumMod val="102000"/>
+                <a:tint val="94000"/>
+              </a:schemeClr>
+            </a:gs>
+            <a:gs pos="50000">
+              <a:schemeClr val="phClr">
+                <a:satMod val="110000"/>
+                <a:lumMod val="100000"/>
+                <a:shade val="100000"/>
+              </a:schemeClr>
+            </a:gs>
+            <a:gs pos="100000">
+              <a:schemeClr val="phClr">
+                <a:lumMod val="99000"/>
+                <a:satMod val="120000"/>
+                <a:shade val="78000"/>
+              </a:schemeClr>
+            </a:gs>
+          </a:gsLst>
+          <a:lin ang="5400000" scaled="0"/>
+        </a:gradFill>
+      </a:fillStyleLst>
+      <a:lnStyleLst>
+        <a:ln w="12700" cap="flat" cmpd="sng" algn="ctr">
+          <a:solidFill>
+            <a:schemeClr val="phClr"/>
+          </a:solidFill>
+          <a:prstDash val="solid"/>
+          <a:miter lim="800000"/>
+        </a:ln>
+        <a:ln w="19050" cap="flat" cmpd="sng" algn="ctr">
+          <a:solidFill>
+            <a:schemeClr val="phClr"/>
+          </a:solidFill>
+          <a:prstDash val="solid"/>
+          <a:miter lim="800000"/>
+        </a:ln>
+        <a:ln w="25400" cap="flat" cmpd="sng" algn="ctr">
+          <a:solidFill>
+            <a:schemeClr val="phClr"/>
+          </a:solidFill>
+          <a:prstDash val="solid"/>
+          <a:miter lim="800000"/>
+        </a:ln>
+      </a:lnStyleLst>
+      <a:effectStyleLst>
+        <a:effectStyle>
+          <a:effectLst/>
+        </a:effectStyle>
+        <a:effectStyle>
+          <a:effectLst/>
+        </a:effectStyle>
+        <a:effectStyle>
+          <a:effectLst>
+            <a:outerShdw blurRad="57150" dist="19050" dir="5400000" algn="ctr" rotWithShape="0">
+              <a:srgbClr val="000000">
+                <a:alpha val="63000"/>
+              </a:srgbClr>
+            </a:outerShdw>
+          </a:effectLst>
+        </a:effectStyle>
+      </a:effectStyleLst>
+      <a:bgFillStyleLst>
+        <a:solidFill>
+          <a:schemeClr val="phClr"/>
+        </a:solidFill>
+        <a:solidFill>
+          <a:schemeClr val="phClr">
+            <a:tint val="95000"/>
+            <a:satMod val="170000"/>
+          </a:schemeClr>
+        </a:solidFill>
+        <a:gradFill rotWithShape="1">
+          <a:gsLst>
+            <a:gs pos="0">
+              <a:schemeClr val="phClr">
+                <a:tint val="93000"/>
+                <a:satMod val="150000"/>
+                <a:shade val="98000"/>
+                <a:lumMod val="102000"/>
+              </a:schemeClr>
+            </a:gs>
+            <a:gs pos="50000">
+              <a:schemeClr val="phClr">
+                <a:tint val="98000"/>
+                <a:satMod val="130000"/>
+                <a:shade val="90000"/>
+                <a:lumMod val="103000"/>
+              </a:schemeClr>
+            </a:gs>
+            <a:gs pos="100000">
+              <a:schemeClr val="phClr">
+                <a:shade val="63000"/>
+                <a:satMod val="120000"/>
+              </a:schemeClr>
+            </a:gs>
+          </a:gsLst>
+          <a:lin ang="5400000" scaled="0"/>
+        </a:gradFill>
+      </a:bgFillStyleLst>
+    </a:fmtScheme>
+  </a:themeElements>
+  <a:objectDefaults>
+    <a:lnDef>
+      <a:spPr/>
+      <a:bodyPr/>
+      <a:lstStyle/>
+      <a:style>
+        <a:lnRef idx="2">
+          <a:schemeClr val="accent1"/>
+        </a:lnRef>
+        <a:fillRef idx="0">
+          <a:schemeClr val="accent1"/>
+        </a:fillRef>
+        <a:effectRef idx="1">
+          <a:schemeClr val="accent1"/>
+        </a:effectRef>
+        <a:fontRef idx="minor">
+          <a:schemeClr val="tx1"/>
+        </a:fontRef>
+      </a:style>
+    </a:lnDef>
+  </a:objectDefaults>
+  <a:extraClrSchemeLst/>
+  <a:extLst>
+    <a:ext uri="{05A4C25C-085E-4340-85A3-A5531E510DB2}">
+      <thm15:themeFamily xmlns:thm15="http://schemas.microsoft.com/office/thememl/2012/main" name="Office Theme" id="{2E142A2C-CD16-42D6-873A-C26D2A0506FA}" vid="{1BDDFF52-6CD6-40A5-AB3C-68EB2F1E4D0A}"/>
+    </a:ext>
+  </a:extLst>
+</a:theme>
 </file>
--- a/Doorknock Leave-Behind Flyer.pptx
+++ b/Doorknock Leave-Behind Flyer.pptx
@@ -5,11 +5,10 @@
     <p:sldMasterId id="2147483648" r:id="rId1"/>
   </p:sldMasterIdLst>
   <p:notesMasterIdLst>
-    <p:notesMasterId r:id="rId4"/>
+    <p:notesMasterId r:id="rId3"/>
   </p:notesMasterIdLst>
   <p:sldIdLst>
-    <p:sldId id="256" r:id="rId2"/>
-    <p:sldId id="257" r:id="rId3"/>
+    <p:sldId id="257" r:id="rId2"/>
   </p:sldIdLst>
   <p:sldSz cx="7562850" cy="10688638"/>
   <p:notesSz cx="6858000" cy="9144000"/>
@@ -209,7 +208,7 @@
           <a:p>
             <a:fld id="{DEE4A353-551F-DA40-88C5-95E609E26DE6}" type="datetimeFigureOut">
               <a:rPr lang="en-US" smtClean="0"/>
-              <a:t>6/17/26</a:t>
+              <a:t>6/20/26</a:t>
             </a:fld>
             <a:endParaRPr lang="en-US"/>
           </a:p>
@@ -481,90 +480,6 @@
   <p:cSld>
     <p:spTree>
       <p:nvGrpSpPr>
-        <p:cNvPr id="1" name=""/>
-        <p:cNvGrpSpPr/>
-        <p:nvPr/>
-      </p:nvGrpSpPr>
-      <p:grpSpPr>
-        <a:xfrm>
-          <a:off x="0" y="0"/>
-          <a:ext cx="0" cy="0"/>
-          <a:chOff x="0" y="0"/>
-          <a:chExt cx="0" cy="0"/>
-        </a:xfrm>
-      </p:grpSpPr>
-      <p:sp>
-        <p:nvSpPr>
-          <p:cNvPr id="2" name="Slide Image Placeholder 1"/>
-          <p:cNvSpPr>
-            <a:spLocks noGrp="1" noRot="1" noChangeAspect="1"/>
-          </p:cNvSpPr>
-          <p:nvPr>
-            <p:ph type="sldImg"/>
-          </p:nvPr>
-        </p:nvSpPr>
-        <p:spPr/>
-      </p:sp>
-      <p:sp>
-        <p:nvSpPr>
-          <p:cNvPr id="3" name="Notes Placeholder 2"/>
-          <p:cNvSpPr>
-            <a:spLocks noGrp="1"/>
-          </p:cNvSpPr>
-          <p:nvPr>
-            <p:ph type="body" idx="1"/>
-          </p:nvPr>
-        </p:nvSpPr>
-        <p:spPr/>
-        <p:txBody>
-          <a:bodyPr/>
-          <a:lstStyle/>
-          <a:p>
-            <a:endParaRPr lang="en-US" dirty="0"/>
-          </a:p>
-        </p:txBody>
-      </p:sp>
-      <p:sp>
-        <p:nvSpPr>
-          <p:cNvPr id="4" name="Slide Number Placeholder 3"/>
-          <p:cNvSpPr>
-            <a:spLocks noGrp="1"/>
-          </p:cNvSpPr>
-          <p:nvPr>
-            <p:ph type="sldNum" sz="quarter" idx="5"/>
-          </p:nvPr>
-        </p:nvSpPr>
-        <p:spPr/>
-        <p:txBody>
-          <a:bodyPr/>
-          <a:lstStyle/>
-          <a:p>
-            <a:fld id="{AD330A47-8819-B149-9DB7-95F42AA22DD1}" type="slidenum">
-              <a:rPr lang="en-US" smtClean="0"/>
-              <a:t>1</a:t>
-            </a:fld>
-            <a:endParaRPr lang="en-US"/>
-          </a:p>
-        </p:txBody>
-      </p:sp>
-    </p:spTree>
-    <p:extLst>
-      <p:ext uri="{BB962C8B-B14F-4D97-AF65-F5344CB8AC3E}">
-        <p14:creationId xmlns:p14="http://schemas.microsoft.com/office/powerpoint/2010/main" val="3881224341"/>
-      </p:ext>
-    </p:extLst>
-  </p:cSld>
-  <p:clrMapOvr>
-    <a:masterClrMapping/>
-  </p:clrMapOvr>
-</p:notes>
-</file>
-
-<file path=ppt/notesSlides/notesSlide2.xml><?xml version="1.0" encoding="utf-8"?>
-<p:notes xmlns:a="http://schemas.openxmlformats.org/drawingml/2006/main" xmlns:r="http://schemas.openxmlformats.org/officeDocument/2006/relationships" xmlns:p="http://schemas.openxmlformats.org/presentationml/2006/main">
-  <p:cSld>
-    <p:spTree>
-      <p:nvGrpSpPr>
         <p:cNvPr id="1" name="">
           <a:extLst>
             <a:ext uri="{FF2B5EF4-FFF2-40B4-BE49-F238E27FC236}">
@@ -649,7 +564,7 @@
           <a:p>
             <a:fld id="{AD330A47-8819-B149-9DB7-95F42AA22DD1}" type="slidenum">
               <a:rPr lang="en-US" smtClean="0"/>
-              <a:t>2</a:t>
+              <a:t>1</a:t>
             </a:fld>
             <a:endParaRPr lang="en-US"/>
           </a:p>
@@ -847,7 +762,7 @@
           <a:p>
             <a:fld id="{5BCAD085-E8A6-8845-BD4E-CB4CCA059FC4}" type="datetimeFigureOut">
               <a:rPr lang="en-US" smtClean="0"/>
-              <a:t>6/17/26</a:t>
+              <a:t>6/20/26</a:t>
             </a:fld>
             <a:endParaRPr lang="en-US"/>
           </a:p>
@@ -1015,7 +930,7 @@
           <a:p>
             <a:fld id="{5BCAD085-E8A6-8845-BD4E-CB4CCA059FC4}" type="datetimeFigureOut">
               <a:rPr lang="en-US" smtClean="0"/>
-              <a:t>6/17/26</a:t>
+              <a:t>6/20/26</a:t>
             </a:fld>
             <a:endParaRPr lang="en-US"/>
           </a:p>
@@ -1193,7 +1108,7 @@
           <a:p>
             <a:fld id="{5BCAD085-E8A6-8845-BD4E-CB4CCA059FC4}" type="datetimeFigureOut">
               <a:rPr lang="en-US" smtClean="0"/>
-              <a:t>6/17/26</a:t>
+              <a:t>6/20/26</a:t>
             </a:fld>
             <a:endParaRPr lang="en-US"/>
           </a:p>
@@ -1361,7 +1276,7 @@
           <a:p>
             <a:fld id="{5BCAD085-E8A6-8845-BD4E-CB4CCA059FC4}" type="datetimeFigureOut">
               <a:rPr lang="en-US" smtClean="0"/>
-              <a:t>6/17/26</a:t>
+              <a:t>6/20/26</a:t>
             </a:fld>
             <a:endParaRPr lang="en-US"/>
           </a:p>
@@ -1606,7 +1521,7 @@
           <a:p>
             <a:fld id="{5BCAD085-E8A6-8845-BD4E-CB4CCA059FC4}" type="datetimeFigureOut">
               <a:rPr lang="en-US" smtClean="0"/>
-              <a:t>6/17/26</a:t>
+              <a:t>6/20/26</a:t>
             </a:fld>
             <a:endParaRPr lang="en-US"/>
           </a:p>
@@ -1891,7 +1806,7 @@
           <a:p>
             <a:fld id="{5BCAD085-E8A6-8845-BD4E-CB4CCA059FC4}" type="datetimeFigureOut">
               <a:rPr lang="en-US" smtClean="0"/>
-              <a:t>6/17/26</a:t>
+              <a:t>6/20/26</a:t>
             </a:fld>
             <a:endParaRPr lang="en-US"/>
           </a:p>
@@ -2310,7 +2225,7 @@
           <a:p>
             <a:fld id="{5BCAD085-E8A6-8845-BD4E-CB4CCA059FC4}" type="datetimeFigureOut">
               <a:rPr lang="en-US" smtClean="0"/>
-              <a:t>6/17/26</a:t>
+              <a:t>6/20/26</a:t>
             </a:fld>
             <a:endParaRPr lang="en-US"/>
           </a:p>
@@ -2427,7 +2342,7 @@
           <a:p>
             <a:fld id="{5BCAD085-E8A6-8845-BD4E-CB4CCA059FC4}" type="datetimeFigureOut">
               <a:rPr lang="en-US" smtClean="0"/>
-              <a:t>6/17/26</a:t>
+              <a:t>6/20/26</a:t>
             </a:fld>
             <a:endParaRPr lang="en-US"/>
           </a:p>
@@ -2522,7 +2437,7 @@
           <a:p>
             <a:fld id="{5BCAD085-E8A6-8845-BD4E-CB4CCA059FC4}" type="datetimeFigureOut">
               <a:rPr lang="en-US" smtClean="0"/>
-              <a:t>6/17/26</a:t>
+              <a:t>6/20/26</a:t>
             </a:fld>
             <a:endParaRPr lang="en-US"/>
           </a:p>
@@ -2797,7 +2712,7 @@
           <a:p>
             <a:fld id="{5BCAD085-E8A6-8845-BD4E-CB4CCA059FC4}" type="datetimeFigureOut">
               <a:rPr lang="en-US" smtClean="0"/>
-              <a:t>6/17/26</a:t>
+              <a:t>6/20/26</a:t>
             </a:fld>
             <a:endParaRPr lang="en-US"/>
           </a:p>
@@ -3049,7 +2964,7 @@
           <a:p>
             <a:fld id="{5BCAD085-E8A6-8845-BD4E-CB4CCA059FC4}" type="datetimeFigureOut">
               <a:rPr lang="en-US" smtClean="0"/>
-              <a:t>6/17/26</a:t>
+              <a:t>6/20/26</a:t>
             </a:fld>
             <a:endParaRPr lang="en-US"/>
           </a:p>
@@ -3260,7 +3175,7 @@
           <a:p>
             <a:fld id="{5BCAD085-E8A6-8845-BD4E-CB4CCA059FC4}" type="datetimeFigureOut">
               <a:rPr lang="en-US" smtClean="0"/>
-              <a:t>6/17/26</a:t>
+              <a:t>6/20/26</a:t>
             </a:fld>
             <a:endParaRPr lang="en-US"/>
           </a:p>
@@ -3631,3571 +3546,6 @@
     </p:bg>
     <p:spTree>
       <p:nvGrpSpPr>
-        <p:cNvPr id="1" name=""/>
-        <p:cNvGrpSpPr/>
-        <p:nvPr/>
-      </p:nvGrpSpPr>
-      <p:grpSpPr>
-        <a:xfrm>
-          <a:off x="0" y="0"/>
-          <a:ext cx="0" cy="0"/>
-          <a:chOff x="0" y="0"/>
-          <a:chExt cx="0" cy="0"/>
-        </a:xfrm>
-      </p:grpSpPr>
-      <p:sp>
-        <p:nvSpPr>
-          <p:cNvPr id="2" name="Rectangle 1"/>
-          <p:cNvSpPr/>
-          <p:nvPr/>
-        </p:nvSpPr>
-        <p:spPr>
-          <a:xfrm>
-            <a:off x="21020" y="-15923"/>
-            <a:ext cx="7562088" cy="1813935"/>
-          </a:xfrm>
-          <a:prstGeom prst="rect">
-            <a:avLst/>
-          </a:prstGeom>
-          <a:solidFill>
-            <a:srgbClr val="1B2A4A"/>
-          </a:solidFill>
-          <a:ln>
-            <a:noFill/>
-          </a:ln>
-        </p:spPr>
-        <p:style>
-          <a:lnRef idx="1">
-            <a:schemeClr val="accent1"/>
-          </a:lnRef>
-          <a:fillRef idx="3">
-            <a:schemeClr val="accent1"/>
-          </a:fillRef>
-          <a:effectRef idx="2">
-            <a:schemeClr val="accent1"/>
-          </a:effectRef>
-          <a:fontRef idx="minor">
-            <a:schemeClr val="lt1"/>
-          </a:fontRef>
-        </p:style>
-        <p:txBody>
-          <a:bodyPr rtlCol="0" anchor="ctr"/>
-          <a:lstStyle/>
-          <a:p>
-            <a:pPr algn="ctr"/>
-            <a:endParaRPr dirty="0"/>
-          </a:p>
-        </p:txBody>
-      </p:sp>
-      <p:sp>
-        <p:nvSpPr>
-          <p:cNvPr id="3" name="Rectangle 2"/>
-          <p:cNvSpPr/>
-          <p:nvPr/>
-        </p:nvSpPr>
-        <p:spPr>
-          <a:xfrm>
-            <a:off x="-10510" y="-21020"/>
-            <a:ext cx="256032" cy="1813935"/>
-          </a:xfrm>
-          <a:prstGeom prst="rect">
-            <a:avLst/>
-          </a:prstGeom>
-          <a:solidFill>
-            <a:srgbClr val="C9A84C"/>
-          </a:solidFill>
-          <a:ln>
-            <a:noFill/>
-          </a:ln>
-        </p:spPr>
-        <p:style>
-          <a:lnRef idx="1">
-            <a:schemeClr val="accent1"/>
-          </a:lnRef>
-          <a:fillRef idx="3">
-            <a:schemeClr val="accent1"/>
-          </a:fillRef>
-          <a:effectRef idx="2">
-            <a:schemeClr val="accent1"/>
-          </a:effectRef>
-          <a:fontRef idx="minor">
-            <a:schemeClr val="lt1"/>
-          </a:fontRef>
-        </p:style>
-        <p:txBody>
-          <a:bodyPr rtlCol="0" anchor="ctr"/>
-          <a:lstStyle/>
-          <a:p>
-            <a:pPr algn="ctr"/>
-            <a:endParaRPr/>
-          </a:p>
-        </p:txBody>
-      </p:sp>
-      <p:sp>
-        <p:nvSpPr>
-          <p:cNvPr id="4" name="TextBox 3"/>
-          <p:cNvSpPr txBox="1"/>
-          <p:nvPr/>
-        </p:nvSpPr>
-        <p:spPr>
-          <a:xfrm>
-            <a:off x="411480" y="201168"/>
-            <a:ext cx="5303520" cy="658368"/>
-          </a:xfrm>
-          <a:prstGeom prst="rect">
-            <a:avLst/>
-          </a:prstGeom>
-          <a:noFill/>
-        </p:spPr>
-        <p:txBody>
-          <a:bodyPr wrap="square">
-            <a:spAutoFit/>
-          </a:bodyPr>
-          <a:lstStyle/>
-          <a:p>
-            <a:pPr algn="l"/>
-            <a:r>
-              <a:rPr sz="2400" b="1" i="0" dirty="0">
-                <a:solidFill>
-                  <a:srgbClr val="FFFFFF"/>
-                </a:solidFill>
-                <a:latin typeface="Calibri"/>
-              </a:rPr>
-              <a:t>Is now the right time
-to sell your landed home?</a:t>
-            </a:r>
-          </a:p>
-        </p:txBody>
-      </p:sp>
-      <p:sp>
-        <p:nvSpPr>
-          <p:cNvPr id="5" name="TextBox 4"/>
-          <p:cNvSpPr txBox="1"/>
-          <p:nvPr/>
-        </p:nvSpPr>
-        <p:spPr>
-          <a:xfrm>
-            <a:off x="411479" y="978988"/>
-            <a:ext cx="5401035" cy="415498"/>
-          </a:xfrm>
-          <a:prstGeom prst="rect">
-            <a:avLst/>
-          </a:prstGeom>
-          <a:noFill/>
-        </p:spPr>
-        <p:txBody>
-          <a:bodyPr wrap="square">
-            <a:spAutoFit/>
-          </a:bodyPr>
-          <a:lstStyle/>
-          <a:p>
-            <a:pPr algn="l"/>
-            <a:r>
-              <a:rPr sz="1050" b="0" i="1" dirty="0">
-                <a:solidFill>
-                  <a:srgbClr val="C9A84C"/>
-                </a:solidFill>
-                <a:latin typeface="Calibri"/>
-              </a:rPr>
-              <a:t>Thomson Garden Estate has seen 21 transactions in the last 12 </a:t>
-            </a:r>
-            <a:r>
-              <a:rPr lang="en-US" sz="1050" b="0" i="1" dirty="0">
-                <a:solidFill>
-                  <a:srgbClr val="C9A84C"/>
-                </a:solidFill>
-                <a:latin typeface="Calibri"/>
-              </a:rPr>
-              <a:t>months,</a:t>
-            </a:r>
-            <a:r>
-              <a:rPr sz="1050" b="0" i="1" dirty="0">
-                <a:solidFill>
-                  <a:srgbClr val="C9A84C"/>
-                </a:solidFill>
-                <a:latin typeface="Calibri"/>
-              </a:rPr>
-              <a:t>  and </a:t>
-            </a:r>
-            <a:r>
-              <a:rPr lang="en-US" sz="1050" b="0" i="1" dirty="0">
-                <a:solidFill>
-                  <a:srgbClr val="C9A84C"/>
-                </a:solidFill>
-                <a:latin typeface="Calibri"/>
-              </a:rPr>
-              <a:t>we have </a:t>
-            </a:r>
-            <a:r>
-              <a:rPr sz="1050" b="0" i="1" dirty="0">
-                <a:solidFill>
-                  <a:srgbClr val="C9A84C"/>
-                </a:solidFill>
-                <a:latin typeface="Calibri"/>
-              </a:rPr>
-              <a:t>serious buyers are actively looking here.</a:t>
-            </a:r>
-          </a:p>
-        </p:txBody>
-      </p:sp>
-      <p:sp>
-        <p:nvSpPr>
-          <p:cNvPr id="13" name="Rectangle 12"/>
-          <p:cNvSpPr/>
-          <p:nvPr/>
-        </p:nvSpPr>
-        <p:spPr>
-          <a:xfrm>
-            <a:off x="518985" y="2067494"/>
-            <a:ext cx="1552193" cy="1024128"/>
-          </a:xfrm>
-          <a:prstGeom prst="rect">
-            <a:avLst/>
-          </a:prstGeom>
-          <a:solidFill>
-            <a:srgbClr val="FDF6E3"/>
-          </a:solidFill>
-          <a:ln w="12700">
-            <a:solidFill>
-              <a:srgbClr val="C9A84C"/>
-            </a:solidFill>
-          </a:ln>
-        </p:spPr>
-        <p:style>
-          <a:lnRef idx="1">
-            <a:schemeClr val="accent1"/>
-          </a:lnRef>
-          <a:fillRef idx="3">
-            <a:schemeClr val="accent1"/>
-          </a:fillRef>
-          <a:effectRef idx="2">
-            <a:schemeClr val="accent1"/>
-          </a:effectRef>
-          <a:fontRef idx="minor">
-            <a:schemeClr val="lt1"/>
-          </a:fontRef>
-        </p:style>
-        <p:txBody>
-          <a:bodyPr rtlCol="0" anchor="ctr"/>
-          <a:lstStyle/>
-          <a:p>
-            <a:pPr algn="ctr"/>
-            <a:endParaRPr/>
-          </a:p>
-        </p:txBody>
-      </p:sp>
-      <p:sp>
-        <p:nvSpPr>
-          <p:cNvPr id="14" name="TextBox 13"/>
-          <p:cNvSpPr txBox="1"/>
-          <p:nvPr/>
-        </p:nvSpPr>
-        <p:spPr>
-          <a:xfrm>
-            <a:off x="573849" y="2143776"/>
-            <a:ext cx="1442466" cy="438912"/>
-          </a:xfrm>
-          <a:prstGeom prst="rect">
-            <a:avLst/>
-          </a:prstGeom>
-          <a:noFill/>
-        </p:spPr>
-        <p:txBody>
-          <a:bodyPr wrap="square">
-            <a:spAutoFit/>
-          </a:bodyPr>
-          <a:lstStyle/>
-          <a:p>
-            <a:pPr algn="ctr"/>
-            <a:r>
-              <a:rPr sz="2000" b="1" i="0" dirty="0">
-                <a:solidFill>
-                  <a:srgbClr val="1B2A4A"/>
-                </a:solidFill>
-                <a:latin typeface="Calibri"/>
-              </a:rPr>
-              <a:t>+6.7%</a:t>
-            </a:r>
-          </a:p>
-        </p:txBody>
-      </p:sp>
-      <p:sp>
-        <p:nvSpPr>
-          <p:cNvPr id="15" name="TextBox 14"/>
-          <p:cNvSpPr txBox="1"/>
-          <p:nvPr/>
-        </p:nvSpPr>
-        <p:spPr>
-          <a:xfrm>
-            <a:off x="573849" y="2598092"/>
-            <a:ext cx="1442466" cy="457200"/>
-          </a:xfrm>
-          <a:prstGeom prst="rect">
-            <a:avLst/>
-          </a:prstGeom>
-          <a:noFill/>
-        </p:spPr>
-        <p:txBody>
-          <a:bodyPr wrap="square">
-            <a:spAutoFit/>
-          </a:bodyPr>
-          <a:lstStyle/>
-          <a:p>
-            <a:pPr algn="ctr"/>
-            <a:r>
-              <a:rPr sz="850" b="0" i="0">
-                <a:solidFill>
-                  <a:srgbClr val="64748B"/>
-                </a:solidFill>
-                <a:latin typeface="Calibri"/>
-              </a:rPr>
-              <a:t>landed price growth
-year-on-year (2025)</a:t>
-            </a:r>
-          </a:p>
-        </p:txBody>
-      </p:sp>
-      <p:sp>
-        <p:nvSpPr>
-          <p:cNvPr id="16" name="Rectangle 15"/>
-          <p:cNvSpPr/>
-          <p:nvPr/>
-        </p:nvSpPr>
-        <p:spPr>
-          <a:xfrm>
-            <a:off x="2180907" y="2067494"/>
-            <a:ext cx="1552193" cy="1024128"/>
-          </a:xfrm>
-          <a:prstGeom prst="rect">
-            <a:avLst/>
-          </a:prstGeom>
-          <a:solidFill>
-            <a:srgbClr val="FDF6E3"/>
-          </a:solidFill>
-          <a:ln w="12700">
-            <a:solidFill>
-              <a:srgbClr val="C9A84C"/>
-            </a:solidFill>
-          </a:ln>
-        </p:spPr>
-        <p:style>
-          <a:lnRef idx="1">
-            <a:schemeClr val="accent1"/>
-          </a:lnRef>
-          <a:fillRef idx="3">
-            <a:schemeClr val="accent1"/>
-          </a:fillRef>
-          <a:effectRef idx="2">
-            <a:schemeClr val="accent1"/>
-          </a:effectRef>
-          <a:fontRef idx="minor">
-            <a:schemeClr val="lt1"/>
-          </a:fontRef>
-        </p:style>
-        <p:txBody>
-          <a:bodyPr rtlCol="0" anchor="ctr"/>
-          <a:lstStyle/>
-          <a:p>
-            <a:pPr algn="ctr"/>
-            <a:endParaRPr/>
-          </a:p>
-        </p:txBody>
-      </p:sp>
-      <p:sp>
-        <p:nvSpPr>
-          <p:cNvPr id="17" name="TextBox 16"/>
-          <p:cNvSpPr txBox="1"/>
-          <p:nvPr/>
-        </p:nvSpPr>
-        <p:spPr>
-          <a:xfrm>
-            <a:off x="2235771" y="2149913"/>
-            <a:ext cx="1442466" cy="438912"/>
-          </a:xfrm>
-          <a:prstGeom prst="rect">
-            <a:avLst/>
-          </a:prstGeom>
-          <a:noFill/>
-        </p:spPr>
-        <p:txBody>
-          <a:bodyPr wrap="square">
-            <a:spAutoFit/>
-          </a:bodyPr>
-          <a:lstStyle/>
-          <a:p>
-            <a:pPr algn="ctr"/>
-            <a:r>
-              <a:rPr sz="2000" b="1" i="0">
-                <a:solidFill>
-                  <a:srgbClr val="1B2A4A"/>
-                </a:solidFill>
-                <a:latin typeface="Calibri"/>
-              </a:rPr>
-              <a:t>+73%</a:t>
-            </a:r>
-          </a:p>
-        </p:txBody>
-      </p:sp>
-      <p:sp>
-        <p:nvSpPr>
-          <p:cNvPr id="18" name="TextBox 17"/>
-          <p:cNvSpPr txBox="1"/>
-          <p:nvPr/>
-        </p:nvSpPr>
-        <p:spPr>
-          <a:xfrm>
-            <a:off x="2235771" y="2598092"/>
-            <a:ext cx="1442466" cy="457200"/>
-          </a:xfrm>
-          <a:prstGeom prst="rect">
-            <a:avLst/>
-          </a:prstGeom>
-          <a:noFill/>
-        </p:spPr>
-        <p:txBody>
-          <a:bodyPr wrap="square">
-            <a:spAutoFit/>
-          </a:bodyPr>
-          <a:lstStyle/>
-          <a:p>
-            <a:pPr algn="ctr"/>
-            <a:r>
-              <a:rPr sz="850" b="0" i="0">
-                <a:solidFill>
-                  <a:srgbClr val="64748B"/>
-                </a:solidFill>
-                <a:latin typeface="Calibri"/>
-              </a:rPr>
-              <a:t>URA landed price index
-Q1 2019 → Q1 2026</a:t>
-            </a:r>
-          </a:p>
-        </p:txBody>
-      </p:sp>
-      <p:sp>
-        <p:nvSpPr>
-          <p:cNvPr id="19" name="Rectangle 18"/>
-          <p:cNvSpPr/>
-          <p:nvPr/>
-        </p:nvSpPr>
-        <p:spPr>
-          <a:xfrm>
-            <a:off x="3842829" y="2067494"/>
-            <a:ext cx="1552193" cy="1024128"/>
-          </a:xfrm>
-          <a:prstGeom prst="rect">
-            <a:avLst/>
-          </a:prstGeom>
-          <a:solidFill>
-            <a:srgbClr val="FDF6E3"/>
-          </a:solidFill>
-          <a:ln w="12700">
-            <a:solidFill>
-              <a:srgbClr val="C9A84C"/>
-            </a:solidFill>
-          </a:ln>
-        </p:spPr>
-        <p:style>
-          <a:lnRef idx="1">
-            <a:schemeClr val="accent1"/>
-          </a:lnRef>
-          <a:fillRef idx="3">
-            <a:schemeClr val="accent1"/>
-          </a:fillRef>
-          <a:effectRef idx="2">
-            <a:schemeClr val="accent1"/>
-          </a:effectRef>
-          <a:fontRef idx="minor">
-            <a:schemeClr val="lt1"/>
-          </a:fontRef>
-        </p:style>
-        <p:txBody>
-          <a:bodyPr rtlCol="0" anchor="ctr"/>
-          <a:lstStyle/>
-          <a:p>
-            <a:pPr algn="ctr"/>
-            <a:endParaRPr/>
-          </a:p>
-        </p:txBody>
-      </p:sp>
-      <p:sp>
-        <p:nvSpPr>
-          <p:cNvPr id="20" name="TextBox 19"/>
-          <p:cNvSpPr txBox="1"/>
-          <p:nvPr/>
-        </p:nvSpPr>
-        <p:spPr>
-          <a:xfrm>
-            <a:off x="3787963" y="2026039"/>
-            <a:ext cx="1604773" cy="400110"/>
-          </a:xfrm>
-          <a:prstGeom prst="rect">
-            <a:avLst/>
-          </a:prstGeom>
-          <a:noFill/>
-        </p:spPr>
-        <p:txBody>
-          <a:bodyPr wrap="square">
-            <a:spAutoFit/>
-          </a:bodyPr>
-          <a:lstStyle/>
-          <a:p>
-            <a:pPr algn="ctr"/>
-            <a:r>
-              <a:rPr sz="2000" b="1" i="0" dirty="0">
-                <a:solidFill>
-                  <a:srgbClr val="1B2A4A"/>
-                </a:solidFill>
-                <a:latin typeface="Calibri"/>
-              </a:rPr>
-              <a:t>2</a:t>
-            </a:r>
-            <a:r>
-              <a:rPr lang="en-US" sz="2000" b="1" i="0" dirty="0">
-                <a:solidFill>
-                  <a:srgbClr val="1B2A4A"/>
-                </a:solidFill>
-                <a:latin typeface="Calibri"/>
-              </a:rPr>
-              <a:t>1</a:t>
-            </a:r>
-            <a:endParaRPr sz="2000" b="1" i="0" dirty="0">
-              <a:solidFill>
-                <a:srgbClr val="1B2A4A"/>
-              </a:solidFill>
-              <a:latin typeface="Calibri"/>
-            </a:endParaRPr>
-          </a:p>
-        </p:txBody>
-      </p:sp>
-      <p:sp>
-        <p:nvSpPr>
-          <p:cNvPr id="21" name="TextBox 20"/>
-          <p:cNvSpPr txBox="1"/>
-          <p:nvPr/>
-        </p:nvSpPr>
-        <p:spPr>
-          <a:xfrm>
-            <a:off x="3897692" y="2598092"/>
-            <a:ext cx="1442466" cy="457200"/>
-          </a:xfrm>
-          <a:prstGeom prst="rect">
-            <a:avLst/>
-          </a:prstGeom>
-          <a:noFill/>
-        </p:spPr>
-        <p:txBody>
-          <a:bodyPr wrap="square">
-            <a:spAutoFit/>
-          </a:bodyPr>
-          <a:lstStyle/>
-          <a:p>
-            <a:pPr algn="ctr"/>
-            <a:r>
-              <a:rPr sz="850" b="0" i="0">
-                <a:solidFill>
-                  <a:srgbClr val="64748B"/>
-                </a:solidFill>
-                <a:latin typeface="Calibri"/>
-              </a:rPr>
-              <a:t>Thomson Garden Estate
-last 12 months</a:t>
-            </a:r>
-          </a:p>
-        </p:txBody>
-      </p:sp>
-      <p:sp>
-        <p:nvSpPr>
-          <p:cNvPr id="22" name="Rectangle 21"/>
-          <p:cNvSpPr/>
-          <p:nvPr/>
-        </p:nvSpPr>
-        <p:spPr>
-          <a:xfrm>
-            <a:off x="5504751" y="2067494"/>
-            <a:ext cx="1552193" cy="1024128"/>
-          </a:xfrm>
-          <a:prstGeom prst="rect">
-            <a:avLst/>
-          </a:prstGeom>
-          <a:solidFill>
-            <a:srgbClr val="FDF6E3"/>
-          </a:solidFill>
-          <a:ln w="12700">
-            <a:solidFill>
-              <a:srgbClr val="C9A84C"/>
-            </a:solidFill>
-          </a:ln>
-        </p:spPr>
-        <p:style>
-          <a:lnRef idx="1">
-            <a:schemeClr val="accent1"/>
-          </a:lnRef>
-          <a:fillRef idx="3">
-            <a:schemeClr val="accent1"/>
-          </a:fillRef>
-          <a:effectRef idx="2">
-            <a:schemeClr val="accent1"/>
-          </a:effectRef>
-          <a:fontRef idx="minor">
-            <a:schemeClr val="lt1"/>
-          </a:fontRef>
-        </p:style>
-        <p:txBody>
-          <a:bodyPr rtlCol="0" anchor="ctr"/>
-          <a:lstStyle/>
-          <a:p>
-            <a:pPr algn="ctr"/>
-            <a:endParaRPr/>
-          </a:p>
-        </p:txBody>
-      </p:sp>
-      <p:sp>
-        <p:nvSpPr>
-          <p:cNvPr id="23" name="TextBox 22"/>
-          <p:cNvSpPr txBox="1"/>
-          <p:nvPr/>
-        </p:nvSpPr>
-        <p:spPr>
-          <a:xfrm>
-            <a:off x="5559614" y="2149913"/>
-            <a:ext cx="1442466" cy="438912"/>
-          </a:xfrm>
-          <a:prstGeom prst="rect">
-            <a:avLst/>
-          </a:prstGeom>
-          <a:noFill/>
-        </p:spPr>
-        <p:txBody>
-          <a:bodyPr wrap="square">
-            <a:spAutoFit/>
-          </a:bodyPr>
-          <a:lstStyle/>
-          <a:p>
-            <a:pPr algn="ctr"/>
-            <a:r>
-              <a:rPr sz="2000" b="1" i="0" dirty="0">
-                <a:solidFill>
-                  <a:srgbClr val="1B2A4A"/>
-                </a:solidFill>
-                <a:latin typeface="Calibri"/>
-              </a:rPr>
-              <a:t>+46%</a:t>
-            </a:r>
-          </a:p>
-        </p:txBody>
-      </p:sp>
-      <p:sp>
-        <p:nvSpPr>
-          <p:cNvPr id="24" name="TextBox 23"/>
-          <p:cNvSpPr txBox="1"/>
-          <p:nvPr/>
-        </p:nvSpPr>
-        <p:spPr>
-          <a:xfrm>
-            <a:off x="5559614" y="2598092"/>
-            <a:ext cx="1442466" cy="457200"/>
-          </a:xfrm>
-          <a:prstGeom prst="rect">
-            <a:avLst/>
-          </a:prstGeom>
-          <a:noFill/>
-        </p:spPr>
-        <p:txBody>
-          <a:bodyPr wrap="square">
-            <a:spAutoFit/>
-          </a:bodyPr>
-          <a:lstStyle/>
-          <a:p>
-            <a:pPr algn="ctr"/>
-            <a:r>
-              <a:rPr sz="850" b="0" i="0">
-                <a:solidFill>
-                  <a:srgbClr val="64748B"/>
-                </a:solidFill>
-                <a:latin typeface="Calibri"/>
-              </a:rPr>
-              <a:t>ultra-wealthy buyer count
-forecast by 2031</a:t>
-            </a:r>
-          </a:p>
-        </p:txBody>
-      </p:sp>
-      <p:sp>
-        <p:nvSpPr>
-          <p:cNvPr id="25" name="TextBox 24"/>
-          <p:cNvSpPr txBox="1"/>
-          <p:nvPr/>
-        </p:nvSpPr>
-        <p:spPr>
-          <a:xfrm>
-            <a:off x="457200" y="3313205"/>
-            <a:ext cx="4389120" cy="256032"/>
-          </a:xfrm>
-          <a:prstGeom prst="rect">
-            <a:avLst/>
-          </a:prstGeom>
-          <a:noFill/>
-        </p:spPr>
-        <p:txBody>
-          <a:bodyPr wrap="square">
-            <a:spAutoFit/>
-          </a:bodyPr>
-          <a:lstStyle/>
-          <a:p>
-            <a:pPr algn="l"/>
-            <a:r>
-              <a:rPr sz="850" b="1" i="0" dirty="0">
-                <a:solidFill>
-                  <a:srgbClr val="C9A84C"/>
-                </a:solidFill>
-                <a:latin typeface="Calibri"/>
-              </a:rPr>
-              <a:t>WHY SELLERS ARE MOVING NOW</a:t>
-            </a:r>
-          </a:p>
-        </p:txBody>
-      </p:sp>
-      <p:sp>
-        <p:nvSpPr>
-          <p:cNvPr id="26" name="Rectangle 25"/>
-          <p:cNvSpPr/>
-          <p:nvPr/>
-        </p:nvSpPr>
-        <p:spPr>
-          <a:xfrm>
-            <a:off x="457200" y="3602155"/>
-            <a:ext cx="4389120" cy="2395728"/>
-          </a:xfrm>
-          <a:prstGeom prst="rect">
-            <a:avLst/>
-          </a:prstGeom>
-          <a:solidFill>
-            <a:srgbClr val="F4F6FA"/>
-          </a:solidFill>
-          <a:ln w="6350">
-            <a:solidFill>
-              <a:srgbClr val="D9E2EF"/>
-            </a:solidFill>
-          </a:ln>
-        </p:spPr>
-        <p:style>
-          <a:lnRef idx="1">
-            <a:schemeClr val="accent1"/>
-          </a:lnRef>
-          <a:fillRef idx="3">
-            <a:schemeClr val="accent1"/>
-          </a:fillRef>
-          <a:effectRef idx="2">
-            <a:schemeClr val="accent1"/>
-          </a:effectRef>
-          <a:fontRef idx="minor">
-            <a:schemeClr val="lt1"/>
-          </a:fontRef>
-        </p:style>
-        <p:txBody>
-          <a:bodyPr rtlCol="0" anchor="ctr"/>
-          <a:lstStyle/>
-          <a:p>
-            <a:pPr algn="ctr"/>
-            <a:endParaRPr/>
-          </a:p>
-        </p:txBody>
-      </p:sp>
-      <p:sp>
-        <p:nvSpPr>
-          <p:cNvPr id="27" name="Oval 26"/>
-          <p:cNvSpPr/>
-          <p:nvPr/>
-        </p:nvSpPr>
-        <p:spPr>
-          <a:xfrm>
-            <a:off x="566928" y="3772134"/>
-            <a:ext cx="237744" cy="237744"/>
-          </a:xfrm>
-          <a:prstGeom prst="ellipse">
-            <a:avLst/>
-          </a:prstGeom>
-          <a:solidFill>
-            <a:srgbClr val="1B2A4A"/>
-          </a:solidFill>
-          <a:ln>
-            <a:noFill/>
-          </a:ln>
-        </p:spPr>
-        <p:style>
-          <a:lnRef idx="1">
-            <a:schemeClr val="accent1"/>
-          </a:lnRef>
-          <a:fillRef idx="3">
-            <a:schemeClr val="accent1"/>
-          </a:fillRef>
-          <a:effectRef idx="2">
-            <a:schemeClr val="accent1"/>
-          </a:effectRef>
-          <a:fontRef idx="minor">
-            <a:schemeClr val="lt1"/>
-          </a:fontRef>
-        </p:style>
-        <p:txBody>
-          <a:bodyPr rtlCol="0" anchor="ctr"/>
-          <a:lstStyle/>
-          <a:p>
-            <a:pPr algn="ctr"/>
-            <a:endParaRPr/>
-          </a:p>
-        </p:txBody>
-      </p:sp>
-      <p:sp>
-        <p:nvSpPr>
-          <p:cNvPr id="28" name="TextBox 27"/>
-          <p:cNvSpPr txBox="1"/>
-          <p:nvPr/>
-        </p:nvSpPr>
-        <p:spPr>
-          <a:xfrm>
-            <a:off x="566928" y="3772134"/>
-            <a:ext cx="237744" cy="237744"/>
-          </a:xfrm>
-          <a:prstGeom prst="rect">
-            <a:avLst/>
-          </a:prstGeom>
-          <a:noFill/>
-        </p:spPr>
-        <p:txBody>
-          <a:bodyPr wrap="square">
-            <a:spAutoFit/>
-          </a:bodyPr>
-          <a:lstStyle/>
-          <a:p>
-            <a:pPr algn="ctr"/>
-            <a:r>
-              <a:rPr sz="800" b="1" i="0">
-                <a:solidFill>
-                  <a:srgbClr val="C9A84C"/>
-                </a:solidFill>
-                <a:latin typeface="Calibri"/>
-              </a:rPr>
-              <a:t>1</a:t>
-            </a:r>
-          </a:p>
-        </p:txBody>
-      </p:sp>
-      <p:sp>
-        <p:nvSpPr>
-          <p:cNvPr id="29" name="TextBox 28"/>
-          <p:cNvSpPr txBox="1"/>
-          <p:nvPr/>
-        </p:nvSpPr>
-        <p:spPr>
-          <a:xfrm>
-            <a:off x="896112" y="3715291"/>
-            <a:ext cx="1280160" cy="201168"/>
-          </a:xfrm>
-          <a:prstGeom prst="rect">
-            <a:avLst/>
-          </a:prstGeom>
-          <a:noFill/>
-        </p:spPr>
-        <p:txBody>
-          <a:bodyPr wrap="square">
-            <a:spAutoFit/>
-          </a:bodyPr>
-          <a:lstStyle/>
-          <a:p>
-            <a:pPr algn="l"/>
-            <a:r>
-              <a:rPr sz="950" b="1" i="0" dirty="0">
-                <a:solidFill>
-                  <a:srgbClr val="1B2A4A"/>
-                </a:solidFill>
-                <a:latin typeface="Calibri"/>
-              </a:rPr>
-              <a:t>Prices up 6.7% YoY</a:t>
-            </a:r>
-          </a:p>
-        </p:txBody>
-      </p:sp>
-      <p:sp>
-        <p:nvSpPr>
-          <p:cNvPr id="30" name="TextBox 29"/>
-          <p:cNvSpPr txBox="1"/>
-          <p:nvPr/>
-        </p:nvSpPr>
-        <p:spPr>
-          <a:xfrm>
-            <a:off x="896112" y="3841214"/>
-            <a:ext cx="2926080" cy="182880"/>
-          </a:xfrm>
-          <a:prstGeom prst="rect">
-            <a:avLst/>
-          </a:prstGeom>
-          <a:noFill/>
-        </p:spPr>
-        <p:txBody>
-          <a:bodyPr wrap="square">
-            <a:spAutoFit/>
-          </a:bodyPr>
-          <a:lstStyle/>
-          <a:p>
-            <a:pPr algn="l"/>
-            <a:r>
-              <a:rPr sz="850" b="0" i="0" dirty="0">
-                <a:solidFill>
-                  <a:srgbClr val="64748B"/>
-                </a:solidFill>
-                <a:latin typeface="Calibri"/>
-              </a:rPr>
-              <a:t>Strong market recovery — Q2/Q3 is peak transaction season.</a:t>
-            </a:r>
-          </a:p>
-        </p:txBody>
-      </p:sp>
-      <p:sp>
-        <p:nvSpPr>
-          <p:cNvPr id="31" name="Oval 30"/>
-          <p:cNvSpPr/>
-          <p:nvPr/>
-        </p:nvSpPr>
-        <p:spPr>
-          <a:xfrm>
-            <a:off x="566928" y="4275845"/>
-            <a:ext cx="237744" cy="237744"/>
-          </a:xfrm>
-          <a:prstGeom prst="ellipse">
-            <a:avLst/>
-          </a:prstGeom>
-          <a:solidFill>
-            <a:srgbClr val="1B2A4A"/>
-          </a:solidFill>
-          <a:ln>
-            <a:noFill/>
-          </a:ln>
-        </p:spPr>
-        <p:style>
-          <a:lnRef idx="1">
-            <a:schemeClr val="accent1"/>
-          </a:lnRef>
-          <a:fillRef idx="3">
-            <a:schemeClr val="accent1"/>
-          </a:fillRef>
-          <a:effectRef idx="2">
-            <a:schemeClr val="accent1"/>
-          </a:effectRef>
-          <a:fontRef idx="minor">
-            <a:schemeClr val="lt1"/>
-          </a:fontRef>
-        </p:style>
-        <p:txBody>
-          <a:bodyPr rtlCol="0" anchor="ctr"/>
-          <a:lstStyle/>
-          <a:p>
-            <a:pPr algn="ctr"/>
-            <a:endParaRPr/>
-          </a:p>
-        </p:txBody>
-      </p:sp>
-      <p:sp>
-        <p:nvSpPr>
-          <p:cNvPr id="32" name="TextBox 31"/>
-          <p:cNvSpPr txBox="1"/>
-          <p:nvPr/>
-        </p:nvSpPr>
-        <p:spPr>
-          <a:xfrm>
-            <a:off x="566928" y="4275845"/>
-            <a:ext cx="237744" cy="237744"/>
-          </a:xfrm>
-          <a:prstGeom prst="rect">
-            <a:avLst/>
-          </a:prstGeom>
-          <a:noFill/>
-        </p:spPr>
-        <p:txBody>
-          <a:bodyPr wrap="square">
-            <a:spAutoFit/>
-          </a:bodyPr>
-          <a:lstStyle/>
-          <a:p>
-            <a:pPr algn="ctr"/>
-            <a:r>
-              <a:rPr sz="800" b="1" i="0">
-                <a:solidFill>
-                  <a:srgbClr val="C9A84C"/>
-                </a:solidFill>
-                <a:latin typeface="Calibri"/>
-              </a:rPr>
-              <a:t>2</a:t>
-            </a:r>
-          </a:p>
-        </p:txBody>
-      </p:sp>
-      <p:sp>
-        <p:nvSpPr>
-          <p:cNvPr id="33" name="TextBox 32"/>
-          <p:cNvSpPr txBox="1"/>
-          <p:nvPr/>
-        </p:nvSpPr>
-        <p:spPr>
-          <a:xfrm>
-            <a:off x="896112" y="4215188"/>
-            <a:ext cx="1868424" cy="238527"/>
-          </a:xfrm>
-          <a:prstGeom prst="rect">
-            <a:avLst/>
-          </a:prstGeom>
-          <a:noFill/>
-        </p:spPr>
-        <p:txBody>
-          <a:bodyPr wrap="square">
-            <a:spAutoFit/>
-          </a:bodyPr>
-          <a:lstStyle/>
-          <a:p>
-            <a:pPr algn="l"/>
-            <a:r>
-              <a:rPr sz="950" b="1" i="0" dirty="0">
-                <a:solidFill>
-                  <a:srgbClr val="1B2A4A"/>
-                </a:solidFill>
-                <a:latin typeface="Calibri"/>
-              </a:rPr>
-              <a:t>Declining interest rates</a:t>
-            </a:r>
-          </a:p>
-        </p:txBody>
-      </p:sp>
-      <p:sp>
-        <p:nvSpPr>
-          <p:cNvPr id="34" name="TextBox 33"/>
-          <p:cNvSpPr txBox="1"/>
-          <p:nvPr/>
-        </p:nvSpPr>
-        <p:spPr>
-          <a:xfrm>
-            <a:off x="896112" y="4341116"/>
-            <a:ext cx="2926080" cy="182880"/>
-          </a:xfrm>
-          <a:prstGeom prst="rect">
-            <a:avLst/>
-          </a:prstGeom>
-          <a:noFill/>
-        </p:spPr>
-        <p:txBody>
-          <a:bodyPr wrap="square">
-            <a:spAutoFit/>
-          </a:bodyPr>
-          <a:lstStyle/>
-          <a:p>
-            <a:pPr algn="l"/>
-            <a:r>
-              <a:rPr sz="850" b="0" i="0" dirty="0">
-                <a:solidFill>
-                  <a:srgbClr val="64748B"/>
-                </a:solidFill>
-                <a:latin typeface="Calibri"/>
-              </a:rPr>
-              <a:t>SORA falling → buyer affordability improving → larger qualified buyer pool.</a:t>
-            </a:r>
-          </a:p>
-        </p:txBody>
-      </p:sp>
-      <p:sp>
-        <p:nvSpPr>
-          <p:cNvPr id="35" name="Oval 34"/>
-          <p:cNvSpPr/>
-          <p:nvPr/>
-        </p:nvSpPr>
-        <p:spPr>
-          <a:xfrm>
-            <a:off x="566928" y="4838474"/>
-            <a:ext cx="237744" cy="237744"/>
-          </a:xfrm>
-          <a:prstGeom prst="ellipse">
-            <a:avLst/>
-          </a:prstGeom>
-          <a:solidFill>
-            <a:srgbClr val="1B2A4A"/>
-          </a:solidFill>
-          <a:ln>
-            <a:noFill/>
-          </a:ln>
-        </p:spPr>
-        <p:style>
-          <a:lnRef idx="1">
-            <a:schemeClr val="accent1"/>
-          </a:lnRef>
-          <a:fillRef idx="3">
-            <a:schemeClr val="accent1"/>
-          </a:fillRef>
-          <a:effectRef idx="2">
-            <a:schemeClr val="accent1"/>
-          </a:effectRef>
-          <a:fontRef idx="minor">
-            <a:schemeClr val="lt1"/>
-          </a:fontRef>
-        </p:style>
-        <p:txBody>
-          <a:bodyPr rtlCol="0" anchor="ctr"/>
-          <a:lstStyle/>
-          <a:p>
-            <a:pPr algn="ctr"/>
-            <a:endParaRPr/>
-          </a:p>
-        </p:txBody>
-      </p:sp>
-      <p:sp>
-        <p:nvSpPr>
-          <p:cNvPr id="36" name="TextBox 35"/>
-          <p:cNvSpPr txBox="1"/>
-          <p:nvPr/>
-        </p:nvSpPr>
-        <p:spPr>
-          <a:xfrm>
-            <a:off x="566928" y="4838474"/>
-            <a:ext cx="237744" cy="237744"/>
-          </a:xfrm>
-          <a:prstGeom prst="rect">
-            <a:avLst/>
-          </a:prstGeom>
-          <a:noFill/>
-        </p:spPr>
-        <p:txBody>
-          <a:bodyPr wrap="square">
-            <a:spAutoFit/>
-          </a:bodyPr>
-          <a:lstStyle/>
-          <a:p>
-            <a:pPr algn="ctr"/>
-            <a:r>
-              <a:rPr sz="800" b="1" i="0">
-                <a:solidFill>
-                  <a:srgbClr val="C9A84C"/>
-                </a:solidFill>
-                <a:latin typeface="Calibri"/>
-              </a:rPr>
-              <a:t>3</a:t>
-            </a:r>
-          </a:p>
-        </p:txBody>
-      </p:sp>
-      <p:sp>
-        <p:nvSpPr>
-          <p:cNvPr id="37" name="TextBox 36"/>
-          <p:cNvSpPr txBox="1"/>
-          <p:nvPr/>
-        </p:nvSpPr>
-        <p:spPr>
-          <a:xfrm>
-            <a:off x="896112" y="4788629"/>
-            <a:ext cx="2155560" cy="238527"/>
-          </a:xfrm>
-          <a:prstGeom prst="rect">
-            <a:avLst/>
-          </a:prstGeom>
-          <a:noFill/>
-        </p:spPr>
-        <p:txBody>
-          <a:bodyPr wrap="square">
-            <a:spAutoFit/>
-          </a:bodyPr>
-          <a:lstStyle/>
-          <a:p>
-            <a:pPr algn="l"/>
-            <a:r>
-              <a:rPr sz="950" b="1" i="0" dirty="0">
-                <a:solidFill>
-                  <a:srgbClr val="1B2A4A"/>
-                </a:solidFill>
-                <a:latin typeface="Calibri"/>
-              </a:rPr>
-              <a:t>Wealthiest buyer base ever</a:t>
-            </a:r>
-          </a:p>
-        </p:txBody>
-      </p:sp>
-      <p:sp>
-        <p:nvSpPr>
-          <p:cNvPr id="38" name="TextBox 37"/>
-          <p:cNvSpPr txBox="1"/>
-          <p:nvPr/>
-        </p:nvSpPr>
-        <p:spPr>
-          <a:xfrm>
-            <a:off x="896112" y="4919496"/>
-            <a:ext cx="2926080" cy="182880"/>
-          </a:xfrm>
-          <a:prstGeom prst="rect">
-            <a:avLst/>
-          </a:prstGeom>
-          <a:noFill/>
-        </p:spPr>
-        <p:txBody>
-          <a:bodyPr wrap="square">
-            <a:spAutoFit/>
-          </a:bodyPr>
-          <a:lstStyle/>
-          <a:p>
-            <a:pPr algn="l"/>
-            <a:r>
-              <a:rPr sz="850" b="0" i="0" dirty="0">
-                <a:solidFill>
-                  <a:srgbClr val="64748B"/>
-                </a:solidFill>
-                <a:latin typeface="Calibri"/>
-              </a:rPr>
-              <a:t>Singapore UHNWI count up 55% in 5 years. Forecast: +46% more by 2031.</a:t>
-            </a:r>
-          </a:p>
-        </p:txBody>
-      </p:sp>
-      <p:sp>
-        <p:nvSpPr>
-          <p:cNvPr id="39" name="Oval 38"/>
-          <p:cNvSpPr/>
-          <p:nvPr/>
-        </p:nvSpPr>
-        <p:spPr>
-          <a:xfrm>
-            <a:off x="566928" y="5406793"/>
-            <a:ext cx="237744" cy="237744"/>
-          </a:xfrm>
-          <a:prstGeom prst="ellipse">
-            <a:avLst/>
-          </a:prstGeom>
-          <a:solidFill>
-            <a:srgbClr val="1B2A4A"/>
-          </a:solidFill>
-          <a:ln>
-            <a:noFill/>
-          </a:ln>
-        </p:spPr>
-        <p:style>
-          <a:lnRef idx="1">
-            <a:schemeClr val="accent1"/>
-          </a:lnRef>
-          <a:fillRef idx="3">
-            <a:schemeClr val="accent1"/>
-          </a:fillRef>
-          <a:effectRef idx="2">
-            <a:schemeClr val="accent1"/>
-          </a:effectRef>
-          <a:fontRef idx="minor">
-            <a:schemeClr val="lt1"/>
-          </a:fontRef>
-        </p:style>
-        <p:txBody>
-          <a:bodyPr rtlCol="0" anchor="ctr"/>
-          <a:lstStyle/>
-          <a:p>
-            <a:pPr algn="ctr"/>
-            <a:endParaRPr/>
-          </a:p>
-        </p:txBody>
-      </p:sp>
-      <p:sp>
-        <p:nvSpPr>
-          <p:cNvPr id="40" name="TextBox 39"/>
-          <p:cNvSpPr txBox="1"/>
-          <p:nvPr/>
-        </p:nvSpPr>
-        <p:spPr>
-          <a:xfrm>
-            <a:off x="566928" y="5406793"/>
-            <a:ext cx="237744" cy="237744"/>
-          </a:xfrm>
-          <a:prstGeom prst="rect">
-            <a:avLst/>
-          </a:prstGeom>
-          <a:noFill/>
-        </p:spPr>
-        <p:txBody>
-          <a:bodyPr wrap="square">
-            <a:spAutoFit/>
-          </a:bodyPr>
-          <a:lstStyle/>
-          <a:p>
-            <a:pPr algn="ctr"/>
-            <a:r>
-              <a:rPr sz="800" b="1" i="0">
-                <a:solidFill>
-                  <a:srgbClr val="C9A84C"/>
-                </a:solidFill>
-                <a:latin typeface="Calibri"/>
-              </a:rPr>
-              <a:t>4</a:t>
-            </a:r>
-          </a:p>
-        </p:txBody>
-      </p:sp>
-      <p:sp>
-        <p:nvSpPr>
-          <p:cNvPr id="41" name="TextBox 40"/>
-          <p:cNvSpPr txBox="1"/>
-          <p:nvPr/>
-        </p:nvSpPr>
-        <p:spPr>
-          <a:xfrm>
-            <a:off x="896112" y="5353904"/>
-            <a:ext cx="1280160" cy="201168"/>
-          </a:xfrm>
-          <a:prstGeom prst="rect">
-            <a:avLst/>
-          </a:prstGeom>
-          <a:noFill/>
-        </p:spPr>
-        <p:txBody>
-          <a:bodyPr wrap="square">
-            <a:spAutoFit/>
-          </a:bodyPr>
-          <a:lstStyle/>
-          <a:p>
-            <a:pPr algn="l"/>
-            <a:r>
-              <a:rPr sz="950" b="1" i="0" dirty="0">
-                <a:solidFill>
-                  <a:srgbClr val="1B2A4A"/>
-                </a:solidFill>
-                <a:latin typeface="Calibri"/>
-              </a:rPr>
-              <a:t>Supply stays scarce</a:t>
-            </a:r>
-          </a:p>
-        </p:txBody>
-      </p:sp>
-      <p:sp>
-        <p:nvSpPr>
-          <p:cNvPr id="42" name="TextBox 41"/>
-          <p:cNvSpPr txBox="1"/>
-          <p:nvPr/>
-        </p:nvSpPr>
-        <p:spPr>
-          <a:xfrm>
-            <a:off x="896112" y="5486467"/>
-            <a:ext cx="2926080" cy="182880"/>
-          </a:xfrm>
-          <a:prstGeom prst="rect">
-            <a:avLst/>
-          </a:prstGeom>
-          <a:noFill/>
-        </p:spPr>
-        <p:txBody>
-          <a:bodyPr wrap="square">
-            <a:spAutoFit/>
-          </a:bodyPr>
-          <a:lstStyle/>
-          <a:p>
-            <a:pPr algn="l"/>
-            <a:r>
-              <a:rPr sz="850" b="0" i="0" dirty="0">
-                <a:solidFill>
-                  <a:srgbClr val="64748B"/>
-                </a:solidFill>
-                <a:latin typeface="Calibri"/>
-              </a:rPr>
-              <a:t>Landed stock grew only 12% in 25 years vs 228% for non-landed condos.</a:t>
-            </a:r>
-          </a:p>
-        </p:txBody>
-      </p:sp>
-      <p:sp>
-        <p:nvSpPr>
-          <p:cNvPr id="47" name="TextBox 46"/>
-          <p:cNvSpPr txBox="1"/>
-          <p:nvPr/>
-        </p:nvSpPr>
-        <p:spPr>
-          <a:xfrm>
-            <a:off x="5029200" y="3327835"/>
-            <a:ext cx="2359152" cy="256032"/>
-          </a:xfrm>
-          <a:prstGeom prst="rect">
-            <a:avLst/>
-          </a:prstGeom>
-          <a:noFill/>
-        </p:spPr>
-        <p:txBody>
-          <a:bodyPr wrap="square">
-            <a:spAutoFit/>
-          </a:bodyPr>
-          <a:lstStyle/>
-          <a:p>
-            <a:pPr algn="l"/>
-            <a:r>
-              <a:rPr sz="800" b="1" i="0">
-                <a:solidFill>
-                  <a:srgbClr val="C9A84C"/>
-                </a:solidFill>
-                <a:latin typeface="Calibri"/>
-              </a:rPr>
-              <a:t>THOMSON GARDEN ESTATE</a:t>
-            </a:r>
-          </a:p>
-        </p:txBody>
-      </p:sp>
-      <p:sp>
-        <p:nvSpPr>
-          <p:cNvPr id="48" name="TextBox 47"/>
-          <p:cNvSpPr txBox="1"/>
-          <p:nvPr/>
-        </p:nvSpPr>
-        <p:spPr>
-          <a:xfrm>
-            <a:off x="5029200" y="3442135"/>
-            <a:ext cx="2359152" cy="307777"/>
-          </a:xfrm>
-          <a:prstGeom prst="rect">
-            <a:avLst/>
-          </a:prstGeom>
-          <a:noFill/>
-        </p:spPr>
-        <p:txBody>
-          <a:bodyPr wrap="square">
-            <a:spAutoFit/>
-          </a:bodyPr>
-          <a:lstStyle/>
-          <a:p>
-            <a:pPr algn="l"/>
-            <a:r>
-              <a:rPr sz="700" b="0" i="1" dirty="0">
-                <a:solidFill>
-                  <a:srgbClr val="64748B"/>
-                </a:solidFill>
-                <a:latin typeface="Calibri"/>
-              </a:rPr>
-              <a:t>Jun 2025 – Jun 2026 · Freehold D20</a:t>
-            </a:r>
-            <a:endParaRPr lang="en-US" sz="700" b="0" i="1" dirty="0">
-              <a:solidFill>
-                <a:srgbClr val="64748B"/>
-              </a:solidFill>
-              <a:latin typeface="Calibri"/>
-            </a:endParaRPr>
-          </a:p>
-          <a:p>
-            <a:pPr algn="l"/>
-            <a:endParaRPr sz="700" b="0" i="1" dirty="0">
-              <a:solidFill>
-                <a:srgbClr val="64748B"/>
-              </a:solidFill>
-              <a:latin typeface="Calibri"/>
-            </a:endParaRPr>
-          </a:p>
-        </p:txBody>
-      </p:sp>
-      <p:sp>
-        <p:nvSpPr>
-          <p:cNvPr id="49" name="Rectangle 48"/>
-          <p:cNvSpPr/>
-          <p:nvPr/>
-        </p:nvSpPr>
-        <p:spPr>
-          <a:xfrm>
-            <a:off x="5029200" y="3602155"/>
-            <a:ext cx="2359152" cy="2395728"/>
-          </a:xfrm>
-          <a:prstGeom prst="rect">
-            <a:avLst/>
-          </a:prstGeom>
-          <a:solidFill>
-            <a:srgbClr val="F4F6FA"/>
-          </a:solidFill>
-          <a:ln w="6350">
-            <a:solidFill>
-              <a:srgbClr val="D9E2EF"/>
-            </a:solidFill>
-          </a:ln>
-        </p:spPr>
-        <p:style>
-          <a:lnRef idx="1">
-            <a:schemeClr val="accent1"/>
-          </a:lnRef>
-          <a:fillRef idx="3">
-            <a:schemeClr val="accent1"/>
-          </a:fillRef>
-          <a:effectRef idx="2">
-            <a:schemeClr val="accent1"/>
-          </a:effectRef>
-          <a:fontRef idx="minor">
-            <a:schemeClr val="lt1"/>
-          </a:fontRef>
-        </p:style>
-        <p:txBody>
-          <a:bodyPr rtlCol="0" anchor="ctr"/>
-          <a:lstStyle/>
-          <a:p>
-            <a:pPr algn="ctr"/>
-            <a:endParaRPr/>
-          </a:p>
-        </p:txBody>
-      </p:sp>
-      <p:sp>
-        <p:nvSpPr>
-          <p:cNvPr id="50" name="Rectangle 49"/>
-          <p:cNvSpPr/>
-          <p:nvPr/>
-        </p:nvSpPr>
-        <p:spPr>
-          <a:xfrm>
-            <a:off x="5120640" y="3693596"/>
-            <a:ext cx="2157984" cy="457200"/>
-          </a:xfrm>
-          <a:prstGeom prst="rect">
-            <a:avLst/>
-          </a:prstGeom>
-          <a:solidFill>
-            <a:srgbClr val="FFFFFF"/>
-          </a:solidFill>
-          <a:ln w="6350">
-            <a:solidFill>
-              <a:srgbClr val="D9E2EF"/>
-            </a:solidFill>
-          </a:ln>
-        </p:spPr>
-        <p:style>
-          <a:lnRef idx="1">
-            <a:schemeClr val="accent1"/>
-          </a:lnRef>
-          <a:fillRef idx="3">
-            <a:schemeClr val="accent1"/>
-          </a:fillRef>
-          <a:effectRef idx="2">
-            <a:schemeClr val="accent1"/>
-          </a:effectRef>
-          <a:fontRef idx="minor">
-            <a:schemeClr val="lt1"/>
-          </a:fontRef>
-        </p:style>
-        <p:txBody>
-          <a:bodyPr rtlCol="0" anchor="ctr"/>
-          <a:lstStyle/>
-          <a:p>
-            <a:pPr algn="ctr"/>
-            <a:endParaRPr/>
-          </a:p>
-        </p:txBody>
-      </p:sp>
-      <p:sp>
-        <p:nvSpPr>
-          <p:cNvPr id="51" name="TextBox 50"/>
-          <p:cNvSpPr txBox="1"/>
-          <p:nvPr/>
-        </p:nvSpPr>
-        <p:spPr>
-          <a:xfrm>
-            <a:off x="5193791" y="3739316"/>
-            <a:ext cx="1746503" cy="230832"/>
-          </a:xfrm>
-          <a:prstGeom prst="rect">
-            <a:avLst/>
-          </a:prstGeom>
-          <a:noFill/>
-        </p:spPr>
-        <p:txBody>
-          <a:bodyPr wrap="square">
-            <a:spAutoFit/>
-          </a:bodyPr>
-          <a:lstStyle/>
-          <a:p>
-            <a:pPr algn="l"/>
-            <a:r>
-              <a:rPr sz="900" b="0" i="0" dirty="0">
-                <a:solidFill>
-                  <a:srgbClr val="1B2A4A"/>
-                </a:solidFill>
-                <a:latin typeface="Calibri"/>
-              </a:rPr>
-              <a:t>Terrace (</a:t>
-            </a:r>
-            <a:r>
-              <a:rPr lang="en-US" sz="900" b="0" i="0" dirty="0">
-                <a:solidFill>
-                  <a:srgbClr val="1B2A4A"/>
-                </a:solidFill>
-                <a:latin typeface="Calibri"/>
-              </a:rPr>
-              <a:t>small &amp; </a:t>
-            </a:r>
-            <a:r>
-              <a:rPr sz="900" b="0" i="0" dirty="0">
-                <a:solidFill>
-                  <a:srgbClr val="1B2A4A"/>
-                </a:solidFill>
-                <a:latin typeface="Calibri"/>
-              </a:rPr>
-              <a:t>typical)</a:t>
-            </a:r>
-          </a:p>
-        </p:txBody>
-      </p:sp>
-      <p:sp>
-        <p:nvSpPr>
-          <p:cNvPr id="52" name="TextBox 51"/>
-          <p:cNvSpPr txBox="1"/>
-          <p:nvPr/>
-        </p:nvSpPr>
-        <p:spPr>
-          <a:xfrm>
-            <a:off x="5193792" y="3867598"/>
-            <a:ext cx="1828800" cy="164592"/>
-          </a:xfrm>
-          <a:prstGeom prst="rect">
-            <a:avLst/>
-          </a:prstGeom>
-          <a:noFill/>
-        </p:spPr>
-        <p:txBody>
-          <a:bodyPr wrap="square">
-            <a:spAutoFit/>
-          </a:bodyPr>
-          <a:lstStyle/>
-          <a:p>
-            <a:pPr algn="l"/>
-            <a:r>
-              <a:rPr sz="1200" b="1" i="0" dirty="0">
-                <a:solidFill>
-                  <a:srgbClr val="C9A84C"/>
-                </a:solidFill>
-                <a:latin typeface="Calibri"/>
-              </a:rPr>
-              <a:t>$2.65M–$4.35M</a:t>
-            </a:r>
-          </a:p>
-        </p:txBody>
-      </p:sp>
-      <p:sp>
-        <p:nvSpPr>
-          <p:cNvPr id="53" name="Rectangle 52"/>
-          <p:cNvSpPr/>
-          <p:nvPr/>
-        </p:nvSpPr>
-        <p:spPr>
-          <a:xfrm>
-            <a:off x="5120640" y="4242236"/>
-            <a:ext cx="2157984" cy="457200"/>
-          </a:xfrm>
-          <a:prstGeom prst="rect">
-            <a:avLst/>
-          </a:prstGeom>
-          <a:solidFill>
-            <a:srgbClr val="FFFFFF"/>
-          </a:solidFill>
-          <a:ln w="6350">
-            <a:solidFill>
-              <a:srgbClr val="D9E2EF"/>
-            </a:solidFill>
-          </a:ln>
-        </p:spPr>
-        <p:style>
-          <a:lnRef idx="1">
-            <a:schemeClr val="accent1"/>
-          </a:lnRef>
-          <a:fillRef idx="3">
-            <a:schemeClr val="accent1"/>
-          </a:fillRef>
-          <a:effectRef idx="2">
-            <a:schemeClr val="accent1"/>
-          </a:effectRef>
-          <a:fontRef idx="minor">
-            <a:schemeClr val="lt1"/>
-          </a:fontRef>
-        </p:style>
-        <p:txBody>
-          <a:bodyPr rtlCol="0" anchor="ctr"/>
-          <a:lstStyle/>
-          <a:p>
-            <a:pPr algn="ctr"/>
-            <a:endParaRPr/>
-          </a:p>
-        </p:txBody>
-      </p:sp>
-      <p:sp>
-        <p:nvSpPr>
-          <p:cNvPr id="54" name="TextBox 53"/>
-          <p:cNvSpPr txBox="1"/>
-          <p:nvPr/>
-        </p:nvSpPr>
-        <p:spPr>
-          <a:xfrm>
-            <a:off x="5193792" y="4287955"/>
-            <a:ext cx="1097280" cy="219456"/>
-          </a:xfrm>
-          <a:prstGeom prst="rect">
-            <a:avLst/>
-          </a:prstGeom>
-          <a:noFill/>
-        </p:spPr>
-        <p:txBody>
-          <a:bodyPr wrap="square">
-            <a:spAutoFit/>
-          </a:bodyPr>
-          <a:lstStyle/>
-          <a:p>
-            <a:pPr algn="l"/>
-            <a:r>
-              <a:rPr sz="900" b="0" i="0">
-                <a:solidFill>
-                  <a:srgbClr val="1B2A4A"/>
-                </a:solidFill>
-                <a:latin typeface="Calibri"/>
-              </a:rPr>
-              <a:t>Terrace (large)</a:t>
-            </a:r>
-          </a:p>
-        </p:txBody>
-      </p:sp>
-      <p:sp>
-        <p:nvSpPr>
-          <p:cNvPr id="55" name="TextBox 54"/>
-          <p:cNvSpPr txBox="1"/>
-          <p:nvPr/>
-        </p:nvSpPr>
-        <p:spPr>
-          <a:xfrm>
-            <a:off x="5193792" y="4416237"/>
-            <a:ext cx="1828800" cy="164592"/>
-          </a:xfrm>
-          <a:prstGeom prst="rect">
-            <a:avLst/>
-          </a:prstGeom>
-          <a:noFill/>
-        </p:spPr>
-        <p:txBody>
-          <a:bodyPr wrap="square">
-            <a:spAutoFit/>
-          </a:bodyPr>
-          <a:lstStyle/>
-          <a:p>
-            <a:pPr algn="l"/>
-            <a:r>
-              <a:rPr sz="1200" b="1" i="0" dirty="0">
-                <a:solidFill>
-                  <a:srgbClr val="C9A84C"/>
-                </a:solidFill>
-                <a:latin typeface="Calibri"/>
-              </a:rPr>
-              <a:t>$4.35M–$6.25M</a:t>
-            </a:r>
-          </a:p>
-        </p:txBody>
-      </p:sp>
-      <p:sp>
-        <p:nvSpPr>
-          <p:cNvPr id="56" name="Rectangle 55"/>
-          <p:cNvSpPr/>
-          <p:nvPr/>
-        </p:nvSpPr>
-        <p:spPr>
-          <a:xfrm>
-            <a:off x="5120640" y="4790876"/>
-            <a:ext cx="2157984" cy="457200"/>
-          </a:xfrm>
-          <a:prstGeom prst="rect">
-            <a:avLst/>
-          </a:prstGeom>
-          <a:solidFill>
-            <a:srgbClr val="FFFFFF"/>
-          </a:solidFill>
-          <a:ln w="6350">
-            <a:solidFill>
-              <a:srgbClr val="D9E2EF"/>
-            </a:solidFill>
-          </a:ln>
-        </p:spPr>
-        <p:style>
-          <a:lnRef idx="1">
-            <a:schemeClr val="accent1"/>
-          </a:lnRef>
-          <a:fillRef idx="3">
-            <a:schemeClr val="accent1"/>
-          </a:fillRef>
-          <a:effectRef idx="2">
-            <a:schemeClr val="accent1"/>
-          </a:effectRef>
-          <a:fontRef idx="minor">
-            <a:schemeClr val="lt1"/>
-          </a:fontRef>
-        </p:style>
-        <p:txBody>
-          <a:bodyPr rtlCol="0" anchor="ctr"/>
-          <a:lstStyle/>
-          <a:p>
-            <a:pPr algn="ctr"/>
-            <a:endParaRPr/>
-          </a:p>
-        </p:txBody>
-      </p:sp>
-      <p:sp>
-        <p:nvSpPr>
-          <p:cNvPr id="57" name="TextBox 56"/>
-          <p:cNvSpPr txBox="1"/>
-          <p:nvPr/>
-        </p:nvSpPr>
-        <p:spPr>
-          <a:xfrm>
-            <a:off x="5193792" y="4836596"/>
-            <a:ext cx="1097280" cy="219456"/>
-          </a:xfrm>
-          <a:prstGeom prst="rect">
-            <a:avLst/>
-          </a:prstGeom>
-          <a:noFill/>
-        </p:spPr>
-        <p:txBody>
-          <a:bodyPr wrap="square">
-            <a:spAutoFit/>
-          </a:bodyPr>
-          <a:lstStyle/>
-          <a:p>
-            <a:pPr algn="l"/>
-            <a:r>
-              <a:rPr sz="900" b="0" i="0">
-                <a:solidFill>
-                  <a:srgbClr val="1B2A4A"/>
-                </a:solidFill>
-                <a:latin typeface="Calibri"/>
-              </a:rPr>
-              <a:t>Semi-D</a:t>
-            </a:r>
-          </a:p>
-        </p:txBody>
-      </p:sp>
-      <p:sp>
-        <p:nvSpPr>
-          <p:cNvPr id="58" name="TextBox 57"/>
-          <p:cNvSpPr txBox="1"/>
-          <p:nvPr/>
-        </p:nvSpPr>
-        <p:spPr>
-          <a:xfrm>
-            <a:off x="5193792" y="4958252"/>
-            <a:ext cx="1828800" cy="164592"/>
-          </a:xfrm>
-          <a:prstGeom prst="rect">
-            <a:avLst/>
-          </a:prstGeom>
-          <a:noFill/>
-        </p:spPr>
-        <p:txBody>
-          <a:bodyPr wrap="square">
-            <a:spAutoFit/>
-          </a:bodyPr>
-          <a:lstStyle/>
-          <a:p>
-            <a:pPr algn="l"/>
-            <a:r>
-              <a:rPr sz="1200" b="1" i="0" dirty="0">
-                <a:solidFill>
-                  <a:srgbClr val="C9A84C"/>
-                </a:solidFill>
-                <a:latin typeface="Calibri"/>
-              </a:rPr>
-              <a:t>$5.70M–$7.20M</a:t>
-            </a:r>
-          </a:p>
-        </p:txBody>
-      </p:sp>
-      <p:sp>
-        <p:nvSpPr>
-          <p:cNvPr id="59" name="Rectangle 58"/>
-          <p:cNvSpPr/>
-          <p:nvPr/>
-        </p:nvSpPr>
-        <p:spPr>
-          <a:xfrm>
-            <a:off x="5120640" y="5339516"/>
-            <a:ext cx="2157984" cy="457200"/>
-          </a:xfrm>
-          <a:prstGeom prst="rect">
-            <a:avLst/>
-          </a:prstGeom>
-          <a:solidFill>
-            <a:srgbClr val="FFFFFF"/>
-          </a:solidFill>
-          <a:ln w="6350">
-            <a:solidFill>
-              <a:srgbClr val="D9E2EF"/>
-            </a:solidFill>
-          </a:ln>
-        </p:spPr>
-        <p:style>
-          <a:lnRef idx="1">
-            <a:schemeClr val="accent1"/>
-          </a:lnRef>
-          <a:fillRef idx="3">
-            <a:schemeClr val="accent1"/>
-          </a:fillRef>
-          <a:effectRef idx="2">
-            <a:schemeClr val="accent1"/>
-          </a:effectRef>
-          <a:fontRef idx="minor">
-            <a:schemeClr val="lt1"/>
-          </a:fontRef>
-        </p:style>
-        <p:txBody>
-          <a:bodyPr rtlCol="0" anchor="ctr"/>
-          <a:lstStyle/>
-          <a:p>
-            <a:pPr algn="ctr"/>
-            <a:endParaRPr/>
-          </a:p>
-        </p:txBody>
-      </p:sp>
-      <p:sp>
-        <p:nvSpPr>
-          <p:cNvPr id="60" name="TextBox 59"/>
-          <p:cNvSpPr txBox="1"/>
-          <p:nvPr/>
-        </p:nvSpPr>
-        <p:spPr>
-          <a:xfrm>
-            <a:off x="5193792" y="5385236"/>
-            <a:ext cx="1097280" cy="219456"/>
-          </a:xfrm>
-          <a:prstGeom prst="rect">
-            <a:avLst/>
-          </a:prstGeom>
-          <a:noFill/>
-        </p:spPr>
-        <p:txBody>
-          <a:bodyPr wrap="square">
-            <a:spAutoFit/>
-          </a:bodyPr>
-          <a:lstStyle/>
-          <a:p>
-            <a:pPr algn="l"/>
-            <a:r>
-              <a:rPr sz="900" b="0" i="0">
-                <a:solidFill>
-                  <a:srgbClr val="1B2A4A"/>
-                </a:solidFill>
-                <a:latin typeface="Calibri"/>
-              </a:rPr>
-              <a:t>Avg Land PSF</a:t>
-            </a:r>
-          </a:p>
-        </p:txBody>
-      </p:sp>
-      <p:sp>
-        <p:nvSpPr>
-          <p:cNvPr id="61" name="TextBox 60"/>
-          <p:cNvSpPr txBox="1"/>
-          <p:nvPr/>
-        </p:nvSpPr>
-        <p:spPr>
-          <a:xfrm>
-            <a:off x="5193792" y="5513518"/>
-            <a:ext cx="1828800" cy="164592"/>
-          </a:xfrm>
-          <a:prstGeom prst="rect">
-            <a:avLst/>
-          </a:prstGeom>
-          <a:noFill/>
-        </p:spPr>
-        <p:txBody>
-          <a:bodyPr wrap="square">
-            <a:spAutoFit/>
-          </a:bodyPr>
-          <a:lstStyle/>
-          <a:p>
-            <a:pPr algn="l"/>
-            <a:r>
-              <a:rPr sz="1200" b="1" i="0" dirty="0">
-                <a:solidFill>
-                  <a:srgbClr val="C9A84C"/>
-                </a:solidFill>
-                <a:latin typeface="Calibri"/>
-              </a:rPr>
-              <a:t>$3,151 </a:t>
-            </a:r>
-            <a:r>
-              <a:rPr sz="1200" b="1" i="0" dirty="0" err="1">
-                <a:solidFill>
-                  <a:srgbClr val="C9A84C"/>
-                </a:solidFill>
-                <a:latin typeface="Calibri"/>
-              </a:rPr>
-              <a:t>psf</a:t>
-            </a:r>
-            <a:endParaRPr sz="1200" b="1" i="0" dirty="0">
-              <a:solidFill>
-                <a:srgbClr val="C9A84C"/>
-              </a:solidFill>
-              <a:latin typeface="Calibri"/>
-            </a:endParaRPr>
-          </a:p>
-        </p:txBody>
-      </p:sp>
-      <p:sp>
-        <p:nvSpPr>
-          <p:cNvPr id="62" name="TextBox 61"/>
-          <p:cNvSpPr txBox="1"/>
-          <p:nvPr/>
-        </p:nvSpPr>
-        <p:spPr>
-          <a:xfrm>
-            <a:off x="5029200" y="6254496"/>
-            <a:ext cx="2359152" cy="164592"/>
-          </a:xfrm>
-          <a:prstGeom prst="rect">
-            <a:avLst/>
-          </a:prstGeom>
-          <a:noFill/>
-        </p:spPr>
-        <p:txBody>
-          <a:bodyPr wrap="square">
-            <a:spAutoFit/>
-          </a:bodyPr>
-          <a:lstStyle/>
-          <a:p>
-            <a:pPr algn="l"/>
-            <a:r>
-              <a:rPr sz="700" b="0" i="1">
-                <a:solidFill>
-                  <a:srgbClr val="64748B"/>
-                </a:solidFill>
-                <a:latin typeface="Calibri"/>
-              </a:rPr>
-              <a:t>Source: URA REALIS (Jun 2025–Jun 2026)</a:t>
-            </a:r>
-          </a:p>
-        </p:txBody>
-      </p:sp>
-      <p:sp>
-        <p:nvSpPr>
-          <p:cNvPr id="63" name="Rectangle 62"/>
-          <p:cNvSpPr/>
-          <p:nvPr/>
-        </p:nvSpPr>
-        <p:spPr>
-          <a:xfrm>
-            <a:off x="21020" y="6236208"/>
-            <a:ext cx="7562088" cy="1042416"/>
-          </a:xfrm>
-          <a:prstGeom prst="rect">
-            <a:avLst/>
-          </a:prstGeom>
-          <a:solidFill>
-            <a:srgbClr val="1B2A4A"/>
-          </a:solidFill>
-          <a:ln>
-            <a:noFill/>
-          </a:ln>
-        </p:spPr>
-        <p:style>
-          <a:lnRef idx="1">
-            <a:schemeClr val="accent1"/>
-          </a:lnRef>
-          <a:fillRef idx="3">
-            <a:schemeClr val="accent1"/>
-          </a:fillRef>
-          <a:effectRef idx="2">
-            <a:schemeClr val="accent1"/>
-          </a:effectRef>
-          <a:fontRef idx="minor">
-            <a:schemeClr val="lt1"/>
-          </a:fontRef>
-        </p:style>
-        <p:txBody>
-          <a:bodyPr rtlCol="0" anchor="ctr"/>
-          <a:lstStyle/>
-          <a:p>
-            <a:pPr algn="ctr"/>
-            <a:endParaRPr/>
-          </a:p>
-        </p:txBody>
-      </p:sp>
-      <p:sp>
-        <p:nvSpPr>
-          <p:cNvPr id="64" name="Rectangle 63"/>
-          <p:cNvSpPr/>
-          <p:nvPr/>
-        </p:nvSpPr>
-        <p:spPr>
-          <a:xfrm>
-            <a:off x="-10510" y="6236208"/>
-            <a:ext cx="256032" cy="1042416"/>
-          </a:xfrm>
-          <a:prstGeom prst="rect">
-            <a:avLst/>
-          </a:prstGeom>
-          <a:solidFill>
-            <a:srgbClr val="C9A84C"/>
-          </a:solidFill>
-          <a:ln>
-            <a:noFill/>
-          </a:ln>
-        </p:spPr>
-        <p:style>
-          <a:lnRef idx="1">
-            <a:schemeClr val="accent1"/>
-          </a:lnRef>
-          <a:fillRef idx="3">
-            <a:schemeClr val="accent1"/>
-          </a:fillRef>
-          <a:effectRef idx="2">
-            <a:schemeClr val="accent1"/>
-          </a:effectRef>
-          <a:fontRef idx="minor">
-            <a:schemeClr val="lt1"/>
-          </a:fontRef>
-        </p:style>
-        <p:txBody>
-          <a:bodyPr rtlCol="0" anchor="ctr"/>
-          <a:lstStyle/>
-          <a:p>
-            <a:pPr algn="ctr"/>
-            <a:endParaRPr/>
-          </a:p>
-        </p:txBody>
-      </p:sp>
-      <p:sp>
-        <p:nvSpPr>
-          <p:cNvPr id="65" name="TextBox 64"/>
-          <p:cNvSpPr txBox="1"/>
-          <p:nvPr/>
-        </p:nvSpPr>
-        <p:spPr>
-          <a:xfrm>
-            <a:off x="411480" y="6309360"/>
-            <a:ext cx="5029200" cy="256032"/>
-          </a:xfrm>
-          <a:prstGeom prst="rect">
-            <a:avLst/>
-          </a:prstGeom>
-          <a:noFill/>
-        </p:spPr>
-        <p:txBody>
-          <a:bodyPr wrap="square">
-            <a:spAutoFit/>
-          </a:bodyPr>
-          <a:lstStyle/>
-          <a:p>
-            <a:pPr algn="l"/>
-            <a:r>
-              <a:rPr sz="900" b="1" i="0" dirty="0">
-                <a:solidFill>
-                  <a:srgbClr val="C9A84C"/>
-                </a:solidFill>
-                <a:latin typeface="Calibri"/>
-              </a:rPr>
-              <a:t>WHAT YOUR HOME COULD BE WORTH</a:t>
-            </a:r>
-          </a:p>
-        </p:txBody>
-      </p:sp>
-      <p:sp>
-        <p:nvSpPr>
-          <p:cNvPr id="66" name="TextBox 65"/>
-          <p:cNvSpPr txBox="1"/>
-          <p:nvPr/>
-        </p:nvSpPr>
-        <p:spPr>
-          <a:xfrm>
-            <a:off x="411480" y="6583680"/>
-            <a:ext cx="6858000" cy="694944"/>
-          </a:xfrm>
-          <a:prstGeom prst="rect">
-            <a:avLst/>
-          </a:prstGeom>
-          <a:noFill/>
-        </p:spPr>
-        <p:txBody>
-          <a:bodyPr wrap="square">
-            <a:spAutoFit/>
-          </a:bodyPr>
-          <a:lstStyle/>
-          <a:p>
-            <a:pPr algn="l"/>
-            <a:r>
-              <a:rPr sz="1000" b="0" i="0">
-                <a:solidFill>
-                  <a:srgbClr val="FFFFFF"/>
-                </a:solidFill>
-                <a:latin typeface="Calibri"/>
-              </a:rPr>
-              <a:t>Based on 21 transactions in Thomson Garden Estate over the last 12 months, freehold terraces have transacted between $2.65M–$6.25M and semi-detached homes at $5.70M–$7.20M. Average land PSF: $3,151. Call me for a complimentary, no-obligation valuation of your specific home.</a:t>
-            </a:r>
-          </a:p>
-        </p:txBody>
-      </p:sp>
-      <p:sp>
-        <p:nvSpPr>
-          <p:cNvPr id="67" name="TextBox 66"/>
-          <p:cNvSpPr txBox="1"/>
-          <p:nvPr/>
-        </p:nvSpPr>
-        <p:spPr>
-          <a:xfrm>
-            <a:off x="946481" y="7398688"/>
-            <a:ext cx="2460266" cy="223138"/>
-          </a:xfrm>
-          <a:prstGeom prst="rect">
-            <a:avLst/>
-          </a:prstGeom>
-          <a:noFill/>
-        </p:spPr>
-        <p:txBody>
-          <a:bodyPr wrap="square">
-            <a:spAutoFit/>
-          </a:bodyPr>
-          <a:lstStyle/>
-          <a:p>
-            <a:pPr algn="l"/>
-            <a:r>
-              <a:rPr sz="850" b="1" i="0" dirty="0">
-                <a:solidFill>
-                  <a:srgbClr val="C9A84C"/>
-                </a:solidFill>
-                <a:latin typeface="Calibri"/>
-              </a:rPr>
-              <a:t>HOW IT WORKS — THREE SIMPLE STEPS</a:t>
-            </a:r>
-          </a:p>
-        </p:txBody>
-      </p:sp>
-      <p:sp>
-        <p:nvSpPr>
-          <p:cNvPr id="68" name="Rectangle 67"/>
-          <p:cNvSpPr/>
-          <p:nvPr/>
-        </p:nvSpPr>
-        <p:spPr>
-          <a:xfrm>
-            <a:off x="910472" y="7691296"/>
-            <a:ext cx="1755592" cy="1417320"/>
-          </a:xfrm>
-          <a:prstGeom prst="rect">
-            <a:avLst/>
-          </a:prstGeom>
-          <a:solidFill>
-            <a:srgbClr val="FDF6E3"/>
-          </a:solidFill>
-          <a:ln w="9525">
-            <a:solidFill>
-              <a:srgbClr val="C9A84C"/>
-            </a:solidFill>
-          </a:ln>
-        </p:spPr>
-        <p:style>
-          <a:lnRef idx="1">
-            <a:schemeClr val="accent1"/>
-          </a:lnRef>
-          <a:fillRef idx="3">
-            <a:schemeClr val="accent1"/>
-          </a:fillRef>
-          <a:effectRef idx="2">
-            <a:schemeClr val="accent1"/>
-          </a:effectRef>
-          <a:fontRef idx="minor">
-            <a:schemeClr val="lt1"/>
-          </a:fontRef>
-        </p:style>
-        <p:txBody>
-          <a:bodyPr rtlCol="0" anchor="ctr"/>
-          <a:lstStyle/>
-          <a:p>
-            <a:pPr algn="ctr"/>
-            <a:endParaRPr/>
-          </a:p>
-        </p:txBody>
-      </p:sp>
-      <p:sp>
-        <p:nvSpPr>
-          <p:cNvPr id="69" name="Oval 68"/>
-          <p:cNvSpPr/>
-          <p:nvPr/>
-        </p:nvSpPr>
-        <p:spPr>
-          <a:xfrm>
-            <a:off x="1609237" y="7755304"/>
-            <a:ext cx="365760" cy="365760"/>
-          </a:xfrm>
-          <a:prstGeom prst="ellipse">
-            <a:avLst/>
-          </a:prstGeom>
-          <a:solidFill>
-            <a:srgbClr val="1B2A4A"/>
-          </a:solidFill>
-          <a:ln>
-            <a:noFill/>
-          </a:ln>
-        </p:spPr>
-        <p:style>
-          <a:lnRef idx="1">
-            <a:schemeClr val="accent1"/>
-          </a:lnRef>
-          <a:fillRef idx="3">
-            <a:schemeClr val="accent1"/>
-          </a:fillRef>
-          <a:effectRef idx="2">
-            <a:schemeClr val="accent1"/>
-          </a:effectRef>
-          <a:fontRef idx="minor">
-            <a:schemeClr val="lt1"/>
-          </a:fontRef>
-        </p:style>
-        <p:txBody>
-          <a:bodyPr rtlCol="0" anchor="ctr"/>
-          <a:lstStyle/>
-          <a:p>
-            <a:pPr algn="ctr"/>
-            <a:endParaRPr dirty="0"/>
-          </a:p>
-        </p:txBody>
-      </p:sp>
-      <p:sp>
-        <p:nvSpPr>
-          <p:cNvPr id="70" name="TextBox 69"/>
-          <p:cNvSpPr txBox="1"/>
-          <p:nvPr/>
-        </p:nvSpPr>
-        <p:spPr>
-          <a:xfrm>
-            <a:off x="1609237" y="7755304"/>
-            <a:ext cx="365760" cy="365760"/>
-          </a:xfrm>
-          <a:prstGeom prst="rect">
-            <a:avLst/>
-          </a:prstGeom>
-          <a:noFill/>
-        </p:spPr>
-        <p:txBody>
-          <a:bodyPr wrap="square">
-            <a:spAutoFit/>
-          </a:bodyPr>
-          <a:lstStyle/>
-          <a:p>
-            <a:pPr algn="ctr"/>
-            <a:r>
-              <a:rPr sz="1200" b="1" i="0" dirty="0">
-                <a:solidFill>
-                  <a:srgbClr val="C9A84C"/>
-                </a:solidFill>
-                <a:latin typeface="Calibri"/>
-              </a:rPr>
-              <a:t>1</a:t>
-            </a:r>
-          </a:p>
-        </p:txBody>
-      </p:sp>
-      <p:sp>
-        <p:nvSpPr>
-          <p:cNvPr id="71" name="TextBox 70"/>
-          <p:cNvSpPr txBox="1"/>
-          <p:nvPr/>
-        </p:nvSpPr>
-        <p:spPr>
-          <a:xfrm>
-            <a:off x="909205" y="8185072"/>
-            <a:ext cx="1755592" cy="238527"/>
-          </a:xfrm>
-          <a:prstGeom prst="rect">
-            <a:avLst/>
-          </a:prstGeom>
-          <a:noFill/>
-        </p:spPr>
-        <p:txBody>
-          <a:bodyPr wrap="square">
-            <a:spAutoFit/>
-          </a:bodyPr>
-          <a:lstStyle/>
-          <a:p>
-            <a:pPr algn="ctr"/>
-            <a:r>
-              <a:rPr sz="950" b="1" i="0">
-                <a:solidFill>
-                  <a:srgbClr val="1B2A4A"/>
-                </a:solidFill>
-                <a:latin typeface="Calibri"/>
-              </a:rPr>
-              <a:t>Free property assessment</a:t>
-            </a:r>
-          </a:p>
-        </p:txBody>
-      </p:sp>
-      <p:sp>
-        <p:nvSpPr>
-          <p:cNvPr id="72" name="TextBox 71"/>
-          <p:cNvSpPr txBox="1"/>
-          <p:nvPr/>
-        </p:nvSpPr>
-        <p:spPr>
-          <a:xfrm>
-            <a:off x="909205" y="8459392"/>
-            <a:ext cx="1755593" cy="484748"/>
-          </a:xfrm>
-          <a:prstGeom prst="rect">
-            <a:avLst/>
-          </a:prstGeom>
-          <a:noFill/>
-        </p:spPr>
-        <p:txBody>
-          <a:bodyPr wrap="square">
-            <a:spAutoFit/>
-          </a:bodyPr>
-          <a:lstStyle/>
-          <a:p>
-            <a:pPr algn="ctr"/>
-            <a:r>
-              <a:rPr lang="en-US" sz="850" dirty="0">
-                <a:solidFill>
-                  <a:srgbClr val="64748B"/>
-                </a:solidFill>
-                <a:latin typeface="Calibri"/>
-              </a:rPr>
-              <a:t>We</a:t>
-            </a:r>
-            <a:r>
-              <a:rPr sz="850" b="0" i="0" dirty="0">
-                <a:solidFill>
-                  <a:srgbClr val="64748B"/>
-                </a:solidFill>
-                <a:latin typeface="Calibri"/>
-              </a:rPr>
-              <a:t> visit, assess condition, pull the latest comps and give you an </a:t>
-            </a:r>
-            <a:r>
-              <a:rPr lang="en-US" sz="850" dirty="0">
-                <a:solidFill>
-                  <a:srgbClr val="64748B"/>
-                </a:solidFill>
-                <a:latin typeface="Calibri"/>
-              </a:rPr>
-              <a:t>indicative </a:t>
-            </a:r>
-            <a:r>
-              <a:rPr sz="850" b="0" i="0" dirty="0">
-                <a:solidFill>
-                  <a:srgbClr val="64748B"/>
-                </a:solidFill>
-                <a:latin typeface="Calibri"/>
-              </a:rPr>
-              <a:t>valuation.</a:t>
-            </a:r>
-          </a:p>
-        </p:txBody>
-      </p:sp>
-      <p:sp>
-        <p:nvSpPr>
-          <p:cNvPr id="73" name="Rectangle 72"/>
-          <p:cNvSpPr/>
-          <p:nvPr/>
-        </p:nvSpPr>
-        <p:spPr>
-          <a:xfrm>
-            <a:off x="2893399" y="7691296"/>
-            <a:ext cx="1755592" cy="1417320"/>
-          </a:xfrm>
-          <a:prstGeom prst="rect">
-            <a:avLst/>
-          </a:prstGeom>
-          <a:solidFill>
-            <a:srgbClr val="FDF6E3"/>
-          </a:solidFill>
-          <a:ln w="9525">
-            <a:solidFill>
-              <a:srgbClr val="C9A84C"/>
-            </a:solidFill>
-          </a:ln>
-        </p:spPr>
-        <p:style>
-          <a:lnRef idx="1">
-            <a:schemeClr val="accent1"/>
-          </a:lnRef>
-          <a:fillRef idx="3">
-            <a:schemeClr val="accent1"/>
-          </a:fillRef>
-          <a:effectRef idx="2">
-            <a:schemeClr val="accent1"/>
-          </a:effectRef>
-          <a:fontRef idx="minor">
-            <a:schemeClr val="lt1"/>
-          </a:fontRef>
-        </p:style>
-        <p:txBody>
-          <a:bodyPr rtlCol="0" anchor="ctr"/>
-          <a:lstStyle/>
-          <a:p>
-            <a:pPr algn="ctr"/>
-            <a:endParaRPr/>
-          </a:p>
-        </p:txBody>
-      </p:sp>
-      <p:sp>
-        <p:nvSpPr>
-          <p:cNvPr id="74" name="Oval 73"/>
-          <p:cNvSpPr/>
-          <p:nvPr/>
-        </p:nvSpPr>
-        <p:spPr>
-          <a:xfrm>
-            <a:off x="3572062" y="7760785"/>
-            <a:ext cx="365760" cy="365760"/>
-          </a:xfrm>
-          <a:prstGeom prst="ellipse">
-            <a:avLst/>
-          </a:prstGeom>
-          <a:solidFill>
-            <a:srgbClr val="1B2A4A"/>
-          </a:solidFill>
-          <a:ln>
-            <a:noFill/>
-          </a:ln>
-        </p:spPr>
-        <p:style>
-          <a:lnRef idx="1">
-            <a:schemeClr val="accent1"/>
-          </a:lnRef>
-          <a:fillRef idx="3">
-            <a:schemeClr val="accent1"/>
-          </a:fillRef>
-          <a:effectRef idx="2">
-            <a:schemeClr val="accent1"/>
-          </a:effectRef>
-          <a:fontRef idx="minor">
-            <a:schemeClr val="lt1"/>
-          </a:fontRef>
-        </p:style>
-        <p:txBody>
-          <a:bodyPr rtlCol="0" anchor="ctr"/>
-          <a:lstStyle/>
-          <a:p>
-            <a:pPr algn="ctr"/>
-            <a:endParaRPr/>
-          </a:p>
-        </p:txBody>
-      </p:sp>
-      <p:sp>
-        <p:nvSpPr>
-          <p:cNvPr id="75" name="TextBox 74"/>
-          <p:cNvSpPr txBox="1"/>
-          <p:nvPr/>
-        </p:nvSpPr>
-        <p:spPr>
-          <a:xfrm>
-            <a:off x="3572062" y="7760785"/>
-            <a:ext cx="365760" cy="365760"/>
-          </a:xfrm>
-          <a:prstGeom prst="rect">
-            <a:avLst/>
-          </a:prstGeom>
-          <a:noFill/>
-        </p:spPr>
-        <p:txBody>
-          <a:bodyPr wrap="square">
-            <a:spAutoFit/>
-          </a:bodyPr>
-          <a:lstStyle/>
-          <a:p>
-            <a:pPr algn="ctr"/>
-            <a:r>
-              <a:rPr sz="1200" b="1" i="0" dirty="0">
-                <a:solidFill>
-                  <a:srgbClr val="C9A84C"/>
-                </a:solidFill>
-                <a:latin typeface="Calibri"/>
-              </a:rPr>
-              <a:t>2</a:t>
-            </a:r>
-          </a:p>
-        </p:txBody>
-      </p:sp>
-      <p:sp>
-        <p:nvSpPr>
-          <p:cNvPr id="76" name="TextBox 75"/>
-          <p:cNvSpPr txBox="1"/>
-          <p:nvPr/>
-        </p:nvSpPr>
-        <p:spPr>
-          <a:xfrm>
-            <a:off x="2893398" y="8185072"/>
-            <a:ext cx="1755593" cy="238527"/>
-          </a:xfrm>
-          <a:prstGeom prst="rect">
-            <a:avLst/>
-          </a:prstGeom>
-          <a:noFill/>
-        </p:spPr>
-        <p:txBody>
-          <a:bodyPr wrap="square">
-            <a:spAutoFit/>
-          </a:bodyPr>
-          <a:lstStyle/>
-          <a:p>
-            <a:pPr algn="ctr"/>
-            <a:r>
-              <a:rPr sz="950" b="1" i="0" dirty="0">
-                <a:solidFill>
-                  <a:srgbClr val="1B2A4A"/>
-                </a:solidFill>
-                <a:latin typeface="Calibri"/>
-              </a:rPr>
-              <a:t>Marketing strategy meeting</a:t>
-            </a:r>
-          </a:p>
-        </p:txBody>
-      </p:sp>
-      <p:sp>
-        <p:nvSpPr>
-          <p:cNvPr id="77" name="TextBox 76"/>
-          <p:cNvSpPr txBox="1"/>
-          <p:nvPr/>
-        </p:nvSpPr>
-        <p:spPr>
-          <a:xfrm>
-            <a:off x="2893399" y="8459392"/>
-            <a:ext cx="1755592" cy="615553"/>
-          </a:xfrm>
-          <a:prstGeom prst="rect">
-            <a:avLst/>
-          </a:prstGeom>
-          <a:noFill/>
-        </p:spPr>
-        <p:txBody>
-          <a:bodyPr wrap="square">
-            <a:spAutoFit/>
-          </a:bodyPr>
-          <a:lstStyle/>
-          <a:p>
-            <a:pPr algn="ctr"/>
-            <a:r>
-              <a:rPr lang="en-US" sz="850" b="0" i="0" dirty="0">
-                <a:solidFill>
-                  <a:srgbClr val="64748B"/>
-                </a:solidFill>
-                <a:latin typeface="Calibri"/>
-              </a:rPr>
-              <a:t>Discuss </a:t>
-            </a:r>
-            <a:r>
-              <a:rPr sz="850" b="0" i="0" dirty="0">
-                <a:solidFill>
-                  <a:srgbClr val="64748B"/>
-                </a:solidFill>
-                <a:latin typeface="Calibri"/>
-              </a:rPr>
-              <a:t>on the right </a:t>
-            </a:r>
-            <a:r>
-              <a:rPr lang="en-US" sz="850" b="0" i="0" dirty="0">
-                <a:solidFill>
-                  <a:srgbClr val="64748B"/>
-                </a:solidFill>
-                <a:latin typeface="Calibri"/>
-              </a:rPr>
-              <a:t>strategy </a:t>
-            </a:r>
-            <a:r>
-              <a:rPr sz="850" b="0" i="0" dirty="0">
-                <a:solidFill>
-                  <a:srgbClr val="64748B"/>
-                </a:solidFill>
-                <a:latin typeface="Calibri"/>
-              </a:rPr>
-              <a:t>and approach. </a:t>
-            </a:r>
-            <a:r>
-              <a:rPr lang="en-US" sz="850" dirty="0">
-                <a:solidFill>
-                  <a:srgbClr val="64748B"/>
-                </a:solidFill>
-                <a:latin typeface="Calibri"/>
-              </a:rPr>
-              <a:t>We</a:t>
-            </a:r>
-            <a:r>
-              <a:rPr sz="850" b="0" i="0" dirty="0">
-                <a:solidFill>
-                  <a:srgbClr val="64748B"/>
-                </a:solidFill>
-                <a:latin typeface="Calibri"/>
-              </a:rPr>
-              <a:t>'ll show you exactly who the buyers are and how </a:t>
-            </a:r>
-            <a:r>
-              <a:rPr lang="en-US" sz="850" b="0" i="0" dirty="0">
-                <a:solidFill>
-                  <a:srgbClr val="64748B"/>
-                </a:solidFill>
-                <a:latin typeface="Calibri"/>
-              </a:rPr>
-              <a:t>We</a:t>
-            </a:r>
-            <a:r>
-              <a:rPr sz="850" b="0" i="0" dirty="0">
-                <a:solidFill>
-                  <a:srgbClr val="64748B"/>
-                </a:solidFill>
-                <a:latin typeface="Calibri"/>
-              </a:rPr>
-              <a:t>'ll reach them.</a:t>
-            </a:r>
-          </a:p>
-        </p:txBody>
-      </p:sp>
-      <p:sp>
-        <p:nvSpPr>
-          <p:cNvPr id="78" name="Rectangle 77"/>
-          <p:cNvSpPr/>
-          <p:nvPr/>
-        </p:nvSpPr>
-        <p:spPr>
-          <a:xfrm>
-            <a:off x="4876326" y="7691296"/>
-            <a:ext cx="1755592" cy="1417320"/>
-          </a:xfrm>
-          <a:prstGeom prst="rect">
-            <a:avLst/>
-          </a:prstGeom>
-          <a:solidFill>
-            <a:srgbClr val="FDF6E3"/>
-          </a:solidFill>
-          <a:ln w="9525">
-            <a:solidFill>
-              <a:srgbClr val="C9A84C"/>
-            </a:solidFill>
-          </a:ln>
-        </p:spPr>
-        <p:style>
-          <a:lnRef idx="1">
-            <a:schemeClr val="accent1"/>
-          </a:lnRef>
-          <a:fillRef idx="3">
-            <a:schemeClr val="accent1"/>
-          </a:fillRef>
-          <a:effectRef idx="2">
-            <a:schemeClr val="accent1"/>
-          </a:effectRef>
-          <a:fontRef idx="minor">
-            <a:schemeClr val="lt1"/>
-          </a:fontRef>
-        </p:style>
-        <p:txBody>
-          <a:bodyPr rtlCol="0" anchor="ctr"/>
-          <a:lstStyle/>
-          <a:p>
-            <a:pPr algn="ctr"/>
-            <a:endParaRPr/>
-          </a:p>
-        </p:txBody>
-      </p:sp>
-      <p:sp>
-        <p:nvSpPr>
-          <p:cNvPr id="79" name="Oval 78"/>
-          <p:cNvSpPr/>
-          <p:nvPr/>
-        </p:nvSpPr>
-        <p:spPr>
-          <a:xfrm>
-            <a:off x="5589107" y="7760785"/>
-            <a:ext cx="365760" cy="365760"/>
-          </a:xfrm>
-          <a:prstGeom prst="ellipse">
-            <a:avLst/>
-          </a:prstGeom>
-          <a:solidFill>
-            <a:srgbClr val="1B2A4A"/>
-          </a:solidFill>
-          <a:ln>
-            <a:noFill/>
-          </a:ln>
-        </p:spPr>
-        <p:style>
-          <a:lnRef idx="1">
-            <a:schemeClr val="accent1"/>
-          </a:lnRef>
-          <a:fillRef idx="3">
-            <a:schemeClr val="accent1"/>
-          </a:fillRef>
-          <a:effectRef idx="2">
-            <a:schemeClr val="accent1"/>
-          </a:effectRef>
-          <a:fontRef idx="minor">
-            <a:schemeClr val="lt1"/>
-          </a:fontRef>
-        </p:style>
-        <p:txBody>
-          <a:bodyPr rtlCol="0" anchor="ctr"/>
-          <a:lstStyle/>
-          <a:p>
-            <a:pPr algn="ctr"/>
-            <a:endParaRPr/>
-          </a:p>
-        </p:txBody>
-      </p:sp>
-      <p:sp>
-        <p:nvSpPr>
-          <p:cNvPr id="80" name="TextBox 79"/>
-          <p:cNvSpPr txBox="1"/>
-          <p:nvPr/>
-        </p:nvSpPr>
-        <p:spPr>
-          <a:xfrm>
-            <a:off x="5589107" y="7760785"/>
-            <a:ext cx="365760" cy="365760"/>
-          </a:xfrm>
-          <a:prstGeom prst="rect">
-            <a:avLst/>
-          </a:prstGeom>
-          <a:noFill/>
-        </p:spPr>
-        <p:txBody>
-          <a:bodyPr wrap="square">
-            <a:spAutoFit/>
-          </a:bodyPr>
-          <a:lstStyle/>
-          <a:p>
-            <a:pPr algn="ctr"/>
-            <a:r>
-              <a:rPr sz="1200" b="1" i="0">
-                <a:solidFill>
-                  <a:srgbClr val="C9A84C"/>
-                </a:solidFill>
-                <a:latin typeface="Calibri"/>
-              </a:rPr>
-              <a:t>3</a:t>
-            </a:r>
-          </a:p>
-        </p:txBody>
-      </p:sp>
-      <p:sp>
-        <p:nvSpPr>
-          <p:cNvPr id="81" name="TextBox 80"/>
-          <p:cNvSpPr txBox="1"/>
-          <p:nvPr/>
-        </p:nvSpPr>
-        <p:spPr>
-          <a:xfrm>
-            <a:off x="4876327" y="8185072"/>
-            <a:ext cx="1755592" cy="238527"/>
-          </a:xfrm>
-          <a:prstGeom prst="rect">
-            <a:avLst/>
-          </a:prstGeom>
-          <a:noFill/>
-        </p:spPr>
-        <p:txBody>
-          <a:bodyPr wrap="square">
-            <a:spAutoFit/>
-          </a:bodyPr>
-          <a:lstStyle/>
-          <a:p>
-            <a:pPr algn="ctr"/>
-            <a:r>
-              <a:rPr lang="en-US" sz="950" b="1" dirty="0">
-                <a:solidFill>
-                  <a:srgbClr val="1B2A4A"/>
-                </a:solidFill>
-                <a:latin typeface="Calibri"/>
-              </a:rPr>
-              <a:t>L</a:t>
-            </a:r>
-            <a:r>
-              <a:rPr sz="950" b="1" i="0" dirty="0">
-                <a:solidFill>
-                  <a:srgbClr val="1B2A4A"/>
-                </a:solidFill>
-                <a:latin typeface="Calibri"/>
-              </a:rPr>
-              <a:t>isting &amp; launch</a:t>
-            </a:r>
-          </a:p>
-        </p:txBody>
-      </p:sp>
-      <p:sp>
-        <p:nvSpPr>
-          <p:cNvPr id="82" name="TextBox 81"/>
-          <p:cNvSpPr txBox="1"/>
-          <p:nvPr/>
-        </p:nvSpPr>
-        <p:spPr>
-          <a:xfrm>
-            <a:off x="4876325" y="8459392"/>
-            <a:ext cx="1755592" cy="615553"/>
-          </a:xfrm>
-          <a:prstGeom prst="rect">
-            <a:avLst/>
-          </a:prstGeom>
-          <a:noFill/>
-        </p:spPr>
-        <p:txBody>
-          <a:bodyPr wrap="square">
-            <a:spAutoFit/>
-          </a:bodyPr>
-          <a:lstStyle/>
-          <a:p>
-            <a:pPr algn="ctr"/>
-            <a:r>
-              <a:rPr sz="850" b="0" i="0" dirty="0">
-                <a:solidFill>
-                  <a:srgbClr val="64748B"/>
-                </a:solidFill>
-                <a:latin typeface="Calibri"/>
-              </a:rPr>
-              <a:t>Professional photography within 5 days. Listing live within 7 days. Active buyer outreach starts immediately.</a:t>
-            </a:r>
-          </a:p>
-        </p:txBody>
-      </p:sp>
-      <p:sp>
-        <p:nvSpPr>
-          <p:cNvPr id="83" name="Rectangle 82"/>
-          <p:cNvSpPr/>
-          <p:nvPr/>
-        </p:nvSpPr>
-        <p:spPr>
-          <a:xfrm>
-            <a:off x="9430" y="9423948"/>
-            <a:ext cx="7562088" cy="987552"/>
-          </a:xfrm>
-          <a:prstGeom prst="rect">
-            <a:avLst/>
-          </a:prstGeom>
-          <a:solidFill>
-            <a:srgbClr val="162338"/>
-          </a:solidFill>
-          <a:ln>
-            <a:noFill/>
-          </a:ln>
-        </p:spPr>
-        <p:style>
-          <a:lnRef idx="1">
-            <a:schemeClr val="accent1"/>
-          </a:lnRef>
-          <a:fillRef idx="3">
-            <a:schemeClr val="accent1"/>
-          </a:fillRef>
-          <a:effectRef idx="2">
-            <a:schemeClr val="accent1"/>
-          </a:effectRef>
-          <a:fontRef idx="minor">
-            <a:schemeClr val="lt1"/>
-          </a:fontRef>
-        </p:style>
-        <p:txBody>
-          <a:bodyPr rtlCol="0" anchor="ctr"/>
-          <a:lstStyle/>
-          <a:p>
-            <a:pPr algn="ctr"/>
-            <a:endParaRPr/>
-          </a:p>
-        </p:txBody>
-      </p:sp>
-      <p:sp>
-        <p:nvSpPr>
-          <p:cNvPr id="84" name="Rectangle 83"/>
-          <p:cNvSpPr/>
-          <p:nvPr/>
-        </p:nvSpPr>
-        <p:spPr>
-          <a:xfrm>
-            <a:off x="-7144" y="9442236"/>
-            <a:ext cx="256032" cy="987552"/>
-          </a:xfrm>
-          <a:prstGeom prst="rect">
-            <a:avLst/>
-          </a:prstGeom>
-          <a:solidFill>
-            <a:srgbClr val="C9A84C"/>
-          </a:solidFill>
-          <a:ln>
-            <a:noFill/>
-          </a:ln>
-        </p:spPr>
-        <p:style>
-          <a:lnRef idx="1">
-            <a:schemeClr val="accent1"/>
-          </a:lnRef>
-          <a:fillRef idx="3">
-            <a:schemeClr val="accent1"/>
-          </a:fillRef>
-          <a:effectRef idx="2">
-            <a:schemeClr val="accent1"/>
-          </a:effectRef>
-          <a:fontRef idx="minor">
-            <a:schemeClr val="lt1"/>
-          </a:fontRef>
-        </p:style>
-        <p:txBody>
-          <a:bodyPr rtlCol="0" anchor="ctr"/>
-          <a:lstStyle/>
-          <a:p>
-            <a:pPr algn="ctr"/>
-            <a:endParaRPr/>
-          </a:p>
-        </p:txBody>
-      </p:sp>
-      <p:sp>
-        <p:nvSpPr>
-          <p:cNvPr id="85" name="TextBox 84"/>
-          <p:cNvSpPr txBox="1"/>
-          <p:nvPr/>
-        </p:nvSpPr>
-        <p:spPr>
-          <a:xfrm>
-            <a:off x="1218997" y="9515629"/>
-            <a:ext cx="1165527" cy="338554"/>
-          </a:xfrm>
-          <a:prstGeom prst="rect">
-            <a:avLst/>
-          </a:prstGeom>
-          <a:noFill/>
-        </p:spPr>
-        <p:txBody>
-          <a:bodyPr wrap="square">
-            <a:spAutoFit/>
-          </a:bodyPr>
-          <a:lstStyle/>
-          <a:p>
-            <a:pPr algn="l"/>
-            <a:r>
-              <a:rPr sz="1600" b="1" i="0" dirty="0">
-                <a:solidFill>
-                  <a:srgbClr val="FFFFFF"/>
-                </a:solidFill>
-                <a:latin typeface="Calibri"/>
-              </a:rPr>
-              <a:t>Rio Pang</a:t>
-            </a:r>
-          </a:p>
-        </p:txBody>
-      </p:sp>
-      <p:sp>
-        <p:nvSpPr>
-          <p:cNvPr id="86" name="TextBox 85"/>
-          <p:cNvSpPr txBox="1"/>
-          <p:nvPr/>
-        </p:nvSpPr>
-        <p:spPr>
-          <a:xfrm>
-            <a:off x="1218997" y="9870688"/>
-            <a:ext cx="1165527" cy="276999"/>
-          </a:xfrm>
-          <a:prstGeom prst="rect">
-            <a:avLst/>
-          </a:prstGeom>
-          <a:noFill/>
-        </p:spPr>
-        <p:txBody>
-          <a:bodyPr wrap="square">
-            <a:spAutoFit/>
-          </a:bodyPr>
-          <a:lstStyle/>
-          <a:p>
-            <a:pPr algn="l"/>
-            <a:br>
-              <a:rPr lang="en-US" sz="600" b="0" i="0" dirty="0">
-                <a:solidFill>
-                  <a:srgbClr val="B0BED4"/>
-                </a:solidFill>
-                <a:latin typeface="Calibri"/>
-              </a:rPr>
-            </a:br>
-            <a:r>
-              <a:rPr sz="600" b="0" i="0" dirty="0">
-                <a:solidFill>
-                  <a:srgbClr val="B0BED4"/>
-                </a:solidFill>
-                <a:latin typeface="Calibri"/>
-              </a:rPr>
-              <a:t>R070214</a:t>
-            </a:r>
-            <a:r>
-              <a:rPr lang="en-US" sz="600" b="0" i="0" dirty="0">
-                <a:solidFill>
-                  <a:srgbClr val="B0BED4"/>
-                </a:solidFill>
-                <a:latin typeface="Calibri"/>
-              </a:rPr>
-              <a:t>B</a:t>
-            </a:r>
-            <a:endParaRPr sz="600" b="0" i="0" dirty="0">
-              <a:solidFill>
-                <a:srgbClr val="B0BED4"/>
-              </a:solidFill>
-              <a:latin typeface="Calibri"/>
-            </a:endParaRPr>
-          </a:p>
-        </p:txBody>
-      </p:sp>
-      <p:sp>
-        <p:nvSpPr>
-          <p:cNvPr id="87" name="TextBox 86"/>
-          <p:cNvSpPr txBox="1"/>
-          <p:nvPr/>
-        </p:nvSpPr>
-        <p:spPr>
-          <a:xfrm>
-            <a:off x="1218997" y="9724425"/>
-            <a:ext cx="1165527" cy="338554"/>
-          </a:xfrm>
-          <a:prstGeom prst="rect">
-            <a:avLst/>
-          </a:prstGeom>
-          <a:noFill/>
-        </p:spPr>
-        <p:txBody>
-          <a:bodyPr wrap="square">
-            <a:spAutoFit/>
-          </a:bodyPr>
-          <a:lstStyle/>
-          <a:p>
-            <a:pPr algn="l"/>
-            <a:r>
-              <a:rPr sz="1600" b="1" i="0" dirty="0">
-                <a:solidFill>
-                  <a:srgbClr val="C9A84C"/>
-                </a:solidFill>
-                <a:latin typeface="Calibri"/>
-              </a:rPr>
-              <a:t>9183 1316</a:t>
-            </a:r>
-          </a:p>
-        </p:txBody>
-      </p:sp>
-      <p:sp>
-        <p:nvSpPr>
-          <p:cNvPr id="89" name="TextBox 88"/>
-          <p:cNvSpPr txBox="1"/>
-          <p:nvPr/>
-        </p:nvSpPr>
-        <p:spPr>
-          <a:xfrm>
-            <a:off x="429768" y="10545022"/>
-            <a:ext cx="6739127" cy="192360"/>
-          </a:xfrm>
-          <a:prstGeom prst="rect">
-            <a:avLst/>
-          </a:prstGeom>
-          <a:noFill/>
-        </p:spPr>
-        <p:txBody>
-          <a:bodyPr wrap="square">
-            <a:spAutoFit/>
-          </a:bodyPr>
-          <a:lstStyle/>
-          <a:p>
-            <a:pPr algn="ctr"/>
-            <a:r>
-              <a:rPr sz="650" b="0" i="1" dirty="0">
-                <a:solidFill>
-                  <a:srgbClr val="64748B"/>
-                </a:solidFill>
-                <a:latin typeface="Calibri"/>
-              </a:rPr>
-              <a:t>Data sourced from URA REALIS (Jun 2025–Jun 2026). This flyer is for informational purposes only and does not constitute a formal valuation.</a:t>
-            </a:r>
-          </a:p>
-        </p:txBody>
-      </p:sp>
-      <p:pic>
-        <p:nvPicPr>
-          <p:cNvPr id="97" name="Picture 96">
-            <a:extLst>
-              <a:ext uri="{FF2B5EF4-FFF2-40B4-BE49-F238E27FC236}">
-                <a16:creationId xmlns:a16="http://schemas.microsoft.com/office/drawing/2014/main" id="{E37EB9D4-3063-33C7-BE32-E6AFFDA22142}"/>
-              </a:ext>
-            </a:extLst>
-          </p:cNvPr>
-          <p:cNvPicPr>
-            <a:picLocks noChangeAspect="1"/>
-          </p:cNvPicPr>
-          <p:nvPr/>
-        </p:nvPicPr>
-        <p:blipFill>
-          <a:blip r:embed="rId3"/>
-          <a:srcRect l="19580" r="16604"/>
-          <a:stretch>
-            <a:fillRect/>
-          </a:stretch>
-        </p:blipFill>
-        <p:spPr>
-          <a:xfrm>
-            <a:off x="-100665" y="7630706"/>
-            <a:ext cx="1306670" cy="3071357"/>
-          </a:xfrm>
-          <a:prstGeom prst="rect">
-            <a:avLst/>
-          </a:prstGeom>
-        </p:spPr>
-      </p:pic>
-      <p:sp>
-        <p:nvSpPr>
-          <p:cNvPr id="98" name="TextBox 97">
-            <a:extLst>
-              <a:ext uri="{FF2B5EF4-FFF2-40B4-BE49-F238E27FC236}">
-                <a16:creationId xmlns:a16="http://schemas.microsoft.com/office/drawing/2014/main" id="{FF8B22FF-8123-85F5-B445-759DAC8BDA7B}"/>
-              </a:ext>
-            </a:extLst>
-          </p:cNvPr>
-          <p:cNvSpPr txBox="1"/>
-          <p:nvPr/>
-        </p:nvSpPr>
-        <p:spPr>
-          <a:xfrm>
-            <a:off x="3815395" y="2246191"/>
-            <a:ext cx="1604773" cy="400110"/>
-          </a:xfrm>
-          <a:prstGeom prst="rect">
-            <a:avLst/>
-          </a:prstGeom>
-          <a:noFill/>
-        </p:spPr>
-        <p:txBody>
-          <a:bodyPr wrap="square">
-            <a:spAutoFit/>
-          </a:bodyPr>
-          <a:lstStyle/>
-          <a:p>
-            <a:pPr algn="ctr"/>
-            <a:r>
-              <a:rPr lang="en-US" sz="2000" b="1" i="0" dirty="0">
-                <a:solidFill>
-                  <a:srgbClr val="1B2A4A"/>
-                </a:solidFill>
-                <a:latin typeface="Calibri"/>
-              </a:rPr>
-              <a:t>Transactions</a:t>
-            </a:r>
-            <a:endParaRPr sz="2000" b="1" i="0" dirty="0">
-              <a:solidFill>
-                <a:srgbClr val="1B2A4A"/>
-              </a:solidFill>
-              <a:latin typeface="Calibri"/>
-            </a:endParaRPr>
-          </a:p>
-        </p:txBody>
-      </p:sp>
-      <p:pic>
-        <p:nvPicPr>
-          <p:cNvPr id="100" name="Picture 99">
-            <a:extLst>
-              <a:ext uri="{FF2B5EF4-FFF2-40B4-BE49-F238E27FC236}">
-                <a16:creationId xmlns:a16="http://schemas.microsoft.com/office/drawing/2014/main" id="{82F8EE19-B110-5391-350F-CF1F5C015CBD}"/>
-              </a:ext>
-            </a:extLst>
-          </p:cNvPr>
-          <p:cNvPicPr>
-            <a:picLocks noChangeAspect="1"/>
-          </p:cNvPicPr>
-          <p:nvPr/>
-        </p:nvPicPr>
-        <p:blipFill>
-          <a:blip r:embed="rId4"/>
-          <a:srcRect l="16444" r="59677"/>
-          <a:stretch>
-            <a:fillRect/>
-          </a:stretch>
-        </p:blipFill>
-        <p:spPr>
-          <a:xfrm>
-            <a:off x="6398246" y="7607808"/>
-            <a:ext cx="1311510" cy="3089416"/>
-          </a:xfrm>
-          <a:prstGeom prst="rect">
-            <a:avLst/>
-          </a:prstGeom>
-        </p:spPr>
-      </p:pic>
-      <p:sp>
-        <p:nvSpPr>
-          <p:cNvPr id="106" name="TextBox 105">
-            <a:extLst>
-              <a:ext uri="{FF2B5EF4-FFF2-40B4-BE49-F238E27FC236}">
-                <a16:creationId xmlns:a16="http://schemas.microsoft.com/office/drawing/2014/main" id="{5A271584-8034-164E-1DB4-5E2F26513D07}"/>
-              </a:ext>
-            </a:extLst>
-          </p:cNvPr>
-          <p:cNvSpPr txBox="1"/>
-          <p:nvPr/>
-        </p:nvSpPr>
-        <p:spPr>
-          <a:xfrm>
-            <a:off x="5241917" y="9515318"/>
-            <a:ext cx="1165527" cy="338554"/>
-          </a:xfrm>
-          <a:prstGeom prst="rect">
-            <a:avLst/>
-          </a:prstGeom>
-          <a:noFill/>
-        </p:spPr>
-        <p:txBody>
-          <a:bodyPr wrap="square">
-            <a:spAutoFit/>
-          </a:bodyPr>
-          <a:lstStyle/>
-          <a:p>
-            <a:pPr algn="r"/>
-            <a:r>
-              <a:rPr lang="en-US" sz="1600" b="1" dirty="0">
-                <a:solidFill>
-                  <a:srgbClr val="FFFFFF"/>
-                </a:solidFill>
-                <a:latin typeface="Calibri"/>
-              </a:rPr>
-              <a:t>Tricia Low</a:t>
-            </a:r>
-            <a:endParaRPr sz="1600" b="1" i="0" dirty="0">
-              <a:solidFill>
-                <a:srgbClr val="FFFFFF"/>
-              </a:solidFill>
-              <a:latin typeface="Calibri"/>
-            </a:endParaRPr>
-          </a:p>
-        </p:txBody>
-      </p:sp>
-      <p:sp>
-        <p:nvSpPr>
-          <p:cNvPr id="107" name="TextBox 106">
-            <a:extLst>
-              <a:ext uri="{FF2B5EF4-FFF2-40B4-BE49-F238E27FC236}">
-                <a16:creationId xmlns:a16="http://schemas.microsoft.com/office/drawing/2014/main" id="{159BCDF0-E7E4-A824-D29B-D687C5C14D8B}"/>
-              </a:ext>
-            </a:extLst>
-          </p:cNvPr>
-          <p:cNvSpPr txBox="1"/>
-          <p:nvPr/>
-        </p:nvSpPr>
-        <p:spPr>
-          <a:xfrm>
-            <a:off x="5241917" y="9870377"/>
-            <a:ext cx="1165527" cy="276999"/>
-          </a:xfrm>
-          <a:prstGeom prst="rect">
-            <a:avLst/>
-          </a:prstGeom>
-          <a:noFill/>
-        </p:spPr>
-        <p:txBody>
-          <a:bodyPr wrap="square">
-            <a:spAutoFit/>
-          </a:bodyPr>
-          <a:lstStyle/>
-          <a:p>
-            <a:pPr algn="r"/>
-            <a:br>
-              <a:rPr lang="en-US" sz="600" b="0" i="0" dirty="0">
-                <a:solidFill>
-                  <a:srgbClr val="B0BED4"/>
-                </a:solidFill>
-                <a:latin typeface="Calibri"/>
-              </a:rPr>
-            </a:br>
-            <a:r>
-              <a:rPr lang="en-US" sz="600" b="0" i="0" dirty="0">
-                <a:solidFill>
-                  <a:srgbClr val="B0BED4"/>
-                </a:solidFill>
-                <a:latin typeface="Calibri"/>
-              </a:rPr>
-              <a:t>R068957J</a:t>
-            </a:r>
-            <a:endParaRPr sz="600" b="0" i="0" dirty="0">
-              <a:solidFill>
-                <a:srgbClr val="B0BED4"/>
-              </a:solidFill>
-              <a:latin typeface="Calibri"/>
-            </a:endParaRPr>
-          </a:p>
-        </p:txBody>
-      </p:sp>
-      <p:sp>
-        <p:nvSpPr>
-          <p:cNvPr id="108" name="TextBox 107">
-            <a:extLst>
-              <a:ext uri="{FF2B5EF4-FFF2-40B4-BE49-F238E27FC236}">
-                <a16:creationId xmlns:a16="http://schemas.microsoft.com/office/drawing/2014/main" id="{8A2B2599-6011-325E-8F69-29F4A069A0DD}"/>
-              </a:ext>
-            </a:extLst>
-          </p:cNvPr>
-          <p:cNvSpPr txBox="1"/>
-          <p:nvPr/>
-        </p:nvSpPr>
-        <p:spPr>
-          <a:xfrm>
-            <a:off x="5241917" y="9724114"/>
-            <a:ext cx="1165527" cy="338554"/>
-          </a:xfrm>
-          <a:prstGeom prst="rect">
-            <a:avLst/>
-          </a:prstGeom>
-          <a:noFill/>
-        </p:spPr>
-        <p:txBody>
-          <a:bodyPr wrap="square">
-            <a:spAutoFit/>
-          </a:bodyPr>
-          <a:lstStyle/>
-          <a:p>
-            <a:pPr algn="r"/>
-            <a:r>
-              <a:rPr lang="en-US" sz="1600" b="1" i="0" dirty="0">
-                <a:solidFill>
-                  <a:srgbClr val="C9A84C"/>
-                </a:solidFill>
-                <a:latin typeface="Calibri"/>
-              </a:rPr>
-              <a:t>9833 8871</a:t>
-            </a:r>
-            <a:endParaRPr sz="1600" b="1" i="0" dirty="0">
-              <a:solidFill>
-                <a:srgbClr val="C9A84C"/>
-              </a:solidFill>
-              <a:latin typeface="Calibri"/>
-            </a:endParaRPr>
-          </a:p>
-        </p:txBody>
-      </p:sp>
-      <p:sp>
-        <p:nvSpPr>
-          <p:cNvPr id="115" name="TextBox 114">
-            <a:extLst>
-              <a:ext uri="{FF2B5EF4-FFF2-40B4-BE49-F238E27FC236}">
-                <a16:creationId xmlns:a16="http://schemas.microsoft.com/office/drawing/2014/main" id="{717C82F8-E140-0F5E-A39C-7213878DDDDE}"/>
-              </a:ext>
-            </a:extLst>
-          </p:cNvPr>
-          <p:cNvSpPr txBox="1"/>
-          <p:nvPr/>
-        </p:nvSpPr>
-        <p:spPr>
-          <a:xfrm>
-            <a:off x="2963221" y="9554753"/>
-            <a:ext cx="1583441" cy="715581"/>
-          </a:xfrm>
-          <a:prstGeom prst="rect">
-            <a:avLst/>
-          </a:prstGeom>
-          <a:noFill/>
-        </p:spPr>
-        <p:txBody>
-          <a:bodyPr wrap="square">
-            <a:spAutoFit/>
-          </a:bodyPr>
-          <a:lstStyle/>
-          <a:p>
-            <a:pPr algn="ctr"/>
-            <a:r>
-              <a:rPr lang="en-US" sz="1000" b="1" i="0" dirty="0">
-                <a:solidFill>
-                  <a:srgbClr val="C9A84C"/>
-                </a:solidFill>
-                <a:latin typeface="Calibri"/>
-              </a:rPr>
-              <a:t>CONTACT US FOR A </a:t>
-            </a:r>
-          </a:p>
-          <a:p>
-            <a:pPr algn="ctr"/>
-            <a:r>
-              <a:rPr lang="en-US" sz="1050" b="1" i="0" u="sng" dirty="0">
-                <a:solidFill>
-                  <a:srgbClr val="C00000"/>
-                </a:solidFill>
-                <a:latin typeface="Calibri"/>
-              </a:rPr>
-              <a:t>FREE</a:t>
-            </a:r>
-            <a:r>
-              <a:rPr lang="en-US" sz="1000" b="1" i="0" dirty="0">
-                <a:solidFill>
-                  <a:srgbClr val="C9A84C"/>
-                </a:solidFill>
-                <a:latin typeface="Calibri"/>
-              </a:rPr>
-              <a:t> INDICATIVE VALUATION AND CONSULTATION TODAY!</a:t>
-            </a:r>
-            <a:endParaRPr sz="1000" b="1" i="0" dirty="0">
-              <a:solidFill>
-                <a:srgbClr val="C9A84C"/>
-              </a:solidFill>
-              <a:latin typeface="Calibri"/>
-            </a:endParaRPr>
-          </a:p>
-        </p:txBody>
-      </p:sp>
-      <p:pic>
-        <p:nvPicPr>
-          <p:cNvPr id="116" name="Picture 115">
-            <a:extLst>
-              <a:ext uri="{FF2B5EF4-FFF2-40B4-BE49-F238E27FC236}">
-                <a16:creationId xmlns:a16="http://schemas.microsoft.com/office/drawing/2014/main" id="{29AB6464-DA9D-9F70-9F21-34FAA8452621}"/>
-              </a:ext>
-            </a:extLst>
-          </p:cNvPr>
-          <p:cNvPicPr>
-            <a:picLocks noChangeAspect="1"/>
-          </p:cNvPicPr>
-          <p:nvPr/>
-        </p:nvPicPr>
-        <p:blipFill>
-          <a:blip r:embed="rId5"/>
-          <a:stretch>
-            <a:fillRect/>
-          </a:stretch>
-        </p:blipFill>
-        <p:spPr>
-          <a:xfrm>
-            <a:off x="2231864" y="9662982"/>
-            <a:ext cx="449708" cy="450613"/>
-          </a:xfrm>
-          <a:prstGeom prst="rect">
-            <a:avLst/>
-          </a:prstGeom>
-        </p:spPr>
-      </p:pic>
-      <p:pic>
-        <p:nvPicPr>
-          <p:cNvPr id="117" name="Picture 116">
-            <a:extLst>
-              <a:ext uri="{FF2B5EF4-FFF2-40B4-BE49-F238E27FC236}">
-                <a16:creationId xmlns:a16="http://schemas.microsoft.com/office/drawing/2014/main" id="{C096E41E-6A92-87B3-4627-92A7E1CE833B}"/>
-              </a:ext>
-            </a:extLst>
-          </p:cNvPr>
-          <p:cNvPicPr>
-            <a:picLocks noChangeAspect="1"/>
-          </p:cNvPicPr>
-          <p:nvPr/>
-        </p:nvPicPr>
-        <p:blipFill>
-          <a:blip r:embed="rId6"/>
-          <a:stretch>
-            <a:fillRect/>
-          </a:stretch>
-        </p:blipFill>
-        <p:spPr>
-          <a:xfrm rot="16200000" flipV="1">
-            <a:off x="4921166" y="9646126"/>
-            <a:ext cx="448221" cy="449123"/>
-          </a:xfrm>
-          <a:prstGeom prst="rect">
-            <a:avLst/>
-          </a:prstGeom>
-        </p:spPr>
-      </p:pic>
-    </p:spTree>
-  </p:cSld>
-  <p:clrMapOvr>
-    <a:masterClrMapping/>
-  </p:clrMapOvr>
-</p:sld>
-</file>
-
-<file path=ppt/slides/slide2.xml><?xml version="1.0" encoding="utf-8"?>
-<p:sld xmlns:a="http://schemas.openxmlformats.org/drawingml/2006/main" xmlns:r="http://schemas.openxmlformats.org/officeDocument/2006/relationships" xmlns:p="http://schemas.openxmlformats.org/presentationml/2006/main">
-  <p:cSld>
-    <p:bg>
-      <p:bgPr>
-        <a:solidFill>
-          <a:srgbClr val="FFFFFF"/>
-        </a:solidFill>
-        <a:effectLst/>
-      </p:bgPr>
-    </p:bg>
-    <p:spTree>
-      <p:nvGrpSpPr>
         <p:cNvPr id="1" name="">
           <a:extLst>
             <a:ext uri="{FF2B5EF4-FFF2-40B4-BE49-F238E27FC236}">
@@ -10643,7 +6993,7 @@
         </p:nvSpPr>
         <p:spPr>
           <a:xfrm>
-            <a:off x="1218997" y="9515629"/>
+            <a:off x="1218997" y="9590275"/>
             <a:ext cx="1165527" cy="338554"/>
           </a:xfrm>
           <a:prstGeom prst="rect">
@@ -10684,7 +7034,7 @@
         </p:nvSpPr>
         <p:spPr>
           <a:xfrm>
-            <a:off x="1218997" y="9870688"/>
+            <a:off x="1218997" y="9945334"/>
             <a:ext cx="1165527" cy="276999"/>
           </a:xfrm>
           <a:prstGeom prst="rect">
@@ -10748,7 +7098,7 @@
         </p:nvSpPr>
         <p:spPr>
           <a:xfrm>
-            <a:off x="1218997" y="9724425"/>
+            <a:off x="1218997" y="9799071"/>
             <a:ext cx="1165527" cy="338554"/>
           </a:xfrm>
           <a:prstGeom prst="rect">
@@ -10939,7 +7289,7 @@
         </p:nvSpPr>
         <p:spPr>
           <a:xfrm>
-            <a:off x="5241917" y="9515318"/>
+            <a:off x="5275473" y="9589964"/>
             <a:ext cx="1165527" cy="338554"/>
           </a:xfrm>
           <a:prstGeom prst="rect">
@@ -10986,7 +7336,7 @@
         </p:nvSpPr>
         <p:spPr>
           <a:xfrm>
-            <a:off x="5241917" y="9870377"/>
+            <a:off x="5275473" y="9945023"/>
             <a:ext cx="1165527" cy="276999"/>
           </a:xfrm>
           <a:prstGeom prst="rect">
@@ -11041,7 +7391,7 @@
         </p:nvSpPr>
         <p:spPr>
           <a:xfrm>
-            <a:off x="5241917" y="9724114"/>
+            <a:off x="5275473" y="9798760"/>
             <a:ext cx="1165527" cy="338554"/>
           </a:xfrm>
           <a:prstGeom prst="rect">
@@ -11164,8 +7514,8 @@
         </p:blipFill>
         <p:spPr>
           <a:xfrm>
-            <a:off x="2231864" y="9662982"/>
-            <a:ext cx="449708" cy="450613"/>
+            <a:off x="2314828" y="9617780"/>
+            <a:ext cx="578570" cy="579734"/>
           </a:xfrm>
           <a:prstGeom prst="rect">
             <a:avLst/>
@@ -11194,8 +7544,8 @@
         </p:blipFill>
         <p:spPr>
           <a:xfrm rot="16200000" flipV="1">
-            <a:off x="4921166" y="9646126"/>
-            <a:ext cx="448221" cy="449123"/>
+            <a:off x="4649566" y="9614874"/>
+            <a:ext cx="571912" cy="573063"/>
           </a:xfrm>
           <a:prstGeom prst="rect">
             <a:avLst/>
